--- a/Curso Gas B/13 - UNE 60670 - Ventilacion y evacuacion de humos/13 - UNE 60670 - Ventilacion y evacuacion de humos - Vídeo 1.pptx
+++ b/Curso Gas B/13 - UNE 60670 - Ventilacion y evacuacion de humos/13 - UNE 60670 - Ventilacion y evacuacion de humos - Vídeo 1.pptx
@@ -23,6 +23,7 @@
     <p:sldId id="271" r:id="rId23"/>
     <p:sldId id="272" r:id="rId24"/>
     <p:sldId id="273" r:id="rId25"/>
+    <p:sldId id="274" r:id="rId26"/>
   </p:sldIdLst>
   <p:sldSz cx="12191695" cy="6858000" type="screen4x3"/>
   <p:notesSz cx="6858000" cy="9144000"/>
@@ -594,12 +595,12 @@
           <a:lstStyle/>
           <a:p>
             <a:r>
-              <a:t>N1: ¿Por qué el gas natural sí y el butano no en un semisótano?</a:t>
-            </a:r>
-          </a:p>
-          <a:p>
-            <a:r>
-              <a:t>N2: Todo depende de si el gas sube o baja al escaparse. El gas natural es menos denso que el aire: si hay fuga, sube hacia el techo. El GLP, butano o propano, es más denso: baja y se acumula en las zonas bajas, como si fuera agua. Ahora piénsalo en un semisótano, que ya es una zona hundida. Con GLP sería una trampa: el gas se quedaría abajo formando una bolsa invisible esperando una chispa. Por eso, con GLP nunca metes aparatos en un semisótano. Con gas natural sí se permite, pero solo si el semisótano no está muy hundido: hasta cuatro metros de diferencia entre su suelo y la calle. Idea corta: gas pesado y zona baja, peligro; gas ligero y poco hundido, tolerable.</a:t>
+              <a:t>N1: Me suena lo de «tiro natural» y «tiro forzado», pero ¿qué es?</a:t>
+            </a:r>
+          </a:p>
+          <a:p>
+            <a:r>
+              <a:t>N2: Es cómo salen los humos por el conducto, y se distingue muy fácil. Tiro natural: los humos suben solos porque están calientes y el aire caliente pesa menos, igual que el humo de una chimenea de leña. Tiro forzado: hay un ventilador o extractor dentro del aparato que los empuja. Regla de examen: si el aparato lleva ventilador, es de tiro forzado; si suben por sí mismos, tiro natural. Y una sigla que cae: el BS es el tipo B de tiro natural que lleva dispositivo antirrevoco. Antirrevoco quiere decir que corta el aparato si los humos, en vez de salir, se vuelven hacia dentro. Un pequeño guardián que evita que el humo te entre en casa.</a:t>
             </a:r>
           </a:p>
         </p:txBody>
@@ -669,12 +670,12 @@
           <a:lstStyle/>
           <a:p>
             <a:r>
-              <a:t>N1: ¿Qué pasa cuando junto varias calderas grandes en un cuarto?</a:t>
-            </a:r>
-          </a:p>
-          <a:p>
-            <a:r>
-              <a:t>N2: Ahí aparece un número que tienes que grabarte: setenta kilovatios. Si sumas las potencias de las calderas de calefacción o agua caliente, más los equipos de absorción para frío, más la cogeneración, todo en el mismo local, y esa suma pasa de setenta kilovatios, ese cuarto deja de ser un local normal: pasa a ser una sala de máquinas. Y una sala de máquinas tiene requisitos propios que no manda esta parte seis, sino la UNE seis mil seiscientos uno y el RITE, el reglamento de instalaciones térmicas. Cambia hasta el papeleo: te pide proyecto y tramitación aparte. Por debajo de setenta, sigues en tu terreno. Y ojo, ese setenta reaparece en el vídeo dos, con la ventilación industrial.</a:t>
+              <a:t>N1: ¿Por qué el gas natural sí y el butano no en un semisótano?</a:t>
+            </a:r>
+          </a:p>
+          <a:p>
+            <a:r>
+              <a:t>N2: Todo depende de si el gas sube o baja al escaparse. El gas natural es menos denso que el aire: si hay fuga, sube hacia el techo. El GLP, butano o propano, es más denso: baja y se acumula en las zonas bajas, como si fuera agua. Ahora piénsalo en un semisótano, que ya es una zona hundida. Con GLP sería una trampa: el gas se quedaría abajo formando una bolsa invisible esperando una chispa. Por eso, con GLP nunca metes aparatos en un semisótano. Con gas natural sí se permite, pero solo si el semisótano no está muy hundido: hasta cuatro metros de diferencia entre su suelo y la calle. Idea corta: gas pesado y zona baja, peligro; gas ligero y poco hundido, tolerable.</a:t>
             </a:r>
           </a:p>
         </p:txBody>
@@ -744,12 +745,12 @@
           <a:lstStyle/>
           <a:p>
             <a:r>
-              <a:t>N1: ¿Qué aparatos de tipo A puedo poner en un local normal?</a:t>
-            </a:r>
-          </a:p>
-          <a:p>
-            <a:r>
-              <a:t>N2: La norma hace una lista, pero basta con que entiendas la lógica. Primero, todo lo de cocinar: cocinas, hornos, cafeteras, barbacoas. Segundo, aparatos de calefacción que usan el calor directamente, pero solo en sitios como almacenes, talleres o naves industriales, no en tu salón; ahí entran los generadores de aire caliente y los tubos radiantes. Y tercero, otros aparatos pequeños con quemador de gas y consumo por debajo de cuatro coma sesenta y cinco kilovatios, como un frigorífico de gas. La idea de fondo: como el tipo A suelta los humos dentro, la norma solo permite los usos donde tiene sentido y con potencia contenida. Guárdate ese cuatro coma sesenta y cinco, que tiene una excepción importante que vemos ahora.</a:t>
+              <a:t>N1: ¿Qué pasa cuando junto varias calderas grandes en un cuarto?</a:t>
+            </a:r>
+          </a:p>
+          <a:p>
+            <a:r>
+              <a:t>N2: Ahí aparece un número que tienes que grabarte: setenta kilovatios. Si sumas las potencias de las calderas de calefacción o agua caliente, más los equipos de absorción para frío, más la cogeneración, todo en el mismo local, y esa suma pasa de setenta kilovatios, ese cuarto deja de ser un local normal: pasa a ser una sala de máquinas. Y una sala de máquinas tiene requisitos propios que no manda esta parte seis, sino la UNE seis mil seiscientos uno y el RITE, el reglamento de instalaciones térmicas. Cambia hasta el papeleo: te pide proyecto y tramitación aparte. Por debajo de setenta, sigues en tu terreno. Y ojo, ese setenta reaparece en el vídeo dos, con la ventilación industrial.</a:t>
             </a:r>
           </a:p>
         </p:txBody>
@@ -819,12 +820,12 @@
           <a:lstStyle/>
           <a:p>
             <a:r>
-              <a:t>N1: ¿Hay sitios donde el tipo A esté prohibido sí o sí?</a:t>
-            </a:r>
-          </a:p>
-          <a:p>
-            <a:r>
-              <a:t>N2: Sí, y esto es de hierro. Un aparato de tipo A no se instala nunca en un dormitorio ni en un baño, ducha o aseo. La razón es de vida o muerte: son sitios donde duermes o donde te encierras con el vapor de la ducha, y un aparato que suelta humos ahí te puede intoxicar sin que te enteres. Es la causa directa de muchas intoxicaciones por monóxido cada invierno. Y hay una excepción tramposa dentro del tipo A: aunque se permiten «otros aparatos» de poca potencia, el calentador o acumulador de agua caliente de tipo A no se pone jamás, ni siendo pequeño. ¿Por qué? Porque estaría soltando humos dentro de casa durante horas para calentar el depósito. Si te preguntan «¿un acumulador de ACS de tipo A si es de poca potencia?», la respuesta es no, nunca.</a:t>
+              <a:t>N1: ¿Qué aparatos de tipo A puedo poner en un local normal?</a:t>
+            </a:r>
+          </a:p>
+          <a:p>
+            <a:r>
+              <a:t>N2: La norma hace una lista, pero basta con que entiendas la lógica. Primero, todo lo de cocinar: cocinas, hornos, cafeteras, barbacoas. Segundo, aparatos de calefacción que usan el calor directamente, pero solo en sitios como almacenes, talleres o naves industriales, no en tu salón; ahí entran los generadores de aire caliente y los tubos radiantes. Y tercero, otros aparatos pequeños con quemador de gas y consumo por debajo de cuatro coma sesenta y cinco kilovatios, como un frigorífico de gas. La idea de fondo: como el tipo A suelta los humos dentro, la norma solo permite los usos donde tiene sentido y con potencia contenida. Guárdate ese cuatro coma sesenta y cinco, que tiene una excepción importante que vemos ahora.</a:t>
             </a:r>
           </a:p>
         </p:txBody>
@@ -894,12 +895,12 @@
           <a:lstStyle/>
           <a:p>
             <a:r>
-              <a:t>N1: ¿Qué pinta la «seguridad de llama» en todo esto?</a:t>
-            </a:r>
-          </a:p>
-          <a:p>
-            <a:r>
-              <a:t>N2: Es un detalle pequeño que decide mucho. La seguridad de llama es un dispositivo, un termopar o un detector, que corta el gas solo si la llama se apaga. Los fuegos antiguos no lo tenían: si se apagaba la llama, seguían soltando gas. Por eso, los aparatos de fuego abierto sin seguridad de llama exigen ventilación rápida, una abertura grande para desalojar de golpe. Los modernos, con seguridad en todos los fuegos, no la necesitan. Y para el loft, tres condiciones que van juntas: la cocina tiene que tener seguridad de llama, la suma de potencia de cocción no puede pasar de doce kilovatios, y el volumen del loft no puede bajar de ochenta metros cúbicos. Piensa: loft, solo cocinar, con seguridad y que sea amplio.</a:t>
+              <a:t>N1: ¿Hay sitios donde el tipo A esté prohibido sí o sí?</a:t>
+            </a:r>
+          </a:p>
+          <a:p>
+            <a:r>
+              <a:t>N2: Sí, y esto es de hierro. Un aparato de tipo A no se instala nunca en un dormitorio ni en un baño, ducha o aseo. La razón es de vida o muerte: son sitios donde duermes o donde te encierras con el vapor de la ducha, y un aparato que suelta humos ahí te puede intoxicar sin que te enteres. Es la causa directa de muchas intoxicaciones por monóxido cada invierno. Y hay una excepción tramposa dentro del tipo A: aunque se permiten «otros aparatos» de poca potencia, el calentador o acumulador de agua caliente de tipo A no se pone jamás, ni siendo pequeño. ¿Por qué? Porque estaría soltando humos dentro de casa durante horas para calentar el depósito. Si te preguntan «¿un acumulador de ACS de tipo A si es de poca potencia?», la respuesta es no, nunca.</a:t>
             </a:r>
           </a:p>
         </p:txBody>
@@ -969,12 +970,12 @@
           <a:lstStyle/>
           <a:p>
             <a:r>
-              <a:t>N1: El tipo B también roba aire del local... ¿está igual de limitado que el A?</a:t>
-            </a:r>
-          </a:p>
-          <a:p>
-            <a:r>
-              <a:t>N2: En lo básico, sí: tampoco se instala en dormitorio ni en baño, ducha o aseo, ni en un cuarto que comunique con ellos si la única forma de entrar es por ahí. Misma lógica: coge aire del local para tirar los humos, y no quieres eso donde alguien duerme o se ducha. Pero hay una variante más segura, el B3x, que es como «el tipo B con permiso especial». Al estar mejor resuelto, se le abren puertas: puede ir en cocinas, lavaderos o garajes, donde el B normal no entra. Y es la única excepción a la prohibición de comunicar con dormitorio o baño. Cuando veas «B3x», piensa: el tipo B que sí puede estar en más sitios.</a:t>
+              <a:t>N1: ¿Qué pinta la «seguridad de llama» en todo esto?</a:t>
+            </a:r>
+          </a:p>
+          <a:p>
+            <a:r>
+              <a:t>N2: Es un detalle pequeño que decide mucho. La seguridad de llama es un dispositivo, un termopar o un detector, que corta el gas solo si la llama se apaga. Los fuegos antiguos no lo tenían: si se apagaba la llama, seguían soltando gas. Por eso, los aparatos de fuego abierto sin seguridad de llama exigen ventilación rápida, una abertura grande para desalojar de golpe. Los modernos, con seguridad en todos los fuegos, no la necesitan. Y para el loft, tres condiciones que van juntas: la cocina tiene que tener seguridad de llama, la suma de potencia de cocción no puede pasar de doce kilovatios, y el volumen del loft no puede bajar de ochenta metros cúbicos. Piensa: loft, solo cocinar, con seguridad y que sea amplio.</a:t>
             </a:r>
           </a:p>
         </p:txBody>
@@ -1044,12 +1045,12 @@
           <a:lstStyle/>
           <a:p>
             <a:r>
-              <a:t>N1: ¿Qué tiene que ver la campana de la cocina con un calentador?</a:t>
-            </a:r>
-          </a:p>
-          <a:p>
-            <a:r>
-              <a:t>N2: Es uno de los accidentes domésticos más típicos, merece entenderlo bien. Imagina un calentador antiguo de tipo B de tiro natural, de los que sacan los humos por su propio tiro suave. Ahora enciendes la campana extractora de la cocina, que tira con fuerza. Esa campana puede «chupar» los humos del calentador hacia dentro de casa en vez de dejarlos salir por su conducto. Resultado: monóxido de carbono en el salón. Por eso, en instalaciones existentes, al ponerlas en servicio hay que impedir de forma automática que el calentador y el extractor funcionen a la vez de forma peligrosa, y ese corte debe actuar en dos minutos o menos. Cuando en obra veas un calentador viejo cerca de una campana potente, salta la alarma: es un diagnóstico de avería clásico.</a:t>
+              <a:t>N1: El tipo B también roba aire del local... ¿está igual de limitado que el A?</a:t>
+            </a:r>
+          </a:p>
+          <a:p>
+            <a:r>
+              <a:t>N2: En lo básico, sí: tampoco se instala en dormitorio ni en baño, ducha o aseo, ni en un cuarto que comunique con ellos si la única forma de entrar es por ahí. Misma lógica: coge aire del local para tirar los humos, y no quieres eso donde alguien duerme o se ducha. Pero hay una variante más segura, el B3x, que es como «el tipo B con permiso especial». Al estar mejor resuelto, se le abren puertas: puede ir en cocinas, lavaderos o garajes, donde el B normal no entra. Y es la única excepción a la prohibición de comunicar con dormitorio o baño. Cuando veas «B3x», piensa: el tipo B que sí puede estar en más sitios.</a:t>
             </a:r>
           </a:p>
         </p:txBody>
@@ -1119,12 +1120,12 @@
           <a:lstStyle/>
           <a:p>
             <a:r>
-              <a:t>N1: Y el tipo C, que dices que es el más seguro, ¿dónde puede ir?</a:t>
-            </a:r>
-          </a:p>
-          <a:p>
-            <a:r>
-              <a:t>N2: Prácticamente en cualquier sitio, por eso lo llamo el todoterreno. Como es estanco, no toca el aire del local ni suelta humos dentro, así que se permite en zona exterior y en cualquier local, incluidos dormitorios y baños, ducha o aseo. Por eso las calderas modernas de ventosa son de tipo C: van donde no puede ir ningún otro. La única pega en un baño o dormitorio no es el gas, es la electricidad: al ser locales húmedos, la parte eléctrica tiene que cumplir el reglamento de baja tensión. Chuleta directa: si te preguntan qué aparato se puede poner en un dormitorio, la respuesta es tipo C.</a:t>
+              <a:t>N1: ¿Qué tiene que ver la campana de la cocina con un calentador?</a:t>
+            </a:r>
+          </a:p>
+          <a:p>
+            <a:r>
+              <a:t>N2: Es uno de los accidentes domésticos más típicos, merece entenderlo bien. Imagina un calentador antiguo de tipo B de tiro natural, de los que sacan los humos por su propio tiro suave. Ahora enciendes la campana extractora de la cocina, que tira con fuerza. Esa campana puede «chupar» los humos del calentador hacia dentro de casa en vez de dejarlos salir por su conducto. Resultado: monóxido de carbono en el salón. Por eso, en instalaciones existentes, al ponerlas en servicio hay que impedir de forma automática que el calentador y el extractor funcionen a la vez de forma peligrosa, y ese corte debe actuar en dos minutos o menos. Cuando en obra veas un calentador viejo cerca de una campana potente, salta la alarma: es un diagnóstico de avería clásico.</a:t>
             </a:r>
           </a:p>
         </p:txBody>
@@ -1194,6 +1195,81 @@
           <a:lstStyle/>
           <a:p>
             <a:r>
+              <a:t>N1: Y el tipo C, que dices que es el más seguro, ¿dónde puede ir?</a:t>
+            </a:r>
+          </a:p>
+          <a:p>
+            <a:r>
+              <a:t>N2: Prácticamente en cualquier sitio, por eso lo llamo el todoterreno. Como es estanco, no toca el aire del local ni suelta humos dentro, así que se permite en zona exterior y en cualquier local, incluidos dormitorios y baños, ducha o aseo. Por eso las calderas modernas de ventosa son de tipo C: van donde no puede ir ningún otro. La única pega en un baño o dormitorio no es el gas, es la electricidad: al ser locales húmedos, la parte eléctrica tiene que cumplir el reglamento de baja tensión. Chuleta directa: si te preguntan qué aparato se puede poner en un dormitorio, la respuesta es tipo C.</a:t>
+            </a:r>
+          </a:p>
+        </p:txBody>
+      </p:sp>
+      <p:sp>
+        <p:nvSpPr>
+          <p:cNvPr id="4" name="Slide Number Placeholder 3"/>
+          <p:cNvSpPr>
+            <a:spLocks noGrp="1"/>
+          </p:cNvSpPr>
+          <p:nvPr>
+            <p:ph type="sldNum" idx="5" sz="quarter"/>
+          </p:nvPr>
+        </p:nvSpPr>
+        <p:spPr/>
+      </p:sp>
+    </p:spTree>
+  </p:cSld>
+  <p:clrMapOvr>
+    <a:masterClrMapping/>
+  </p:clrMapOvr>
+</p:notes>
+</file>
+
+<file path=ppt/notesSlides/notesSlide19.xml><?xml version="1.0" encoding="utf-8"?>
+<p:notes xmlns:a="http://schemas.openxmlformats.org/drawingml/2006/main" xmlns:p="http://schemas.openxmlformats.org/presentationml/2006/main" xmlns:r="http://schemas.openxmlformats.org/officeDocument/2006/relationships">
+  <p:cSld>
+    <p:spTree>
+      <p:nvGrpSpPr>
+        <p:cNvPr id="1" name=""/>
+        <p:cNvGrpSpPr/>
+        <p:nvPr/>
+      </p:nvGrpSpPr>
+      <p:grpSpPr>
+        <a:xfrm>
+          <a:off x="0" y="0"/>
+          <a:ext cx="0" cy="0"/>
+          <a:chOff x="0" y="0"/>
+          <a:chExt cx="0" cy="0"/>
+        </a:xfrm>
+      </p:grpSpPr>
+      <p:sp>
+        <p:nvSpPr>
+          <p:cNvPr id="2" name="Slide Image Placeholder 1"/>
+          <p:cNvSpPr>
+            <a:spLocks noGrp="1"/>
+          </p:cNvSpPr>
+          <p:nvPr>
+            <p:ph type="sldImg" idx="2"/>
+          </p:nvPr>
+        </p:nvSpPr>
+        <p:spPr/>
+      </p:sp>
+      <p:sp>
+        <p:nvSpPr>
+          <p:cNvPr id="3" name="Notes Placeholder 2"/>
+          <p:cNvSpPr>
+            <a:spLocks noGrp="1"/>
+          </p:cNvSpPr>
+          <p:nvPr>
+            <p:ph type="body" idx="3" sz="quarter"/>
+          </p:nvPr>
+        </p:nvSpPr>
+        <p:spPr/>
+        <p:txBody>
+          <a:bodyPr/>
+          <a:lstStyle/>
+          <a:p>
+            <a:r>
               <a:t>N1: Profe, cierra el vídeo: ¿cómo lo enlazo todo?</a:t>
             </a:r>
           </a:p>
@@ -1352,16 +1428,7 @@
         <p:txBody>
           <a:bodyPr/>
           <a:lstStyle/>
-          <a:p>
-            <a:r>
-              <a:t>N1: ¿Y qué es exactamente la UNE 60670? ¿Una ley?</a:t>
-            </a:r>
-          </a:p>
-          <a:p>
-            <a:r>
-              <a:t>N2: No es una ley, es una norma técnica, pero es la que usa el instalador todos los días. Piensa en ella como el manual de instrucciones del oficio: fija los criterios técnicos, los requisitos de seguridad y las garantías de buen servicio para diseñar, montar, ampliar, probar, poner en servicio y revisar las instalaciones receptoras de gas. La receptora es la parte de dentro, la que va del contador a tus aparatos. Y pone una frontera: solo cubre instalaciones con una presión máxima de operación, la MOP, igual o inferior a cinco bar. Ejemplo: la tubería que lleva el gas a tu caldera y la propia caldera entran aquí; la red de la calle a mucha presión, no.</a:t>
-            </a:r>
-          </a:p>
+          <a:p/>
         </p:txBody>
       </p:sp>
       <p:sp>
@@ -1429,12 +1496,12 @@
           <a:lstStyle/>
           <a:p>
             <a:r>
-              <a:t>N1: Me lío: ¿la parte seis y el tema trece son lo mismo?</a:t>
-            </a:r>
-          </a:p>
-          <a:p>
-            <a:r>
-              <a:t>N2: Es la trampa de nombres más típica, vamos a aclararla. La norma completa se divide en trece partes: la uno es generalidades, la dos terminología, la tres tuberías, y la parte seis, la tuya, trata los locales que contienen aparatos de gas, su ventilación y la evacuación de humos. Da la casualidad de que esa parte seis es el tema trece de tu curso. Son cosas distintas con números parecidos. Truco: cuando en el examen leas «UNE seis mil seiscientos setenta guion seis», tradúcelo por «la parte de los locales, la ventilación y los humos». Ese es su apellido, y no falla.</a:t>
+              <a:t>N1: ¿Y qué es exactamente la UNE 60670? ¿Una ley?</a:t>
+            </a:r>
+          </a:p>
+          <a:p>
+            <a:r>
+              <a:t>N2: No es una ley, es una norma técnica, pero es la que usa el instalador todos los días. Piensa en ella como el manual de instrucciones del oficio: fija los criterios técnicos, los requisitos de seguridad y las garantías de buen servicio para diseñar, montar, ampliar, probar, poner en servicio y revisar las instalaciones receptoras de gas. La receptora es la parte de dentro, la que va del contador a tus aparatos. Y pone una frontera: solo cubre instalaciones con una presión máxima de operación, la MOP, igual o inferior a cinco bar. Ejemplo: la tubería que lleva el gas a tu caldera y la propia caldera entran aquí; la red de la calle a mucha presión, no.</a:t>
             </a:r>
           </a:p>
         </p:txBody>
@@ -1504,12 +1571,12 @@
           <a:lstStyle/>
           <a:p>
             <a:r>
-              <a:t>N1: ¿Y por qué insistes en las novedades de la edición?</a:t>
-            </a:r>
-          </a:p>
-          <a:p>
-            <a:r>
-              <a:t>N2: Porque lo que cambia en una revisión es justo lo que al examinador le apetece preguntar; está fresco. Fíjate en las que más caen: en un semisótano ahora se permite gas menos denso que el aire solo si su suelo está a menos de cuatro metros de la calle; se permite cocinar con aparatos de tipo A en un loft si se cumplen condiciones; se revisan enteras las condiciones del tipo B; las rejillas solo se exigen en locales domésticos, colectivos o comerciales; y aparece la ventilación cruzada para locales industriales cuando la suma de tipo A y B pasa de setenta kilovatios. No las memorices todas hoy; quédate con que son los puntos marcados en rojo.</a:t>
+              <a:t>N1: Me lío: ¿la parte seis y el tema trece son lo mismo?</a:t>
+            </a:r>
+          </a:p>
+          <a:p>
+            <a:r>
+              <a:t>N2: Es la trampa de nombres más típica, vamos a aclararla. La norma completa se divide en trece partes: la uno es generalidades, la dos terminología, la tres tuberías, y la parte seis, la tuya, trata los locales que contienen aparatos de gas, su ventilación y la evacuación de humos. Da la casualidad de que esa parte seis es el tema trece de tu curso. Son cosas distintas con números parecidos. Truco: cuando en el examen leas «UNE seis mil seiscientos setenta guion seis», tradúcelo por «la parte de los locales, la ventilación y los humos». Ese es su apellido, y no falla.</a:t>
             </a:r>
           </a:p>
         </p:txBody>
@@ -1579,12 +1646,12 @@
           <a:lstStyle/>
           <a:p>
             <a:r>
-              <a:t>N1: ¿Qué cubre exactamente esta parte seis?</a:t>
-            </a:r>
-          </a:p>
-          <a:p>
-            <a:r>
-              <a:t>N2: Tres cosas, tenlas juntas: las características de los locales y sus orificios de ventilación, los sistemas de ventilación de esos locales, y los sistemas de evacuación de los humos de los aparatos. Todo eso, sea cual sea el tipo de aparato. Pero ojo a lo que deja fuera: las salas de máquinas y los equipos autónomos de generación de calor o frío o de cogeneración, que van por otra norma, la UNE seis mil seiscientos uno. Regla mental: poca potencia y local normal, juegas con esta parte seis; mucha potencia y sala de máquinas, te vas a la otra norma. Enseguida verás dónde está esa frontera: setenta kilovatios.</a:t>
+              <a:t>N1: ¿Y por qué insistes en las novedades de la edición?</a:t>
+            </a:r>
+          </a:p>
+          <a:p>
+            <a:r>
+              <a:t>N2: Porque lo que cambia en una revisión es justo lo que al examinador le apetece preguntar; está fresco. Fíjate en las que más caen: en un semisótano ahora se permite gas menos denso que el aire solo si su suelo está a menos de cuatro metros de la calle; se permite cocinar con aparatos de tipo A en un loft si se cumplen condiciones; se revisan enteras las condiciones del tipo B; las rejillas solo se exigen en locales domésticos, colectivos o comerciales; y aparece la ventilación cruzada para locales industriales cuando la suma de tipo A y B pasa de setenta kilovatios. No las memorices todas hoy; quédate con que son los puntos marcados en rojo.</a:t>
             </a:r>
           </a:p>
         </p:txBody>
@@ -1654,12 +1721,12 @@
           <a:lstStyle/>
           <a:p>
             <a:r>
-              <a:t>N1: ¿Qué diferencia hay entre un tipo A y un tipo B?</a:t>
-            </a:r>
-          </a:p>
-          <a:p>
-            <a:r>
-              <a:t>N2: Los dos son de circuito abierto: cogen el aire de combustión de la propia habitación donde están, por eso «respiran del local». La diferencia está en los humos. El tipo A es de evacuación no conducida: no tiene tubo de humos, así que los suelta en el mismo local. Piensa en una cocina de gas o un calientaplatos. El tipo B sí tiene conducto: coge el aire del local pero echa los humos fuera por un tubo, como el clásico calentador antiguo del baño. Los dos roban aire de la habitación, y por eso los dos exigen ventilación para reponerlo. La diferencia práctica: el A te deja los humos dentro, el B los saca.</a:t>
+              <a:t>N1: ¿Qué cubre exactamente esta parte seis?</a:t>
+            </a:r>
+          </a:p>
+          <a:p>
+            <a:r>
+              <a:t>N2: Tres cosas, tenlas juntas: las características de los locales y sus orificios de ventilación, los sistemas de ventilación de esos locales, y los sistemas de evacuación de los humos de los aparatos. Todo eso, sea cual sea el tipo de aparato. Pero ojo a lo que deja fuera: las salas de máquinas y los equipos autónomos de generación de calor o frío o de cogeneración, que van por otra norma, la UNE seis mil seiscientos uno. Regla mental: poca potencia y local normal, juegas con esta parte seis; mucha potencia y sala de máquinas, te vas a la otra norma. Enseguida verás dónde está esa frontera: setenta kilovatios.</a:t>
             </a:r>
           </a:p>
         </p:txBody>
@@ -1729,12 +1796,12 @@
           <a:lstStyle/>
           <a:p>
             <a:r>
-              <a:t>N1: ¿Y el tipo C por qué es distinto?</a:t>
-            </a:r>
-          </a:p>
-          <a:p>
-            <a:r>
-              <a:t>N2: El tipo C es estanco, y esa palabra lo cambia todo. Estanco significa que su circuito de combustión, la entrada de aire y la salida de humos, está cerrado y aislado del local. No respira tu habitación: coge el aire directamente de fuera y devuelve los humos fuera, normalmente por el mismo tubo de doble pared que llamamos ventosa. Es la caldera moderna que ves en cualquier cocina. Al no tocar el aire del local ni soltar humos dentro, es con diferencia el más seguro, y por eso es el único que puedes meter casi en cualquier sitio. Chuleta: A se lo queda todo, B tira los humos, C ni te toca el aire.</a:t>
+              <a:t>N1: ¿Qué diferencia hay entre un tipo A y un tipo B?</a:t>
+            </a:r>
+          </a:p>
+          <a:p>
+            <a:r>
+              <a:t>N2: Los dos son de circuito abierto: cogen el aire de combustión de la propia habitación donde están, por eso «respiran del local». La diferencia está en los humos. El tipo A es de evacuación no conducida: no tiene tubo de humos, así que los suelta en el mismo local. Piensa en una cocina de gas o un calientaplatos. El tipo B sí tiene conducto: coge el aire del local pero echa los humos fuera por un tubo, como el clásico calentador antiguo del baño. Los dos roban aire de la habitación, y por eso los dos exigen ventilación para reponerlo. La diferencia práctica: el A te deja los humos dentro, el B los saca.</a:t>
             </a:r>
           </a:p>
         </p:txBody>
@@ -1804,12 +1871,12 @@
           <a:lstStyle/>
           <a:p>
             <a:r>
-              <a:t>N1: Me suena lo de «tiro natural» y «tiro forzado», pero ¿qué es?</a:t>
-            </a:r>
-          </a:p>
-          <a:p>
-            <a:r>
-              <a:t>N2: Es cómo salen los humos por el conducto, y se distingue muy fácil. Tiro natural: los humos suben solos porque están calientes y el aire caliente pesa menos, igual que el humo de una chimenea de leña. Tiro forzado: hay un ventilador o extractor dentro del aparato que los empuja. Regla de examen: si el aparato lleva ventilador, es de tiro forzado; si suben por sí mismos, tiro natural. Y una sigla que cae: el BS es el tipo B de tiro natural que lleva dispositivo antirrevoco. Antirrevoco quiere decir que corta el aparato si los humos, en vez de salir, se vuelven hacia dentro. Un pequeño guardián que evita que el humo te entre en casa.</a:t>
+              <a:t>N1: ¿Y el tipo C por qué es distinto?</a:t>
+            </a:r>
+          </a:p>
+          <a:p>
+            <a:r>
+              <a:t>N2: El tipo C es estanco, y esa palabra lo cambia todo. Estanco significa que su circuito de combustión, la entrada de aire y la salida de humos, está cerrado y aislado del local. No respira tu habitación: coge el aire directamente de fuera y devuelve los humos fuera, normalmente por el mismo tubo de doble pared que llamamos ventosa. Es la caldera moderna que ves en cualquier cocina. Al no tocar el aire del local ni soltar humos dentro, es con diferencia el más seguro, y por eso es el único que puedes meter casi en cualquier sitio. Chuleta: A se lo queda todo, B tira los humos, C ni te toca el aire.</a:t>
             </a:r>
           </a:p>
         </p:txBody>
@@ -4884,7 +4951,7 @@
             <a:r>
               <a:rPr sz="1400" b="1" i="0">
                 <a:solidFill>
-                  <a:srgbClr val="CADCFC"/>
+                  <a:srgbClr val="F4A24C"/>
                 </a:solidFill>
                 <a:latin typeface="Montserrat"/>
               </a:rPr>
@@ -4895,13 +4962,57 @@
       </p:sp>
       <p:sp>
         <p:nvSpPr>
-          <p:cNvPr id="4" name="TextBox 3"/>
+          <p:cNvPr id="4" name="Rounded Rectangle 3"/>
+          <p:cNvSpPr/>
+          <p:nvPr/>
+        </p:nvSpPr>
+        <p:spPr>
+          <a:xfrm>
+            <a:off x="868680" y="2057400"/>
+            <a:ext cx="1463040" cy="82296"/>
+          </a:xfrm>
+          <a:prstGeom prst="roundRect">
+            <a:avLst/>
+          </a:prstGeom>
+          <a:solidFill>
+            <a:srgbClr val="E8801A"/>
+          </a:solidFill>
+          <a:ln>
+            <a:noFill/>
+          </a:ln>
+          <a:effectLst/>
+        </p:spPr>
+        <p:style>
+          <a:lnRef idx="1">
+            <a:schemeClr val="accent1"/>
+          </a:lnRef>
+          <a:fillRef idx="3">
+            <a:schemeClr val="accent1"/>
+          </a:fillRef>
+          <a:effectRef idx="2">
+            <a:schemeClr val="accent1"/>
+          </a:effectRef>
+          <a:fontRef idx="minor">
+            <a:schemeClr val="lt1"/>
+          </a:fontRef>
+        </p:style>
+        <p:txBody>
+          <a:bodyPr rtlCol="0" anchor="ctr"/>
+          <a:lstStyle/>
+          <a:p>
+            <a:pPr algn="ctr"/>
+          </a:p>
+        </p:txBody>
+      </p:sp>
+      <p:sp>
+        <p:nvSpPr>
+          <p:cNvPr id="5" name="TextBox 4"/>
           <p:cNvSpPr txBox="1"/>
           <p:nvPr/>
         </p:nvSpPr>
         <p:spPr>
           <a:xfrm>
-            <a:off x="822960" y="2194560"/>
+            <a:off x="822960" y="2286000"/>
             <a:ext cx="10515600" cy="2011680"/>
           </a:xfrm>
           <a:prstGeom prst="rect">
@@ -4940,7 +5051,7 @@
       </p:sp>
       <p:sp>
         <p:nvSpPr>
-          <p:cNvPr id="5" name="TextBox 4"/>
+          <p:cNvPr id="6" name="TextBox 5"/>
           <p:cNvSpPr txBox="1"/>
           <p:nvPr/>
         </p:nvSpPr>
@@ -5064,7 +5175,7 @@
                 </a:solidFill>
                 <a:latin typeface="Montserrat"/>
               </a:rPr>
-              <a:t>010 / 018</a:t>
+              <a:t>010 / 019</a:t>
             </a:r>
           </a:p>
         </p:txBody>
@@ -5112,7 +5223,7 @@
         <p:spPr>
           <a:xfrm>
             <a:off x="822960" y="457200"/>
-            <a:ext cx="8229600" cy="365760"/>
+            <a:ext cx="10058400" cy="365760"/>
           </a:xfrm>
           <a:prstGeom prst="rect">
             <a:avLst/>
@@ -5126,13 +5237,13 @@
           <a:lstStyle/>
           <a:p>
             <a:r>
-              <a:rPr sz="1200" b="1" i="0">
-                <a:solidFill>
-                  <a:srgbClr val="64748B"/>
-                </a:solidFill>
-                <a:latin typeface="Montserrat"/>
-              </a:rPr>
-              <a:t>INSTALACIÓN · NIVEL DEL LOCAL</a:t>
+              <a:rPr sz="1300" b="1" i="0">
+                <a:solidFill>
+                  <a:srgbClr val="E8801A"/>
+                </a:solidFill>
+                <a:latin typeface="Montserrat"/>
+              </a:rPr>
+              <a:t>TIRO NATURAL Y FORZADO</a:t>
             </a:r>
           </a:p>
         </p:txBody>
@@ -5160,26 +5271,70 @@
           <a:lstStyle/>
           <a:p>
             <a:r>
-              <a:rPr sz="2700" b="1" i="0">
+              <a:rPr sz="2800" b="1" i="0">
                 <a:solidFill>
                   <a:srgbClr val="1E2761"/>
                 </a:solidFill>
                 <a:latin typeface="Montserrat"/>
               </a:rPr>
-              <a:t>Semisótano: manda cómo pesa el gas</a:t>
-            </a:r>
-          </a:p>
-        </p:txBody>
-      </p:sp>
-      <p:sp>
-        <p:nvSpPr>
-          <p:cNvPr id="7" name="TextBox 6"/>
+              <a:t>¿Los humos suben solos o empujados?</a:t>
+            </a:r>
+          </a:p>
+        </p:txBody>
+      </p:sp>
+      <p:sp>
+        <p:nvSpPr>
+          <p:cNvPr id="7" name="Rounded Rectangle 6"/>
+          <p:cNvSpPr/>
+          <p:nvPr/>
+        </p:nvSpPr>
+        <p:spPr>
+          <a:xfrm>
+            <a:off x="868680" y="1627632"/>
+            <a:ext cx="2011680" cy="73152"/>
+          </a:xfrm>
+          <a:prstGeom prst="roundRect">
+            <a:avLst/>
+          </a:prstGeom>
+          <a:solidFill>
+            <a:srgbClr val="E8801A"/>
+          </a:solidFill>
+          <a:ln>
+            <a:noFill/>
+          </a:ln>
+          <a:effectLst/>
+        </p:spPr>
+        <p:style>
+          <a:lnRef idx="1">
+            <a:schemeClr val="accent1"/>
+          </a:lnRef>
+          <a:fillRef idx="3">
+            <a:schemeClr val="accent1"/>
+          </a:fillRef>
+          <a:effectRef idx="2">
+            <a:schemeClr val="accent1"/>
+          </a:effectRef>
+          <a:fontRef idx="minor">
+            <a:schemeClr val="lt1"/>
+          </a:fontRef>
+        </p:style>
+        <p:txBody>
+          <a:bodyPr rtlCol="0" anchor="ctr"/>
+          <a:lstStyle/>
+          <a:p>
+            <a:pPr algn="ctr"/>
+          </a:p>
+        </p:txBody>
+      </p:sp>
+      <p:sp>
+        <p:nvSpPr>
+          <p:cNvPr id="8" name="TextBox 7"/>
           <p:cNvSpPr txBox="1"/>
           <p:nvPr/>
         </p:nvSpPr>
         <p:spPr>
           <a:xfrm>
-            <a:off x="822960" y="1920240"/>
+            <a:off x="822960" y="1965960"/>
             <a:ext cx="4983480" cy="4206240"/>
           </a:xfrm>
           <a:prstGeom prst="rect">
@@ -5195,17 +5350,17 @@
           <a:p>
             <a:pPr>
               <a:spcAft>
-                <a:spcPts val="1000"/>
+                <a:spcPts val="1100"/>
               </a:spcAft>
             </a:pPr>
             <a:r>
               <a:rPr sz="1600" b="1" i="0">
                 <a:solidFill>
-                  <a:srgbClr val="2E3A80"/>
-                </a:solidFill>
-                <a:latin typeface="Montserrat"/>
-              </a:rPr>
-              <a:t>•  </a:t>
+                  <a:srgbClr val="E8801A"/>
+                </a:solidFill>
+                <a:latin typeface="Montserrat"/>
+              </a:rPr>
+              <a:t>▸  </a:t>
             </a:r>
             <a:r>
               <a:rPr sz="1600" b="0" i="0">
@@ -5214,23 +5369,23 @@
                 </a:solidFill>
                 <a:latin typeface="Montserrat"/>
               </a:rPr>
-              <a:t>GLP: nunca en semisótano</a:t>
+              <a:t>Tiro natural: suben por el calor</a:t>
             </a:r>
           </a:p>
           <a:p>
             <a:pPr>
               <a:spcAft>
-                <a:spcPts val="1000"/>
+                <a:spcPts val="1100"/>
               </a:spcAft>
             </a:pPr>
             <a:r>
               <a:rPr sz="1600" b="1" i="0">
                 <a:solidFill>
-                  <a:srgbClr val="2E3A80"/>
-                </a:solidFill>
-                <a:latin typeface="Montserrat"/>
-              </a:rPr>
-              <a:t>•  </a:t>
+                  <a:srgbClr val="E8801A"/>
+                </a:solidFill>
+                <a:latin typeface="Montserrat"/>
+              </a:rPr>
+              <a:t>▸  </a:t>
             </a:r>
             <a:r>
               <a:rPr sz="1600" b="0" i="0">
@@ -5239,23 +5394,23 @@
                 </a:solidFill>
                 <a:latin typeface="Montserrat"/>
               </a:rPr>
-              <a:t>Gas natural: solo hasta 4 m</a:t>
+              <a:t>Tiro forzado: los empuja un ventilador</a:t>
             </a:r>
           </a:p>
           <a:p>
             <a:pPr>
               <a:spcAft>
-                <a:spcPts val="1000"/>
+                <a:spcPts val="1100"/>
               </a:spcAft>
             </a:pPr>
             <a:r>
               <a:rPr sz="1600" b="1" i="0">
                 <a:solidFill>
-                  <a:srgbClr val="2E3A80"/>
-                </a:solidFill>
-                <a:latin typeface="Montserrat"/>
-              </a:rPr>
-              <a:t>•  </a:t>
+                  <a:srgbClr val="E8801A"/>
+                </a:solidFill>
+                <a:latin typeface="Montserrat"/>
+              </a:rPr>
+              <a:t>▸  </a:t>
             </a:r>
             <a:r>
               <a:rPr sz="1600" b="0" i="0">
@@ -5264,14 +5419,14 @@
                 </a:solidFill>
                 <a:latin typeface="Montserrat"/>
               </a:rPr>
-              <a:t>Por debajo del semisótano: no</a:t>
-            </a:r>
-          </a:p>
-        </p:txBody>
-      </p:sp>
-      <p:sp>
-        <p:nvSpPr>
-          <p:cNvPr id="8" name="imgph" descr="IMGQ:basement gas pipe installation"/>
+              <a:t>BS: dispositivo antirrevoco</a:t>
+            </a:r>
+          </a:p>
+        </p:txBody>
+      </p:sp>
+      <p:sp>
+        <p:nvSpPr>
+          <p:cNvPr id="9" name="imgph" descr="IMGQ:chimney flue on rooftop"/>
           <p:cNvSpPr/>
           <p:nvPr/>
         </p:nvSpPr>
@@ -5317,7 +5472,7 @@
       </p:sp>
       <p:sp>
         <p:nvSpPr>
-          <p:cNvPr id="9" name="TextBox 8"/>
+          <p:cNvPr id="10" name="TextBox 9"/>
           <p:cNvSpPr txBox="1"/>
           <p:nvPr/>
         </p:nvSpPr>
@@ -5357,7 +5512,7 @@
                 </a:solidFill>
                 <a:latin typeface="Montserrat"/>
               </a:rPr>
-              <a:t>basement gas pipe installation</a:t>
+              <a:t>chimney flue on rooftop</a:t>
             </a:r>
           </a:p>
         </p:txBody>
@@ -5454,7 +5609,7 @@
                 </a:solidFill>
                 <a:latin typeface="Montserrat"/>
               </a:rPr>
-              <a:t>011 / 018</a:t>
+              <a:t>011 / 019</a:t>
             </a:r>
           </a:p>
         </p:txBody>
@@ -5502,7 +5657,7 @@
         <p:spPr>
           <a:xfrm>
             <a:off x="822960" y="457200"/>
-            <a:ext cx="8229600" cy="365760"/>
+            <a:ext cx="10058400" cy="365760"/>
           </a:xfrm>
           <a:prstGeom prst="rect">
             <a:avLst/>
@@ -5516,13 +5671,13 @@
           <a:lstStyle/>
           <a:p>
             <a:r>
-              <a:rPr sz="1200" b="1" i="0">
-                <a:solidFill>
-                  <a:srgbClr val="64748B"/>
-                </a:solidFill>
-                <a:latin typeface="Montserrat"/>
-              </a:rPr>
-              <a:t>INSTALACIÓN · POTENCIA</a:t>
+              <a:rPr sz="1300" b="1" i="0">
+                <a:solidFill>
+                  <a:srgbClr val="E8801A"/>
+                </a:solidFill>
+                <a:latin typeface="Montserrat"/>
+              </a:rPr>
+              <a:t>INSTALACIÓN · NIVEL DEL LOCAL</a:t>
             </a:r>
           </a:p>
         </p:txBody>
@@ -5550,26 +5705,70 @@
           <a:lstStyle/>
           <a:p>
             <a:r>
-              <a:rPr sz="2700" b="1" i="0">
+              <a:rPr sz="2800" b="1" i="0">
                 <a:solidFill>
                   <a:srgbClr val="1E2761"/>
                 </a:solidFill>
                 <a:latin typeface="Montserrat"/>
               </a:rPr>
-              <a:t>La frontera de los 70 kW</a:t>
-            </a:r>
-          </a:p>
-        </p:txBody>
-      </p:sp>
-      <p:sp>
-        <p:nvSpPr>
-          <p:cNvPr id="7" name="TextBox 6"/>
+              <a:t>Semisótano: manda cómo pesa el gas</a:t>
+            </a:r>
+          </a:p>
+        </p:txBody>
+      </p:sp>
+      <p:sp>
+        <p:nvSpPr>
+          <p:cNvPr id="7" name="Rounded Rectangle 6"/>
+          <p:cNvSpPr/>
+          <p:nvPr/>
+        </p:nvSpPr>
+        <p:spPr>
+          <a:xfrm>
+            <a:off x="868680" y="1627632"/>
+            <a:ext cx="2011680" cy="73152"/>
+          </a:xfrm>
+          <a:prstGeom prst="roundRect">
+            <a:avLst/>
+          </a:prstGeom>
+          <a:solidFill>
+            <a:srgbClr val="E8801A"/>
+          </a:solidFill>
+          <a:ln>
+            <a:noFill/>
+          </a:ln>
+          <a:effectLst/>
+        </p:spPr>
+        <p:style>
+          <a:lnRef idx="1">
+            <a:schemeClr val="accent1"/>
+          </a:lnRef>
+          <a:fillRef idx="3">
+            <a:schemeClr val="accent1"/>
+          </a:fillRef>
+          <a:effectRef idx="2">
+            <a:schemeClr val="accent1"/>
+          </a:effectRef>
+          <a:fontRef idx="minor">
+            <a:schemeClr val="lt1"/>
+          </a:fontRef>
+        </p:style>
+        <p:txBody>
+          <a:bodyPr rtlCol="0" anchor="ctr"/>
+          <a:lstStyle/>
+          <a:p>
+            <a:pPr algn="ctr"/>
+          </a:p>
+        </p:txBody>
+      </p:sp>
+      <p:sp>
+        <p:nvSpPr>
+          <p:cNvPr id="8" name="TextBox 7"/>
           <p:cNvSpPr txBox="1"/>
           <p:nvPr/>
         </p:nvSpPr>
         <p:spPr>
           <a:xfrm>
-            <a:off x="822960" y="1920240"/>
+            <a:off x="822960" y="1965960"/>
             <a:ext cx="4983480" cy="4206240"/>
           </a:xfrm>
           <a:prstGeom prst="rect">
@@ -5585,17 +5784,17 @@
           <a:p>
             <a:pPr>
               <a:spcAft>
-                <a:spcPts val="1000"/>
+                <a:spcPts val="1100"/>
               </a:spcAft>
             </a:pPr>
             <a:r>
               <a:rPr sz="1600" b="1" i="0">
                 <a:solidFill>
-                  <a:srgbClr val="2E3A80"/>
-                </a:solidFill>
-                <a:latin typeface="Montserrat"/>
-              </a:rPr>
-              <a:t>•  </a:t>
+                  <a:srgbClr val="E8801A"/>
+                </a:solidFill>
+                <a:latin typeface="Montserrat"/>
+              </a:rPr>
+              <a:t>▸  </a:t>
             </a:r>
             <a:r>
               <a:rPr sz="1600" b="0" i="0">
@@ -5604,23 +5803,23 @@
                 </a:solidFill>
                 <a:latin typeface="Montserrat"/>
               </a:rPr>
-              <a:t>Suma de potencias &gt; 70 kW</a:t>
+              <a:t>GLP: nunca en semisótano</a:t>
             </a:r>
           </a:p>
           <a:p>
             <a:pPr>
               <a:spcAft>
-                <a:spcPts val="1000"/>
+                <a:spcPts val="1100"/>
               </a:spcAft>
             </a:pPr>
             <a:r>
               <a:rPr sz="1600" b="1" i="0">
                 <a:solidFill>
-                  <a:srgbClr val="2E3A80"/>
-                </a:solidFill>
-                <a:latin typeface="Montserrat"/>
-              </a:rPr>
-              <a:t>•  </a:t>
+                  <a:srgbClr val="E8801A"/>
+                </a:solidFill>
+                <a:latin typeface="Montserrat"/>
+              </a:rPr>
+              <a:t>▸  </a:t>
             </a:r>
             <a:r>
               <a:rPr sz="1600" b="0" i="0">
@@ -5629,23 +5828,23 @@
                 </a:solidFill>
                 <a:latin typeface="Montserrat"/>
               </a:rPr>
-              <a:t>Obliga a sala de máquinas</a:t>
+              <a:t>Gas natural: solo hasta 4 m</a:t>
             </a:r>
           </a:p>
           <a:p>
             <a:pPr>
               <a:spcAft>
-                <a:spcPts val="1000"/>
+                <a:spcPts val="1100"/>
               </a:spcAft>
             </a:pPr>
             <a:r>
               <a:rPr sz="1600" b="1" i="0">
                 <a:solidFill>
-                  <a:srgbClr val="2E3A80"/>
-                </a:solidFill>
-                <a:latin typeface="Montserrat"/>
-              </a:rPr>
-              <a:t>•  </a:t>
+                  <a:srgbClr val="E8801A"/>
+                </a:solidFill>
+                <a:latin typeface="Montserrat"/>
+              </a:rPr>
+              <a:t>▸  </a:t>
             </a:r>
             <a:r>
               <a:rPr sz="1600" b="0" i="0">
@@ -5654,14 +5853,14 @@
                 </a:solidFill>
                 <a:latin typeface="Montserrat"/>
               </a:rPr>
-              <a:t>Mandan UNE 60601 y RITE</a:t>
-            </a:r>
-          </a:p>
-        </p:txBody>
-      </p:sp>
-      <p:sp>
-        <p:nvSpPr>
-          <p:cNvPr id="8" name="imgph" descr="IMGQ:large commercial boiler installation"/>
+              <a:t>Por debajo del semisótano: no</a:t>
+            </a:r>
+          </a:p>
+        </p:txBody>
+      </p:sp>
+      <p:sp>
+        <p:nvSpPr>
+          <p:cNvPr id="9" name="imgph" descr="IMGQ:basement gas pipe installation"/>
           <p:cNvSpPr/>
           <p:nvPr/>
         </p:nvSpPr>
@@ -5707,7 +5906,7 @@
       </p:sp>
       <p:sp>
         <p:nvSpPr>
-          <p:cNvPr id="9" name="TextBox 8"/>
+          <p:cNvPr id="10" name="TextBox 9"/>
           <p:cNvSpPr txBox="1"/>
           <p:nvPr/>
         </p:nvSpPr>
@@ -5747,7 +5946,7 @@
                 </a:solidFill>
                 <a:latin typeface="Montserrat"/>
               </a:rPr>
-              <a:t>large commercial boiler installation</a:t>
+              <a:t>basement gas pipe installation</a:t>
             </a:r>
           </a:p>
         </p:txBody>
@@ -5844,7 +6043,7 @@
                 </a:solidFill>
                 <a:latin typeface="Montserrat"/>
               </a:rPr>
-              <a:t>012 / 018</a:t>
+              <a:t>012 / 019</a:t>
             </a:r>
           </a:p>
         </p:txBody>
@@ -5892,7 +6091,7 @@
         <p:spPr>
           <a:xfrm>
             <a:off x="822960" y="457200"/>
-            <a:ext cx="8229600" cy="365760"/>
+            <a:ext cx="10058400" cy="365760"/>
           </a:xfrm>
           <a:prstGeom prst="rect">
             <a:avLst/>
@@ -5906,13 +6105,13 @@
           <a:lstStyle/>
           <a:p>
             <a:r>
-              <a:rPr sz="1200" b="1" i="0">
-                <a:solidFill>
-                  <a:srgbClr val="64748B"/>
-                </a:solidFill>
-                <a:latin typeface="Montserrat"/>
-              </a:rPr>
-              <a:t>TIPO A · DÓNDE</a:t>
+              <a:rPr sz="1300" b="1" i="0">
+                <a:solidFill>
+                  <a:srgbClr val="E8801A"/>
+                </a:solidFill>
+                <a:latin typeface="Montserrat"/>
+              </a:rPr>
+              <a:t>INSTALACIÓN · POTENCIA</a:t>
             </a:r>
           </a:p>
         </p:txBody>
@@ -5940,26 +6139,70 @@
           <a:lstStyle/>
           <a:p>
             <a:r>
-              <a:rPr sz="2700" b="1" i="0">
+              <a:rPr sz="2800" b="1" i="0">
                 <a:solidFill>
                   <a:srgbClr val="1E2761"/>
                 </a:solidFill>
                 <a:latin typeface="Montserrat"/>
               </a:rPr>
-              <a:t>Qué tipo A se puede instalar</a:t>
-            </a:r>
-          </a:p>
-        </p:txBody>
-      </p:sp>
-      <p:sp>
-        <p:nvSpPr>
-          <p:cNvPr id="7" name="TextBox 6"/>
+              <a:t>La frontera de los 70 kW</a:t>
+            </a:r>
+          </a:p>
+        </p:txBody>
+      </p:sp>
+      <p:sp>
+        <p:nvSpPr>
+          <p:cNvPr id="7" name="Rounded Rectangle 6"/>
+          <p:cNvSpPr/>
+          <p:nvPr/>
+        </p:nvSpPr>
+        <p:spPr>
+          <a:xfrm>
+            <a:off x="868680" y="1627632"/>
+            <a:ext cx="2011680" cy="73152"/>
+          </a:xfrm>
+          <a:prstGeom prst="roundRect">
+            <a:avLst/>
+          </a:prstGeom>
+          <a:solidFill>
+            <a:srgbClr val="E8801A"/>
+          </a:solidFill>
+          <a:ln>
+            <a:noFill/>
+          </a:ln>
+          <a:effectLst/>
+        </p:spPr>
+        <p:style>
+          <a:lnRef idx="1">
+            <a:schemeClr val="accent1"/>
+          </a:lnRef>
+          <a:fillRef idx="3">
+            <a:schemeClr val="accent1"/>
+          </a:fillRef>
+          <a:effectRef idx="2">
+            <a:schemeClr val="accent1"/>
+          </a:effectRef>
+          <a:fontRef idx="minor">
+            <a:schemeClr val="lt1"/>
+          </a:fontRef>
+        </p:style>
+        <p:txBody>
+          <a:bodyPr rtlCol="0" anchor="ctr"/>
+          <a:lstStyle/>
+          <a:p>
+            <a:pPr algn="ctr"/>
+          </a:p>
+        </p:txBody>
+      </p:sp>
+      <p:sp>
+        <p:nvSpPr>
+          <p:cNvPr id="8" name="TextBox 7"/>
           <p:cNvSpPr txBox="1"/>
           <p:nvPr/>
         </p:nvSpPr>
         <p:spPr>
           <a:xfrm>
-            <a:off x="822960" y="1920240"/>
+            <a:off x="822960" y="1965960"/>
             <a:ext cx="4983480" cy="4206240"/>
           </a:xfrm>
           <a:prstGeom prst="rect">
@@ -5975,17 +6218,17 @@
           <a:p>
             <a:pPr>
               <a:spcAft>
-                <a:spcPts val="1000"/>
+                <a:spcPts val="1100"/>
               </a:spcAft>
             </a:pPr>
             <a:r>
               <a:rPr sz="1600" b="1" i="0">
                 <a:solidFill>
-                  <a:srgbClr val="2E3A80"/>
-                </a:solidFill>
-                <a:latin typeface="Montserrat"/>
-              </a:rPr>
-              <a:t>•  </a:t>
+                  <a:srgbClr val="E8801A"/>
+                </a:solidFill>
+                <a:latin typeface="Montserrat"/>
+              </a:rPr>
+              <a:t>▸  </a:t>
             </a:r>
             <a:r>
               <a:rPr sz="1600" b="0" i="0">
@@ -5994,23 +6237,23 @@
                 </a:solidFill>
                 <a:latin typeface="Montserrat"/>
               </a:rPr>
-              <a:t>Cocción de alimentos y bebidas</a:t>
+              <a:t>Suma de potencias &gt; 70 kW</a:t>
             </a:r>
           </a:p>
           <a:p>
             <a:pPr>
               <a:spcAft>
-                <a:spcPts val="1000"/>
+                <a:spcPts val="1100"/>
               </a:spcAft>
             </a:pPr>
             <a:r>
               <a:rPr sz="1600" b="1" i="0">
                 <a:solidFill>
-                  <a:srgbClr val="2E3A80"/>
-                </a:solidFill>
-                <a:latin typeface="Montserrat"/>
-              </a:rPr>
-              <a:t>•  </a:t>
+                  <a:srgbClr val="E8801A"/>
+                </a:solidFill>
+                <a:latin typeface="Montserrat"/>
+              </a:rPr>
+              <a:t>▸  </a:t>
             </a:r>
             <a:r>
               <a:rPr sz="1600" b="0" i="0">
@@ -6019,23 +6262,23 @@
                 </a:solidFill>
                 <a:latin typeface="Montserrat"/>
               </a:rPr>
-              <a:t>Calefacción directa en naves y talleres</a:t>
+              <a:t>Obliga a sala de máquinas</a:t>
             </a:r>
           </a:p>
           <a:p>
             <a:pPr>
               <a:spcAft>
-                <a:spcPts val="1000"/>
+                <a:spcPts val="1100"/>
               </a:spcAft>
             </a:pPr>
             <a:r>
               <a:rPr sz="1600" b="1" i="0">
                 <a:solidFill>
-                  <a:srgbClr val="2E3A80"/>
-                </a:solidFill>
-                <a:latin typeface="Montserrat"/>
-              </a:rPr>
-              <a:t>•  </a:t>
+                  <a:srgbClr val="E8801A"/>
+                </a:solidFill>
+                <a:latin typeface="Montserrat"/>
+              </a:rPr>
+              <a:t>▸  </a:t>
             </a:r>
             <a:r>
               <a:rPr sz="1600" b="0" i="0">
@@ -6044,14 +6287,14 @@
                 </a:solidFill>
                 <a:latin typeface="Montserrat"/>
               </a:rPr>
-              <a:t>Otros aparatos &lt; 4,65 kW</a:t>
-            </a:r>
-          </a:p>
-        </p:txBody>
-      </p:sp>
-      <p:sp>
-        <p:nvSpPr>
-          <p:cNvPr id="8" name="imgph" descr="IMGQ:gas stove kitchen blue flame"/>
+              <a:t>Mandan UNE 60601 y RITE</a:t>
+            </a:r>
+          </a:p>
+        </p:txBody>
+      </p:sp>
+      <p:sp>
+        <p:nvSpPr>
+          <p:cNvPr id="9" name="imgph" descr="IMGQ:large commercial boiler installation"/>
           <p:cNvSpPr/>
           <p:nvPr/>
         </p:nvSpPr>
@@ -6097,7 +6340,7 @@
       </p:sp>
       <p:sp>
         <p:nvSpPr>
-          <p:cNvPr id="9" name="TextBox 8"/>
+          <p:cNvPr id="10" name="TextBox 9"/>
           <p:cNvSpPr txBox="1"/>
           <p:nvPr/>
         </p:nvSpPr>
@@ -6137,7 +6380,7 @@
                 </a:solidFill>
                 <a:latin typeface="Montserrat"/>
               </a:rPr>
-              <a:t>gas stove kitchen blue flame</a:t>
+              <a:t>large commercial boiler installation</a:t>
             </a:r>
           </a:p>
         </p:txBody>
@@ -6234,7 +6477,7 @@
                 </a:solidFill>
                 <a:latin typeface="Montserrat"/>
               </a:rPr>
-              <a:t>013 / 018</a:t>
+              <a:t>013 / 019</a:t>
             </a:r>
           </a:p>
         </p:txBody>
@@ -6282,7 +6525,7 @@
         <p:spPr>
           <a:xfrm>
             <a:off x="822960" y="457200"/>
-            <a:ext cx="8229600" cy="365760"/>
+            <a:ext cx="10058400" cy="365760"/>
           </a:xfrm>
           <a:prstGeom prst="rect">
             <a:avLst/>
@@ -6296,13 +6539,13 @@
           <a:lstStyle/>
           <a:p>
             <a:r>
-              <a:rPr sz="1200" b="1" i="0">
-                <a:solidFill>
-                  <a:srgbClr val="64748B"/>
-                </a:solidFill>
-                <a:latin typeface="Montserrat"/>
-              </a:rPr>
-              <a:t>TIPO A · PROHIBICIONES</a:t>
+              <a:rPr sz="1300" b="1" i="0">
+                <a:solidFill>
+                  <a:srgbClr val="E8801A"/>
+                </a:solidFill>
+                <a:latin typeface="Montserrat"/>
+              </a:rPr>
+              <a:t>TIPO A · DÓNDE</a:t>
             </a:r>
           </a:p>
         </p:txBody>
@@ -6330,26 +6573,70 @@
           <a:lstStyle/>
           <a:p>
             <a:r>
-              <a:rPr sz="2700" b="1" i="0">
+              <a:rPr sz="2800" b="1" i="0">
                 <a:solidFill>
                   <a:srgbClr val="1E2761"/>
                 </a:solidFill>
                 <a:latin typeface="Montserrat"/>
               </a:rPr>
-              <a:t>Dónde nunca va un tipo A</a:t>
-            </a:r>
-          </a:p>
-        </p:txBody>
-      </p:sp>
-      <p:sp>
-        <p:nvSpPr>
-          <p:cNvPr id="7" name="TextBox 6"/>
+              <a:t>Qué tipo A se puede instalar</a:t>
+            </a:r>
+          </a:p>
+        </p:txBody>
+      </p:sp>
+      <p:sp>
+        <p:nvSpPr>
+          <p:cNvPr id="7" name="Rounded Rectangle 6"/>
+          <p:cNvSpPr/>
+          <p:nvPr/>
+        </p:nvSpPr>
+        <p:spPr>
+          <a:xfrm>
+            <a:off x="868680" y="1627632"/>
+            <a:ext cx="2011680" cy="73152"/>
+          </a:xfrm>
+          <a:prstGeom prst="roundRect">
+            <a:avLst/>
+          </a:prstGeom>
+          <a:solidFill>
+            <a:srgbClr val="E8801A"/>
+          </a:solidFill>
+          <a:ln>
+            <a:noFill/>
+          </a:ln>
+          <a:effectLst/>
+        </p:spPr>
+        <p:style>
+          <a:lnRef idx="1">
+            <a:schemeClr val="accent1"/>
+          </a:lnRef>
+          <a:fillRef idx="3">
+            <a:schemeClr val="accent1"/>
+          </a:fillRef>
+          <a:effectRef idx="2">
+            <a:schemeClr val="accent1"/>
+          </a:effectRef>
+          <a:fontRef idx="minor">
+            <a:schemeClr val="lt1"/>
+          </a:fontRef>
+        </p:style>
+        <p:txBody>
+          <a:bodyPr rtlCol="0" anchor="ctr"/>
+          <a:lstStyle/>
+          <a:p>
+            <a:pPr algn="ctr"/>
+          </a:p>
+        </p:txBody>
+      </p:sp>
+      <p:sp>
+        <p:nvSpPr>
+          <p:cNvPr id="8" name="TextBox 7"/>
           <p:cNvSpPr txBox="1"/>
           <p:nvPr/>
         </p:nvSpPr>
         <p:spPr>
           <a:xfrm>
-            <a:off x="822960" y="1920240"/>
+            <a:off x="822960" y="1965960"/>
             <a:ext cx="4983480" cy="4206240"/>
           </a:xfrm>
           <a:prstGeom prst="rect">
@@ -6365,17 +6652,17 @@
           <a:p>
             <a:pPr>
               <a:spcAft>
-                <a:spcPts val="1000"/>
+                <a:spcPts val="1100"/>
               </a:spcAft>
             </a:pPr>
             <a:r>
               <a:rPr sz="1600" b="1" i="0">
                 <a:solidFill>
-                  <a:srgbClr val="2E3A80"/>
-                </a:solidFill>
-                <a:latin typeface="Montserrat"/>
-              </a:rPr>
-              <a:t>•  </a:t>
+                  <a:srgbClr val="E8801A"/>
+                </a:solidFill>
+                <a:latin typeface="Montserrat"/>
+              </a:rPr>
+              <a:t>▸  </a:t>
             </a:r>
             <a:r>
               <a:rPr sz="1600" b="0" i="0">
@@ -6384,23 +6671,23 @@
                 </a:solidFill>
                 <a:latin typeface="Montserrat"/>
               </a:rPr>
-              <a:t>Nunca en dormitorio</a:t>
+              <a:t>Cocción de alimentos y bebidas</a:t>
             </a:r>
           </a:p>
           <a:p>
             <a:pPr>
               <a:spcAft>
-                <a:spcPts val="1000"/>
+                <a:spcPts val="1100"/>
               </a:spcAft>
             </a:pPr>
             <a:r>
               <a:rPr sz="1600" b="1" i="0">
                 <a:solidFill>
-                  <a:srgbClr val="2E3A80"/>
-                </a:solidFill>
-                <a:latin typeface="Montserrat"/>
-              </a:rPr>
-              <a:t>•  </a:t>
+                  <a:srgbClr val="E8801A"/>
+                </a:solidFill>
+                <a:latin typeface="Montserrat"/>
+              </a:rPr>
+              <a:t>▸  </a:t>
             </a:r>
             <a:r>
               <a:rPr sz="1600" b="0" i="0">
@@ -6409,23 +6696,23 @@
                 </a:solidFill>
                 <a:latin typeface="Montserrat"/>
               </a:rPr>
-              <a:t>Nunca en baño, ducha o aseo</a:t>
+              <a:t>Calefacción directa en naves y talleres</a:t>
             </a:r>
           </a:p>
           <a:p>
             <a:pPr>
               <a:spcAft>
-                <a:spcPts val="1000"/>
+                <a:spcPts val="1100"/>
               </a:spcAft>
             </a:pPr>
             <a:r>
               <a:rPr sz="1600" b="1" i="0">
                 <a:solidFill>
-                  <a:srgbClr val="2E3A80"/>
-                </a:solidFill>
-                <a:latin typeface="Montserrat"/>
-              </a:rPr>
-              <a:t>•  </a:t>
+                  <a:srgbClr val="E8801A"/>
+                </a:solidFill>
+                <a:latin typeface="Montserrat"/>
+              </a:rPr>
+              <a:t>▸  </a:t>
             </a:r>
             <a:r>
               <a:rPr sz="1600" b="0" i="0">
@@ -6434,14 +6721,14 @@
                 </a:solidFill>
                 <a:latin typeface="Montserrat"/>
               </a:rPr>
-              <a:t>ACS por acumulación: jamás</a:t>
-            </a:r>
-          </a:p>
-        </p:txBody>
-      </p:sp>
-      <p:sp>
-        <p:nvSpPr>
-          <p:cNvPr id="8" name="imgph" descr="IMGQ:empty bathroom interior"/>
+              <a:t>Otros aparatos &lt; 4,65 kW</a:t>
+            </a:r>
+          </a:p>
+        </p:txBody>
+      </p:sp>
+      <p:sp>
+        <p:nvSpPr>
+          <p:cNvPr id="9" name="imgph" descr="IMGQ:gas stove kitchen blue flame"/>
           <p:cNvSpPr/>
           <p:nvPr/>
         </p:nvSpPr>
@@ -6487,7 +6774,7 @@
       </p:sp>
       <p:sp>
         <p:nvSpPr>
-          <p:cNvPr id="9" name="TextBox 8"/>
+          <p:cNvPr id="10" name="TextBox 9"/>
           <p:cNvSpPr txBox="1"/>
           <p:nvPr/>
         </p:nvSpPr>
@@ -6527,7 +6814,7 @@
                 </a:solidFill>
                 <a:latin typeface="Montserrat"/>
               </a:rPr>
-              <a:t>empty bathroom interior</a:t>
+              <a:t>gas stove kitchen blue flame</a:t>
             </a:r>
           </a:p>
         </p:txBody>
@@ -6624,7 +6911,7 @@
                 </a:solidFill>
                 <a:latin typeface="Montserrat"/>
               </a:rPr>
-              <a:t>014 / 018</a:t>
+              <a:t>014 / 019</a:t>
             </a:r>
           </a:p>
         </p:txBody>
@@ -6672,7 +6959,7 @@
         <p:spPr>
           <a:xfrm>
             <a:off x="822960" y="457200"/>
-            <a:ext cx="8229600" cy="365760"/>
+            <a:ext cx="10058400" cy="365760"/>
           </a:xfrm>
           <a:prstGeom prst="rect">
             <a:avLst/>
@@ -6686,13 +6973,13 @@
           <a:lstStyle/>
           <a:p>
             <a:r>
-              <a:rPr sz="1200" b="1" i="0">
-                <a:solidFill>
-                  <a:srgbClr val="64748B"/>
-                </a:solidFill>
-                <a:latin typeface="Montserrat"/>
-              </a:rPr>
-              <a:t>TIPO A · FUEGOS Y LOFT</a:t>
+              <a:rPr sz="1300" b="1" i="0">
+                <a:solidFill>
+                  <a:srgbClr val="E8801A"/>
+                </a:solidFill>
+                <a:latin typeface="Montserrat"/>
+              </a:rPr>
+              <a:t>TIPO A · PROHIBICIONES</a:t>
             </a:r>
           </a:p>
         </p:txBody>
@@ -6720,26 +7007,70 @@
           <a:lstStyle/>
           <a:p>
             <a:r>
-              <a:rPr sz="2700" b="1" i="0">
+              <a:rPr sz="2800" b="1" i="0">
                 <a:solidFill>
                   <a:srgbClr val="1E2761"/>
                 </a:solidFill>
                 <a:latin typeface="Montserrat"/>
               </a:rPr>
-              <a:t>Seguridad de llama y el loft</a:t>
-            </a:r>
-          </a:p>
-        </p:txBody>
-      </p:sp>
-      <p:sp>
-        <p:nvSpPr>
-          <p:cNvPr id="7" name="TextBox 6"/>
+              <a:t>Dónde nunca va un tipo A</a:t>
+            </a:r>
+          </a:p>
+        </p:txBody>
+      </p:sp>
+      <p:sp>
+        <p:nvSpPr>
+          <p:cNvPr id="7" name="Rounded Rectangle 6"/>
+          <p:cNvSpPr/>
+          <p:nvPr/>
+        </p:nvSpPr>
+        <p:spPr>
+          <a:xfrm>
+            <a:off x="868680" y="1627632"/>
+            <a:ext cx="2011680" cy="73152"/>
+          </a:xfrm>
+          <a:prstGeom prst="roundRect">
+            <a:avLst/>
+          </a:prstGeom>
+          <a:solidFill>
+            <a:srgbClr val="E8801A"/>
+          </a:solidFill>
+          <a:ln>
+            <a:noFill/>
+          </a:ln>
+          <a:effectLst/>
+        </p:spPr>
+        <p:style>
+          <a:lnRef idx="1">
+            <a:schemeClr val="accent1"/>
+          </a:lnRef>
+          <a:fillRef idx="3">
+            <a:schemeClr val="accent1"/>
+          </a:fillRef>
+          <a:effectRef idx="2">
+            <a:schemeClr val="accent1"/>
+          </a:effectRef>
+          <a:fontRef idx="minor">
+            <a:schemeClr val="lt1"/>
+          </a:fontRef>
+        </p:style>
+        <p:txBody>
+          <a:bodyPr rtlCol="0" anchor="ctr"/>
+          <a:lstStyle/>
+          <a:p>
+            <a:pPr algn="ctr"/>
+          </a:p>
+        </p:txBody>
+      </p:sp>
+      <p:sp>
+        <p:nvSpPr>
+          <p:cNvPr id="8" name="TextBox 7"/>
           <p:cNvSpPr txBox="1"/>
           <p:nvPr/>
         </p:nvSpPr>
         <p:spPr>
           <a:xfrm>
-            <a:off x="822960" y="1920240"/>
+            <a:off x="822960" y="1965960"/>
             <a:ext cx="4983480" cy="4206240"/>
           </a:xfrm>
           <a:prstGeom prst="rect">
@@ -6755,17 +7086,17 @@
           <a:p>
             <a:pPr>
               <a:spcAft>
-                <a:spcPts val="1000"/>
+                <a:spcPts val="1100"/>
               </a:spcAft>
             </a:pPr>
             <a:r>
               <a:rPr sz="1600" b="1" i="0">
                 <a:solidFill>
-                  <a:srgbClr val="2E3A80"/>
-                </a:solidFill>
-                <a:latin typeface="Montserrat"/>
-              </a:rPr>
-              <a:t>•  </a:t>
+                  <a:srgbClr val="E8801A"/>
+                </a:solidFill>
+                <a:latin typeface="Montserrat"/>
+              </a:rPr>
+              <a:t>▸  </a:t>
             </a:r>
             <a:r>
               <a:rPr sz="1600" b="0" i="0">
@@ -6774,23 +7105,23 @@
                 </a:solidFill>
                 <a:latin typeface="Montserrat"/>
               </a:rPr>
-              <a:t>Sin seguridad de llama: ventilación rápida</a:t>
+              <a:t>Nunca en dormitorio</a:t>
             </a:r>
           </a:p>
           <a:p>
             <a:pPr>
               <a:spcAft>
-                <a:spcPts val="1000"/>
+                <a:spcPts val="1100"/>
               </a:spcAft>
             </a:pPr>
             <a:r>
               <a:rPr sz="1600" b="1" i="0">
                 <a:solidFill>
-                  <a:srgbClr val="2E3A80"/>
-                </a:solidFill>
-                <a:latin typeface="Montserrat"/>
-              </a:rPr>
-              <a:t>•  </a:t>
+                  <a:srgbClr val="E8801A"/>
+                </a:solidFill>
+                <a:latin typeface="Montserrat"/>
+              </a:rPr>
+              <a:t>▸  </a:t>
             </a:r>
             <a:r>
               <a:rPr sz="1600" b="0" i="0">
@@ -6799,23 +7130,23 @@
                 </a:solidFill>
                 <a:latin typeface="Montserrat"/>
               </a:rPr>
-              <a:t>Con seguridad de llama: no hace falta</a:t>
+              <a:t>Nunca en baño, ducha o aseo</a:t>
             </a:r>
           </a:p>
           <a:p>
             <a:pPr>
               <a:spcAft>
-                <a:spcPts val="1000"/>
+                <a:spcPts val="1100"/>
               </a:spcAft>
             </a:pPr>
             <a:r>
               <a:rPr sz="1600" b="1" i="0">
                 <a:solidFill>
-                  <a:srgbClr val="2E3A80"/>
-                </a:solidFill>
-                <a:latin typeface="Montserrat"/>
-              </a:rPr>
-              <a:t>•  </a:t>
+                  <a:srgbClr val="E8801A"/>
+                </a:solidFill>
+                <a:latin typeface="Montserrat"/>
+              </a:rPr>
+              <a:t>▸  </a:t>
             </a:r>
             <a:r>
               <a:rPr sz="1600" b="0" i="0">
@@ -6824,14 +7155,14 @@
                 </a:solidFill>
                 <a:latin typeface="Montserrat"/>
               </a:rPr>
-              <a:t>Loft: cocción ≤ 12 kW y ≥ 80 m³</a:t>
-            </a:r>
-          </a:p>
-        </p:txBody>
-      </p:sp>
-      <p:sp>
-        <p:nvSpPr>
-          <p:cNvPr id="8" name="imgph" descr="IMGQ:loft apartment open kitchen"/>
+              <a:t>ACS por acumulación: jamás</a:t>
+            </a:r>
+          </a:p>
+        </p:txBody>
+      </p:sp>
+      <p:sp>
+        <p:nvSpPr>
+          <p:cNvPr id="9" name="imgph" descr="IMGQ:empty bathroom interior"/>
           <p:cNvSpPr/>
           <p:nvPr/>
         </p:nvSpPr>
@@ -6877,7 +7208,7 @@
       </p:sp>
       <p:sp>
         <p:nvSpPr>
-          <p:cNvPr id="9" name="TextBox 8"/>
+          <p:cNvPr id="10" name="TextBox 9"/>
           <p:cNvSpPr txBox="1"/>
           <p:nvPr/>
         </p:nvSpPr>
@@ -6917,7 +7248,7 @@
                 </a:solidFill>
                 <a:latin typeface="Montserrat"/>
               </a:rPr>
-              <a:t>loft apartment open kitchen</a:t>
+              <a:t>empty bathroom interior</a:t>
             </a:r>
           </a:p>
         </p:txBody>
@@ -7014,7 +7345,7 @@
                 </a:solidFill>
                 <a:latin typeface="Montserrat"/>
               </a:rPr>
-              <a:t>015 / 018</a:t>
+              <a:t>015 / 019</a:t>
             </a:r>
           </a:p>
         </p:txBody>
@@ -7062,7 +7393,7 @@
         <p:spPr>
           <a:xfrm>
             <a:off x="822960" y="457200"/>
-            <a:ext cx="8229600" cy="365760"/>
+            <a:ext cx="10058400" cy="365760"/>
           </a:xfrm>
           <a:prstGeom prst="rect">
             <a:avLst/>
@@ -7076,13 +7407,13 @@
           <a:lstStyle/>
           <a:p>
             <a:r>
-              <a:rPr sz="1200" b="1" i="0">
-                <a:solidFill>
-                  <a:srgbClr val="64748B"/>
-                </a:solidFill>
-                <a:latin typeface="Montserrat"/>
-              </a:rPr>
-              <a:t>TIPO B · DÓNDE</a:t>
+              <a:rPr sz="1300" b="1" i="0">
+                <a:solidFill>
+                  <a:srgbClr val="E8801A"/>
+                </a:solidFill>
+                <a:latin typeface="Montserrat"/>
+              </a:rPr>
+              <a:t>TIPO A · FUEGOS Y LOFT</a:t>
             </a:r>
           </a:p>
         </p:txBody>
@@ -7110,26 +7441,70 @@
           <a:lstStyle/>
           <a:p>
             <a:r>
-              <a:rPr sz="2700" b="1" i="0">
+              <a:rPr sz="2800" b="1" i="0">
                 <a:solidFill>
                   <a:srgbClr val="1E2761"/>
                 </a:solidFill>
                 <a:latin typeface="Montserrat"/>
               </a:rPr>
-              <a:t>Tipo B y su comodín, el B3x</a:t>
-            </a:r>
-          </a:p>
-        </p:txBody>
-      </p:sp>
-      <p:sp>
-        <p:nvSpPr>
-          <p:cNvPr id="7" name="TextBox 6"/>
+              <a:t>Seguridad de llama y el loft</a:t>
+            </a:r>
+          </a:p>
+        </p:txBody>
+      </p:sp>
+      <p:sp>
+        <p:nvSpPr>
+          <p:cNvPr id="7" name="Rounded Rectangle 6"/>
+          <p:cNvSpPr/>
+          <p:nvPr/>
+        </p:nvSpPr>
+        <p:spPr>
+          <a:xfrm>
+            <a:off x="868680" y="1627632"/>
+            <a:ext cx="2011680" cy="73152"/>
+          </a:xfrm>
+          <a:prstGeom prst="roundRect">
+            <a:avLst/>
+          </a:prstGeom>
+          <a:solidFill>
+            <a:srgbClr val="E8801A"/>
+          </a:solidFill>
+          <a:ln>
+            <a:noFill/>
+          </a:ln>
+          <a:effectLst/>
+        </p:spPr>
+        <p:style>
+          <a:lnRef idx="1">
+            <a:schemeClr val="accent1"/>
+          </a:lnRef>
+          <a:fillRef idx="3">
+            <a:schemeClr val="accent1"/>
+          </a:fillRef>
+          <a:effectRef idx="2">
+            <a:schemeClr val="accent1"/>
+          </a:effectRef>
+          <a:fontRef idx="minor">
+            <a:schemeClr val="lt1"/>
+          </a:fontRef>
+        </p:style>
+        <p:txBody>
+          <a:bodyPr rtlCol="0" anchor="ctr"/>
+          <a:lstStyle/>
+          <a:p>
+            <a:pPr algn="ctr"/>
+          </a:p>
+        </p:txBody>
+      </p:sp>
+      <p:sp>
+        <p:nvSpPr>
+          <p:cNvPr id="8" name="TextBox 7"/>
           <p:cNvSpPr txBox="1"/>
           <p:nvPr/>
         </p:nvSpPr>
         <p:spPr>
           <a:xfrm>
-            <a:off x="822960" y="1920240"/>
+            <a:off x="822960" y="1965960"/>
             <a:ext cx="4983480" cy="4206240"/>
           </a:xfrm>
           <a:prstGeom prst="rect">
@@ -7145,17 +7520,17 @@
           <a:p>
             <a:pPr>
               <a:spcAft>
-                <a:spcPts val="1000"/>
+                <a:spcPts val="1100"/>
               </a:spcAft>
             </a:pPr>
             <a:r>
               <a:rPr sz="1600" b="1" i="0">
                 <a:solidFill>
-                  <a:srgbClr val="2E3A80"/>
-                </a:solidFill>
-                <a:latin typeface="Montserrat"/>
-              </a:rPr>
-              <a:t>•  </a:t>
+                  <a:srgbClr val="E8801A"/>
+                </a:solidFill>
+                <a:latin typeface="Montserrat"/>
+              </a:rPr>
+              <a:t>▸  </a:t>
             </a:r>
             <a:r>
               <a:rPr sz="1600" b="0" i="0">
@@ -7164,23 +7539,23 @@
                 </a:solidFill>
                 <a:latin typeface="Montserrat"/>
               </a:rPr>
-              <a:t>Nunca en dormitorio ni baño</a:t>
+              <a:t>Sin seguridad de llama: ventilación rápida</a:t>
             </a:r>
           </a:p>
           <a:p>
             <a:pPr>
               <a:spcAft>
-                <a:spcPts val="1000"/>
+                <a:spcPts val="1100"/>
               </a:spcAft>
             </a:pPr>
             <a:r>
               <a:rPr sz="1600" b="1" i="0">
                 <a:solidFill>
-                  <a:srgbClr val="2E3A80"/>
-                </a:solidFill>
-                <a:latin typeface="Montserrat"/>
-              </a:rPr>
-              <a:t>•  </a:t>
+                  <a:srgbClr val="E8801A"/>
+                </a:solidFill>
+                <a:latin typeface="Montserrat"/>
+              </a:rPr>
+              <a:t>▸  </a:t>
             </a:r>
             <a:r>
               <a:rPr sz="1600" b="0" i="0">
@@ -7189,23 +7564,23 @@
                 </a:solidFill>
                 <a:latin typeface="Montserrat"/>
               </a:rPr>
-              <a:t>B3x: cocinas, lavaderos, garajes</a:t>
+              <a:t>Con seguridad de llama: no hace falta</a:t>
             </a:r>
           </a:p>
           <a:p>
             <a:pPr>
               <a:spcAft>
-                <a:spcPts val="1000"/>
+                <a:spcPts val="1100"/>
               </a:spcAft>
             </a:pPr>
             <a:r>
               <a:rPr sz="1600" b="1" i="0">
                 <a:solidFill>
-                  <a:srgbClr val="2E3A80"/>
-                </a:solidFill>
-                <a:latin typeface="Montserrat"/>
-              </a:rPr>
-              <a:t>•  </a:t>
+                  <a:srgbClr val="E8801A"/>
+                </a:solidFill>
+                <a:latin typeface="Montserrat"/>
+              </a:rPr>
+              <a:t>▸  </a:t>
             </a:r>
             <a:r>
               <a:rPr sz="1600" b="0" i="0">
@@ -7214,14 +7589,14 @@
                 </a:solidFill>
                 <a:latin typeface="Montserrat"/>
               </a:rPr>
-              <a:t>Única excepción a la prohibición</a:t>
-            </a:r>
-          </a:p>
-        </p:txBody>
-      </p:sp>
-      <p:sp>
-        <p:nvSpPr>
-          <p:cNvPr id="8" name="imgph" descr="IMGQ:utility room gas water heater"/>
+              <a:t>Loft: cocción ≤ 12 kW y ≥ 80 m³</a:t>
+            </a:r>
+          </a:p>
+        </p:txBody>
+      </p:sp>
+      <p:sp>
+        <p:nvSpPr>
+          <p:cNvPr id="9" name="imgph" descr="IMGQ:loft apartment open kitchen"/>
           <p:cNvSpPr/>
           <p:nvPr/>
         </p:nvSpPr>
@@ -7267,7 +7642,7 @@
       </p:sp>
       <p:sp>
         <p:nvSpPr>
-          <p:cNvPr id="9" name="TextBox 8"/>
+          <p:cNvPr id="10" name="TextBox 9"/>
           <p:cNvSpPr txBox="1"/>
           <p:nvPr/>
         </p:nvSpPr>
@@ -7307,7 +7682,7 @@
                 </a:solidFill>
                 <a:latin typeface="Montserrat"/>
               </a:rPr>
-              <a:t>utility room gas water heater</a:t>
+              <a:t>loft apartment open kitchen</a:t>
             </a:r>
           </a:p>
         </p:txBody>
@@ -7404,7 +7779,7 @@
                 </a:solidFill>
                 <a:latin typeface="Montserrat"/>
               </a:rPr>
-              <a:t>016 / 018</a:t>
+              <a:t>016 / 019</a:t>
             </a:r>
           </a:p>
         </p:txBody>
@@ -7452,7 +7827,7 @@
         <p:spPr>
           <a:xfrm>
             <a:off x="822960" y="457200"/>
-            <a:ext cx="8229600" cy="365760"/>
+            <a:ext cx="10058400" cy="365760"/>
           </a:xfrm>
           <a:prstGeom prst="rect">
             <a:avLst/>
@@ -7466,13 +7841,13 @@
           <a:lstStyle/>
           <a:p>
             <a:r>
-              <a:rPr sz="1200" b="1" i="0">
-                <a:solidFill>
-                  <a:srgbClr val="64748B"/>
-                </a:solidFill>
-                <a:latin typeface="Montserrat"/>
-              </a:rPr>
-              <a:t>TIPO B · SEGURIDAD</a:t>
+              <a:rPr sz="1300" b="1" i="0">
+                <a:solidFill>
+                  <a:srgbClr val="E8801A"/>
+                </a:solidFill>
+                <a:latin typeface="Montserrat"/>
+              </a:rPr>
+              <a:t>TIPO B · DÓNDE</a:t>
             </a:r>
           </a:p>
         </p:txBody>
@@ -7500,26 +7875,70 @@
           <a:lstStyle/>
           <a:p>
             <a:r>
-              <a:rPr sz="2700" b="1" i="0">
+              <a:rPr sz="2800" b="1" i="0">
                 <a:solidFill>
                   <a:srgbClr val="1E2761"/>
                 </a:solidFill>
                 <a:latin typeface="Montserrat"/>
               </a:rPr>
-              <a:t>Campana y calentador: el revoco</a:t>
-            </a:r>
-          </a:p>
-        </p:txBody>
-      </p:sp>
-      <p:sp>
-        <p:nvSpPr>
-          <p:cNvPr id="7" name="TextBox 6"/>
+              <a:t>Tipo B y su comodín, el B3x</a:t>
+            </a:r>
+          </a:p>
+        </p:txBody>
+      </p:sp>
+      <p:sp>
+        <p:nvSpPr>
+          <p:cNvPr id="7" name="Rounded Rectangle 6"/>
+          <p:cNvSpPr/>
+          <p:nvPr/>
+        </p:nvSpPr>
+        <p:spPr>
+          <a:xfrm>
+            <a:off x="868680" y="1627632"/>
+            <a:ext cx="2011680" cy="73152"/>
+          </a:xfrm>
+          <a:prstGeom prst="roundRect">
+            <a:avLst/>
+          </a:prstGeom>
+          <a:solidFill>
+            <a:srgbClr val="E8801A"/>
+          </a:solidFill>
+          <a:ln>
+            <a:noFill/>
+          </a:ln>
+          <a:effectLst/>
+        </p:spPr>
+        <p:style>
+          <a:lnRef idx="1">
+            <a:schemeClr val="accent1"/>
+          </a:lnRef>
+          <a:fillRef idx="3">
+            <a:schemeClr val="accent1"/>
+          </a:fillRef>
+          <a:effectRef idx="2">
+            <a:schemeClr val="accent1"/>
+          </a:effectRef>
+          <a:fontRef idx="minor">
+            <a:schemeClr val="lt1"/>
+          </a:fontRef>
+        </p:style>
+        <p:txBody>
+          <a:bodyPr rtlCol="0" anchor="ctr"/>
+          <a:lstStyle/>
+          <a:p>
+            <a:pPr algn="ctr"/>
+          </a:p>
+        </p:txBody>
+      </p:sp>
+      <p:sp>
+        <p:nvSpPr>
+          <p:cNvPr id="8" name="TextBox 7"/>
           <p:cNvSpPr txBox="1"/>
           <p:nvPr/>
         </p:nvSpPr>
         <p:spPr>
           <a:xfrm>
-            <a:off x="822960" y="1920240"/>
+            <a:off x="822960" y="1965960"/>
             <a:ext cx="4983480" cy="4206240"/>
           </a:xfrm>
           <a:prstGeom prst="rect">
@@ -7535,17 +7954,17 @@
           <a:p>
             <a:pPr>
               <a:spcAft>
-                <a:spcPts val="1000"/>
+                <a:spcPts val="1100"/>
               </a:spcAft>
             </a:pPr>
             <a:r>
               <a:rPr sz="1600" b="1" i="0">
                 <a:solidFill>
-                  <a:srgbClr val="2E3A80"/>
-                </a:solidFill>
-                <a:latin typeface="Montserrat"/>
-              </a:rPr>
-              <a:t>•  </a:t>
+                  <a:srgbClr val="E8801A"/>
+                </a:solidFill>
+                <a:latin typeface="Montserrat"/>
+              </a:rPr>
+              <a:t>▸  </a:t>
             </a:r>
             <a:r>
               <a:rPr sz="1600" b="0" i="0">
@@ -7554,23 +7973,23 @@
                 </a:solidFill>
                 <a:latin typeface="Montserrat"/>
               </a:rPr>
-              <a:t>La campana chupa los humos</a:t>
+              <a:t>Nunca en dormitorio ni baño</a:t>
             </a:r>
           </a:p>
           <a:p>
             <a:pPr>
               <a:spcAft>
-                <a:spcPts val="1000"/>
+                <a:spcPts val="1100"/>
               </a:spcAft>
             </a:pPr>
             <a:r>
               <a:rPr sz="1600" b="1" i="0">
                 <a:solidFill>
-                  <a:srgbClr val="2E3A80"/>
-                </a:solidFill>
-                <a:latin typeface="Montserrat"/>
-              </a:rPr>
-              <a:t>•  </a:t>
+                  <a:srgbClr val="E8801A"/>
+                </a:solidFill>
+                <a:latin typeface="Montserrat"/>
+              </a:rPr>
+              <a:t>▸  </a:t>
             </a:r>
             <a:r>
               <a:rPr sz="1600" b="0" i="0">
@@ -7579,23 +7998,23 @@
                 </a:solidFill>
                 <a:latin typeface="Montserrat"/>
               </a:rPr>
-              <a:t>Peligro de CO en casa</a:t>
+              <a:t>B3x: cocinas, lavaderos, garajes</a:t>
             </a:r>
           </a:p>
           <a:p>
             <a:pPr>
               <a:spcAft>
-                <a:spcPts val="1000"/>
+                <a:spcPts val="1100"/>
               </a:spcAft>
             </a:pPr>
             <a:r>
               <a:rPr sz="1600" b="1" i="0">
                 <a:solidFill>
-                  <a:srgbClr val="2E3A80"/>
-                </a:solidFill>
-                <a:latin typeface="Montserrat"/>
-              </a:rPr>
-              <a:t>•  </a:t>
+                  <a:srgbClr val="E8801A"/>
+                </a:solidFill>
+                <a:latin typeface="Montserrat"/>
+              </a:rPr>
+              <a:t>▸  </a:t>
             </a:r>
             <a:r>
               <a:rPr sz="1600" b="0" i="0">
@@ -7604,14 +8023,14 @@
                 </a:solidFill>
                 <a:latin typeface="Montserrat"/>
               </a:rPr>
-              <a:t>Corte automático en ≤ 2 min</a:t>
-            </a:r>
-          </a:p>
-        </p:txBody>
-      </p:sp>
-      <p:sp>
-        <p:nvSpPr>
-          <p:cNvPr id="8" name="imgph" descr="IMGQ:kitchen extractor hood"/>
+              <a:t>Única excepción a la prohibición</a:t>
+            </a:r>
+          </a:p>
+        </p:txBody>
+      </p:sp>
+      <p:sp>
+        <p:nvSpPr>
+          <p:cNvPr id="9" name="imgph" descr="IMGQ:utility room gas water heater"/>
           <p:cNvSpPr/>
           <p:nvPr/>
         </p:nvSpPr>
@@ -7657,7 +8076,7 @@
       </p:sp>
       <p:sp>
         <p:nvSpPr>
-          <p:cNvPr id="9" name="TextBox 8"/>
+          <p:cNvPr id="10" name="TextBox 9"/>
           <p:cNvSpPr txBox="1"/>
           <p:nvPr/>
         </p:nvSpPr>
@@ -7697,7 +8116,7 @@
                 </a:solidFill>
                 <a:latin typeface="Montserrat"/>
               </a:rPr>
-              <a:t>kitchen extractor hood</a:t>
+              <a:t>utility room gas water heater</a:t>
             </a:r>
           </a:p>
         </p:txBody>
@@ -7794,7 +8213,7 @@
                 </a:solidFill>
                 <a:latin typeface="Montserrat"/>
               </a:rPr>
-              <a:t>017 / 018</a:t>
+              <a:t>017 / 019</a:t>
             </a:r>
           </a:p>
         </p:txBody>
@@ -7842,7 +8261,7 @@
         <p:spPr>
           <a:xfrm>
             <a:off x="822960" y="457200"/>
-            <a:ext cx="8229600" cy="365760"/>
+            <a:ext cx="10058400" cy="365760"/>
           </a:xfrm>
           <a:prstGeom prst="rect">
             <a:avLst/>
@@ -7856,13 +8275,13 @@
           <a:lstStyle/>
           <a:p>
             <a:r>
-              <a:rPr sz="1200" b="1" i="0">
-                <a:solidFill>
-                  <a:srgbClr val="64748B"/>
-                </a:solidFill>
-                <a:latin typeface="Montserrat"/>
-              </a:rPr>
-              <a:t>TIPO C · DÓNDE</a:t>
+              <a:rPr sz="1300" b="1" i="0">
+                <a:solidFill>
+                  <a:srgbClr val="E8801A"/>
+                </a:solidFill>
+                <a:latin typeface="Montserrat"/>
+              </a:rPr>
+              <a:t>TIPO B · SEGURIDAD</a:t>
             </a:r>
           </a:p>
         </p:txBody>
@@ -7890,26 +8309,70 @@
           <a:lstStyle/>
           <a:p>
             <a:r>
-              <a:rPr sz="2700" b="1" i="0">
+              <a:rPr sz="2800" b="1" i="0">
                 <a:solidFill>
                   <a:srgbClr val="1E2761"/>
                 </a:solidFill>
                 <a:latin typeface="Montserrat"/>
               </a:rPr>
-              <a:t>Tipo C: el todoterreno</a:t>
-            </a:r>
-          </a:p>
-        </p:txBody>
-      </p:sp>
-      <p:sp>
-        <p:nvSpPr>
-          <p:cNvPr id="7" name="TextBox 6"/>
+              <a:t>Campana y calentador: el revoco</a:t>
+            </a:r>
+          </a:p>
+        </p:txBody>
+      </p:sp>
+      <p:sp>
+        <p:nvSpPr>
+          <p:cNvPr id="7" name="Rounded Rectangle 6"/>
+          <p:cNvSpPr/>
+          <p:nvPr/>
+        </p:nvSpPr>
+        <p:spPr>
+          <a:xfrm>
+            <a:off x="868680" y="1627632"/>
+            <a:ext cx="2011680" cy="73152"/>
+          </a:xfrm>
+          <a:prstGeom prst="roundRect">
+            <a:avLst/>
+          </a:prstGeom>
+          <a:solidFill>
+            <a:srgbClr val="E8801A"/>
+          </a:solidFill>
+          <a:ln>
+            <a:noFill/>
+          </a:ln>
+          <a:effectLst/>
+        </p:spPr>
+        <p:style>
+          <a:lnRef idx="1">
+            <a:schemeClr val="accent1"/>
+          </a:lnRef>
+          <a:fillRef idx="3">
+            <a:schemeClr val="accent1"/>
+          </a:fillRef>
+          <a:effectRef idx="2">
+            <a:schemeClr val="accent1"/>
+          </a:effectRef>
+          <a:fontRef idx="minor">
+            <a:schemeClr val="lt1"/>
+          </a:fontRef>
+        </p:style>
+        <p:txBody>
+          <a:bodyPr rtlCol="0" anchor="ctr"/>
+          <a:lstStyle/>
+          <a:p>
+            <a:pPr algn="ctr"/>
+          </a:p>
+        </p:txBody>
+      </p:sp>
+      <p:sp>
+        <p:nvSpPr>
+          <p:cNvPr id="8" name="TextBox 7"/>
           <p:cNvSpPr txBox="1"/>
           <p:nvPr/>
         </p:nvSpPr>
         <p:spPr>
           <a:xfrm>
-            <a:off x="822960" y="1920240"/>
+            <a:off x="822960" y="1965960"/>
             <a:ext cx="4983480" cy="4206240"/>
           </a:xfrm>
           <a:prstGeom prst="rect">
@@ -7925,17 +8388,17 @@
           <a:p>
             <a:pPr>
               <a:spcAft>
-                <a:spcPts val="1000"/>
+                <a:spcPts val="1100"/>
               </a:spcAft>
             </a:pPr>
             <a:r>
               <a:rPr sz="1600" b="1" i="0">
                 <a:solidFill>
-                  <a:srgbClr val="2E3A80"/>
-                </a:solidFill>
-                <a:latin typeface="Montserrat"/>
-              </a:rPr>
-              <a:t>•  </a:t>
+                  <a:srgbClr val="E8801A"/>
+                </a:solidFill>
+                <a:latin typeface="Montserrat"/>
+              </a:rPr>
+              <a:t>▸  </a:t>
             </a:r>
             <a:r>
               <a:rPr sz="1600" b="0" i="0">
@@ -7944,23 +8407,23 @@
                 </a:solidFill>
                 <a:latin typeface="Montserrat"/>
               </a:rPr>
-              <a:t>Vale en cualquier local</a:t>
+              <a:t>La campana chupa los humos</a:t>
             </a:r>
           </a:p>
           <a:p>
             <a:pPr>
               <a:spcAft>
-                <a:spcPts val="1000"/>
+                <a:spcPts val="1100"/>
               </a:spcAft>
             </a:pPr>
             <a:r>
               <a:rPr sz="1600" b="1" i="0">
                 <a:solidFill>
-                  <a:srgbClr val="2E3A80"/>
-                </a:solidFill>
-                <a:latin typeface="Montserrat"/>
-              </a:rPr>
-              <a:t>•  </a:t>
+                  <a:srgbClr val="E8801A"/>
+                </a:solidFill>
+                <a:latin typeface="Montserrat"/>
+              </a:rPr>
+              <a:t>▸  </a:t>
             </a:r>
             <a:r>
               <a:rPr sz="1600" b="0" i="0">
@@ -7969,23 +8432,23 @@
                 </a:solidFill>
                 <a:latin typeface="Montserrat"/>
               </a:rPr>
-              <a:t>Incluso dormitorio y baño</a:t>
+              <a:t>Peligro de CO en casa</a:t>
             </a:r>
           </a:p>
           <a:p>
             <a:pPr>
               <a:spcAft>
-                <a:spcPts val="1000"/>
+                <a:spcPts val="1100"/>
               </a:spcAft>
             </a:pPr>
             <a:r>
               <a:rPr sz="1600" b="1" i="0">
                 <a:solidFill>
-                  <a:srgbClr val="2E3A80"/>
-                </a:solidFill>
-                <a:latin typeface="Montserrat"/>
-              </a:rPr>
-              <a:t>•  </a:t>
+                  <a:srgbClr val="E8801A"/>
+                </a:solidFill>
+                <a:latin typeface="Montserrat"/>
+              </a:rPr>
+              <a:t>▸  </a:t>
             </a:r>
             <a:r>
               <a:rPr sz="1600" b="0" i="0">
@@ -7994,14 +8457,14 @@
                 </a:solidFill>
                 <a:latin typeface="Montserrat"/>
               </a:rPr>
-              <a:t>En húmedos: cumplir el REBT</a:t>
-            </a:r>
-          </a:p>
-        </p:txBody>
-      </p:sp>
-      <p:sp>
-        <p:nvSpPr>
-          <p:cNvPr id="8" name="imgph" descr="IMGQ:modern boiler in cupboard"/>
+              <a:t>Corte automático en ≤ 2 min</a:t>
+            </a:r>
+          </a:p>
+        </p:txBody>
+      </p:sp>
+      <p:sp>
+        <p:nvSpPr>
+          <p:cNvPr id="9" name="imgph" descr="IMGQ:kitchen extractor hood"/>
           <p:cNvSpPr/>
           <p:nvPr/>
         </p:nvSpPr>
@@ -8047,7 +8510,7 @@
       </p:sp>
       <p:sp>
         <p:nvSpPr>
-          <p:cNvPr id="9" name="TextBox 8"/>
+          <p:cNvPr id="10" name="TextBox 9"/>
           <p:cNvSpPr txBox="1"/>
           <p:nvPr/>
         </p:nvSpPr>
@@ -8087,7 +8550,7 @@
                 </a:solidFill>
                 <a:latin typeface="Montserrat"/>
               </a:rPr>
-              <a:t>modern boiler in cupboard</a:t>
+              <a:t>kitchen extractor hood</a:t>
             </a:r>
           </a:p>
         </p:txBody>
@@ -8125,6 +8588,440 @@
             <a:avLst/>
           </a:prstGeom>
           <a:solidFill>
+            <a:srgbClr val="FFFFFF"/>
+          </a:solidFill>
+          <a:ln>
+            <a:noFill/>
+          </a:ln>
+          <a:effectLst/>
+        </p:spPr>
+        <p:style>
+          <a:lnRef idx="1">
+            <a:schemeClr val="accent1"/>
+          </a:lnRef>
+          <a:fillRef idx="3">
+            <a:schemeClr val="accent1"/>
+          </a:fillRef>
+          <a:effectRef idx="2">
+            <a:schemeClr val="accent1"/>
+          </a:effectRef>
+          <a:fontRef idx="minor">
+            <a:schemeClr val="lt1"/>
+          </a:fontRef>
+        </p:style>
+        <p:txBody>
+          <a:bodyPr rtlCol="0" anchor="ctr"/>
+          <a:lstStyle/>
+          <a:p>
+            <a:pPr algn="ctr"/>
+          </a:p>
+        </p:txBody>
+      </p:sp>
+      <p:sp>
+        <p:nvSpPr>
+          <p:cNvPr id="3" name="TextBox 2"/>
+          <p:cNvSpPr txBox="1"/>
+          <p:nvPr/>
+        </p:nvSpPr>
+        <p:spPr>
+          <a:xfrm>
+            <a:off x="10607040" y="320040"/>
+            <a:ext cx="1371600" cy="365760"/>
+          </a:xfrm>
+          <a:prstGeom prst="rect">
+            <a:avLst/>
+          </a:prstGeom>
+          <a:noFill/>
+        </p:spPr>
+        <p:txBody>
+          <a:bodyPr wrap="square">
+            <a:spAutoFit/>
+          </a:bodyPr>
+          <a:lstStyle/>
+          <a:p>
+            <a:pPr algn="r"/>
+            <a:r>
+              <a:rPr sz="1000" b="1" i="0">
+                <a:solidFill>
+                  <a:srgbClr val="64748B"/>
+                </a:solidFill>
+                <a:latin typeface="Montserrat"/>
+              </a:rPr>
+              <a:t>018 / 019</a:t>
+            </a:r>
+          </a:p>
+        </p:txBody>
+      </p:sp>
+      <p:sp>
+        <p:nvSpPr>
+          <p:cNvPr id="4" name="TextBox 3"/>
+          <p:cNvSpPr txBox="1"/>
+          <p:nvPr/>
+        </p:nvSpPr>
+        <p:spPr>
+          <a:xfrm>
+            <a:off x="457200" y="6419088"/>
+            <a:ext cx="8229600" cy="365760"/>
+          </a:xfrm>
+          <a:prstGeom prst="rect">
+            <a:avLst/>
+          </a:prstGeom>
+          <a:noFill/>
+        </p:spPr>
+        <p:txBody>
+          <a:bodyPr wrap="square">
+            <a:spAutoFit/>
+          </a:bodyPr>
+          <a:lstStyle/>
+          <a:p>
+            <a:r>
+              <a:rPr sz="900" b="0" i="0">
+                <a:solidFill>
+                  <a:srgbClr val="64748B"/>
+                </a:solidFill>
+                <a:latin typeface="Montserrat"/>
+              </a:rPr>
+              <a:t>Curso Gas B · Tema 13 · UNE 60670-6</a:t>
+            </a:r>
+          </a:p>
+        </p:txBody>
+      </p:sp>
+      <p:sp>
+        <p:nvSpPr>
+          <p:cNvPr id="5" name="TextBox 4"/>
+          <p:cNvSpPr txBox="1"/>
+          <p:nvPr/>
+        </p:nvSpPr>
+        <p:spPr>
+          <a:xfrm>
+            <a:off x="822960" y="457200"/>
+            <a:ext cx="10058400" cy="365760"/>
+          </a:xfrm>
+          <a:prstGeom prst="rect">
+            <a:avLst/>
+          </a:prstGeom>
+          <a:noFill/>
+        </p:spPr>
+        <p:txBody>
+          <a:bodyPr wrap="square">
+            <a:spAutoFit/>
+          </a:bodyPr>
+          <a:lstStyle/>
+          <a:p>
+            <a:r>
+              <a:rPr sz="1300" b="1" i="0">
+                <a:solidFill>
+                  <a:srgbClr val="E8801A"/>
+                </a:solidFill>
+                <a:latin typeface="Montserrat"/>
+              </a:rPr>
+              <a:t>TIPO C · DÓNDE</a:t>
+            </a:r>
+          </a:p>
+        </p:txBody>
+      </p:sp>
+      <p:sp>
+        <p:nvSpPr>
+          <p:cNvPr id="6" name="TextBox 5"/>
+          <p:cNvSpPr txBox="1"/>
+          <p:nvPr/>
+        </p:nvSpPr>
+        <p:spPr>
+          <a:xfrm>
+            <a:off x="822960" y="868680"/>
+            <a:ext cx="10515600" cy="914400"/>
+          </a:xfrm>
+          <a:prstGeom prst="rect">
+            <a:avLst/>
+          </a:prstGeom>
+          <a:noFill/>
+        </p:spPr>
+        <p:txBody>
+          <a:bodyPr wrap="square">
+            <a:spAutoFit/>
+          </a:bodyPr>
+          <a:lstStyle/>
+          <a:p>
+            <a:r>
+              <a:rPr sz="2800" b="1" i="0">
+                <a:solidFill>
+                  <a:srgbClr val="1E2761"/>
+                </a:solidFill>
+                <a:latin typeface="Montserrat"/>
+              </a:rPr>
+              <a:t>Tipo C: el todoterreno</a:t>
+            </a:r>
+          </a:p>
+        </p:txBody>
+      </p:sp>
+      <p:sp>
+        <p:nvSpPr>
+          <p:cNvPr id="7" name="Rounded Rectangle 6"/>
+          <p:cNvSpPr/>
+          <p:nvPr/>
+        </p:nvSpPr>
+        <p:spPr>
+          <a:xfrm>
+            <a:off x="868680" y="1627632"/>
+            <a:ext cx="2011680" cy="73152"/>
+          </a:xfrm>
+          <a:prstGeom prst="roundRect">
+            <a:avLst/>
+          </a:prstGeom>
+          <a:solidFill>
+            <a:srgbClr val="E8801A"/>
+          </a:solidFill>
+          <a:ln>
+            <a:noFill/>
+          </a:ln>
+          <a:effectLst/>
+        </p:spPr>
+        <p:style>
+          <a:lnRef idx="1">
+            <a:schemeClr val="accent1"/>
+          </a:lnRef>
+          <a:fillRef idx="3">
+            <a:schemeClr val="accent1"/>
+          </a:fillRef>
+          <a:effectRef idx="2">
+            <a:schemeClr val="accent1"/>
+          </a:effectRef>
+          <a:fontRef idx="minor">
+            <a:schemeClr val="lt1"/>
+          </a:fontRef>
+        </p:style>
+        <p:txBody>
+          <a:bodyPr rtlCol="0" anchor="ctr"/>
+          <a:lstStyle/>
+          <a:p>
+            <a:pPr algn="ctr"/>
+          </a:p>
+        </p:txBody>
+      </p:sp>
+      <p:sp>
+        <p:nvSpPr>
+          <p:cNvPr id="8" name="TextBox 7"/>
+          <p:cNvSpPr txBox="1"/>
+          <p:nvPr/>
+        </p:nvSpPr>
+        <p:spPr>
+          <a:xfrm>
+            <a:off x="822960" y="1965960"/>
+            <a:ext cx="4983480" cy="4206240"/>
+          </a:xfrm>
+          <a:prstGeom prst="rect">
+            <a:avLst/>
+          </a:prstGeom>
+          <a:noFill/>
+        </p:spPr>
+        <p:txBody>
+          <a:bodyPr wrap="square">
+            <a:spAutoFit/>
+          </a:bodyPr>
+          <a:lstStyle/>
+          <a:p>
+            <a:pPr>
+              <a:spcAft>
+                <a:spcPts val="1100"/>
+              </a:spcAft>
+            </a:pPr>
+            <a:r>
+              <a:rPr sz="1600" b="1" i="0">
+                <a:solidFill>
+                  <a:srgbClr val="E8801A"/>
+                </a:solidFill>
+                <a:latin typeface="Montserrat"/>
+              </a:rPr>
+              <a:t>▸  </a:t>
+            </a:r>
+            <a:r>
+              <a:rPr sz="1600" b="0" i="0">
+                <a:solidFill>
+                  <a:srgbClr val="1B2330"/>
+                </a:solidFill>
+                <a:latin typeface="Montserrat"/>
+              </a:rPr>
+              <a:t>Vale en cualquier local</a:t>
+            </a:r>
+          </a:p>
+          <a:p>
+            <a:pPr>
+              <a:spcAft>
+                <a:spcPts val="1100"/>
+              </a:spcAft>
+            </a:pPr>
+            <a:r>
+              <a:rPr sz="1600" b="1" i="0">
+                <a:solidFill>
+                  <a:srgbClr val="E8801A"/>
+                </a:solidFill>
+                <a:latin typeface="Montserrat"/>
+              </a:rPr>
+              <a:t>▸  </a:t>
+            </a:r>
+            <a:r>
+              <a:rPr sz="1600" b="0" i="0">
+                <a:solidFill>
+                  <a:srgbClr val="1B2330"/>
+                </a:solidFill>
+                <a:latin typeface="Montserrat"/>
+              </a:rPr>
+              <a:t>Incluso dormitorio y baño</a:t>
+            </a:r>
+          </a:p>
+          <a:p>
+            <a:pPr>
+              <a:spcAft>
+                <a:spcPts val="1100"/>
+              </a:spcAft>
+            </a:pPr>
+            <a:r>
+              <a:rPr sz="1600" b="1" i="0">
+                <a:solidFill>
+                  <a:srgbClr val="E8801A"/>
+                </a:solidFill>
+                <a:latin typeface="Montserrat"/>
+              </a:rPr>
+              <a:t>▸  </a:t>
+            </a:r>
+            <a:r>
+              <a:rPr sz="1600" b="0" i="0">
+                <a:solidFill>
+                  <a:srgbClr val="1B2330"/>
+                </a:solidFill>
+                <a:latin typeface="Montserrat"/>
+              </a:rPr>
+              <a:t>En húmedos: cumplir el REBT</a:t>
+            </a:r>
+          </a:p>
+        </p:txBody>
+      </p:sp>
+      <p:sp>
+        <p:nvSpPr>
+          <p:cNvPr id="9" name="imgph" descr="IMGQ:modern boiler in cupboard"/>
+          <p:cNvSpPr/>
+          <p:nvPr/>
+        </p:nvSpPr>
+        <p:spPr>
+          <a:xfrm>
+            <a:off x="5806440" y="1051560"/>
+            <a:ext cx="5298947" cy="4629150"/>
+          </a:xfrm>
+          <a:prstGeom prst="roundRect">
+            <a:avLst/>
+          </a:prstGeom>
+          <a:solidFill>
+            <a:srgbClr val="F3F6FB"/>
+          </a:solidFill>
+          <a:ln w="12700">
+            <a:solidFill>
+              <a:srgbClr val="C7D2E6"/>
+            </a:solidFill>
+          </a:ln>
+          <a:effectLst/>
+        </p:spPr>
+        <p:style>
+          <a:lnRef idx="1">
+            <a:schemeClr val="accent1"/>
+          </a:lnRef>
+          <a:fillRef idx="3">
+            <a:schemeClr val="accent1"/>
+          </a:fillRef>
+          <a:effectRef idx="2">
+            <a:schemeClr val="accent1"/>
+          </a:effectRef>
+          <a:fontRef idx="minor">
+            <a:schemeClr val="lt1"/>
+          </a:fontRef>
+        </p:style>
+        <p:txBody>
+          <a:bodyPr rtlCol="0" anchor="ctr"/>
+          <a:lstStyle/>
+          <a:p>
+            <a:pPr algn="ctr"/>
+          </a:p>
+        </p:txBody>
+      </p:sp>
+      <p:sp>
+        <p:nvSpPr>
+          <p:cNvPr id="10" name="TextBox 9"/>
+          <p:cNvSpPr txBox="1"/>
+          <p:nvPr/>
+        </p:nvSpPr>
+        <p:spPr>
+          <a:xfrm>
+            <a:off x="6080760" y="2726055"/>
+            <a:ext cx="4750307" cy="1280160"/>
+          </a:xfrm>
+          <a:prstGeom prst="rect">
+            <a:avLst/>
+          </a:prstGeom>
+          <a:noFill/>
+        </p:spPr>
+        <p:txBody>
+          <a:bodyPr wrap="square">
+            <a:spAutoFit/>
+          </a:bodyPr>
+          <a:lstStyle/>
+          <a:p>
+            <a:pPr algn="ctr"/>
+            <a:r>
+              <a:rPr sz="1400" b="1" i="0">
+                <a:solidFill>
+                  <a:srgbClr val="64748B"/>
+                </a:solidFill>
+                <a:latin typeface="Montserrat"/>
+              </a:rPr>
+              <a:t>IMAGEN REALISTA</a:t>
+            </a:r>
+          </a:p>
+          <a:p>
+            <a:pPr algn="ctr"/>
+            <a:r>
+              <a:rPr sz="1100" b="0" i="1">
+                <a:solidFill>
+                  <a:srgbClr val="64748B"/>
+                </a:solidFill>
+                <a:latin typeface="Montserrat"/>
+              </a:rPr>
+              <a:t>modern boiler in cupboard</a:t>
+            </a:r>
+          </a:p>
+        </p:txBody>
+      </p:sp>
+    </p:spTree>
+  </p:cSld>
+  <p:clrMapOvr>
+    <a:masterClrMapping/>
+  </p:clrMapOvr>
+</p:sld>
+</file>
+
+<file path=ppt/slides/slide19.xml><?xml version="1.0" encoding="utf-8"?>
+<p:sld xmlns:a="http://schemas.openxmlformats.org/drawingml/2006/main" xmlns:p="http://schemas.openxmlformats.org/presentationml/2006/main" xmlns:r="http://schemas.openxmlformats.org/officeDocument/2006/relationships">
+  <p:cSld>
+    <p:spTree>
+      <p:nvGrpSpPr>
+        <p:cNvPr id="1" name=""/>
+        <p:cNvGrpSpPr/>
+        <p:nvPr/>
+      </p:nvGrpSpPr>
+      <p:grpSpPr/>
+      <p:sp>
+        <p:nvSpPr>
+          <p:cNvPr id="2" name="Rectangle 1"/>
+          <p:cNvSpPr/>
+          <p:nvPr/>
+        </p:nvSpPr>
+        <p:spPr>
+          <a:xfrm>
+            <a:off x="0" y="0"/>
+            <a:ext cx="12191695" cy="6858000"/>
+          </a:xfrm>
+          <a:prstGeom prst="rect">
+            <a:avLst/>
+          </a:prstGeom>
+          <a:solidFill>
             <a:srgbClr val="1E2761"/>
           </a:solidFill>
           <a:ln>
@@ -8179,7 +9076,7 @@
             <a:r>
               <a:rPr sz="1400" b="1" i="0">
                 <a:solidFill>
-                  <a:srgbClr val="CADCFC"/>
+                  <a:srgbClr val="F4A24C"/>
                 </a:solidFill>
                 <a:latin typeface="Montserrat"/>
               </a:rPr>
@@ -8190,13 +9087,57 @@
       </p:sp>
       <p:sp>
         <p:nvSpPr>
-          <p:cNvPr id="4" name="TextBox 3"/>
+          <p:cNvPr id="4" name="Rounded Rectangle 3"/>
+          <p:cNvSpPr/>
+          <p:nvPr/>
+        </p:nvSpPr>
+        <p:spPr>
+          <a:xfrm>
+            <a:off x="868680" y="1051560"/>
+            <a:ext cx="1463040" cy="82296"/>
+          </a:xfrm>
+          <a:prstGeom prst="roundRect">
+            <a:avLst/>
+          </a:prstGeom>
+          <a:solidFill>
+            <a:srgbClr val="E8801A"/>
+          </a:solidFill>
+          <a:ln>
+            <a:noFill/>
+          </a:ln>
+          <a:effectLst/>
+        </p:spPr>
+        <p:style>
+          <a:lnRef idx="1">
+            <a:schemeClr val="accent1"/>
+          </a:lnRef>
+          <a:fillRef idx="3">
+            <a:schemeClr val="accent1"/>
+          </a:fillRef>
+          <a:effectRef idx="2">
+            <a:schemeClr val="accent1"/>
+          </a:effectRef>
+          <a:fontRef idx="minor">
+            <a:schemeClr val="lt1"/>
+          </a:fontRef>
+        </p:style>
+        <p:txBody>
+          <a:bodyPr rtlCol="0" anchor="ctr"/>
+          <a:lstStyle/>
+          <a:p>
+            <a:pPr algn="ctr"/>
+          </a:p>
+        </p:txBody>
+      </p:sp>
+      <p:sp>
+        <p:nvSpPr>
+          <p:cNvPr id="5" name="TextBox 4"/>
           <p:cNvSpPr txBox="1"/>
           <p:nvPr/>
         </p:nvSpPr>
         <p:spPr>
           <a:xfrm>
-            <a:off x="822960" y="1143000"/>
+            <a:off x="822960" y="1234440"/>
             <a:ext cx="10515600" cy="1097280"/>
           </a:xfrm>
           <a:prstGeom prst="rect">
@@ -8224,14 +9165,14 @@
       </p:sp>
       <p:sp>
         <p:nvSpPr>
-          <p:cNvPr id="5" name="TextBox 4"/>
+          <p:cNvPr id="6" name="TextBox 5"/>
           <p:cNvSpPr txBox="1"/>
           <p:nvPr/>
         </p:nvSpPr>
         <p:spPr>
           <a:xfrm>
-            <a:off x="822960" y="2514600"/>
-            <a:ext cx="10515600" cy="2834640"/>
+            <a:off x="822960" y="2606040"/>
+            <a:ext cx="10515600" cy="2743200"/>
           </a:xfrm>
           <a:prstGeom prst="rect">
             <a:avLst/>
@@ -8252,7 +9193,7 @@
             <a:r>
               <a:rPr sz="2000" b="1" i="0">
                 <a:solidFill>
-                  <a:srgbClr val="CADCFC"/>
+                  <a:srgbClr val="F4A24C"/>
                 </a:solidFill>
                 <a:latin typeface="Montserrat"/>
               </a:rPr>
@@ -8277,7 +9218,7 @@
             <a:r>
               <a:rPr sz="2000" b="1" i="0">
                 <a:solidFill>
-                  <a:srgbClr val="CADCFC"/>
+                  <a:srgbClr val="F4A24C"/>
                 </a:solidFill>
                 <a:latin typeface="Montserrat"/>
               </a:rPr>
@@ -8302,7 +9243,7 @@
             <a:r>
               <a:rPr sz="2000" b="1" i="0">
                 <a:solidFill>
-                  <a:srgbClr val="CADCFC"/>
+                  <a:srgbClr val="F4A24C"/>
                 </a:solidFill>
                 <a:latin typeface="Montserrat"/>
               </a:rPr>
@@ -8327,7 +9268,7 @@
             <a:r>
               <a:rPr sz="2000" b="1" i="0">
                 <a:solidFill>
-                  <a:srgbClr val="CADCFC"/>
+                  <a:srgbClr val="F4A24C"/>
                 </a:solidFill>
                 <a:latin typeface="Montserrat"/>
               </a:rPr>
@@ -8347,20 +9288,20 @@
       </p:sp>
       <p:sp>
         <p:nvSpPr>
-          <p:cNvPr id="6" name="Rounded Rectangle 5"/>
+          <p:cNvPr id="7" name="Rounded Rectangle 6"/>
           <p:cNvSpPr/>
           <p:nvPr/>
         </p:nvSpPr>
         <p:spPr>
           <a:xfrm>
             <a:off x="822960" y="5532120"/>
-            <a:ext cx="10515600" cy="777240"/>
+            <a:ext cx="10515600" cy="822960"/>
           </a:xfrm>
           <a:prstGeom prst="roundRect">
             <a:avLst/>
           </a:prstGeom>
           <a:solidFill>
-            <a:srgbClr val="2E3A80"/>
+            <a:srgbClr val="E8801A"/>
           </a:solidFill>
           <a:ln>
             <a:noFill/>
@@ -8391,13 +9332,13 @@
       </p:sp>
       <p:sp>
         <p:nvSpPr>
-          <p:cNvPr id="7" name="TextBox 6"/>
+          <p:cNvPr id="8" name="TextBox 7"/>
           <p:cNvSpPr txBox="1"/>
           <p:nvPr/>
         </p:nvSpPr>
         <p:spPr>
           <a:xfrm>
-            <a:off x="1051560" y="5605272"/>
+            <a:off x="1051560" y="5623560"/>
             <a:ext cx="10058400" cy="640080"/>
           </a:xfrm>
           <a:prstGeom prst="rect">
@@ -8414,7 +9355,7 @@
             <a:r>
               <a:rPr sz="1500" b="1" i="1">
                 <a:solidFill>
-                  <a:srgbClr val="CADCFC"/>
+                  <a:srgbClr val="1E2761"/>
                 </a:solidFill>
                 <a:latin typeface="Montserrat"/>
               </a:rPr>
@@ -8515,7 +9456,7 @@
                 </a:solidFill>
                 <a:latin typeface="Montserrat"/>
               </a:rPr>
-              <a:t>002 / 018</a:t>
+              <a:t>002 / 019</a:t>
             </a:r>
           </a:p>
         </p:txBody>
@@ -8579,7 +9520,7 @@
             <a:r>
               <a:rPr sz="2700" b="1" i="0">
                 <a:solidFill>
-                  <a:srgbClr val="1E2761"/>
+                  <a:srgbClr val="E8801A"/>
                 </a:solidFill>
                 <a:latin typeface="Montserrat"/>
               </a:rPr>
@@ -8591,6 +9532,50 @@
       <p:sp>
         <p:nvSpPr>
           <p:cNvPr id="6" name="Rounded Rectangle 5"/>
+          <p:cNvSpPr/>
+          <p:nvPr/>
+        </p:nvSpPr>
+        <p:spPr>
+          <a:xfrm>
+            <a:off x="868680" y="1234440"/>
+            <a:ext cx="1463040" cy="73152"/>
+          </a:xfrm>
+          <a:prstGeom prst="roundRect">
+            <a:avLst/>
+          </a:prstGeom>
+          <a:solidFill>
+            <a:srgbClr val="1E2761"/>
+          </a:solidFill>
+          <a:ln>
+            <a:noFill/>
+          </a:ln>
+          <a:effectLst/>
+        </p:spPr>
+        <p:style>
+          <a:lnRef idx="1">
+            <a:schemeClr val="accent1"/>
+          </a:lnRef>
+          <a:fillRef idx="3">
+            <a:schemeClr val="accent1"/>
+          </a:fillRef>
+          <a:effectRef idx="2">
+            <a:schemeClr val="accent1"/>
+          </a:effectRef>
+          <a:fontRef idx="minor">
+            <a:schemeClr val="lt1"/>
+          </a:fontRef>
+        </p:style>
+        <p:txBody>
+          <a:bodyPr rtlCol="0" anchor="ctr"/>
+          <a:lstStyle/>
+          <a:p>
+            <a:pPr algn="ctr"/>
+          </a:p>
+        </p:txBody>
+      </p:sp>
+      <p:sp>
+        <p:nvSpPr>
+          <p:cNvPr id="7" name="Rounded Rectangle 6"/>
           <p:cNvSpPr/>
           <p:nvPr/>
         </p:nvSpPr>
@@ -8636,7 +9621,7 @@
       </p:sp>
       <p:sp>
         <p:nvSpPr>
-          <p:cNvPr id="7" name="TextBox 6"/>
+          <p:cNvPr id="8" name="TextBox 7"/>
           <p:cNvSpPr txBox="1"/>
           <p:nvPr/>
         </p:nvSpPr>
@@ -8671,7 +9656,7 @@
       </p:sp>
       <p:sp>
         <p:nvSpPr>
-          <p:cNvPr id="8" name="TextBox 7"/>
+          <p:cNvPr id="9" name="TextBox 8"/>
           <p:cNvSpPr txBox="1"/>
           <p:nvPr/>
         </p:nvSpPr>
@@ -8706,7 +9691,7 @@
       </p:sp>
       <p:sp>
         <p:nvSpPr>
-          <p:cNvPr id="9" name="Rounded Rectangle 8"/>
+          <p:cNvPr id="10" name="Rounded Rectangle 9"/>
           <p:cNvSpPr/>
           <p:nvPr/>
         </p:nvSpPr>
@@ -8752,7 +9737,7 @@
       </p:sp>
       <p:sp>
         <p:nvSpPr>
-          <p:cNvPr id="10" name="TextBox 9"/>
+          <p:cNvPr id="11" name="TextBox 10"/>
           <p:cNvSpPr txBox="1"/>
           <p:nvPr/>
         </p:nvSpPr>
@@ -8787,7 +9772,7 @@
       </p:sp>
       <p:sp>
         <p:nvSpPr>
-          <p:cNvPr id="11" name="TextBox 10"/>
+          <p:cNvPr id="12" name="TextBox 11"/>
           <p:cNvSpPr txBox="1"/>
           <p:nvPr/>
         </p:nvSpPr>
@@ -8822,7 +9807,7 @@
       </p:sp>
       <p:sp>
         <p:nvSpPr>
-          <p:cNvPr id="12" name="Rounded Rectangle 11"/>
+          <p:cNvPr id="13" name="Rounded Rectangle 12"/>
           <p:cNvSpPr/>
           <p:nvPr/>
         </p:nvSpPr>
@@ -8868,7 +9853,7 @@
       </p:sp>
       <p:sp>
         <p:nvSpPr>
-          <p:cNvPr id="13" name="TextBox 12"/>
+          <p:cNvPr id="14" name="TextBox 13"/>
           <p:cNvSpPr txBox="1"/>
           <p:nvPr/>
         </p:nvSpPr>
@@ -8903,7 +9888,7 @@
       </p:sp>
       <p:sp>
         <p:nvSpPr>
-          <p:cNvPr id="14" name="TextBox 13"/>
+          <p:cNvPr id="15" name="TextBox 14"/>
           <p:cNvSpPr txBox="1"/>
           <p:nvPr/>
         </p:nvSpPr>
@@ -9028,7 +10013,7 @@
                 </a:solidFill>
                 <a:latin typeface="Montserrat"/>
               </a:rPr>
-              <a:t>003 / 018</a:t>
+              <a:t>003 / 019</a:t>
             </a:r>
           </a:p>
         </p:txBody>
@@ -9075,7 +10060,7 @@
         </p:nvSpPr>
         <p:spPr>
           <a:xfrm>
-            <a:off x="822960" y="457200"/>
+            <a:off x="822960" y="502920"/>
             <a:ext cx="8229600" cy="365760"/>
           </a:xfrm>
           <a:prstGeom prst="rect">
@@ -9090,13 +10075,13 @@
           <a:lstStyle/>
           <a:p>
             <a:r>
-              <a:rPr sz="1200" b="1" i="0">
-                <a:solidFill>
-                  <a:srgbClr val="64748B"/>
-                </a:solidFill>
-                <a:latin typeface="Montserrat"/>
-              </a:rPr>
-              <a:t>LA NORMA</a:t>
+              <a:rPr sz="1300" b="1" i="0">
+                <a:solidFill>
+                  <a:srgbClr val="E8801A"/>
+                </a:solidFill>
+                <a:latin typeface="Montserrat"/>
+              </a:rPr>
+              <a:t>PARTES DE ESTE VÍDEO</a:t>
             </a:r>
           </a:p>
         </p:txBody>
@@ -9109,7 +10094,7 @@
         </p:nvSpPr>
         <p:spPr>
           <a:xfrm>
-            <a:off x="822960" y="868680"/>
+            <a:off x="822960" y="914400"/>
             <a:ext cx="10515600" cy="914400"/>
           </a:xfrm>
           <a:prstGeom prst="rect">
@@ -9130,130 +10115,30 @@
                 </a:solidFill>
                 <a:latin typeface="Montserrat"/>
               </a:rPr>
-              <a:t>Qué es la UNE 60670-6</a:t>
-            </a:r>
-          </a:p>
-        </p:txBody>
-      </p:sp>
-      <p:sp>
-        <p:nvSpPr>
-          <p:cNvPr id="7" name="TextBox 6"/>
-          <p:cNvSpPr txBox="1"/>
-          <p:nvPr/>
-        </p:nvSpPr>
-        <p:spPr>
-          <a:xfrm>
-            <a:off x="822960" y="1920240"/>
-            <a:ext cx="4983480" cy="4206240"/>
-          </a:xfrm>
-          <a:prstGeom prst="rect">
-            <a:avLst/>
-          </a:prstGeom>
-          <a:noFill/>
-        </p:spPr>
-        <p:txBody>
-          <a:bodyPr wrap="square">
-            <a:spAutoFit/>
-          </a:bodyPr>
-          <a:lstStyle/>
-          <a:p>
-            <a:pPr>
-              <a:spcAft>
-                <a:spcPts val="1000"/>
-              </a:spcAft>
-            </a:pPr>
-            <a:r>
-              <a:rPr sz="1600" b="1" i="0">
-                <a:solidFill>
-                  <a:srgbClr val="2E3A80"/>
-                </a:solidFill>
-                <a:latin typeface="Montserrat"/>
-              </a:rPr>
-              <a:t>•  </a:t>
-            </a:r>
-            <a:r>
-              <a:rPr sz="1600" b="0" i="0">
-                <a:solidFill>
-                  <a:srgbClr val="1B2330"/>
-                </a:solidFill>
-                <a:latin typeface="Montserrat"/>
-              </a:rPr>
-              <a:t>Criterios técnicos y de seguridad</a:t>
-            </a:r>
-          </a:p>
-          <a:p>
-            <a:pPr>
-              <a:spcAft>
-                <a:spcPts val="1000"/>
-              </a:spcAft>
-            </a:pPr>
-            <a:r>
-              <a:rPr sz="1600" b="1" i="0">
-                <a:solidFill>
-                  <a:srgbClr val="2E3A80"/>
-                </a:solidFill>
-                <a:latin typeface="Montserrat"/>
-              </a:rPr>
-              <a:t>•  </a:t>
-            </a:r>
-            <a:r>
-              <a:rPr sz="1600" b="0" i="0">
-                <a:solidFill>
-                  <a:srgbClr val="1B2330"/>
-                </a:solidFill>
-                <a:latin typeface="Montserrat"/>
-              </a:rPr>
-              <a:t>Diseño, prueba y puesta en servicio</a:t>
-            </a:r>
-          </a:p>
-          <a:p>
-            <a:pPr>
-              <a:spcAft>
-                <a:spcPts val="1000"/>
-              </a:spcAft>
-            </a:pPr>
-            <a:r>
-              <a:rPr sz="1600" b="1" i="0">
-                <a:solidFill>
-                  <a:srgbClr val="2E3A80"/>
-                </a:solidFill>
-                <a:latin typeface="Montserrat"/>
-              </a:rPr>
-              <a:t>•  </a:t>
-            </a:r>
-            <a:r>
-              <a:rPr sz="1600" b="0" i="0">
-                <a:solidFill>
-                  <a:srgbClr val="1B2330"/>
-                </a:solidFill>
-                <a:latin typeface="Montserrat"/>
-              </a:rPr>
-              <a:t>Presión máxima ≤ 5 bar (MOP)</a:t>
-            </a:r>
-          </a:p>
-        </p:txBody>
-      </p:sp>
-      <p:sp>
-        <p:nvSpPr>
-          <p:cNvPr id="8" name="imgph" descr="IMGQ:gas meter installation on wall"/>
+              <a:t>En este vídeo</a:t>
+            </a:r>
+          </a:p>
+        </p:txBody>
+      </p:sp>
+      <p:sp>
+        <p:nvSpPr>
+          <p:cNvPr id="7" name="Rounded Rectangle 6"/>
           <p:cNvSpPr/>
           <p:nvPr/>
         </p:nvSpPr>
         <p:spPr>
           <a:xfrm>
-            <a:off x="5806440" y="1051560"/>
-            <a:ext cx="5298947" cy="4629150"/>
+            <a:off x="868680" y="1673352"/>
+            <a:ext cx="2011680" cy="73152"/>
           </a:xfrm>
           <a:prstGeom prst="roundRect">
             <a:avLst/>
           </a:prstGeom>
           <a:solidFill>
-            <a:srgbClr val="F3F6FB"/>
+            <a:srgbClr val="E8801A"/>
           </a:solidFill>
-          <a:ln w="12700">
-            <a:solidFill>
-              <a:srgbClr val="C7D2E6"/>
-            </a:solidFill>
+          <a:ln>
+            <a:noFill/>
           </a:ln>
           <a:effectLst/>
         </p:spPr>
@@ -9281,14 +10166,14 @@
       </p:sp>
       <p:sp>
         <p:nvSpPr>
-          <p:cNvPr id="9" name="TextBox 8"/>
+          <p:cNvPr id="8" name="TextBox 7"/>
           <p:cNvSpPr txBox="1"/>
           <p:nvPr/>
         </p:nvSpPr>
         <p:spPr>
           <a:xfrm>
-            <a:off x="6080760" y="2726055"/>
-            <a:ext cx="4750307" cy="1280160"/>
+            <a:off x="822960" y="2103120"/>
+            <a:ext cx="10515600" cy="4023360"/>
           </a:xfrm>
           <a:prstGeom prst="rect">
             <a:avLst/>
@@ -9301,27 +10186,228 @@
           </a:bodyPr>
           <a:lstStyle/>
           <a:p>
-            <a:pPr algn="ctr"/>
-            <a:r>
-              <a:rPr sz="1400" b="1" i="0">
-                <a:solidFill>
-                  <a:srgbClr val="64748B"/>
-                </a:solidFill>
-                <a:latin typeface="Montserrat"/>
-              </a:rPr>
-              <a:t>IMAGEN REALISTA</a:t>
-            </a:r>
-          </a:p>
-          <a:p>
-            <a:pPr algn="ctr"/>
-            <a:r>
-              <a:rPr sz="1100" b="0" i="1">
-                <a:solidFill>
-                  <a:srgbClr val="64748B"/>
-                </a:solidFill>
-                <a:latin typeface="Montserrat"/>
-              </a:rPr>
-              <a:t>gas meter installation on wall</a:t>
+            <a:pPr>
+              <a:spcAft>
+                <a:spcPts val="900"/>
+              </a:spcAft>
+            </a:pPr>
+            <a:r>
+              <a:rPr sz="1800" b="1" i="0">
+                <a:solidFill>
+                  <a:srgbClr val="E8801A"/>
+                </a:solidFill>
+                <a:latin typeface="Montserrat"/>
+              </a:rPr>
+              <a:t>01   </a:t>
+            </a:r>
+            <a:r>
+              <a:rPr sz="1700" b="0" i="0">
+                <a:solidFill>
+                  <a:srgbClr val="1B2330"/>
+                </a:solidFill>
+                <a:latin typeface="Montserrat"/>
+              </a:rPr>
+              <a:t>La norma</a:t>
+            </a:r>
+          </a:p>
+          <a:p>
+            <a:pPr>
+              <a:spcAft>
+                <a:spcPts val="900"/>
+              </a:spcAft>
+            </a:pPr>
+            <a:r>
+              <a:rPr sz="1800" b="1" i="0">
+                <a:solidFill>
+                  <a:srgbClr val="E8801A"/>
+                </a:solidFill>
+                <a:latin typeface="Montserrat"/>
+              </a:rPr>
+              <a:t>02   </a:t>
+            </a:r>
+            <a:r>
+              <a:rPr sz="1700" b="0" i="0">
+                <a:solidFill>
+                  <a:srgbClr val="1B2330"/>
+                </a:solidFill>
+                <a:latin typeface="Montserrat"/>
+              </a:rPr>
+              <a:t>Trece partes</a:t>
+            </a:r>
+          </a:p>
+          <a:p>
+            <a:pPr>
+              <a:spcAft>
+                <a:spcPts val="900"/>
+              </a:spcAft>
+            </a:pPr>
+            <a:r>
+              <a:rPr sz="1800" b="1" i="0">
+                <a:solidFill>
+                  <a:srgbClr val="E8801A"/>
+                </a:solidFill>
+                <a:latin typeface="Montserrat"/>
+              </a:rPr>
+              <a:t>03   </a:t>
+            </a:r>
+            <a:r>
+              <a:rPr sz="1700" b="0" i="0">
+                <a:solidFill>
+                  <a:srgbClr val="1B2330"/>
+                </a:solidFill>
+                <a:latin typeface="Montserrat"/>
+              </a:rPr>
+              <a:t>Novedades</a:t>
+            </a:r>
+          </a:p>
+          <a:p>
+            <a:pPr>
+              <a:spcAft>
+                <a:spcPts val="900"/>
+              </a:spcAft>
+            </a:pPr>
+            <a:r>
+              <a:rPr sz="1800" b="1" i="0">
+                <a:solidFill>
+                  <a:srgbClr val="E8801A"/>
+                </a:solidFill>
+                <a:latin typeface="Montserrat"/>
+              </a:rPr>
+              <a:t>04   </a:t>
+            </a:r>
+            <a:r>
+              <a:rPr sz="1700" b="0" i="0">
+                <a:solidFill>
+                  <a:srgbClr val="1B2330"/>
+                </a:solidFill>
+                <a:latin typeface="Montserrat"/>
+              </a:rPr>
+              <a:t>Objeto</a:t>
+            </a:r>
+          </a:p>
+          <a:p>
+            <a:pPr>
+              <a:spcAft>
+                <a:spcPts val="900"/>
+              </a:spcAft>
+            </a:pPr>
+            <a:r>
+              <a:rPr sz="1800" b="1" i="0">
+                <a:solidFill>
+                  <a:srgbClr val="E8801A"/>
+                </a:solidFill>
+                <a:latin typeface="Montserrat"/>
+              </a:rPr>
+              <a:t>05   </a:t>
+            </a:r>
+            <a:r>
+              <a:rPr sz="1700" b="0" i="0">
+                <a:solidFill>
+                  <a:srgbClr val="1B2330"/>
+                </a:solidFill>
+                <a:latin typeface="Montserrat"/>
+              </a:rPr>
+              <a:t>Clasificación</a:t>
+            </a:r>
+          </a:p>
+          <a:p>
+            <a:pPr>
+              <a:spcAft>
+                <a:spcPts val="900"/>
+              </a:spcAft>
+            </a:pPr>
+            <a:r>
+              <a:rPr sz="1800" b="1" i="0">
+                <a:solidFill>
+                  <a:srgbClr val="E8801A"/>
+                </a:solidFill>
+                <a:latin typeface="Montserrat"/>
+              </a:rPr>
+              <a:t>06   </a:t>
+            </a:r>
+            <a:r>
+              <a:rPr sz="1700" b="0" i="0">
+                <a:solidFill>
+                  <a:srgbClr val="1B2330"/>
+                </a:solidFill>
+                <a:latin typeface="Montserrat"/>
+              </a:rPr>
+              <a:t>Tiro natural y forzado</a:t>
+            </a:r>
+          </a:p>
+          <a:p>
+            <a:pPr>
+              <a:spcAft>
+                <a:spcPts val="900"/>
+              </a:spcAft>
+            </a:pPr>
+            <a:r>
+              <a:rPr sz="1800" b="1" i="0">
+                <a:solidFill>
+                  <a:srgbClr val="E8801A"/>
+                </a:solidFill>
+                <a:latin typeface="Montserrat"/>
+              </a:rPr>
+              <a:t>07   </a:t>
+            </a:r>
+            <a:r>
+              <a:rPr sz="1700" b="0" i="0">
+                <a:solidFill>
+                  <a:srgbClr val="1B2330"/>
+                </a:solidFill>
+                <a:latin typeface="Montserrat"/>
+              </a:rPr>
+              <a:t>Instalación</a:t>
+            </a:r>
+          </a:p>
+          <a:p>
+            <a:pPr>
+              <a:spcAft>
+                <a:spcPts val="900"/>
+              </a:spcAft>
+            </a:pPr>
+            <a:r>
+              <a:rPr sz="1800" b="1" i="0">
+                <a:solidFill>
+                  <a:srgbClr val="E8801A"/>
+                </a:solidFill>
+                <a:latin typeface="Montserrat"/>
+              </a:rPr>
+              <a:t>08   </a:t>
+            </a:r>
+            <a:r>
+              <a:rPr sz="1700" b="0" i="0">
+                <a:solidFill>
+                  <a:srgbClr val="1B2330"/>
+                </a:solidFill>
+                <a:latin typeface="Montserrat"/>
+              </a:rPr>
+              <a:t>Tipo A</a:t>
+            </a:r>
+          </a:p>
+          <a:p>
+            <a:pPr>
+              <a:spcAft>
+                <a:spcPts val="900"/>
+              </a:spcAft>
+            </a:pPr>
+            <a:r>
+              <a:rPr sz="1800" b="1" i="0">
+                <a:solidFill>
+                  <a:srgbClr val="E8801A"/>
+                </a:solidFill>
+                <a:latin typeface="Montserrat"/>
+              </a:rPr>
+              <a:t>09   </a:t>
+            </a:r>
+            <a:r>
+              <a:rPr sz="1700" b="0" i="0">
+                <a:solidFill>
+                  <a:srgbClr val="1B2330"/>
+                </a:solidFill>
+                <a:latin typeface="Montserrat"/>
+              </a:rPr>
+              <a:t>Tipo B</a:t>
             </a:r>
           </a:p>
         </p:txBody>
@@ -9418,7 +10504,7 @@
                 </a:solidFill>
                 <a:latin typeface="Montserrat"/>
               </a:rPr>
-              <a:t>004 / 018</a:t>
+              <a:t>004 / 019</a:t>
             </a:r>
           </a:p>
         </p:txBody>
@@ -9466,7 +10552,7 @@
         <p:spPr>
           <a:xfrm>
             <a:off x="822960" y="457200"/>
-            <a:ext cx="8229600" cy="365760"/>
+            <a:ext cx="10058400" cy="365760"/>
           </a:xfrm>
           <a:prstGeom prst="rect">
             <a:avLst/>
@@ -9480,13 +10566,13 @@
           <a:lstStyle/>
           <a:p>
             <a:r>
-              <a:rPr sz="1200" b="1" i="0">
-                <a:solidFill>
-                  <a:srgbClr val="64748B"/>
-                </a:solidFill>
-                <a:latin typeface="Montserrat"/>
-              </a:rPr>
-              <a:t>TRECE PARTES</a:t>
+              <a:rPr sz="1300" b="1" i="0">
+                <a:solidFill>
+                  <a:srgbClr val="E8801A"/>
+                </a:solidFill>
+                <a:latin typeface="Montserrat"/>
+              </a:rPr>
+              <a:t>LA NORMA</a:t>
             </a:r>
           </a:p>
         </p:txBody>
@@ -9514,26 +10600,70 @@
           <a:lstStyle/>
           <a:p>
             <a:r>
-              <a:rPr sz="2700" b="1" i="0">
+              <a:rPr sz="2800" b="1" i="0">
                 <a:solidFill>
                   <a:srgbClr val="1E2761"/>
                 </a:solidFill>
                 <a:latin typeface="Montserrat"/>
               </a:rPr>
-              <a:t>La Parte 6 es tu Tema 13</a:t>
-            </a:r>
-          </a:p>
-        </p:txBody>
-      </p:sp>
-      <p:sp>
-        <p:nvSpPr>
-          <p:cNvPr id="7" name="TextBox 6"/>
+              <a:t>Qué es la UNE 60670-6</a:t>
+            </a:r>
+          </a:p>
+        </p:txBody>
+      </p:sp>
+      <p:sp>
+        <p:nvSpPr>
+          <p:cNvPr id="7" name="Rounded Rectangle 6"/>
+          <p:cNvSpPr/>
+          <p:nvPr/>
+        </p:nvSpPr>
+        <p:spPr>
+          <a:xfrm>
+            <a:off x="868680" y="1627632"/>
+            <a:ext cx="2011680" cy="73152"/>
+          </a:xfrm>
+          <a:prstGeom prst="roundRect">
+            <a:avLst/>
+          </a:prstGeom>
+          <a:solidFill>
+            <a:srgbClr val="E8801A"/>
+          </a:solidFill>
+          <a:ln>
+            <a:noFill/>
+          </a:ln>
+          <a:effectLst/>
+        </p:spPr>
+        <p:style>
+          <a:lnRef idx="1">
+            <a:schemeClr val="accent1"/>
+          </a:lnRef>
+          <a:fillRef idx="3">
+            <a:schemeClr val="accent1"/>
+          </a:fillRef>
+          <a:effectRef idx="2">
+            <a:schemeClr val="accent1"/>
+          </a:effectRef>
+          <a:fontRef idx="minor">
+            <a:schemeClr val="lt1"/>
+          </a:fontRef>
+        </p:style>
+        <p:txBody>
+          <a:bodyPr rtlCol="0" anchor="ctr"/>
+          <a:lstStyle/>
+          <a:p>
+            <a:pPr algn="ctr"/>
+          </a:p>
+        </p:txBody>
+      </p:sp>
+      <p:sp>
+        <p:nvSpPr>
+          <p:cNvPr id="8" name="TextBox 7"/>
           <p:cNvSpPr txBox="1"/>
           <p:nvPr/>
         </p:nvSpPr>
         <p:spPr>
           <a:xfrm>
-            <a:off x="822960" y="1920240"/>
+            <a:off x="822960" y="1965960"/>
             <a:ext cx="4983480" cy="4206240"/>
           </a:xfrm>
           <a:prstGeom prst="rect">
@@ -9549,17 +10679,17 @@
           <a:p>
             <a:pPr>
               <a:spcAft>
-                <a:spcPts val="1000"/>
+                <a:spcPts val="1100"/>
               </a:spcAft>
             </a:pPr>
             <a:r>
               <a:rPr sz="1600" b="1" i="0">
                 <a:solidFill>
-                  <a:srgbClr val="2E3A80"/>
-                </a:solidFill>
-                <a:latin typeface="Montserrat"/>
-              </a:rPr>
-              <a:t>•  </a:t>
+                  <a:srgbClr val="E8801A"/>
+                </a:solidFill>
+                <a:latin typeface="Montserrat"/>
+              </a:rPr>
+              <a:t>▸  </a:t>
             </a:r>
             <a:r>
               <a:rPr sz="1600" b="0" i="0">
@@ -9568,23 +10698,23 @@
                 </a:solidFill>
                 <a:latin typeface="Montserrat"/>
               </a:rPr>
-              <a:t>La norma tiene 13 partes</a:t>
+              <a:t>Criterios técnicos y de seguridad</a:t>
             </a:r>
           </a:p>
           <a:p>
             <a:pPr>
               <a:spcAft>
-                <a:spcPts val="1000"/>
+                <a:spcPts val="1100"/>
               </a:spcAft>
             </a:pPr>
             <a:r>
               <a:rPr sz="1600" b="1" i="0">
                 <a:solidFill>
-                  <a:srgbClr val="2E3A80"/>
-                </a:solidFill>
-                <a:latin typeface="Montserrat"/>
-              </a:rPr>
-              <a:t>•  </a:t>
+                  <a:srgbClr val="E8801A"/>
+                </a:solidFill>
+                <a:latin typeface="Montserrat"/>
+              </a:rPr>
+              <a:t>▸  </a:t>
             </a:r>
             <a:r>
               <a:rPr sz="1600" b="0" i="0">
@@ -9593,23 +10723,23 @@
                 </a:solidFill>
                 <a:latin typeface="Montserrat"/>
               </a:rPr>
-              <a:t>La 6: locales, ventilación y humos</a:t>
+              <a:t>Diseño, prueba y puesta en servicio</a:t>
             </a:r>
           </a:p>
           <a:p>
             <a:pPr>
               <a:spcAft>
-                <a:spcPts val="1000"/>
+                <a:spcPts val="1100"/>
               </a:spcAft>
             </a:pPr>
             <a:r>
               <a:rPr sz="1600" b="1" i="0">
                 <a:solidFill>
-                  <a:srgbClr val="2E3A80"/>
-                </a:solidFill>
-                <a:latin typeface="Montserrat"/>
-              </a:rPr>
-              <a:t>•  </a:t>
+                  <a:srgbClr val="E8801A"/>
+                </a:solidFill>
+                <a:latin typeface="Montserrat"/>
+              </a:rPr>
+              <a:t>▸  </a:t>
             </a:r>
             <a:r>
               <a:rPr sz="1600" b="0" i="0">
@@ -9618,14 +10748,14 @@
                 </a:solidFill>
                 <a:latin typeface="Montserrat"/>
               </a:rPr>
-              <a:t>No confundas parte con tema</a:t>
-            </a:r>
-          </a:p>
-        </p:txBody>
-      </p:sp>
-      <p:sp>
-        <p:nvSpPr>
-          <p:cNvPr id="8" name="imgph" descr="IMGQ:technical standard document folder"/>
+              <a:t>Presión máxima ≤ 5 bar (MOP)</a:t>
+            </a:r>
+          </a:p>
+        </p:txBody>
+      </p:sp>
+      <p:sp>
+        <p:nvSpPr>
+          <p:cNvPr id="9" name="imgph" descr="IMGQ:gas meter installation on wall"/>
           <p:cNvSpPr/>
           <p:nvPr/>
         </p:nvSpPr>
@@ -9671,7 +10801,7 @@
       </p:sp>
       <p:sp>
         <p:nvSpPr>
-          <p:cNvPr id="9" name="TextBox 8"/>
+          <p:cNvPr id="10" name="TextBox 9"/>
           <p:cNvSpPr txBox="1"/>
           <p:nvPr/>
         </p:nvSpPr>
@@ -9711,7 +10841,7 @@
                 </a:solidFill>
                 <a:latin typeface="Montserrat"/>
               </a:rPr>
-              <a:t>technical standard document folder</a:t>
+              <a:t>gas meter installation on wall</a:t>
             </a:r>
           </a:p>
         </p:txBody>
@@ -9808,7 +10938,7 @@
                 </a:solidFill>
                 <a:latin typeface="Montserrat"/>
               </a:rPr>
-              <a:t>005 / 018</a:t>
+              <a:t>005 / 019</a:t>
             </a:r>
           </a:p>
         </p:txBody>
@@ -9856,7 +10986,7 @@
         <p:spPr>
           <a:xfrm>
             <a:off x="822960" y="457200"/>
-            <a:ext cx="8229600" cy="365760"/>
+            <a:ext cx="10058400" cy="365760"/>
           </a:xfrm>
           <a:prstGeom prst="rect">
             <a:avLst/>
@@ -9870,13 +11000,13 @@
           <a:lstStyle/>
           <a:p>
             <a:r>
-              <a:rPr sz="1200" b="1" i="0">
-                <a:solidFill>
-                  <a:srgbClr val="64748B"/>
-                </a:solidFill>
-                <a:latin typeface="Montserrat"/>
-              </a:rPr>
-              <a:t>NOVEDADES</a:t>
+              <a:rPr sz="1300" b="1" i="0">
+                <a:solidFill>
+                  <a:srgbClr val="E8801A"/>
+                </a:solidFill>
+                <a:latin typeface="Montserrat"/>
+              </a:rPr>
+              <a:t>TRECE PARTES</a:t>
             </a:r>
           </a:p>
         </p:txBody>
@@ -9904,26 +11034,70 @@
           <a:lstStyle/>
           <a:p>
             <a:r>
-              <a:rPr sz="2700" b="1" i="0">
+              <a:rPr sz="2800" b="1" i="0">
                 <a:solidFill>
                   <a:srgbClr val="1E2761"/>
                 </a:solidFill>
                 <a:latin typeface="Montserrat"/>
               </a:rPr>
-              <a:t>Lo nuevo que gusta en examen</a:t>
-            </a:r>
-          </a:p>
-        </p:txBody>
-      </p:sp>
-      <p:sp>
-        <p:nvSpPr>
-          <p:cNvPr id="7" name="TextBox 6"/>
+              <a:t>La Parte 6 es tu Tema 13</a:t>
+            </a:r>
+          </a:p>
+        </p:txBody>
+      </p:sp>
+      <p:sp>
+        <p:nvSpPr>
+          <p:cNvPr id="7" name="Rounded Rectangle 6"/>
+          <p:cNvSpPr/>
+          <p:nvPr/>
+        </p:nvSpPr>
+        <p:spPr>
+          <a:xfrm>
+            <a:off x="868680" y="1627632"/>
+            <a:ext cx="2011680" cy="73152"/>
+          </a:xfrm>
+          <a:prstGeom prst="roundRect">
+            <a:avLst/>
+          </a:prstGeom>
+          <a:solidFill>
+            <a:srgbClr val="E8801A"/>
+          </a:solidFill>
+          <a:ln>
+            <a:noFill/>
+          </a:ln>
+          <a:effectLst/>
+        </p:spPr>
+        <p:style>
+          <a:lnRef idx="1">
+            <a:schemeClr val="accent1"/>
+          </a:lnRef>
+          <a:fillRef idx="3">
+            <a:schemeClr val="accent1"/>
+          </a:fillRef>
+          <a:effectRef idx="2">
+            <a:schemeClr val="accent1"/>
+          </a:effectRef>
+          <a:fontRef idx="minor">
+            <a:schemeClr val="lt1"/>
+          </a:fontRef>
+        </p:style>
+        <p:txBody>
+          <a:bodyPr rtlCol="0" anchor="ctr"/>
+          <a:lstStyle/>
+          <a:p>
+            <a:pPr algn="ctr"/>
+          </a:p>
+        </p:txBody>
+      </p:sp>
+      <p:sp>
+        <p:nvSpPr>
+          <p:cNvPr id="8" name="TextBox 7"/>
           <p:cNvSpPr txBox="1"/>
           <p:nvPr/>
         </p:nvSpPr>
         <p:spPr>
           <a:xfrm>
-            <a:off x="822960" y="1920240"/>
+            <a:off x="822960" y="1965960"/>
             <a:ext cx="4983480" cy="4206240"/>
           </a:xfrm>
           <a:prstGeom prst="rect">
@@ -9939,17 +11113,17 @@
           <a:p>
             <a:pPr>
               <a:spcAft>
-                <a:spcPts val="1000"/>
+                <a:spcPts val="1100"/>
               </a:spcAft>
             </a:pPr>
             <a:r>
               <a:rPr sz="1600" b="1" i="0">
                 <a:solidFill>
-                  <a:srgbClr val="2E3A80"/>
-                </a:solidFill>
-                <a:latin typeface="Montserrat"/>
-              </a:rPr>
-              <a:t>•  </a:t>
+                  <a:srgbClr val="E8801A"/>
+                </a:solidFill>
+                <a:latin typeface="Montserrat"/>
+              </a:rPr>
+              <a:t>▸  </a:t>
             </a:r>
             <a:r>
               <a:rPr sz="1600" b="0" i="0">
@@ -9958,23 +11132,23 @@
                 </a:solidFill>
                 <a:latin typeface="Montserrat"/>
               </a:rPr>
-              <a:t>Semisótano: gas ligero hasta 4 m</a:t>
+              <a:t>La norma tiene 13 partes</a:t>
             </a:r>
           </a:p>
           <a:p>
             <a:pPr>
               <a:spcAft>
-                <a:spcPts val="1000"/>
+                <a:spcPts val="1100"/>
               </a:spcAft>
             </a:pPr>
             <a:r>
               <a:rPr sz="1600" b="1" i="0">
                 <a:solidFill>
-                  <a:srgbClr val="2E3A80"/>
-                </a:solidFill>
-                <a:latin typeface="Montserrat"/>
-              </a:rPr>
-              <a:t>•  </a:t>
+                  <a:srgbClr val="E8801A"/>
+                </a:solidFill>
+                <a:latin typeface="Montserrat"/>
+              </a:rPr>
+              <a:t>▸  </a:t>
             </a:r>
             <a:r>
               <a:rPr sz="1600" b="0" i="0">
@@ -9983,23 +11157,23 @@
                 </a:solidFill>
                 <a:latin typeface="Montserrat"/>
               </a:rPr>
-              <a:t>Cocción tipo A en loft, con condiciones</a:t>
+              <a:t>La 6: locales, ventilación y humos</a:t>
             </a:r>
           </a:p>
           <a:p>
             <a:pPr>
               <a:spcAft>
-                <a:spcPts val="1000"/>
+                <a:spcPts val="1100"/>
               </a:spcAft>
             </a:pPr>
             <a:r>
               <a:rPr sz="1600" b="1" i="0">
                 <a:solidFill>
-                  <a:srgbClr val="2E3A80"/>
-                </a:solidFill>
-                <a:latin typeface="Montserrat"/>
-              </a:rPr>
-              <a:t>•  </a:t>
+                  <a:srgbClr val="E8801A"/>
+                </a:solidFill>
+                <a:latin typeface="Montserrat"/>
+              </a:rPr>
+              <a:t>▸  </a:t>
             </a:r>
             <a:r>
               <a:rPr sz="1600" b="0" i="0">
@@ -10008,39 +11182,14 @@
                 </a:solidFill>
                 <a:latin typeface="Montserrat"/>
               </a:rPr>
-              <a:t>Tipo B revisado por completo</a:t>
-            </a:r>
-          </a:p>
-          <a:p>
-            <a:pPr>
-              <a:spcAft>
-                <a:spcPts val="1000"/>
-              </a:spcAft>
-            </a:pPr>
-            <a:r>
-              <a:rPr sz="1600" b="1" i="0">
-                <a:solidFill>
-                  <a:srgbClr val="2E3A80"/>
-                </a:solidFill>
-                <a:latin typeface="Montserrat"/>
-              </a:rPr>
-              <a:t>•  </a:t>
-            </a:r>
-            <a:r>
-              <a:rPr sz="1600" b="0" i="0">
-                <a:solidFill>
-                  <a:srgbClr val="1B2330"/>
-                </a:solidFill>
-                <a:latin typeface="Montserrat"/>
-              </a:rPr>
-              <a:t>Ventilación cruzada industrial &gt; 70 kW</a:t>
-            </a:r>
-          </a:p>
-        </p:txBody>
-      </p:sp>
-      <p:sp>
-        <p:nvSpPr>
-          <p:cNvPr id="8" name="imgph" descr="IMGQ:modern gas boiler wall mounted"/>
+              <a:t>No confundas parte con tema</a:t>
+            </a:r>
+          </a:p>
+        </p:txBody>
+      </p:sp>
+      <p:sp>
+        <p:nvSpPr>
+          <p:cNvPr id="9" name="imgph" descr="IMGQ:technical standard document folder"/>
           <p:cNvSpPr/>
           <p:nvPr/>
         </p:nvSpPr>
@@ -10086,7 +11235,7 @@
       </p:sp>
       <p:sp>
         <p:nvSpPr>
-          <p:cNvPr id="9" name="TextBox 8"/>
+          <p:cNvPr id="10" name="TextBox 9"/>
           <p:cNvSpPr txBox="1"/>
           <p:nvPr/>
         </p:nvSpPr>
@@ -10126,7 +11275,7 @@
                 </a:solidFill>
                 <a:latin typeface="Montserrat"/>
               </a:rPr>
-              <a:t>modern gas boiler wall mounted</a:t>
+              <a:t>technical standard document folder</a:t>
             </a:r>
           </a:p>
         </p:txBody>
@@ -10223,7 +11372,7 @@
                 </a:solidFill>
                 <a:latin typeface="Montserrat"/>
               </a:rPr>
-              <a:t>006 / 018</a:t>
+              <a:t>006 / 019</a:t>
             </a:r>
           </a:p>
         </p:txBody>
@@ -10271,7 +11420,7 @@
         <p:spPr>
           <a:xfrm>
             <a:off x="822960" y="457200"/>
-            <a:ext cx="8229600" cy="365760"/>
+            <a:ext cx="10058400" cy="365760"/>
           </a:xfrm>
           <a:prstGeom prst="rect">
             <a:avLst/>
@@ -10285,13 +11434,13 @@
           <a:lstStyle/>
           <a:p>
             <a:r>
-              <a:rPr sz="1200" b="1" i="0">
-                <a:solidFill>
-                  <a:srgbClr val="64748B"/>
-                </a:solidFill>
-                <a:latin typeface="Montserrat"/>
-              </a:rPr>
-              <a:t>OBJETO</a:t>
+              <a:rPr sz="1300" b="1" i="0">
+                <a:solidFill>
+                  <a:srgbClr val="E8801A"/>
+                </a:solidFill>
+                <a:latin typeface="Montserrat"/>
+              </a:rPr>
+              <a:t>NOVEDADES</a:t>
             </a:r>
           </a:p>
         </p:txBody>
@@ -10319,26 +11468,70 @@
           <a:lstStyle/>
           <a:p>
             <a:r>
-              <a:rPr sz="2700" b="1" i="0">
+              <a:rPr sz="2800" b="1" i="0">
                 <a:solidFill>
                   <a:srgbClr val="1E2761"/>
                 </a:solidFill>
                 <a:latin typeface="Montserrat"/>
               </a:rPr>
-              <a:t>De qué se ocupa y de qué no</a:t>
-            </a:r>
-          </a:p>
-        </p:txBody>
-      </p:sp>
-      <p:sp>
-        <p:nvSpPr>
-          <p:cNvPr id="7" name="TextBox 6"/>
+              <a:t>Lo nuevo que gusta en examen</a:t>
+            </a:r>
+          </a:p>
+        </p:txBody>
+      </p:sp>
+      <p:sp>
+        <p:nvSpPr>
+          <p:cNvPr id="7" name="Rounded Rectangle 6"/>
+          <p:cNvSpPr/>
+          <p:nvPr/>
+        </p:nvSpPr>
+        <p:spPr>
+          <a:xfrm>
+            <a:off x="868680" y="1627632"/>
+            <a:ext cx="2011680" cy="73152"/>
+          </a:xfrm>
+          <a:prstGeom prst="roundRect">
+            <a:avLst/>
+          </a:prstGeom>
+          <a:solidFill>
+            <a:srgbClr val="E8801A"/>
+          </a:solidFill>
+          <a:ln>
+            <a:noFill/>
+          </a:ln>
+          <a:effectLst/>
+        </p:spPr>
+        <p:style>
+          <a:lnRef idx="1">
+            <a:schemeClr val="accent1"/>
+          </a:lnRef>
+          <a:fillRef idx="3">
+            <a:schemeClr val="accent1"/>
+          </a:fillRef>
+          <a:effectRef idx="2">
+            <a:schemeClr val="accent1"/>
+          </a:effectRef>
+          <a:fontRef idx="minor">
+            <a:schemeClr val="lt1"/>
+          </a:fontRef>
+        </p:style>
+        <p:txBody>
+          <a:bodyPr rtlCol="0" anchor="ctr"/>
+          <a:lstStyle/>
+          <a:p>
+            <a:pPr algn="ctr"/>
+          </a:p>
+        </p:txBody>
+      </p:sp>
+      <p:sp>
+        <p:nvSpPr>
+          <p:cNvPr id="8" name="TextBox 7"/>
           <p:cNvSpPr txBox="1"/>
           <p:nvPr/>
         </p:nvSpPr>
         <p:spPr>
           <a:xfrm>
-            <a:off x="822960" y="1920240"/>
+            <a:off x="822960" y="1965960"/>
             <a:ext cx="4983480" cy="4206240"/>
           </a:xfrm>
           <a:prstGeom prst="rect">
@@ -10354,17 +11547,17 @@
           <a:p>
             <a:pPr>
               <a:spcAft>
-                <a:spcPts val="1000"/>
+                <a:spcPts val="1100"/>
               </a:spcAft>
             </a:pPr>
             <a:r>
               <a:rPr sz="1600" b="1" i="0">
                 <a:solidFill>
-                  <a:srgbClr val="2E3A80"/>
-                </a:solidFill>
-                <a:latin typeface="Montserrat"/>
-              </a:rPr>
-              <a:t>•  </a:t>
+                  <a:srgbClr val="E8801A"/>
+                </a:solidFill>
+                <a:latin typeface="Montserrat"/>
+              </a:rPr>
+              <a:t>▸  </a:t>
             </a:r>
             <a:r>
               <a:rPr sz="1600" b="0" i="0">
@@ -10373,23 +11566,23 @@
                 </a:solidFill>
                 <a:latin typeface="Montserrat"/>
               </a:rPr>
-              <a:t>Locales con aparatos de gas</a:t>
+              <a:t>Semisótano: gas ligero hasta 4 m</a:t>
             </a:r>
           </a:p>
           <a:p>
             <a:pPr>
               <a:spcAft>
-                <a:spcPts val="1000"/>
+                <a:spcPts val="1100"/>
               </a:spcAft>
             </a:pPr>
             <a:r>
               <a:rPr sz="1600" b="1" i="0">
                 <a:solidFill>
-                  <a:srgbClr val="2E3A80"/>
-                </a:solidFill>
-                <a:latin typeface="Montserrat"/>
-              </a:rPr>
-              <a:t>•  </a:t>
+                  <a:srgbClr val="E8801A"/>
+                </a:solidFill>
+                <a:latin typeface="Montserrat"/>
+              </a:rPr>
+              <a:t>▸  </a:t>
             </a:r>
             <a:r>
               <a:rPr sz="1600" b="0" i="0">
@@ -10398,23 +11591,23 @@
                 </a:solidFill>
                 <a:latin typeface="Montserrat"/>
               </a:rPr>
-              <a:t>Ventilación y evacuación de humos</a:t>
+              <a:t>Cocción tipo A en loft, con condiciones</a:t>
             </a:r>
           </a:p>
           <a:p>
             <a:pPr>
               <a:spcAft>
-                <a:spcPts val="1000"/>
+                <a:spcPts val="1100"/>
               </a:spcAft>
             </a:pPr>
             <a:r>
               <a:rPr sz="1600" b="1" i="0">
                 <a:solidFill>
-                  <a:srgbClr val="2E3A80"/>
-                </a:solidFill>
-                <a:latin typeface="Montserrat"/>
-              </a:rPr>
-              <a:t>•  </a:t>
+                  <a:srgbClr val="E8801A"/>
+                </a:solidFill>
+                <a:latin typeface="Montserrat"/>
+              </a:rPr>
+              <a:t>▸  </a:t>
             </a:r>
             <a:r>
               <a:rPr sz="1600" b="0" i="0">
@@ -10423,14 +11616,39 @@
                 </a:solidFill>
                 <a:latin typeface="Montserrat"/>
               </a:rPr>
-              <a:t>Fuera: salas de máquinas (UNE 60601)</a:t>
-            </a:r>
-          </a:p>
-        </p:txBody>
-      </p:sp>
-      <p:sp>
-        <p:nvSpPr>
-          <p:cNvPr id="8" name="imgph" descr="IMGQ:industrial boiler room machinery"/>
+              <a:t>Tipo B revisado por completo</a:t>
+            </a:r>
+          </a:p>
+          <a:p>
+            <a:pPr>
+              <a:spcAft>
+                <a:spcPts val="1100"/>
+              </a:spcAft>
+            </a:pPr>
+            <a:r>
+              <a:rPr sz="1600" b="1" i="0">
+                <a:solidFill>
+                  <a:srgbClr val="E8801A"/>
+                </a:solidFill>
+                <a:latin typeface="Montserrat"/>
+              </a:rPr>
+              <a:t>▸  </a:t>
+            </a:r>
+            <a:r>
+              <a:rPr sz="1600" b="0" i="0">
+                <a:solidFill>
+                  <a:srgbClr val="1B2330"/>
+                </a:solidFill>
+                <a:latin typeface="Montserrat"/>
+              </a:rPr>
+              <a:t>Ventilación cruzada industrial &gt; 70 kW</a:t>
+            </a:r>
+          </a:p>
+        </p:txBody>
+      </p:sp>
+      <p:sp>
+        <p:nvSpPr>
+          <p:cNvPr id="9" name="imgph" descr="IMGQ:modern gas boiler wall mounted"/>
           <p:cNvSpPr/>
           <p:nvPr/>
         </p:nvSpPr>
@@ -10476,7 +11694,7 @@
       </p:sp>
       <p:sp>
         <p:nvSpPr>
-          <p:cNvPr id="9" name="TextBox 8"/>
+          <p:cNvPr id="10" name="TextBox 9"/>
           <p:cNvSpPr txBox="1"/>
           <p:nvPr/>
         </p:nvSpPr>
@@ -10516,7 +11734,7 @@
                 </a:solidFill>
                 <a:latin typeface="Montserrat"/>
               </a:rPr>
-              <a:t>industrial boiler room machinery</a:t>
+              <a:t>modern gas boiler wall mounted</a:t>
             </a:r>
           </a:p>
         </p:txBody>
@@ -10613,7 +11831,7 @@
                 </a:solidFill>
                 <a:latin typeface="Montserrat"/>
               </a:rPr>
-              <a:t>007 / 018</a:t>
+              <a:t>007 / 019</a:t>
             </a:r>
           </a:p>
         </p:txBody>
@@ -10661,7 +11879,7 @@
         <p:spPr>
           <a:xfrm>
             <a:off x="822960" y="457200"/>
-            <a:ext cx="8229600" cy="365760"/>
+            <a:ext cx="10058400" cy="365760"/>
           </a:xfrm>
           <a:prstGeom prst="rect">
             <a:avLst/>
@@ -10675,13 +11893,13 @@
           <a:lstStyle/>
           <a:p>
             <a:r>
-              <a:rPr sz="1200" b="1" i="0">
-                <a:solidFill>
-                  <a:srgbClr val="64748B"/>
-                </a:solidFill>
-                <a:latin typeface="Montserrat"/>
-              </a:rPr>
-              <a:t>CLASIFICACIÓN · CIRCUITO ABIERTO</a:t>
+              <a:rPr sz="1300" b="1" i="0">
+                <a:solidFill>
+                  <a:srgbClr val="E8801A"/>
+                </a:solidFill>
+                <a:latin typeface="Montserrat"/>
+              </a:rPr>
+              <a:t>OBJETO</a:t>
             </a:r>
           </a:p>
         </p:txBody>
@@ -10709,26 +11927,70 @@
           <a:lstStyle/>
           <a:p>
             <a:r>
-              <a:rPr sz="2700" b="1" i="0">
+              <a:rPr sz="2800" b="1" i="0">
                 <a:solidFill>
                   <a:srgbClr val="1E2761"/>
                 </a:solidFill>
                 <a:latin typeface="Montserrat"/>
               </a:rPr>
-              <a:t>Tipo A y tipo B: respiran del local</a:t>
-            </a:r>
-          </a:p>
-        </p:txBody>
-      </p:sp>
-      <p:sp>
-        <p:nvSpPr>
-          <p:cNvPr id="7" name="TextBox 6"/>
+              <a:t>De qué se ocupa y de qué no</a:t>
+            </a:r>
+          </a:p>
+        </p:txBody>
+      </p:sp>
+      <p:sp>
+        <p:nvSpPr>
+          <p:cNvPr id="7" name="Rounded Rectangle 6"/>
+          <p:cNvSpPr/>
+          <p:nvPr/>
+        </p:nvSpPr>
+        <p:spPr>
+          <a:xfrm>
+            <a:off x="868680" y="1627632"/>
+            <a:ext cx="2011680" cy="73152"/>
+          </a:xfrm>
+          <a:prstGeom prst="roundRect">
+            <a:avLst/>
+          </a:prstGeom>
+          <a:solidFill>
+            <a:srgbClr val="E8801A"/>
+          </a:solidFill>
+          <a:ln>
+            <a:noFill/>
+          </a:ln>
+          <a:effectLst/>
+        </p:spPr>
+        <p:style>
+          <a:lnRef idx="1">
+            <a:schemeClr val="accent1"/>
+          </a:lnRef>
+          <a:fillRef idx="3">
+            <a:schemeClr val="accent1"/>
+          </a:fillRef>
+          <a:effectRef idx="2">
+            <a:schemeClr val="accent1"/>
+          </a:effectRef>
+          <a:fontRef idx="minor">
+            <a:schemeClr val="lt1"/>
+          </a:fontRef>
+        </p:style>
+        <p:txBody>
+          <a:bodyPr rtlCol="0" anchor="ctr"/>
+          <a:lstStyle/>
+          <a:p>
+            <a:pPr algn="ctr"/>
+          </a:p>
+        </p:txBody>
+      </p:sp>
+      <p:sp>
+        <p:nvSpPr>
+          <p:cNvPr id="8" name="TextBox 7"/>
           <p:cNvSpPr txBox="1"/>
           <p:nvPr/>
         </p:nvSpPr>
         <p:spPr>
           <a:xfrm>
-            <a:off x="822960" y="1920240"/>
+            <a:off x="822960" y="1965960"/>
             <a:ext cx="4983480" cy="4206240"/>
           </a:xfrm>
           <a:prstGeom prst="rect">
@@ -10744,17 +12006,17 @@
           <a:p>
             <a:pPr>
               <a:spcAft>
-                <a:spcPts val="1000"/>
+                <a:spcPts val="1100"/>
               </a:spcAft>
             </a:pPr>
             <a:r>
               <a:rPr sz="1600" b="1" i="0">
                 <a:solidFill>
-                  <a:srgbClr val="2E3A80"/>
-                </a:solidFill>
-                <a:latin typeface="Montserrat"/>
-              </a:rPr>
-              <a:t>•  </a:t>
+                  <a:srgbClr val="E8801A"/>
+                </a:solidFill>
+                <a:latin typeface="Montserrat"/>
+              </a:rPr>
+              <a:t>▸  </a:t>
             </a:r>
             <a:r>
               <a:rPr sz="1600" b="0" i="0">
@@ -10763,23 +12025,23 @@
                 </a:solidFill>
                 <a:latin typeface="Montserrat"/>
               </a:rPr>
-              <a:t>Tipo A: humos al propio local</a:t>
+              <a:t>Locales con aparatos de gas</a:t>
             </a:r>
           </a:p>
           <a:p>
             <a:pPr>
               <a:spcAft>
-                <a:spcPts val="1000"/>
+                <a:spcPts val="1100"/>
               </a:spcAft>
             </a:pPr>
             <a:r>
               <a:rPr sz="1600" b="1" i="0">
                 <a:solidFill>
-                  <a:srgbClr val="2E3A80"/>
-                </a:solidFill>
-                <a:latin typeface="Montserrat"/>
-              </a:rPr>
-              <a:t>•  </a:t>
+                  <a:srgbClr val="E8801A"/>
+                </a:solidFill>
+                <a:latin typeface="Montserrat"/>
+              </a:rPr>
+              <a:t>▸  </a:t>
             </a:r>
             <a:r>
               <a:rPr sz="1600" b="0" i="0">
@@ -10788,23 +12050,23 @@
                 </a:solidFill>
                 <a:latin typeface="Montserrat"/>
               </a:rPr>
-              <a:t>Tipo B: humos fuera por un tubo</a:t>
+              <a:t>Ventilación y evacuación de humos</a:t>
             </a:r>
           </a:p>
           <a:p>
             <a:pPr>
               <a:spcAft>
-                <a:spcPts val="1000"/>
+                <a:spcPts val="1100"/>
               </a:spcAft>
             </a:pPr>
             <a:r>
               <a:rPr sz="1600" b="1" i="0">
                 <a:solidFill>
-                  <a:srgbClr val="2E3A80"/>
-                </a:solidFill>
-                <a:latin typeface="Montserrat"/>
-              </a:rPr>
-              <a:t>•  </a:t>
+                  <a:srgbClr val="E8801A"/>
+                </a:solidFill>
+                <a:latin typeface="Montserrat"/>
+              </a:rPr>
+              <a:t>▸  </a:t>
             </a:r>
             <a:r>
               <a:rPr sz="1600" b="0" i="0">
@@ -10813,14 +12075,14 @@
                 </a:solidFill>
                 <a:latin typeface="Montserrat"/>
               </a:rPr>
-              <a:t>Ambos cogen aire de la habitación</a:t>
-            </a:r>
-          </a:p>
-        </p:txBody>
-      </p:sp>
-      <p:sp>
-        <p:nvSpPr>
-          <p:cNvPr id="8" name="imgph" descr="IMGQ:old gas water heater bathroom"/>
+              <a:t>Fuera: salas de máquinas (UNE 60601)</a:t>
+            </a:r>
+          </a:p>
+        </p:txBody>
+      </p:sp>
+      <p:sp>
+        <p:nvSpPr>
+          <p:cNvPr id="9" name="imgph" descr="IMGQ:industrial boiler room machinery"/>
           <p:cNvSpPr/>
           <p:nvPr/>
         </p:nvSpPr>
@@ -10866,7 +12128,7 @@
       </p:sp>
       <p:sp>
         <p:nvSpPr>
-          <p:cNvPr id="9" name="TextBox 8"/>
+          <p:cNvPr id="10" name="TextBox 9"/>
           <p:cNvSpPr txBox="1"/>
           <p:nvPr/>
         </p:nvSpPr>
@@ -10906,7 +12168,7 @@
                 </a:solidFill>
                 <a:latin typeface="Montserrat"/>
               </a:rPr>
-              <a:t>old gas water heater bathroom</a:t>
+              <a:t>industrial boiler room machinery</a:t>
             </a:r>
           </a:p>
         </p:txBody>
@@ -11003,7 +12265,7 @@
                 </a:solidFill>
                 <a:latin typeface="Montserrat"/>
               </a:rPr>
-              <a:t>008 / 018</a:t>
+              <a:t>008 / 019</a:t>
             </a:r>
           </a:p>
         </p:txBody>
@@ -11051,7 +12313,7 @@
         <p:spPr>
           <a:xfrm>
             <a:off x="822960" y="457200"/>
-            <a:ext cx="8229600" cy="365760"/>
+            <a:ext cx="10058400" cy="365760"/>
           </a:xfrm>
           <a:prstGeom prst="rect">
             <a:avLst/>
@@ -11065,13 +12327,13 @@
           <a:lstStyle/>
           <a:p>
             <a:r>
-              <a:rPr sz="1200" b="1" i="0">
-                <a:solidFill>
-                  <a:srgbClr val="64748B"/>
-                </a:solidFill>
-                <a:latin typeface="Montserrat"/>
-              </a:rPr>
-              <a:t>CLASIFICACIÓN · CIRCUITO ESTANCO</a:t>
+              <a:rPr sz="1300" b="1" i="0">
+                <a:solidFill>
+                  <a:srgbClr val="E8801A"/>
+                </a:solidFill>
+                <a:latin typeface="Montserrat"/>
+              </a:rPr>
+              <a:t>CLASIFICACIÓN · CIRCUITO ABIERTO</a:t>
             </a:r>
           </a:p>
         </p:txBody>
@@ -11099,26 +12361,70 @@
           <a:lstStyle/>
           <a:p>
             <a:r>
-              <a:rPr sz="2700" b="1" i="0">
+              <a:rPr sz="2800" b="1" i="0">
                 <a:solidFill>
                   <a:srgbClr val="1E2761"/>
                 </a:solidFill>
                 <a:latin typeface="Montserrat"/>
               </a:rPr>
-              <a:t>Tipo C: ni toca el aire del local</a:t>
-            </a:r>
-          </a:p>
-        </p:txBody>
-      </p:sp>
-      <p:sp>
-        <p:nvSpPr>
-          <p:cNvPr id="7" name="TextBox 6"/>
+              <a:t>Tipo A y tipo B: respiran del local</a:t>
+            </a:r>
+          </a:p>
+        </p:txBody>
+      </p:sp>
+      <p:sp>
+        <p:nvSpPr>
+          <p:cNvPr id="7" name="Rounded Rectangle 6"/>
+          <p:cNvSpPr/>
+          <p:nvPr/>
+        </p:nvSpPr>
+        <p:spPr>
+          <a:xfrm>
+            <a:off x="868680" y="1627632"/>
+            <a:ext cx="2011680" cy="73152"/>
+          </a:xfrm>
+          <a:prstGeom prst="roundRect">
+            <a:avLst/>
+          </a:prstGeom>
+          <a:solidFill>
+            <a:srgbClr val="E8801A"/>
+          </a:solidFill>
+          <a:ln>
+            <a:noFill/>
+          </a:ln>
+          <a:effectLst/>
+        </p:spPr>
+        <p:style>
+          <a:lnRef idx="1">
+            <a:schemeClr val="accent1"/>
+          </a:lnRef>
+          <a:fillRef idx="3">
+            <a:schemeClr val="accent1"/>
+          </a:fillRef>
+          <a:effectRef idx="2">
+            <a:schemeClr val="accent1"/>
+          </a:effectRef>
+          <a:fontRef idx="minor">
+            <a:schemeClr val="lt1"/>
+          </a:fontRef>
+        </p:style>
+        <p:txBody>
+          <a:bodyPr rtlCol="0" anchor="ctr"/>
+          <a:lstStyle/>
+          <a:p>
+            <a:pPr algn="ctr"/>
+          </a:p>
+        </p:txBody>
+      </p:sp>
+      <p:sp>
+        <p:nvSpPr>
+          <p:cNvPr id="8" name="TextBox 7"/>
           <p:cNvSpPr txBox="1"/>
           <p:nvPr/>
         </p:nvSpPr>
         <p:spPr>
           <a:xfrm>
-            <a:off x="822960" y="1920240"/>
+            <a:off x="822960" y="1965960"/>
             <a:ext cx="4983480" cy="4206240"/>
           </a:xfrm>
           <a:prstGeom prst="rect">
@@ -11134,17 +12440,17 @@
           <a:p>
             <a:pPr>
               <a:spcAft>
-                <a:spcPts val="1000"/>
+                <a:spcPts val="1100"/>
               </a:spcAft>
             </a:pPr>
             <a:r>
               <a:rPr sz="1600" b="1" i="0">
                 <a:solidFill>
-                  <a:srgbClr val="2E3A80"/>
-                </a:solidFill>
-                <a:latin typeface="Montserrat"/>
-              </a:rPr>
-              <a:t>•  </a:t>
+                  <a:srgbClr val="E8801A"/>
+                </a:solidFill>
+                <a:latin typeface="Montserrat"/>
+              </a:rPr>
+              <a:t>▸  </a:t>
             </a:r>
             <a:r>
               <a:rPr sz="1600" b="0" i="0">
@@ -11153,23 +12459,23 @@
                 </a:solidFill>
                 <a:latin typeface="Montserrat"/>
               </a:rPr>
-              <a:t>Circuito de combustión cerrado</a:t>
+              <a:t>Tipo A: humos al propio local</a:t>
             </a:r>
           </a:p>
           <a:p>
             <a:pPr>
               <a:spcAft>
-                <a:spcPts val="1000"/>
+                <a:spcPts val="1100"/>
               </a:spcAft>
             </a:pPr>
             <a:r>
               <a:rPr sz="1600" b="1" i="0">
                 <a:solidFill>
-                  <a:srgbClr val="2E3A80"/>
-                </a:solidFill>
-                <a:latin typeface="Montserrat"/>
-              </a:rPr>
-              <a:t>•  </a:t>
+                  <a:srgbClr val="E8801A"/>
+                </a:solidFill>
+                <a:latin typeface="Montserrat"/>
+              </a:rPr>
+              <a:t>▸  </a:t>
             </a:r>
             <a:r>
               <a:rPr sz="1600" b="0" i="0">
@@ -11178,23 +12484,23 @@
                 </a:solidFill>
                 <a:latin typeface="Montserrat"/>
               </a:rPr>
-              <a:t>Aire de fuera, humos fuera</a:t>
+              <a:t>Tipo B: humos fuera por un tubo</a:t>
             </a:r>
           </a:p>
           <a:p>
             <a:pPr>
               <a:spcAft>
-                <a:spcPts val="1000"/>
+                <a:spcPts val="1100"/>
               </a:spcAft>
             </a:pPr>
             <a:r>
               <a:rPr sz="1600" b="1" i="0">
                 <a:solidFill>
-                  <a:srgbClr val="2E3A80"/>
-                </a:solidFill>
-                <a:latin typeface="Montserrat"/>
-              </a:rPr>
-              <a:t>•  </a:t>
+                  <a:srgbClr val="E8801A"/>
+                </a:solidFill>
+                <a:latin typeface="Montserrat"/>
+              </a:rPr>
+              <a:t>▸  </a:t>
             </a:r>
             <a:r>
               <a:rPr sz="1600" b="0" i="0">
@@ -11203,14 +12509,14 @@
                 </a:solidFill>
                 <a:latin typeface="Montserrat"/>
               </a:rPr>
-              <a:t>El más seguro de los tres</a:t>
-            </a:r>
-          </a:p>
-        </p:txBody>
-      </p:sp>
-      <p:sp>
-        <p:nvSpPr>
-          <p:cNvPr id="8" name="imgph" descr="IMGQ:condensing boiler concentric flue"/>
+              <a:t>Ambos cogen aire de la habitación</a:t>
+            </a:r>
+          </a:p>
+        </p:txBody>
+      </p:sp>
+      <p:sp>
+        <p:nvSpPr>
+          <p:cNvPr id="9" name="imgph" descr="IMGQ:old gas water heater bathroom"/>
           <p:cNvSpPr/>
           <p:nvPr/>
         </p:nvSpPr>
@@ -11256,7 +12562,7 @@
       </p:sp>
       <p:sp>
         <p:nvSpPr>
-          <p:cNvPr id="9" name="TextBox 8"/>
+          <p:cNvPr id="10" name="TextBox 9"/>
           <p:cNvSpPr txBox="1"/>
           <p:nvPr/>
         </p:nvSpPr>
@@ -11296,7 +12602,7 @@
                 </a:solidFill>
                 <a:latin typeface="Montserrat"/>
               </a:rPr>
-              <a:t>condensing boiler concentric flue</a:t>
+              <a:t>old gas water heater bathroom</a:t>
             </a:r>
           </a:p>
         </p:txBody>
@@ -11393,7 +12699,7 @@
                 </a:solidFill>
                 <a:latin typeface="Montserrat"/>
               </a:rPr>
-              <a:t>009 / 018</a:t>
+              <a:t>009 / 019</a:t>
             </a:r>
           </a:p>
         </p:txBody>
@@ -11441,7 +12747,7 @@
         <p:spPr>
           <a:xfrm>
             <a:off x="822960" y="457200"/>
-            <a:ext cx="8229600" cy="365760"/>
+            <a:ext cx="10058400" cy="365760"/>
           </a:xfrm>
           <a:prstGeom prst="rect">
             <a:avLst/>
@@ -11455,13 +12761,13 @@
           <a:lstStyle/>
           <a:p>
             <a:r>
-              <a:rPr sz="1200" b="1" i="0">
-                <a:solidFill>
-                  <a:srgbClr val="64748B"/>
-                </a:solidFill>
-                <a:latin typeface="Montserrat"/>
-              </a:rPr>
-              <a:t>TIRO NATURAL Y FORZADO</a:t>
+              <a:rPr sz="1300" b="1" i="0">
+                <a:solidFill>
+                  <a:srgbClr val="E8801A"/>
+                </a:solidFill>
+                <a:latin typeface="Montserrat"/>
+              </a:rPr>
+              <a:t>CLASIFICACIÓN · CIRCUITO ESTANCO</a:t>
             </a:r>
           </a:p>
         </p:txBody>
@@ -11489,26 +12795,70 @@
           <a:lstStyle/>
           <a:p>
             <a:r>
-              <a:rPr sz="2700" b="1" i="0">
+              <a:rPr sz="2800" b="1" i="0">
                 <a:solidFill>
                   <a:srgbClr val="1E2761"/>
                 </a:solidFill>
                 <a:latin typeface="Montserrat"/>
               </a:rPr>
-              <a:t>¿Los humos suben solos o empujados?</a:t>
-            </a:r>
-          </a:p>
-        </p:txBody>
-      </p:sp>
-      <p:sp>
-        <p:nvSpPr>
-          <p:cNvPr id="7" name="TextBox 6"/>
+              <a:t>Tipo C: ni toca el aire del local</a:t>
+            </a:r>
+          </a:p>
+        </p:txBody>
+      </p:sp>
+      <p:sp>
+        <p:nvSpPr>
+          <p:cNvPr id="7" name="Rounded Rectangle 6"/>
+          <p:cNvSpPr/>
+          <p:nvPr/>
+        </p:nvSpPr>
+        <p:spPr>
+          <a:xfrm>
+            <a:off x="868680" y="1627632"/>
+            <a:ext cx="2011680" cy="73152"/>
+          </a:xfrm>
+          <a:prstGeom prst="roundRect">
+            <a:avLst/>
+          </a:prstGeom>
+          <a:solidFill>
+            <a:srgbClr val="E8801A"/>
+          </a:solidFill>
+          <a:ln>
+            <a:noFill/>
+          </a:ln>
+          <a:effectLst/>
+        </p:spPr>
+        <p:style>
+          <a:lnRef idx="1">
+            <a:schemeClr val="accent1"/>
+          </a:lnRef>
+          <a:fillRef idx="3">
+            <a:schemeClr val="accent1"/>
+          </a:fillRef>
+          <a:effectRef idx="2">
+            <a:schemeClr val="accent1"/>
+          </a:effectRef>
+          <a:fontRef idx="minor">
+            <a:schemeClr val="lt1"/>
+          </a:fontRef>
+        </p:style>
+        <p:txBody>
+          <a:bodyPr rtlCol="0" anchor="ctr"/>
+          <a:lstStyle/>
+          <a:p>
+            <a:pPr algn="ctr"/>
+          </a:p>
+        </p:txBody>
+      </p:sp>
+      <p:sp>
+        <p:nvSpPr>
+          <p:cNvPr id="8" name="TextBox 7"/>
           <p:cNvSpPr txBox="1"/>
           <p:nvPr/>
         </p:nvSpPr>
         <p:spPr>
           <a:xfrm>
-            <a:off x="822960" y="1920240"/>
+            <a:off x="822960" y="1965960"/>
             <a:ext cx="4983480" cy="4206240"/>
           </a:xfrm>
           <a:prstGeom prst="rect">
@@ -11524,17 +12874,17 @@
           <a:p>
             <a:pPr>
               <a:spcAft>
-                <a:spcPts val="1000"/>
+                <a:spcPts val="1100"/>
               </a:spcAft>
             </a:pPr>
             <a:r>
               <a:rPr sz="1600" b="1" i="0">
                 <a:solidFill>
-                  <a:srgbClr val="2E3A80"/>
-                </a:solidFill>
-                <a:latin typeface="Montserrat"/>
-              </a:rPr>
-              <a:t>•  </a:t>
+                  <a:srgbClr val="E8801A"/>
+                </a:solidFill>
+                <a:latin typeface="Montserrat"/>
+              </a:rPr>
+              <a:t>▸  </a:t>
             </a:r>
             <a:r>
               <a:rPr sz="1600" b="0" i="0">
@@ -11543,23 +12893,23 @@
                 </a:solidFill>
                 <a:latin typeface="Montserrat"/>
               </a:rPr>
-              <a:t>Tiro natural: suben por el calor</a:t>
+              <a:t>Circuito de combustión cerrado</a:t>
             </a:r>
           </a:p>
           <a:p>
             <a:pPr>
               <a:spcAft>
-                <a:spcPts val="1000"/>
+                <a:spcPts val="1100"/>
               </a:spcAft>
             </a:pPr>
             <a:r>
               <a:rPr sz="1600" b="1" i="0">
                 <a:solidFill>
-                  <a:srgbClr val="2E3A80"/>
-                </a:solidFill>
-                <a:latin typeface="Montserrat"/>
-              </a:rPr>
-              <a:t>•  </a:t>
+                  <a:srgbClr val="E8801A"/>
+                </a:solidFill>
+                <a:latin typeface="Montserrat"/>
+              </a:rPr>
+              <a:t>▸  </a:t>
             </a:r>
             <a:r>
               <a:rPr sz="1600" b="0" i="0">
@@ -11568,23 +12918,23 @@
                 </a:solidFill>
                 <a:latin typeface="Montserrat"/>
               </a:rPr>
-              <a:t>Tiro forzado: los empuja un ventilador</a:t>
+              <a:t>Aire de fuera, humos fuera</a:t>
             </a:r>
           </a:p>
           <a:p>
             <a:pPr>
               <a:spcAft>
-                <a:spcPts val="1000"/>
+                <a:spcPts val="1100"/>
               </a:spcAft>
             </a:pPr>
             <a:r>
               <a:rPr sz="1600" b="1" i="0">
                 <a:solidFill>
-                  <a:srgbClr val="2E3A80"/>
-                </a:solidFill>
-                <a:latin typeface="Montserrat"/>
-              </a:rPr>
-              <a:t>•  </a:t>
+                  <a:srgbClr val="E8801A"/>
+                </a:solidFill>
+                <a:latin typeface="Montserrat"/>
+              </a:rPr>
+              <a:t>▸  </a:t>
             </a:r>
             <a:r>
               <a:rPr sz="1600" b="0" i="0">
@@ -11593,14 +12943,14 @@
                 </a:solidFill>
                 <a:latin typeface="Montserrat"/>
               </a:rPr>
-              <a:t>BS: dispositivo antirrevoco</a:t>
-            </a:r>
-          </a:p>
-        </p:txBody>
-      </p:sp>
-      <p:sp>
-        <p:nvSpPr>
-          <p:cNvPr id="8" name="imgph" descr="IMGQ:chimney flue on rooftop"/>
+              <a:t>El más seguro de los tres</a:t>
+            </a:r>
+          </a:p>
+        </p:txBody>
+      </p:sp>
+      <p:sp>
+        <p:nvSpPr>
+          <p:cNvPr id="9" name="imgph" descr="IMGQ:condensing boiler concentric flue"/>
           <p:cNvSpPr/>
           <p:nvPr/>
         </p:nvSpPr>
@@ -11646,7 +12996,7 @@
       </p:sp>
       <p:sp>
         <p:nvSpPr>
-          <p:cNvPr id="9" name="TextBox 8"/>
+          <p:cNvPr id="10" name="TextBox 9"/>
           <p:cNvSpPr txBox="1"/>
           <p:nvPr/>
         </p:nvSpPr>
@@ -11686,7 +13036,7 @@
                 </a:solidFill>
                 <a:latin typeface="Montserrat"/>
               </a:rPr>
-              <a:t>chimney flue on rooftop</a:t>
+              <a:t>condensing boiler concentric flue</a:t>
             </a:r>
           </a:p>
         </p:txBody>

--- a/Curso Gas B/13 - UNE 60670 - Ventilacion y evacuacion de humos/13 - UNE 60670 - Ventilacion y evacuacion de humos - Vídeo 1.pptx
+++ b/Curso Gas B/13 - UNE 60670 - Ventilacion y evacuacion de humos/13 - UNE 60670 - Ventilacion y evacuacion de humos - Vídeo 1.pptx
@@ -24,6 +24,11 @@
     <p:sldId id="272" r:id="rId24"/>
     <p:sldId id="273" r:id="rId25"/>
     <p:sldId id="274" r:id="rId26"/>
+    <p:sldId id="275" r:id="rId27"/>
+    <p:sldId id="276" r:id="rId28"/>
+    <p:sldId id="277" r:id="rId29"/>
+    <p:sldId id="278" r:id="rId30"/>
+    <p:sldId id="279" r:id="rId31"/>
   </p:sldIdLst>
   <p:sldSz cx="12191695" cy="6858000" type="screen4x3"/>
   <p:notesSz cx="6858000" cy="9144000"/>
@@ -595,12 +600,12 @@
           <a:lstStyle/>
           <a:p>
             <a:r>
-              <a:t>N1: Me suena lo de «tiro natural» y «tiro forzado», pero ¿qué es?</a:t>
-            </a:r>
-          </a:p>
-          <a:p>
-            <a:r>
-              <a:t>N2: Es cómo salen los humos por el conducto, y se distingue muy fácil. Tiro natural: los humos suben solos porque están calientes y el aire caliente pesa menos, igual que el humo de una chimenea de leña. Tiro forzado: hay un ventilador o extractor dentro del aparato que los empuja. Regla de examen: si el aparato lleva ventilador, es de tiro forzado; si suben por sí mismos, tiro natural. Y una sigla que cae: el BS es el tipo B de tiro natural que lleva dispositivo antirrevoco. Antirrevoco quiere decir que corta el aparato si los humos, en vez de salir, se vuelven hacia dentro. Un pequeño guardián que evita que el humo te entre en casa.</a:t>
+              <a:t>N1: ¿Y el tipo C por qué es distinto?</a:t>
+            </a:r>
+          </a:p>
+          <a:p>
+            <a:r>
+              <a:t>N2: El tipo C es estanco, y esa palabra lo cambia todo. Estanco significa que su circuito de combustión, la entrada de aire y la salida de humos, está cerrado y aislado del local. No respira tu habitación: coge el aire directamente de fuera y devuelve los humos fuera, normalmente por el mismo tubo de doble pared que llamamos ventosa. Es la caldera moderna que ves en cualquier cocina. Al no tocar el aire del local ni soltar humos dentro, es con diferencia el más seguro, y por eso es el único que puedes meter casi en cualquier sitio. Chuleta: A se lo queda todo, B tira los humos, C ni te toca el aire.</a:t>
             </a:r>
           </a:p>
         </p:txBody>
@@ -670,12 +675,12 @@
           <a:lstStyle/>
           <a:p>
             <a:r>
-              <a:t>N1: ¿Por qué el gas natural sí y el butano no en un semisótano?</a:t>
-            </a:r>
-          </a:p>
-          <a:p>
-            <a:r>
-              <a:t>N2: Todo depende de si el gas sube o baja al escaparse. El gas natural es menos denso que el aire: si hay fuga, sube hacia el techo. El GLP, butano o propano, es más denso: baja y se acumula en las zonas bajas, como si fuera agua. Ahora piénsalo en un semisótano, que ya es una zona hundida. Con GLP sería una trampa: el gas se quedaría abajo formando una bolsa invisible esperando una chispa. Por eso, con GLP nunca metes aparatos en un semisótano. Con gas natural sí se permite, pero solo si el semisótano no está muy hundido: hasta cuatro metros de diferencia entre su suelo y la calle. Idea corta: gas pesado y zona baja, peligro; gas ligero y poco hundido, tolerable.</a:t>
+              <a:t>N1: Me suena lo de «tiro natural» y «tiro forzado», pero ¿qué es?</a:t>
+            </a:r>
+          </a:p>
+          <a:p>
+            <a:r>
+              <a:t>N2: Es cómo salen los humos por el conducto, y se distingue muy fácil. Tiro natural: los humos suben solos porque están calientes y el aire caliente pesa menos, igual que el humo de una chimenea de leña. Tiro forzado: hay un ventilador o extractor dentro del aparato que los empuja. Regla de examen: si el aparato lleva ventilador, es de tiro forzado; si suben por sí mismos, tiro natural. Y una sigla que cae: el BS es el tipo B de tiro natural que lleva dispositivo antirrevoco. Antirrevoco quiere decir que corta el aparato si los humos, en vez de salir, se vuelven hacia dentro. Un pequeño guardián que evita que el humo te entre en casa.</a:t>
             </a:r>
           </a:p>
         </p:txBody>
@@ -745,12 +750,12 @@
           <a:lstStyle/>
           <a:p>
             <a:r>
-              <a:t>N1: ¿Qué pasa cuando junto varias calderas grandes en un cuarto?</a:t>
-            </a:r>
-          </a:p>
-          <a:p>
-            <a:r>
-              <a:t>N2: Ahí aparece un número que tienes que grabarte: setenta kilovatios. Si sumas las potencias de las calderas de calefacción o agua caliente, más los equipos de absorción para frío, más la cogeneración, todo en el mismo local, y esa suma pasa de setenta kilovatios, ese cuarto deja de ser un local normal: pasa a ser una sala de máquinas. Y una sala de máquinas tiene requisitos propios que no manda esta parte seis, sino la UNE seis mil seiscientos uno y el RITE, el reglamento de instalaciones térmicas. Cambia hasta el papeleo: te pide proyecto y tramitación aparte. Por debajo de setenta, sigues en tu terreno. Y ojo, ese setenta reaparece en el vídeo dos, con la ventilación industrial.</a:t>
+              <a:t>N1: ¿Por qué el gas natural sí y el butano no en un semisótano?</a:t>
+            </a:r>
+          </a:p>
+          <a:p>
+            <a:r>
+              <a:t>N2: Todo depende de si el gas sube o baja al escaparse. El gas natural es menos denso que el aire: si hay fuga, sube hacia el techo. El GLP, butano o propano, es más denso: baja y se acumula en las zonas bajas, como si fuera agua. Ahora piénsalo en un semisótano, que ya es una zona hundida. Con GLP sería una trampa: el gas se quedaría abajo formando una bolsa invisible esperando una chispa. Por eso, con GLP nunca metes aparatos en un semisótano. Con gas natural sí se permite, pero solo si el semisótano no está muy hundido: hasta cuatro metros de diferencia entre su suelo y la calle. Idea corta: gas pesado y zona baja, peligro; gas ligero y poco hundido, tolerable.</a:t>
             </a:r>
           </a:p>
         </p:txBody>
@@ -820,12 +825,12 @@
           <a:lstStyle/>
           <a:p>
             <a:r>
-              <a:t>N1: ¿Qué aparatos de tipo A puedo poner en un local normal?</a:t>
-            </a:r>
-          </a:p>
-          <a:p>
-            <a:r>
-              <a:t>N2: La norma hace una lista, pero basta con que entiendas la lógica. Primero, todo lo de cocinar: cocinas, hornos, cafeteras, barbacoas. Segundo, aparatos de calefacción que usan el calor directamente, pero solo en sitios como almacenes, talleres o naves industriales, no en tu salón; ahí entran los generadores de aire caliente y los tubos radiantes. Y tercero, otros aparatos pequeños con quemador de gas y consumo por debajo de cuatro coma sesenta y cinco kilovatios, como un frigorífico de gas. La idea de fondo: como el tipo A suelta los humos dentro, la norma solo permite los usos donde tiene sentido y con potencia contenida. Guárdate ese cuatro coma sesenta y cinco, que tiene una excepción importante que vemos ahora.</a:t>
+              <a:t>N1: ¿Qué pasa cuando junto varias calderas grandes en un cuarto?</a:t>
+            </a:r>
+          </a:p>
+          <a:p>
+            <a:r>
+              <a:t>N2: Ahí aparece un número que tienes que grabarte: setenta kilovatios. Si sumas las potencias de las calderas de calefacción o agua caliente, más los equipos de absorción para frío, más la cogeneración, todo en el mismo local, y esa suma pasa de setenta kilovatios, ese cuarto deja de ser un local normal: pasa a ser una sala de máquinas. Y una sala de máquinas tiene requisitos propios que no manda esta parte seis, sino la UNE seis mil seiscientos uno y el RITE, el reglamento de instalaciones térmicas. Cambia hasta el papeleo: te pide proyecto y tramitación aparte. Por debajo de setenta, sigues en tu terreno. Y ojo, ese setenta reaparece en el vídeo dos, con la ventilación industrial.</a:t>
             </a:r>
           </a:p>
         </p:txBody>
@@ -895,12 +900,12 @@
           <a:lstStyle/>
           <a:p>
             <a:r>
-              <a:t>N1: ¿Hay sitios donde el tipo A esté prohibido sí o sí?</a:t>
-            </a:r>
-          </a:p>
-          <a:p>
-            <a:r>
-              <a:t>N2: Sí, y esto es de hierro. Un aparato de tipo A no se instala nunca en un dormitorio ni en un baño, ducha o aseo. La razón es de vida o muerte: son sitios donde duermes o donde te encierras con el vapor de la ducha, y un aparato que suelta humos ahí te puede intoxicar sin que te enteres. Es la causa directa de muchas intoxicaciones por monóxido cada invierno. Y hay una excepción tramposa dentro del tipo A: aunque se permiten «otros aparatos» de poca potencia, el calentador o acumulador de agua caliente de tipo A no se pone jamás, ni siendo pequeño. ¿Por qué? Porque estaría soltando humos dentro de casa durante horas para calentar el depósito. Si te preguntan «¿un acumulador de ACS de tipo A si es de poca potencia?», la respuesta es no, nunca.</a:t>
+              <a:t>N1: ¿Qué aparatos de tipo A puedo poner en un local normal?</a:t>
+            </a:r>
+          </a:p>
+          <a:p>
+            <a:r>
+              <a:t>N2: La norma hace una lista, pero basta con que entiendas la lógica. Primero, todo lo de cocinar: cocinas, hornos, cafeteras, barbacoas. Segundo, aparatos de calefacción que usan el calor directamente, pero solo en sitios como almacenes, talleres o naves industriales, no en tu salón; ahí entran los generadores de aire caliente y los tubos radiantes. Y tercero, otros aparatos pequeños con quemador de gas y consumo por debajo de cuatro coma sesenta y cinco kilovatios, como un frigorífico de gas. La idea de fondo: como el tipo A suelta los humos dentro, la norma solo permite los usos donde tiene sentido y con potencia contenida. Guárdate ese cuatro coma sesenta y cinco, que tiene una excepción importante que vemos ahora.</a:t>
             </a:r>
           </a:p>
         </p:txBody>
@@ -970,12 +975,12 @@
           <a:lstStyle/>
           <a:p>
             <a:r>
-              <a:t>N1: ¿Qué pinta la «seguridad de llama» en todo esto?</a:t>
-            </a:r>
-          </a:p>
-          <a:p>
-            <a:r>
-              <a:t>N2: Es un detalle pequeño que decide mucho. La seguridad de llama es un dispositivo, un termopar o un detector, que corta el gas solo si la llama se apaga. Los fuegos antiguos no lo tenían: si se apagaba la llama, seguían soltando gas. Por eso, los aparatos de fuego abierto sin seguridad de llama exigen ventilación rápida, una abertura grande para desalojar de golpe. Los modernos, con seguridad en todos los fuegos, no la necesitan. Y para el loft, tres condiciones que van juntas: la cocina tiene que tener seguridad de llama, la suma de potencia de cocción no puede pasar de doce kilovatios, y el volumen del loft no puede bajar de ochenta metros cúbicos. Piensa: loft, solo cocinar, con seguridad y que sea amplio.</a:t>
+              <a:t>N1: ¿Hay sitios donde el tipo A esté prohibido sí o sí?</a:t>
+            </a:r>
+          </a:p>
+          <a:p>
+            <a:r>
+              <a:t>N2: Sí, y esto es de hierro. Un aparato de tipo A no se instala nunca en un dormitorio ni en un baño, ducha o aseo. La razón es de vida o muerte: son sitios donde duermes o donde te encierras con el vapor de la ducha, y un aparato que suelta humos ahí te puede intoxicar sin que te enteres. Es la causa directa de muchas intoxicaciones por monóxido cada invierno. Y hay una excepción tramposa dentro del tipo A: aunque se permiten «otros aparatos» de poca potencia, el calentador o acumulador de agua caliente de tipo A no se pone jamás, ni siendo pequeño. ¿Por qué? Porque estaría soltando humos dentro de casa durante horas para calentar el depósito. Si te preguntan «¿un acumulador de ACS de tipo A si es de poca potencia?», la respuesta es no, nunca.</a:t>
             </a:r>
           </a:p>
         </p:txBody>
@@ -1045,12 +1050,12 @@
           <a:lstStyle/>
           <a:p>
             <a:r>
-              <a:t>N1: El tipo B también roba aire del local... ¿está igual de limitado que el A?</a:t>
-            </a:r>
-          </a:p>
-          <a:p>
-            <a:r>
-              <a:t>N2: En lo básico, sí: tampoco se instala en dormitorio ni en baño, ducha o aseo, ni en un cuarto que comunique con ellos si la única forma de entrar es por ahí. Misma lógica: coge aire del local para tirar los humos, y no quieres eso donde alguien duerme o se ducha. Pero hay una variante más segura, el B3x, que es como «el tipo B con permiso especial». Al estar mejor resuelto, se le abren puertas: puede ir en cocinas, lavaderos o garajes, donde el B normal no entra. Y es la única excepción a la prohibición de comunicar con dormitorio o baño. Cuando veas «B3x», piensa: el tipo B que sí puede estar en más sitios.</a:t>
+              <a:t>N1: Pregunta trampa clásica. Un termo de agua de tipo A pequeñito, ¿pasa?</a:t>
+            </a:r>
+          </a:p>
+          <a:p>
+            <a:r>
+              <a:t>N2: Ojo, que aquí la poca potencia no te salva. Piensa cuántas horas estaría soltando humos dentro de casa.</a:t>
             </a:r>
           </a:p>
         </p:txBody>
@@ -1120,12 +1125,12 @@
           <a:lstStyle/>
           <a:p>
             <a:r>
-              <a:t>N1: ¿Qué tiene que ver la campana de la cocina con un calentador?</a:t>
-            </a:r>
-          </a:p>
-          <a:p>
-            <a:r>
-              <a:t>N2: Es uno de los accidentes domésticos más típicos, merece entenderlo bien. Imagina un calentador antiguo de tipo B de tiro natural, de los que sacan los humos por su propio tiro suave. Ahora enciendes la campana extractora de la cocina, que tira con fuerza. Esa campana puede «chupar» los humos del calentador hacia dentro de casa en vez de dejarlos salir por su conducto. Resultado: monóxido de carbono en el salón. Por eso, en instalaciones existentes, al ponerlas en servicio hay que impedir de forma automática que el calentador y el extractor funcionen a la vez de forma peligrosa, y ese corte debe actuar en dos minutos o menos. Cuando en obra veas un calentador viejo cerca de una campana potente, salta la alarma: es un diagnóstico de avería clásico.</a:t>
+              <a:t>N1: ¿Por qué nunca?</a:t>
+            </a:r>
+          </a:p>
+          <a:p>
+            <a:r>
+              <a:t>N2: Porque aunque los «otros aparatos» de tipo A de menos de cuatro coma sesenta y cinco kilovatios se permiten, la norma saca una excepción tajante: el aparato de producción de agua caliente sanitaria por acumulación de tipo A no se instala jamás. Un depósito soltando humos durante horas dentro de casa es un riesgo de intoxicación. El truco: si ves «acumulador de ACS de tipo A», la respuesta es no, nunca, da igual la potencia.</a:t>
             </a:r>
           </a:p>
         </p:txBody>
@@ -1195,12 +1200,12 @@
           <a:lstStyle/>
           <a:p>
             <a:r>
-              <a:t>N1: Y el tipo C, que dices que es el más seguro, ¿dónde puede ir?</a:t>
-            </a:r>
-          </a:p>
-          <a:p>
-            <a:r>
-              <a:t>N2: Prácticamente en cualquier sitio, por eso lo llamo el todoterreno. Como es estanco, no toca el aire del local ni suelta humos dentro, así que se permite en zona exterior y en cualquier local, incluidos dormitorios y baños, ducha o aseo. Por eso las calderas modernas de ventosa son de tipo C: van donde no puede ir ningún otro. La única pega en un baño o dormitorio no es el gas, es la electricidad: al ser locales húmedos, la parte eléctrica tiene que cumplir el reglamento de baja tensión. Chuleta directa: si te preguntan qué aparato se puede poner en un dormitorio, la respuesta es tipo C.</a:t>
+              <a:t>N1: ¿Qué pinta la «seguridad de llama» en todo esto?</a:t>
+            </a:r>
+          </a:p>
+          <a:p>
+            <a:r>
+              <a:t>N2: Es un detalle pequeño que decide mucho. La seguridad de llama es un dispositivo, un termopar o un detector, que corta el gas solo si la llama se apaga. Los fuegos antiguos no lo tenían: si se apagaba la llama, seguían soltando gas. Por eso, los aparatos de fuego abierto sin seguridad de llama exigen ventilación rápida, una abertura grande para desalojar de golpe. Los modernos, con seguridad en todos los fuegos, no la necesitan. Y para el loft, tres condiciones que van juntas: la cocina tiene que tener seguridad de llama, la suma de potencia de cocción no puede pasar de doce kilovatios, y el volumen del loft no puede bajar de ochenta metros cúbicos. Piensa: loft, solo cocinar, con seguridad y que sea amplio.</a:t>
             </a:r>
           </a:p>
         </p:txBody>
@@ -1270,22 +1275,12 @@
           <a:lstStyle/>
           <a:p>
             <a:r>
-              <a:t>N1: Profe, cierra el vídeo: ¿cómo lo enlazo todo?</a:t>
-            </a:r>
-          </a:p>
-          <a:p>
-            <a:r>
-              <a:t>N2: Reconstruyamos el hilo. Empezamos por lo primero de cualquier obra: clasificar el aparato, porque de la letra cuelga todo. El tipo A se queda los humos en el local, el B los tira fuera por un tubo pero roba aire de la habitación, y el C es estanco, ni respira tu cuarto. De ahí sale la regla de dónde va cada uno: A y B jamás en dormitorio o baño, porque intoxican; el único que entra ahí es el C. Luego los datos que no se te pueden caer: en semisótano el GLP nunca y el gas natural solo hasta cuatro metros, porque el gas pesado se acumula abajo; y la frontera de setenta kilovatios que convierte un cuarto en sala de máquinas y te cambia hasta el papeleo.</a:t>
-            </a:r>
-          </a:p>
-          <a:p>
-            <a:r>
-              <a:t>N1: ¿Y cómo cae esto en el examen y en la obra?</a:t>
-            </a:r>
-          </a:p>
-          <a:p>
-            <a:r>
-              <a:t>N2: En el examen se pregunta cruzado: «tipo A en un baño», «acumulador de ACS de tipo A», «GLP en semisótano»; si tienes clara la lógica, no fallas. Y en la obra, esto decide si firmas el certificado o si detectas una anomalía que hay que corregir antes de dar gas. Hoy ya eres más gasista que ayer: sabes leer un aparato de un vistazo. En el vídeo dos damos el salto a los números: qué volumen mínimo pide el local y cuánta rejilla hay que poner. Te espero allí.</a:t>
+              <a:t>N1: El tipo B también roba aire del local... ¿está igual de limitado que el A?</a:t>
+            </a:r>
+          </a:p>
+          <a:p>
+            <a:r>
+              <a:t>N2: En lo básico, sí: tampoco se instala en dormitorio ni en baño, ducha o aseo, ni en un cuarto que comunique con ellos si la única forma de entrar es por ahí. Misma lógica: coge aire del local para tirar los humos, y no quieres eso donde alguien duerme o se ducha. Pero hay una variante más segura, el B3x, que es como «el tipo B con permiso especial». Al estar mejor resuelto, se le abren puertas: puede ir en cocinas, lavaderos o garajes, donde el B normal no entra. Y es la única excepción a la prohibición de comunicar con dormitorio o baño. Cuando veas «B3x», piensa: el tipo B que sí puede estar en más sitios.</a:t>
             </a:r>
           </a:p>
         </p:txBody>
@@ -1385,6 +1380,391 @@
 </p:notes>
 </file>
 
+<file path=ppt/notesSlides/notesSlide20.xml><?xml version="1.0" encoding="utf-8"?>
+<p:notes xmlns:a="http://schemas.openxmlformats.org/drawingml/2006/main" xmlns:p="http://schemas.openxmlformats.org/presentationml/2006/main" xmlns:r="http://schemas.openxmlformats.org/officeDocument/2006/relationships">
+  <p:cSld>
+    <p:spTree>
+      <p:nvGrpSpPr>
+        <p:cNvPr id="1" name=""/>
+        <p:cNvGrpSpPr/>
+        <p:nvPr/>
+      </p:nvGrpSpPr>
+      <p:grpSpPr>
+        <a:xfrm>
+          <a:off x="0" y="0"/>
+          <a:ext cx="0" cy="0"/>
+          <a:chOff x="0" y="0"/>
+          <a:chExt cx="0" cy="0"/>
+        </a:xfrm>
+      </p:grpSpPr>
+      <p:sp>
+        <p:nvSpPr>
+          <p:cNvPr id="2" name="Slide Image Placeholder 1"/>
+          <p:cNvSpPr>
+            <a:spLocks noGrp="1"/>
+          </p:cNvSpPr>
+          <p:nvPr>
+            <p:ph type="sldImg" idx="2"/>
+          </p:nvPr>
+        </p:nvSpPr>
+        <p:spPr/>
+      </p:sp>
+      <p:sp>
+        <p:nvSpPr>
+          <p:cNvPr id="3" name="Notes Placeholder 2"/>
+          <p:cNvSpPr>
+            <a:spLocks noGrp="1"/>
+          </p:cNvSpPr>
+          <p:nvPr>
+            <p:ph type="body" idx="3" sz="quarter"/>
+          </p:nvPr>
+        </p:nvSpPr>
+        <p:spPr/>
+        <p:txBody>
+          <a:bodyPr/>
+          <a:lstStyle/>
+          <a:p>
+            <a:r>
+              <a:t>N1: ¿Qué tiene que ver la campana de la cocina con un calentador?</a:t>
+            </a:r>
+          </a:p>
+          <a:p>
+            <a:r>
+              <a:t>N2: Es uno de los accidentes domésticos más típicos, merece entenderlo bien. Imagina un calentador antiguo de tipo B de tiro natural, de los que sacan los humos por su propio tiro suave. Ahora enciendes la campana extractora de la cocina, que tira con fuerza. Esa campana puede «chupar» los humos del calentador hacia dentro de casa en vez de dejarlos salir por su conducto. Resultado: monóxido de carbono en el salón. Por eso, en instalaciones existentes, al ponerlas en servicio hay que impedir de forma automática que el calentador y el extractor funcionen a la vez de forma peligrosa, y ese corte debe actuar en dos minutos o menos. Cuando en obra veas un calentador viejo cerca de una campana potente, salta la alarma: es un diagnóstico de avería clásico.</a:t>
+            </a:r>
+          </a:p>
+        </p:txBody>
+      </p:sp>
+      <p:sp>
+        <p:nvSpPr>
+          <p:cNvPr id="4" name="Slide Number Placeholder 3"/>
+          <p:cNvSpPr>
+            <a:spLocks noGrp="1"/>
+          </p:cNvSpPr>
+          <p:nvPr>
+            <p:ph type="sldNum" idx="5" sz="quarter"/>
+          </p:nvPr>
+        </p:nvSpPr>
+        <p:spPr/>
+      </p:sp>
+    </p:spTree>
+  </p:cSld>
+  <p:clrMapOvr>
+    <a:masterClrMapping/>
+  </p:clrMapOvr>
+</p:notes>
+</file>
+
+<file path=ppt/notesSlides/notesSlide21.xml><?xml version="1.0" encoding="utf-8"?>
+<p:notes xmlns:a="http://schemas.openxmlformats.org/drawingml/2006/main" xmlns:p="http://schemas.openxmlformats.org/presentationml/2006/main" xmlns:r="http://schemas.openxmlformats.org/officeDocument/2006/relationships">
+  <p:cSld>
+    <p:spTree>
+      <p:nvGrpSpPr>
+        <p:cNvPr id="1" name=""/>
+        <p:cNvGrpSpPr/>
+        <p:nvPr/>
+      </p:nvGrpSpPr>
+      <p:grpSpPr>
+        <a:xfrm>
+          <a:off x="0" y="0"/>
+          <a:ext cx="0" cy="0"/>
+          <a:chOff x="0" y="0"/>
+          <a:chExt cx="0" cy="0"/>
+        </a:xfrm>
+      </p:grpSpPr>
+      <p:sp>
+        <p:nvSpPr>
+          <p:cNvPr id="2" name="Slide Image Placeholder 1"/>
+          <p:cNvSpPr>
+            <a:spLocks noGrp="1"/>
+          </p:cNvSpPr>
+          <p:nvPr>
+            <p:ph type="sldImg" idx="2"/>
+          </p:nvPr>
+        </p:nvSpPr>
+        <p:spPr/>
+      </p:sp>
+      <p:sp>
+        <p:nvSpPr>
+          <p:cNvPr id="3" name="Notes Placeholder 2"/>
+          <p:cNvSpPr>
+            <a:spLocks noGrp="1"/>
+          </p:cNvSpPr>
+          <p:nvPr>
+            <p:ph type="body" idx="3" sz="quarter"/>
+          </p:nvPr>
+        </p:nvSpPr>
+        <p:spPr/>
+        <p:txBody>
+          <a:bodyPr/>
+          <a:lstStyle/>
+          <a:p>
+            <a:r>
+              <a:t>N1: Y el tipo C, que dices que es el más seguro, ¿dónde puede ir?</a:t>
+            </a:r>
+          </a:p>
+          <a:p>
+            <a:r>
+              <a:t>N2: Prácticamente en cualquier sitio, por eso lo llamo el todoterreno. Como es estanco, no toca el aire del local ni suelta humos dentro, así que se permite en zona exterior y en cualquier local, incluidos dormitorios y baños, ducha o aseo. Por eso las calderas modernas de ventosa son de tipo C: van donde no puede ir ningún otro. La única pega en un baño o dormitorio no es el gas, es la electricidad: al ser locales húmedos, la parte eléctrica tiene que cumplir el reglamento de baja tensión. Chuleta directa: si te preguntan qué aparato se puede poner en un dormitorio, la respuesta es tipo C.</a:t>
+            </a:r>
+          </a:p>
+        </p:txBody>
+      </p:sp>
+      <p:sp>
+        <p:nvSpPr>
+          <p:cNvPr id="4" name="Slide Number Placeholder 3"/>
+          <p:cNvSpPr>
+            <a:spLocks noGrp="1"/>
+          </p:cNvSpPr>
+          <p:nvPr>
+            <p:ph type="sldNum" idx="5" sz="quarter"/>
+          </p:nvPr>
+        </p:nvSpPr>
+        <p:spPr/>
+      </p:sp>
+    </p:spTree>
+  </p:cSld>
+  <p:clrMapOvr>
+    <a:masterClrMapping/>
+  </p:clrMapOvr>
+</p:notes>
+</file>
+
+<file path=ppt/notesSlides/notesSlide22.xml><?xml version="1.0" encoding="utf-8"?>
+<p:notes xmlns:a="http://schemas.openxmlformats.org/drawingml/2006/main" xmlns:p="http://schemas.openxmlformats.org/presentationml/2006/main" xmlns:r="http://schemas.openxmlformats.org/officeDocument/2006/relationships">
+  <p:cSld>
+    <p:spTree>
+      <p:nvGrpSpPr>
+        <p:cNvPr id="1" name=""/>
+        <p:cNvGrpSpPr/>
+        <p:nvPr/>
+      </p:nvGrpSpPr>
+      <p:grpSpPr>
+        <a:xfrm>
+          <a:off x="0" y="0"/>
+          <a:ext cx="0" cy="0"/>
+          <a:chOff x="0" y="0"/>
+          <a:chExt cx="0" cy="0"/>
+        </a:xfrm>
+      </p:grpSpPr>
+      <p:sp>
+        <p:nvSpPr>
+          <p:cNvPr id="2" name="Slide Image Placeholder 1"/>
+          <p:cNvSpPr>
+            <a:spLocks noGrp="1"/>
+          </p:cNvSpPr>
+          <p:nvPr>
+            <p:ph type="sldImg" idx="2"/>
+          </p:nvPr>
+        </p:nvSpPr>
+        <p:spPr/>
+      </p:sp>
+      <p:sp>
+        <p:nvSpPr>
+          <p:cNvPr id="3" name="Notes Placeholder 2"/>
+          <p:cNvSpPr>
+            <a:spLocks noGrp="1"/>
+          </p:cNvSpPr>
+          <p:nvPr>
+            <p:ph type="body" idx="3" sz="quarter"/>
+          </p:nvPr>
+        </p:nvSpPr>
+        <p:spPr/>
+        <p:txBody>
+          <a:bodyPr/>
+          <a:lstStyle/>
+          <a:p>
+            <a:r>
+              <a:t>N1: Una de examen puro. En un dormitorio, ¿qué aparato tiene permiso para entrar?</a:t>
+            </a:r>
+          </a:p>
+          <a:p>
+            <a:r>
+              <a:t>N2: Piensa en cuál no respira el aire de la habitación ni suelta humos dentro. Ese es el bueno.</a:t>
+            </a:r>
+          </a:p>
+        </p:txBody>
+      </p:sp>
+      <p:sp>
+        <p:nvSpPr>
+          <p:cNvPr id="4" name="Slide Number Placeholder 3"/>
+          <p:cNvSpPr>
+            <a:spLocks noGrp="1"/>
+          </p:cNvSpPr>
+          <p:nvPr>
+            <p:ph type="sldNum" idx="5" sz="quarter"/>
+          </p:nvPr>
+        </p:nvSpPr>
+        <p:spPr/>
+      </p:sp>
+    </p:spTree>
+  </p:cSld>
+  <p:clrMapOvr>
+    <a:masterClrMapping/>
+  </p:clrMapOvr>
+</p:notes>
+</file>
+
+<file path=ppt/notesSlides/notesSlide23.xml><?xml version="1.0" encoding="utf-8"?>
+<p:notes xmlns:a="http://schemas.openxmlformats.org/drawingml/2006/main" xmlns:p="http://schemas.openxmlformats.org/presentationml/2006/main" xmlns:r="http://schemas.openxmlformats.org/officeDocument/2006/relationships">
+  <p:cSld>
+    <p:spTree>
+      <p:nvGrpSpPr>
+        <p:cNvPr id="1" name=""/>
+        <p:cNvGrpSpPr/>
+        <p:nvPr/>
+      </p:nvGrpSpPr>
+      <p:grpSpPr>
+        <a:xfrm>
+          <a:off x="0" y="0"/>
+          <a:ext cx="0" cy="0"/>
+          <a:chOff x="0" y="0"/>
+          <a:chExt cx="0" cy="0"/>
+        </a:xfrm>
+      </p:grpSpPr>
+      <p:sp>
+        <p:nvSpPr>
+          <p:cNvPr id="2" name="Slide Image Placeholder 1"/>
+          <p:cNvSpPr>
+            <a:spLocks noGrp="1"/>
+          </p:cNvSpPr>
+          <p:nvPr>
+            <p:ph type="sldImg" idx="2"/>
+          </p:nvPr>
+        </p:nvSpPr>
+        <p:spPr/>
+      </p:sp>
+      <p:sp>
+        <p:nvSpPr>
+          <p:cNvPr id="3" name="Notes Placeholder 2"/>
+          <p:cNvSpPr>
+            <a:spLocks noGrp="1"/>
+          </p:cNvSpPr>
+          <p:nvPr>
+            <p:ph type="body" idx="3" sz="quarter"/>
+          </p:nvPr>
+        </p:nvSpPr>
+        <p:spPr/>
+        <p:txBody>
+          <a:bodyPr/>
+          <a:lstStyle/>
+          <a:p>
+            <a:r>
+              <a:t>N1: ¿Por qué el C y no los otros?</a:t>
+            </a:r>
+          </a:p>
+          <a:p>
+            <a:r>
+              <a:t>N2: Porque el tipo A suelta los humos en el propio local y el tipo B roba aire del cuarto para tirarlos fuera; los dos están prohibidos donde se duerme o donde uno se encierra con vapor. El tipo C es estanco: coge aire de fuera y echa humos fuera, sin tocar el aire del dormitorio. El truco para no fallar: tipo A y tipo B prohibidos en dormitorio y baño; el único que entra es el C.</a:t>
+            </a:r>
+          </a:p>
+        </p:txBody>
+      </p:sp>
+      <p:sp>
+        <p:nvSpPr>
+          <p:cNvPr id="4" name="Slide Number Placeholder 3"/>
+          <p:cNvSpPr>
+            <a:spLocks noGrp="1"/>
+          </p:cNvSpPr>
+          <p:nvPr>
+            <p:ph type="sldNum" idx="5" sz="quarter"/>
+          </p:nvPr>
+        </p:nvSpPr>
+        <p:spPr/>
+      </p:sp>
+    </p:spTree>
+  </p:cSld>
+  <p:clrMapOvr>
+    <a:masterClrMapping/>
+  </p:clrMapOvr>
+</p:notes>
+</file>
+
+<file path=ppt/notesSlides/notesSlide24.xml><?xml version="1.0" encoding="utf-8"?>
+<p:notes xmlns:a="http://schemas.openxmlformats.org/drawingml/2006/main" xmlns:p="http://schemas.openxmlformats.org/presentationml/2006/main" xmlns:r="http://schemas.openxmlformats.org/officeDocument/2006/relationships">
+  <p:cSld>
+    <p:spTree>
+      <p:nvGrpSpPr>
+        <p:cNvPr id="1" name=""/>
+        <p:cNvGrpSpPr/>
+        <p:nvPr/>
+      </p:nvGrpSpPr>
+      <p:grpSpPr>
+        <a:xfrm>
+          <a:off x="0" y="0"/>
+          <a:ext cx="0" cy="0"/>
+          <a:chOff x="0" y="0"/>
+          <a:chExt cx="0" cy="0"/>
+        </a:xfrm>
+      </p:grpSpPr>
+      <p:sp>
+        <p:nvSpPr>
+          <p:cNvPr id="2" name="Slide Image Placeholder 1"/>
+          <p:cNvSpPr>
+            <a:spLocks noGrp="1"/>
+          </p:cNvSpPr>
+          <p:nvPr>
+            <p:ph type="sldImg" idx="2"/>
+          </p:nvPr>
+        </p:nvSpPr>
+        <p:spPr/>
+      </p:sp>
+      <p:sp>
+        <p:nvSpPr>
+          <p:cNvPr id="3" name="Notes Placeholder 2"/>
+          <p:cNvSpPr>
+            <a:spLocks noGrp="1"/>
+          </p:cNvSpPr>
+          <p:nvPr>
+            <p:ph type="body" idx="3" sz="quarter"/>
+          </p:nvPr>
+        </p:nvSpPr>
+        <p:spPr/>
+        <p:txBody>
+          <a:bodyPr/>
+          <a:lstStyle/>
+          <a:p>
+            <a:r>
+              <a:t>N1: Profe, cierra el vídeo: ¿cómo lo enlazo todo?</a:t>
+            </a:r>
+          </a:p>
+          <a:p>
+            <a:r>
+              <a:t>N2: Reconstruyamos el hilo. Empezamos por lo primero de cualquier obra: clasificar el aparato, porque de la letra cuelga todo. El tipo A se queda los humos en el local, el B los tira fuera por un tubo pero roba aire de la habitación, y el C es estanco, ni respira tu cuarto. De ahí sale la regla de dónde va cada uno: A y B jamás en dormitorio o baño, porque intoxican; el único que entra ahí es el C. Luego los datos que no se te pueden caer: en semisótano el GLP nunca y el gas natural solo hasta cuatro metros, porque el gas pesado se acumula abajo; y la frontera de setenta kilovatios que convierte un cuarto en sala de máquinas y te cambia hasta el papeleo.</a:t>
+            </a:r>
+          </a:p>
+          <a:p>
+            <a:r>
+              <a:t>N1: ¿Y cómo cae esto en el examen y en la obra?</a:t>
+            </a:r>
+          </a:p>
+          <a:p>
+            <a:r>
+              <a:t>N2: En el examen se pregunta cruzado: «tipo A en un baño», «acumulador de ACS de tipo A», «GLP en semisótano»; si tienes clara la lógica, no fallas. Y en la obra, esto decide si firmas el certificado o si detectas una anomalía que hay que corregir antes de dar gas. Hoy ya eres más gasista que ayer: sabes leer un aparato de un vistazo. En el vídeo dos damos el salto a los números: qué volumen mínimo pide el local y cuánta rejilla hay que poner. Te espero allí.</a:t>
+            </a:r>
+          </a:p>
+        </p:txBody>
+      </p:sp>
+      <p:sp>
+        <p:nvSpPr>
+          <p:cNvPr id="4" name="Slide Number Placeholder 3"/>
+          <p:cNvSpPr>
+            <a:spLocks noGrp="1"/>
+          </p:cNvSpPr>
+          <p:nvPr>
+            <p:ph type="sldNum" idx="5" sz="quarter"/>
+          </p:nvPr>
+        </p:nvSpPr>
+        <p:spPr/>
+      </p:sp>
+    </p:spTree>
+  </p:cSld>
+  <p:clrMapOvr>
+    <a:masterClrMapping/>
+  </p:clrMapOvr>
+</p:notes>
+</file>
+
 <file path=ppt/notesSlides/notesSlide3.xml><?xml version="1.0" encoding="utf-8"?>
 <p:notes xmlns:a="http://schemas.openxmlformats.org/drawingml/2006/main" xmlns:p="http://schemas.openxmlformats.org/presentationml/2006/main" xmlns:r="http://schemas.openxmlformats.org/officeDocument/2006/relationships">
   <p:cSld>
@@ -1646,12 +2026,12 @@
           <a:lstStyle/>
           <a:p>
             <a:r>
-              <a:t>N1: ¿Y por qué insistes en las novedades de la edición?</a:t>
-            </a:r>
-          </a:p>
-          <a:p>
-            <a:r>
-              <a:t>N2: Porque lo que cambia en una revisión es justo lo que al examinador le apetece preguntar; está fresco. Fíjate en las que más caen: en un semisótano ahora se permite gas menos denso que el aire solo si su suelo está a menos de cuatro metros de la calle; se permite cocinar con aparatos de tipo A en un loft si se cumplen condiciones; se revisan enteras las condiciones del tipo B; las rejillas solo se exigen en locales domésticos, colectivos o comerciales; y aparece la ventilación cruzada para locales industriales cuando la suma de tipo A y B pasa de setenta kilovatios. No las memorices todas hoy; quédate con que son los puntos marcados en rojo.</a:t>
+              <a:t>N1: ¿Cuántas partes tiene la norma y cuál es la mía?</a:t>
+            </a:r>
+          </a:p>
+          <a:p>
+            <a:r>
+              <a:t>N2: La UNE seis mil seiscientos setenta se divide en trece partes bajo un mismo título general. La uno es generalidades, la dos terminología, la tres tuberías, la cuatro diseño y construcción, la cinco los recintos de contadores. La tuya es la parte seis: configuración, ventilación y evacuación de humos en los locales que contienen aparatos a gas. De la siete en adelante van la instalación de aparatos, las pruebas de estanquidad, la puesta en servicio y los controles periódicos. Fíjate en la coincidencia que despista: esta parte seis es el tema trece de tu curso, y son cosas distintas con números que no tienen nada que ver. Cuando leas «guion seis», piensa siempre: locales, ventilación y humos.</a:t>
             </a:r>
           </a:p>
         </p:txBody>
@@ -1721,12 +2101,12 @@
           <a:lstStyle/>
           <a:p>
             <a:r>
-              <a:t>N1: ¿Qué cubre exactamente esta parte seis?</a:t>
-            </a:r>
-          </a:p>
-          <a:p>
-            <a:r>
-              <a:t>N2: Tres cosas, tenlas juntas: las características de los locales y sus orificios de ventilación, los sistemas de ventilación de esos locales, y los sistemas de evacuación de los humos de los aparatos. Todo eso, sea cual sea el tipo de aparato. Pero ojo a lo que deja fuera: las salas de máquinas y los equipos autónomos de generación de calor o frío o de cogeneración, que van por otra norma, la UNE seis mil seiscientos uno. Regla mental: poca potencia y local normal, juegas con esta parte seis; mucha potencia y sala de máquinas, te vas a la otra norma. Enseguida verás dónde está esa frontera: setenta kilovatios.</a:t>
+              <a:t>N1: ¿Y por qué insistes en las novedades de la edición?</a:t>
+            </a:r>
+          </a:p>
+          <a:p>
+            <a:r>
+              <a:t>N2: Porque lo que cambia en una revisión es justo lo que al examinador le apetece preguntar; está fresco. Fíjate en las que más caen: en un semisótano ahora se permite gas menos denso que el aire solo si su suelo está a menos de cuatro metros de la calle; se permite cocinar con aparatos de tipo A en un loft si se cumplen condiciones; se revisan enteras las condiciones del tipo B; las rejillas solo se exigen en locales domésticos, colectivos o comerciales; y aparece la ventilación cruzada para locales industriales cuando la suma de tipo A y B pasa de setenta kilovatios. No las memorices todas hoy; quédate con que son los puntos marcados en rojo.</a:t>
             </a:r>
           </a:p>
         </p:txBody>
@@ -1796,12 +2176,12 @@
           <a:lstStyle/>
           <a:p>
             <a:r>
-              <a:t>N1: ¿Qué diferencia hay entre un tipo A y un tipo B?</a:t>
-            </a:r>
-          </a:p>
-          <a:p>
-            <a:r>
-              <a:t>N2: Los dos son de circuito abierto: cogen el aire de combustión de la propia habitación donde están, por eso «respiran del local». La diferencia está en los humos. El tipo A es de evacuación no conducida: no tiene tubo de humos, así que los suelta en el mismo local. Piensa en una cocina de gas o un calientaplatos. El tipo B sí tiene conducto: coge el aire del local pero echa los humos fuera por un tubo, como el clásico calentador antiguo del baño. Los dos roban aire de la habitación, y por eso los dos exigen ventilación para reponerlo. La diferencia práctica: el A te deja los humos dentro, el B los saca.</a:t>
+              <a:t>N1: ¿Qué cubre exactamente esta parte seis?</a:t>
+            </a:r>
+          </a:p>
+          <a:p>
+            <a:r>
+              <a:t>N2: Tres cosas, tenlas juntas: las características de los locales y sus orificios de ventilación, los sistemas de ventilación de esos locales, y los sistemas de evacuación de los humos de los aparatos. Todo eso, sea cual sea el tipo de aparato. Pero ojo a lo que deja fuera: las salas de máquinas y los equipos autónomos de generación de calor o frío o de cogeneración, que van por otra norma, la UNE seis mil seiscientos uno. Regla mental: poca potencia y local normal, juegas con esta parte seis; mucha potencia y sala de máquinas, te vas a la otra norma. Enseguida verás dónde está esa frontera: setenta kilovatios.</a:t>
             </a:r>
           </a:p>
         </p:txBody>
@@ -1871,12 +2251,12 @@
           <a:lstStyle/>
           <a:p>
             <a:r>
-              <a:t>N1: ¿Y el tipo C por qué es distinto?</a:t>
-            </a:r>
-          </a:p>
-          <a:p>
-            <a:r>
-              <a:t>N2: El tipo C es estanco, y esa palabra lo cambia todo. Estanco significa que su circuito de combustión, la entrada de aire y la salida de humos, está cerrado y aislado del local. No respira tu habitación: coge el aire directamente de fuera y devuelve los humos fuera, normalmente por el mismo tubo de doble pared que llamamos ventosa. Es la caldera moderna que ves en cualquier cocina. Al no tocar el aire del local ni soltar humos dentro, es con diferencia el más seguro, y por eso es el único que puedes meter casi en cualquier sitio. Chuleta: A se lo queda todo, B tira los humos, C ni te toca el aire.</a:t>
+              <a:t>N1: ¿Qué diferencia hay entre un tipo A y un tipo B?</a:t>
+            </a:r>
+          </a:p>
+          <a:p>
+            <a:r>
+              <a:t>N2: Los dos son de circuito abierto: cogen el aire de combustión de la propia habitación donde están, por eso «respiran del local». La diferencia está en los humos. El tipo A es de evacuación no conducida: no tiene tubo de humos, así que los suelta en el mismo local. Piensa en una cocina de gas o un calientaplatos. El tipo B sí tiene conducto: coge el aire del local pero echa los humos fuera por un tubo, como el clásico calentador antiguo del baño. Los dos roban aire de la habitación, y por eso los dos exigen ventilación para reponerlo. La diferencia práctica: el A te deja los humos dentro, el B los saca.</a:t>
             </a:r>
           </a:p>
         </p:txBody>
@@ -4962,7 +5342,7 @@
       </p:sp>
       <p:sp>
         <p:nvSpPr>
-          <p:cNvPr id="4" name="Rounded Rectangle 3"/>
+          <p:cNvPr id="4" name="Rectangle 3"/>
           <p:cNvSpPr/>
           <p:nvPr/>
         </p:nvSpPr>
@@ -4971,7 +5351,7 @@
             <a:off x="868680" y="2057400"/>
             <a:ext cx="1463040" cy="82296"/>
           </a:xfrm>
-          <a:prstGeom prst="roundRect">
+          <a:prstGeom prst="rect">
             <a:avLst/>
           </a:prstGeom>
           <a:solidFill>
@@ -5088,6 +5468,18 @@
   <p:clrMapOvr>
     <a:masterClrMapping/>
   </p:clrMapOvr>
+  <mc:AlternateContent xmlns:mc="http://schemas.openxmlformats.org/markup-compatibility/2006">
+    <mc:Choice xmlns:p14="http://schemas.microsoft.com/office/powerpoint/2010/main" Requires="p14">
+      <p:transition spd="med" p14:dur="700">
+        <p14:cube dir="l"/>
+      </p:transition>
+    </mc:Choice>
+    <mc:Fallback>
+      <p:transition spd="med">
+        <p:push dir="l"/>
+      </p:transition>
+    </mc:Fallback>
+  </mc:AlternateContent>
 </p:sld>
 </file>
 
@@ -5175,7 +5567,7 @@
                 </a:solidFill>
                 <a:latin typeface="Montserrat"/>
               </a:rPr>
-              <a:t>010 / 019</a:t>
+              <a:t>010 / 024</a:t>
             </a:r>
           </a:p>
         </p:txBody>
@@ -5243,7 +5635,7 @@
                 </a:solidFill>
                 <a:latin typeface="Montserrat"/>
               </a:rPr>
-              <a:t>TIRO NATURAL Y FORZADO</a:t>
+              <a:t>CLASIFICACIÓN · CIRCUITO ESTANCO</a:t>
             </a:r>
           </a:p>
         </p:txBody>
@@ -5277,14 +5669,14 @@
                 </a:solidFill>
                 <a:latin typeface="Montserrat"/>
               </a:rPr>
-              <a:t>¿Los humos suben solos o empujados?</a:t>
-            </a:r>
-          </a:p>
-        </p:txBody>
-      </p:sp>
-      <p:sp>
-        <p:nvSpPr>
-          <p:cNvPr id="7" name="Rounded Rectangle 6"/>
+              <a:t>Tipo C: ni toca el aire del local</a:t>
+            </a:r>
+          </a:p>
+        </p:txBody>
+      </p:sp>
+      <p:sp>
+        <p:nvSpPr>
+          <p:cNvPr id="7" name="Rectangle 6"/>
           <p:cNvSpPr/>
           <p:nvPr/>
         </p:nvSpPr>
@@ -5293,7 +5685,7 @@
             <a:off x="868680" y="1627632"/>
             <a:ext cx="2011680" cy="73152"/>
           </a:xfrm>
-          <a:prstGeom prst="roundRect">
+          <a:prstGeom prst="rect">
             <a:avLst/>
           </a:prstGeom>
           <a:solidFill>
@@ -5334,8 +5726,8 @@
         </p:nvSpPr>
         <p:spPr>
           <a:xfrm>
-            <a:off x="822960" y="1965960"/>
-            <a:ext cx="4983480" cy="4206240"/>
+            <a:off x="6355080" y="1965960"/>
+            <a:ext cx="5029200" cy="4206240"/>
           </a:xfrm>
           <a:prstGeom prst="rect">
             <a:avLst/>
@@ -5369,7 +5761,7 @@
                 </a:solidFill>
                 <a:latin typeface="Montserrat"/>
               </a:rPr>
-              <a:t>Tiro natural: suben por el calor</a:t>
+              <a:t>Circuito de combustión cerrado</a:t>
             </a:r>
           </a:p>
           <a:p>
@@ -5394,7 +5786,7 @@
                 </a:solidFill>
                 <a:latin typeface="Montserrat"/>
               </a:rPr>
-              <a:t>Tiro forzado: los empuja un ventilador</a:t>
+              <a:t>Aire de fuera, humos fuera</a:t>
             </a:r>
           </a:p>
           <a:p>
@@ -5419,21 +5811,21 @@
                 </a:solidFill>
                 <a:latin typeface="Montserrat"/>
               </a:rPr>
-              <a:t>BS: dispositivo antirrevoco</a:t>
-            </a:r>
-          </a:p>
-        </p:txBody>
-      </p:sp>
-      <p:sp>
-        <p:nvSpPr>
-          <p:cNvPr id="9" name="imgph" descr="IMGQ:chimney flue on rooftop"/>
+              <a:t>El más seguro de los tres</a:t>
+            </a:r>
+          </a:p>
+        </p:txBody>
+      </p:sp>
+      <p:sp>
+        <p:nvSpPr>
+          <p:cNvPr id="9" name="imgph" descr="IMGQ:condensing boiler concentric flue"/>
           <p:cNvSpPr/>
           <p:nvPr/>
         </p:nvSpPr>
         <p:spPr>
           <a:xfrm>
-            <a:off x="5806440" y="1051560"/>
-            <a:ext cx="5298947" cy="4629150"/>
+            <a:off x="822960" y="1965960"/>
+            <a:ext cx="5303520" cy="4572000"/>
           </a:xfrm>
           <a:prstGeom prst="roundRect">
             <a:avLst/>
@@ -5478,8 +5870,8 @@
         </p:nvSpPr>
         <p:spPr>
           <a:xfrm>
-            <a:off x="6080760" y="2726055"/>
-            <a:ext cx="4750307" cy="1280160"/>
+            <a:off x="1097280" y="3611880"/>
+            <a:ext cx="4754880" cy="1280160"/>
           </a:xfrm>
           <a:prstGeom prst="rect">
             <a:avLst/>
@@ -5500,7 +5892,7 @@
                 </a:solidFill>
                 <a:latin typeface="Montserrat"/>
               </a:rPr>
-              <a:t>IMAGEN REALISTA</a:t>
+              <a:t>IMAGEN</a:t>
             </a:r>
           </a:p>
           <a:p>
@@ -5512,7 +5904,7 @@
                 </a:solidFill>
                 <a:latin typeface="Montserrat"/>
               </a:rPr>
-              <a:t>chimney flue on rooftop</a:t>
+              <a:t>condensing boiler concentric flue</a:t>
             </a:r>
           </a:p>
         </p:txBody>
@@ -5522,6 +5914,18 @@
   <p:clrMapOvr>
     <a:masterClrMapping/>
   </p:clrMapOvr>
+  <mc:AlternateContent xmlns:mc="http://schemas.openxmlformats.org/markup-compatibility/2006">
+    <mc:Choice xmlns:p14="http://schemas.microsoft.com/office/powerpoint/2010/main" Requires="p14">
+      <p:transition spd="med" p14:dur="700">
+        <p14:cube dir="r"/>
+      </p:transition>
+    </mc:Choice>
+    <mc:Fallback>
+      <p:transition spd="med">
+        <p:push dir="r"/>
+      </p:transition>
+    </mc:Fallback>
+  </mc:AlternateContent>
 </p:sld>
 </file>
 
@@ -5609,7 +6013,7 @@
                 </a:solidFill>
                 <a:latin typeface="Montserrat"/>
               </a:rPr>
-              <a:t>011 / 019</a:t>
+              <a:t>011 / 024</a:t>
             </a:r>
           </a:p>
         </p:txBody>
@@ -5677,7 +6081,7 @@
                 </a:solidFill>
                 <a:latin typeface="Montserrat"/>
               </a:rPr>
-              <a:t>INSTALACIÓN · NIVEL DEL LOCAL</a:t>
+              <a:t>TIRO NATURAL Y FORZADO</a:t>
             </a:r>
           </a:p>
         </p:txBody>
@@ -5711,14 +6115,14 @@
                 </a:solidFill>
                 <a:latin typeface="Montserrat"/>
               </a:rPr>
-              <a:t>Semisótano: manda cómo pesa el gas</a:t>
-            </a:r>
-          </a:p>
-        </p:txBody>
-      </p:sp>
-      <p:sp>
-        <p:nvSpPr>
-          <p:cNvPr id="7" name="Rounded Rectangle 6"/>
+              <a:t>¿Los humos suben solos o empujados?</a:t>
+            </a:r>
+          </a:p>
+        </p:txBody>
+      </p:sp>
+      <p:sp>
+        <p:nvSpPr>
+          <p:cNvPr id="7" name="Rectangle 6"/>
           <p:cNvSpPr/>
           <p:nvPr/>
         </p:nvSpPr>
@@ -5727,7 +6131,7 @@
             <a:off x="868680" y="1627632"/>
             <a:ext cx="2011680" cy="73152"/>
           </a:xfrm>
-          <a:prstGeom prst="roundRect">
+          <a:prstGeom prst="rect">
             <a:avLst/>
           </a:prstGeom>
           <a:solidFill>
@@ -5769,7 +6173,7 @@
         <p:spPr>
           <a:xfrm>
             <a:off x="822960" y="1965960"/>
-            <a:ext cx="4983480" cy="4206240"/>
+            <a:ext cx="5029200" cy="4206240"/>
           </a:xfrm>
           <a:prstGeom prst="rect">
             <a:avLst/>
@@ -5803,7 +6207,7 @@
                 </a:solidFill>
                 <a:latin typeface="Montserrat"/>
               </a:rPr>
-              <a:t>GLP: nunca en semisótano</a:t>
+              <a:t>Tiro natural: suben por el calor</a:t>
             </a:r>
           </a:p>
           <a:p>
@@ -5828,7 +6232,7 @@
                 </a:solidFill>
                 <a:latin typeface="Montserrat"/>
               </a:rPr>
-              <a:t>Gas natural: solo hasta 4 m</a:t>
+              <a:t>Tiro forzado: los empuja un ventilador</a:t>
             </a:r>
           </a:p>
           <a:p>
@@ -5853,21 +6257,21 @@
                 </a:solidFill>
                 <a:latin typeface="Montserrat"/>
               </a:rPr>
-              <a:t>Por debajo del semisótano: no</a:t>
-            </a:r>
-          </a:p>
-        </p:txBody>
-      </p:sp>
-      <p:sp>
-        <p:nvSpPr>
-          <p:cNvPr id="9" name="imgph" descr="IMGQ:basement gas pipe installation"/>
+              <a:t>BS: dispositivo antirrevoco</a:t>
+            </a:r>
+          </a:p>
+        </p:txBody>
+      </p:sp>
+      <p:sp>
+        <p:nvSpPr>
+          <p:cNvPr id="9" name="imgph" descr="IMGQ:chimney flue on rooftop"/>
           <p:cNvSpPr/>
           <p:nvPr/>
         </p:nvSpPr>
         <p:spPr>
           <a:xfrm>
-            <a:off x="5806440" y="1051560"/>
-            <a:ext cx="5298947" cy="4629150"/>
+            <a:off x="6080760" y="1965960"/>
+            <a:ext cx="5303520" cy="4572000"/>
           </a:xfrm>
           <a:prstGeom prst="roundRect">
             <a:avLst/>
@@ -5912,8 +6316,8 @@
         </p:nvSpPr>
         <p:spPr>
           <a:xfrm>
-            <a:off x="6080760" y="2726055"/>
-            <a:ext cx="4750307" cy="1280160"/>
+            <a:off x="6355080" y="3611880"/>
+            <a:ext cx="4754880" cy="1280160"/>
           </a:xfrm>
           <a:prstGeom prst="rect">
             <a:avLst/>
@@ -5934,7 +6338,7 @@
                 </a:solidFill>
                 <a:latin typeface="Montserrat"/>
               </a:rPr>
-              <a:t>IMAGEN REALISTA</a:t>
+              <a:t>IMAGEN</a:t>
             </a:r>
           </a:p>
           <a:p>
@@ -5946,7 +6350,7 @@
                 </a:solidFill>
                 <a:latin typeface="Montserrat"/>
               </a:rPr>
-              <a:t>basement gas pipe installation</a:t>
+              <a:t>chimney flue on rooftop</a:t>
             </a:r>
           </a:p>
         </p:txBody>
@@ -5956,6 +6360,18 @@
   <p:clrMapOvr>
     <a:masterClrMapping/>
   </p:clrMapOvr>
+  <mc:AlternateContent xmlns:mc="http://schemas.openxmlformats.org/markup-compatibility/2006">
+    <mc:Choice xmlns:p14="http://schemas.microsoft.com/office/powerpoint/2010/main" Requires="p14">
+      <p:transition spd="med" p14:dur="700">
+        <p14:cube dir="l"/>
+      </p:transition>
+    </mc:Choice>
+    <mc:Fallback>
+      <p:transition spd="med">
+        <p:push dir="l"/>
+      </p:transition>
+    </mc:Fallback>
+  </mc:AlternateContent>
 </p:sld>
 </file>
 
@@ -6043,7 +6459,7 @@
                 </a:solidFill>
                 <a:latin typeface="Montserrat"/>
               </a:rPr>
-              <a:t>012 / 019</a:t>
+              <a:t>012 / 024</a:t>
             </a:r>
           </a:p>
         </p:txBody>
@@ -6111,7 +6527,7 @@
                 </a:solidFill>
                 <a:latin typeface="Montserrat"/>
               </a:rPr>
-              <a:t>INSTALACIÓN · POTENCIA</a:t>
+              <a:t>INSTALACIÓN · NIVEL DEL LOCAL</a:t>
             </a:r>
           </a:p>
         </p:txBody>
@@ -6145,14 +6561,14 @@
                 </a:solidFill>
                 <a:latin typeface="Montserrat"/>
               </a:rPr>
-              <a:t>La frontera de los 70 kW</a:t>
-            </a:r>
-          </a:p>
-        </p:txBody>
-      </p:sp>
-      <p:sp>
-        <p:nvSpPr>
-          <p:cNvPr id="7" name="Rounded Rectangle 6"/>
+              <a:t>Semisótano: manda cómo pesa el gas</a:t>
+            </a:r>
+          </a:p>
+        </p:txBody>
+      </p:sp>
+      <p:sp>
+        <p:nvSpPr>
+          <p:cNvPr id="7" name="Rectangle 6"/>
           <p:cNvSpPr/>
           <p:nvPr/>
         </p:nvSpPr>
@@ -6161,7 +6577,7 @@
             <a:off x="868680" y="1627632"/>
             <a:ext cx="2011680" cy="73152"/>
           </a:xfrm>
-          <a:prstGeom prst="roundRect">
+          <a:prstGeom prst="rect">
             <a:avLst/>
           </a:prstGeom>
           <a:solidFill>
@@ -6202,8 +6618,8 @@
         </p:nvSpPr>
         <p:spPr>
           <a:xfrm>
-            <a:off x="822960" y="1965960"/>
-            <a:ext cx="4983480" cy="4206240"/>
+            <a:off x="6355080" y="1965960"/>
+            <a:ext cx="5029200" cy="4206240"/>
           </a:xfrm>
           <a:prstGeom prst="rect">
             <a:avLst/>
@@ -6237,7 +6653,7 @@
                 </a:solidFill>
                 <a:latin typeface="Montserrat"/>
               </a:rPr>
-              <a:t>Suma de potencias &gt; 70 kW</a:t>
+              <a:t>GLP: nunca en semisótano</a:t>
             </a:r>
           </a:p>
           <a:p>
@@ -6262,7 +6678,7 @@
                 </a:solidFill>
                 <a:latin typeface="Montserrat"/>
               </a:rPr>
-              <a:t>Obliga a sala de máquinas</a:t>
+              <a:t>Gas natural: solo hasta 4 m</a:t>
             </a:r>
           </a:p>
           <a:p>
@@ -6287,21 +6703,21 @@
                 </a:solidFill>
                 <a:latin typeface="Montserrat"/>
               </a:rPr>
-              <a:t>Mandan UNE 60601 y RITE</a:t>
-            </a:r>
-          </a:p>
-        </p:txBody>
-      </p:sp>
-      <p:sp>
-        <p:nvSpPr>
-          <p:cNvPr id="9" name="imgph" descr="IMGQ:large commercial boiler installation"/>
+              <a:t>Por debajo del semisótano: no</a:t>
+            </a:r>
+          </a:p>
+        </p:txBody>
+      </p:sp>
+      <p:sp>
+        <p:nvSpPr>
+          <p:cNvPr id="9" name="imgph" descr="IMGQ:basement gas pipe installation"/>
           <p:cNvSpPr/>
           <p:nvPr/>
         </p:nvSpPr>
         <p:spPr>
           <a:xfrm>
-            <a:off x="5806440" y="1051560"/>
-            <a:ext cx="5298947" cy="4629150"/>
+            <a:off x="822960" y="1965960"/>
+            <a:ext cx="5303520" cy="4572000"/>
           </a:xfrm>
           <a:prstGeom prst="roundRect">
             <a:avLst/>
@@ -6346,8 +6762,8 @@
         </p:nvSpPr>
         <p:spPr>
           <a:xfrm>
-            <a:off x="6080760" y="2726055"/>
-            <a:ext cx="4750307" cy="1280160"/>
+            <a:off x="1097280" y="3611880"/>
+            <a:ext cx="4754880" cy="1280160"/>
           </a:xfrm>
           <a:prstGeom prst="rect">
             <a:avLst/>
@@ -6368,7 +6784,7 @@
                 </a:solidFill>
                 <a:latin typeface="Montserrat"/>
               </a:rPr>
-              <a:t>IMAGEN REALISTA</a:t>
+              <a:t>IMAGEN</a:t>
             </a:r>
           </a:p>
           <a:p>
@@ -6380,7 +6796,7 @@
                 </a:solidFill>
                 <a:latin typeface="Montserrat"/>
               </a:rPr>
-              <a:t>large commercial boiler installation</a:t>
+              <a:t>basement gas pipe installation</a:t>
             </a:r>
           </a:p>
         </p:txBody>
@@ -6390,6 +6806,18 @@
   <p:clrMapOvr>
     <a:masterClrMapping/>
   </p:clrMapOvr>
+  <mc:AlternateContent xmlns:mc="http://schemas.openxmlformats.org/markup-compatibility/2006">
+    <mc:Choice xmlns:p14="http://schemas.microsoft.com/office/powerpoint/2010/main" Requires="p14">
+      <p:transition spd="med" p14:dur="700">
+        <p14:cube dir="r"/>
+      </p:transition>
+    </mc:Choice>
+    <mc:Fallback>
+      <p:transition spd="med">
+        <p:push dir="r"/>
+      </p:transition>
+    </mc:Fallback>
+  </mc:AlternateContent>
 </p:sld>
 </file>
 
@@ -6477,7 +6905,7 @@
                 </a:solidFill>
                 <a:latin typeface="Montserrat"/>
               </a:rPr>
-              <a:t>013 / 019</a:t>
+              <a:t>013 / 024</a:t>
             </a:r>
           </a:p>
         </p:txBody>
@@ -6545,7 +6973,7 @@
                 </a:solidFill>
                 <a:latin typeface="Montserrat"/>
               </a:rPr>
-              <a:t>TIPO A · DÓNDE</a:t>
+              <a:t>INSTALACIÓN · POTENCIA</a:t>
             </a:r>
           </a:p>
         </p:txBody>
@@ -6579,14 +7007,14 @@
                 </a:solidFill>
                 <a:latin typeface="Montserrat"/>
               </a:rPr>
-              <a:t>Qué tipo A se puede instalar</a:t>
-            </a:r>
-          </a:p>
-        </p:txBody>
-      </p:sp>
-      <p:sp>
-        <p:nvSpPr>
-          <p:cNvPr id="7" name="Rounded Rectangle 6"/>
+              <a:t>La frontera de los 70 kW</a:t>
+            </a:r>
+          </a:p>
+        </p:txBody>
+      </p:sp>
+      <p:sp>
+        <p:nvSpPr>
+          <p:cNvPr id="7" name="Rectangle 6"/>
           <p:cNvSpPr/>
           <p:nvPr/>
         </p:nvSpPr>
@@ -6595,7 +7023,7 @@
             <a:off x="868680" y="1627632"/>
             <a:ext cx="2011680" cy="73152"/>
           </a:xfrm>
-          <a:prstGeom prst="roundRect">
+          <a:prstGeom prst="rect">
             <a:avLst/>
           </a:prstGeom>
           <a:solidFill>
@@ -6637,7 +7065,7 @@
         <p:spPr>
           <a:xfrm>
             <a:off x="822960" y="1965960"/>
-            <a:ext cx="4983480" cy="4206240"/>
+            <a:ext cx="5029200" cy="4206240"/>
           </a:xfrm>
           <a:prstGeom prst="rect">
             <a:avLst/>
@@ -6671,7 +7099,7 @@
                 </a:solidFill>
                 <a:latin typeface="Montserrat"/>
               </a:rPr>
-              <a:t>Cocción de alimentos y bebidas</a:t>
+              <a:t>Suma de potencias &gt; 70 kW</a:t>
             </a:r>
           </a:p>
           <a:p>
@@ -6696,7 +7124,7 @@
                 </a:solidFill>
                 <a:latin typeface="Montserrat"/>
               </a:rPr>
-              <a:t>Calefacción directa en naves y talleres</a:t>
+              <a:t>Obliga a sala de máquinas</a:t>
             </a:r>
           </a:p>
           <a:p>
@@ -6721,21 +7149,21 @@
                 </a:solidFill>
                 <a:latin typeface="Montserrat"/>
               </a:rPr>
-              <a:t>Otros aparatos &lt; 4,65 kW</a:t>
-            </a:r>
-          </a:p>
-        </p:txBody>
-      </p:sp>
-      <p:sp>
-        <p:nvSpPr>
-          <p:cNvPr id="9" name="imgph" descr="IMGQ:gas stove kitchen blue flame"/>
+              <a:t>Mandan UNE 60601 y RITE</a:t>
+            </a:r>
+          </a:p>
+        </p:txBody>
+      </p:sp>
+      <p:sp>
+        <p:nvSpPr>
+          <p:cNvPr id="9" name="imgph" descr="IMGQ:large commercial boiler installation"/>
           <p:cNvSpPr/>
           <p:nvPr/>
         </p:nvSpPr>
         <p:spPr>
           <a:xfrm>
-            <a:off x="5806440" y="1051560"/>
-            <a:ext cx="5298947" cy="4629150"/>
+            <a:off x="6080760" y="1965960"/>
+            <a:ext cx="5303520" cy="4572000"/>
           </a:xfrm>
           <a:prstGeom prst="roundRect">
             <a:avLst/>
@@ -6780,8 +7208,8 @@
         </p:nvSpPr>
         <p:spPr>
           <a:xfrm>
-            <a:off x="6080760" y="2726055"/>
-            <a:ext cx="4750307" cy="1280160"/>
+            <a:off x="6355080" y="3611880"/>
+            <a:ext cx="4754880" cy="1280160"/>
           </a:xfrm>
           <a:prstGeom prst="rect">
             <a:avLst/>
@@ -6802,7 +7230,7 @@
                 </a:solidFill>
                 <a:latin typeface="Montserrat"/>
               </a:rPr>
-              <a:t>IMAGEN REALISTA</a:t>
+              <a:t>IMAGEN</a:t>
             </a:r>
           </a:p>
           <a:p>
@@ -6814,7 +7242,7 @@
                 </a:solidFill>
                 <a:latin typeface="Montserrat"/>
               </a:rPr>
-              <a:t>gas stove kitchen blue flame</a:t>
+              <a:t>large commercial boiler installation</a:t>
             </a:r>
           </a:p>
         </p:txBody>
@@ -6824,6 +7252,18 @@
   <p:clrMapOvr>
     <a:masterClrMapping/>
   </p:clrMapOvr>
+  <mc:AlternateContent xmlns:mc="http://schemas.openxmlformats.org/markup-compatibility/2006">
+    <mc:Choice xmlns:p14="http://schemas.microsoft.com/office/powerpoint/2010/main" Requires="p14">
+      <p:transition spd="med" p14:dur="700">
+        <p14:cube dir="l"/>
+      </p:transition>
+    </mc:Choice>
+    <mc:Fallback>
+      <p:transition spd="med">
+        <p:push dir="l"/>
+      </p:transition>
+    </mc:Fallback>
+  </mc:AlternateContent>
 </p:sld>
 </file>
 
@@ -6911,7 +7351,7 @@
                 </a:solidFill>
                 <a:latin typeface="Montserrat"/>
               </a:rPr>
-              <a:t>014 / 019</a:t>
+              <a:t>014 / 024</a:t>
             </a:r>
           </a:p>
         </p:txBody>
@@ -6979,7 +7419,7 @@
                 </a:solidFill>
                 <a:latin typeface="Montserrat"/>
               </a:rPr>
-              <a:t>TIPO A · PROHIBICIONES</a:t>
+              <a:t>TIPO A · DÓNDE</a:t>
             </a:r>
           </a:p>
         </p:txBody>
@@ -7013,14 +7453,14 @@
                 </a:solidFill>
                 <a:latin typeface="Montserrat"/>
               </a:rPr>
-              <a:t>Dónde nunca va un tipo A</a:t>
-            </a:r>
-          </a:p>
-        </p:txBody>
-      </p:sp>
-      <p:sp>
-        <p:nvSpPr>
-          <p:cNvPr id="7" name="Rounded Rectangle 6"/>
+              <a:t>Qué tipo A se puede instalar</a:t>
+            </a:r>
+          </a:p>
+        </p:txBody>
+      </p:sp>
+      <p:sp>
+        <p:nvSpPr>
+          <p:cNvPr id="7" name="Rectangle 6"/>
           <p:cNvSpPr/>
           <p:nvPr/>
         </p:nvSpPr>
@@ -7029,7 +7469,7 @@
             <a:off x="868680" y="1627632"/>
             <a:ext cx="2011680" cy="73152"/>
           </a:xfrm>
-          <a:prstGeom prst="roundRect">
+          <a:prstGeom prst="rect">
             <a:avLst/>
           </a:prstGeom>
           <a:solidFill>
@@ -7070,8 +7510,8 @@
         </p:nvSpPr>
         <p:spPr>
           <a:xfrm>
-            <a:off x="822960" y="1965960"/>
-            <a:ext cx="4983480" cy="4206240"/>
+            <a:off x="6355080" y="1965960"/>
+            <a:ext cx="5029200" cy="4206240"/>
           </a:xfrm>
           <a:prstGeom prst="rect">
             <a:avLst/>
@@ -7105,7 +7545,7 @@
                 </a:solidFill>
                 <a:latin typeface="Montserrat"/>
               </a:rPr>
-              <a:t>Nunca en dormitorio</a:t>
+              <a:t>Cocción de alimentos y bebidas</a:t>
             </a:r>
           </a:p>
           <a:p>
@@ -7130,7 +7570,7 @@
                 </a:solidFill>
                 <a:latin typeface="Montserrat"/>
               </a:rPr>
-              <a:t>Nunca en baño, ducha o aseo</a:t>
+              <a:t>Calefacción directa en naves y talleres</a:t>
             </a:r>
           </a:p>
           <a:p>
@@ -7155,21 +7595,21 @@
                 </a:solidFill>
                 <a:latin typeface="Montserrat"/>
               </a:rPr>
-              <a:t>ACS por acumulación: jamás</a:t>
-            </a:r>
-          </a:p>
-        </p:txBody>
-      </p:sp>
-      <p:sp>
-        <p:nvSpPr>
-          <p:cNvPr id="9" name="imgph" descr="IMGQ:empty bathroom interior"/>
+              <a:t>Otros aparatos &lt; 4,65 kW</a:t>
+            </a:r>
+          </a:p>
+        </p:txBody>
+      </p:sp>
+      <p:sp>
+        <p:nvSpPr>
+          <p:cNvPr id="9" name="imgph" descr="IMGQ:gas stove kitchen blue flame"/>
           <p:cNvSpPr/>
           <p:nvPr/>
         </p:nvSpPr>
         <p:spPr>
           <a:xfrm>
-            <a:off x="5806440" y="1051560"/>
-            <a:ext cx="5298947" cy="4629150"/>
+            <a:off x="822960" y="1965960"/>
+            <a:ext cx="5303520" cy="4572000"/>
           </a:xfrm>
           <a:prstGeom prst="roundRect">
             <a:avLst/>
@@ -7214,8 +7654,8 @@
         </p:nvSpPr>
         <p:spPr>
           <a:xfrm>
-            <a:off x="6080760" y="2726055"/>
-            <a:ext cx="4750307" cy="1280160"/>
+            <a:off x="1097280" y="3611880"/>
+            <a:ext cx="4754880" cy="1280160"/>
           </a:xfrm>
           <a:prstGeom prst="rect">
             <a:avLst/>
@@ -7236,7 +7676,7 @@
                 </a:solidFill>
                 <a:latin typeface="Montserrat"/>
               </a:rPr>
-              <a:t>IMAGEN REALISTA</a:t>
+              <a:t>IMAGEN</a:t>
             </a:r>
           </a:p>
           <a:p>
@@ -7248,7 +7688,7 @@
                 </a:solidFill>
                 <a:latin typeface="Montserrat"/>
               </a:rPr>
-              <a:t>empty bathroom interior</a:t>
+              <a:t>gas stove kitchen blue flame</a:t>
             </a:r>
           </a:p>
         </p:txBody>
@@ -7258,6 +7698,18 @@
   <p:clrMapOvr>
     <a:masterClrMapping/>
   </p:clrMapOvr>
+  <mc:AlternateContent xmlns:mc="http://schemas.openxmlformats.org/markup-compatibility/2006">
+    <mc:Choice xmlns:p14="http://schemas.microsoft.com/office/powerpoint/2010/main" Requires="p14">
+      <p:transition spd="med" p14:dur="700">
+        <p14:cube dir="r"/>
+      </p:transition>
+    </mc:Choice>
+    <mc:Fallback>
+      <p:transition spd="med">
+        <p:push dir="r"/>
+      </p:transition>
+    </mc:Fallback>
+  </mc:AlternateContent>
 </p:sld>
 </file>
 
@@ -7345,7 +7797,7 @@
                 </a:solidFill>
                 <a:latin typeface="Montserrat"/>
               </a:rPr>
-              <a:t>015 / 019</a:t>
+              <a:t>015 / 024</a:t>
             </a:r>
           </a:p>
         </p:txBody>
@@ -7413,7 +7865,7 @@
                 </a:solidFill>
                 <a:latin typeface="Montserrat"/>
               </a:rPr>
-              <a:t>TIPO A · FUEGOS Y LOFT</a:t>
+              <a:t>TIPO A · PROHIBICIONES</a:t>
             </a:r>
           </a:p>
         </p:txBody>
@@ -7447,14 +7899,14 @@
                 </a:solidFill>
                 <a:latin typeface="Montserrat"/>
               </a:rPr>
-              <a:t>Seguridad de llama y el loft</a:t>
-            </a:r>
-          </a:p>
-        </p:txBody>
-      </p:sp>
-      <p:sp>
-        <p:nvSpPr>
-          <p:cNvPr id="7" name="Rounded Rectangle 6"/>
+              <a:t>Dónde nunca va un tipo A</a:t>
+            </a:r>
+          </a:p>
+        </p:txBody>
+      </p:sp>
+      <p:sp>
+        <p:nvSpPr>
+          <p:cNvPr id="7" name="Rectangle 6"/>
           <p:cNvSpPr/>
           <p:nvPr/>
         </p:nvSpPr>
@@ -7463,7 +7915,7 @@
             <a:off x="868680" y="1627632"/>
             <a:ext cx="2011680" cy="73152"/>
           </a:xfrm>
-          <a:prstGeom prst="roundRect">
+          <a:prstGeom prst="rect">
             <a:avLst/>
           </a:prstGeom>
           <a:solidFill>
@@ -7505,7 +7957,7 @@
         <p:spPr>
           <a:xfrm>
             <a:off x="822960" y="1965960"/>
-            <a:ext cx="4983480" cy="4206240"/>
+            <a:ext cx="5029200" cy="4206240"/>
           </a:xfrm>
           <a:prstGeom prst="rect">
             <a:avLst/>
@@ -7539,7 +7991,7 @@
                 </a:solidFill>
                 <a:latin typeface="Montserrat"/>
               </a:rPr>
-              <a:t>Sin seguridad de llama: ventilación rápida</a:t>
+              <a:t>Nunca en dormitorio</a:t>
             </a:r>
           </a:p>
           <a:p>
@@ -7564,7 +8016,7 @@
                 </a:solidFill>
                 <a:latin typeface="Montserrat"/>
               </a:rPr>
-              <a:t>Con seguridad de llama: no hace falta</a:t>
+              <a:t>Nunca en baño, ducha o aseo</a:t>
             </a:r>
           </a:p>
           <a:p>
@@ -7589,21 +8041,21 @@
                 </a:solidFill>
                 <a:latin typeface="Montserrat"/>
               </a:rPr>
-              <a:t>Loft: cocción ≤ 12 kW y ≥ 80 m³</a:t>
-            </a:r>
-          </a:p>
-        </p:txBody>
-      </p:sp>
-      <p:sp>
-        <p:nvSpPr>
-          <p:cNvPr id="9" name="imgph" descr="IMGQ:loft apartment open kitchen"/>
+              <a:t>ACS por acumulación: jamás</a:t>
+            </a:r>
+          </a:p>
+        </p:txBody>
+      </p:sp>
+      <p:sp>
+        <p:nvSpPr>
+          <p:cNvPr id="9" name="imgph" descr="IMGQ:empty bathroom interior"/>
           <p:cNvSpPr/>
           <p:nvPr/>
         </p:nvSpPr>
         <p:spPr>
           <a:xfrm>
-            <a:off x="5806440" y="1051560"/>
-            <a:ext cx="5298947" cy="4629150"/>
+            <a:off x="6080760" y="1965960"/>
+            <a:ext cx="5303520" cy="4572000"/>
           </a:xfrm>
           <a:prstGeom prst="roundRect">
             <a:avLst/>
@@ -7648,8 +8100,8 @@
         </p:nvSpPr>
         <p:spPr>
           <a:xfrm>
-            <a:off x="6080760" y="2726055"/>
-            <a:ext cx="4750307" cy="1280160"/>
+            <a:off x="6355080" y="3611880"/>
+            <a:ext cx="4754880" cy="1280160"/>
           </a:xfrm>
           <a:prstGeom prst="rect">
             <a:avLst/>
@@ -7670,7 +8122,7 @@
                 </a:solidFill>
                 <a:latin typeface="Montserrat"/>
               </a:rPr>
-              <a:t>IMAGEN REALISTA</a:t>
+              <a:t>IMAGEN</a:t>
             </a:r>
           </a:p>
           <a:p>
@@ -7682,7 +8134,7 @@
                 </a:solidFill>
                 <a:latin typeface="Montserrat"/>
               </a:rPr>
-              <a:t>loft apartment open kitchen</a:t>
+              <a:t>empty bathroom interior</a:t>
             </a:r>
           </a:p>
         </p:txBody>
@@ -7692,6 +8144,18 @@
   <p:clrMapOvr>
     <a:masterClrMapping/>
   </p:clrMapOvr>
+  <mc:AlternateContent xmlns:mc="http://schemas.openxmlformats.org/markup-compatibility/2006">
+    <mc:Choice xmlns:p14="http://schemas.microsoft.com/office/powerpoint/2010/main" Requires="p14">
+      <p:transition spd="med" p14:dur="700">
+        <p14:cube dir="l"/>
+      </p:transition>
+    </mc:Choice>
+    <mc:Fallback>
+      <p:transition spd="med">
+        <p:push dir="l"/>
+      </p:transition>
+    </mc:Fallback>
+  </mc:AlternateContent>
 </p:sld>
 </file>
 
@@ -7779,7 +8243,7 @@
                 </a:solidFill>
                 <a:latin typeface="Montserrat"/>
               </a:rPr>
-              <a:t>016 / 019</a:t>
+              <a:t>016 / 024</a:t>
             </a:r>
           </a:p>
         </p:txBody>
@@ -7820,84 +8284,16 @@
       </p:sp>
       <p:sp>
         <p:nvSpPr>
-          <p:cNvPr id="5" name="TextBox 4"/>
-          <p:cNvSpPr txBox="1"/>
-          <p:nvPr/>
-        </p:nvSpPr>
-        <p:spPr>
-          <a:xfrm>
-            <a:off x="822960" y="457200"/>
-            <a:ext cx="10058400" cy="365760"/>
-          </a:xfrm>
-          <a:prstGeom prst="rect">
-            <a:avLst/>
-          </a:prstGeom>
-          <a:noFill/>
-        </p:spPr>
-        <p:txBody>
-          <a:bodyPr wrap="square">
-            <a:spAutoFit/>
-          </a:bodyPr>
-          <a:lstStyle/>
-          <a:p>
-            <a:r>
-              <a:rPr sz="1300" b="1" i="0">
-                <a:solidFill>
-                  <a:srgbClr val="E8801A"/>
-                </a:solidFill>
-                <a:latin typeface="Montserrat"/>
-              </a:rPr>
-              <a:t>TIPO B · DÓNDE</a:t>
-            </a:r>
-          </a:p>
-        </p:txBody>
-      </p:sp>
-      <p:sp>
-        <p:nvSpPr>
-          <p:cNvPr id="6" name="TextBox 5"/>
-          <p:cNvSpPr txBox="1"/>
-          <p:nvPr/>
-        </p:nvSpPr>
-        <p:spPr>
-          <a:xfrm>
-            <a:off x="822960" y="868680"/>
-            <a:ext cx="10515600" cy="914400"/>
-          </a:xfrm>
-          <a:prstGeom prst="rect">
-            <a:avLst/>
-          </a:prstGeom>
-          <a:noFill/>
-        </p:spPr>
-        <p:txBody>
-          <a:bodyPr wrap="square">
-            <a:spAutoFit/>
-          </a:bodyPr>
-          <a:lstStyle/>
-          <a:p>
-            <a:r>
-              <a:rPr sz="2800" b="1" i="0">
-                <a:solidFill>
-                  <a:srgbClr val="1E2761"/>
-                </a:solidFill>
-                <a:latin typeface="Montserrat"/>
-              </a:rPr>
-              <a:t>Tipo B y su comodín, el B3x</a:t>
-            </a:r>
-          </a:p>
-        </p:txBody>
-      </p:sp>
-      <p:sp>
-        <p:nvSpPr>
-          <p:cNvPr id="7" name="Rounded Rectangle 6"/>
+          <p:cNvPr id="5" name="Rectangle 4"/>
           <p:cNvSpPr/>
           <p:nvPr/>
         </p:nvSpPr>
         <p:spPr>
           <a:xfrm>
-            <a:off x="868680" y="1627632"/>
-            <a:ext cx="2011680" cy="73152"/>
-          </a:xfrm>
-          <a:prstGeom prst="roundRect">
+            <a:off x="0" y="0"/>
+            <a:ext cx="12191695" cy="1143000"/>
+          </a:xfrm>
+          <a:prstGeom prst="rect">
             <a:avLst/>
           </a:prstGeom>
           <a:solidFill>
@@ -7932,14 +8328,14 @@
       </p:sp>
       <p:sp>
         <p:nvSpPr>
-          <p:cNvPr id="8" name="TextBox 7"/>
+          <p:cNvPr id="6" name="TextBox 5"/>
           <p:cNvSpPr txBox="1"/>
           <p:nvPr/>
         </p:nvSpPr>
         <p:spPr>
           <a:xfrm>
-            <a:off x="822960" y="1965960"/>
-            <a:ext cx="4983480" cy="4206240"/>
+            <a:off x="822960" y="274320"/>
+            <a:ext cx="10515600" cy="640080"/>
           </a:xfrm>
           <a:prstGeom prst="rect">
             <a:avLst/>
@@ -7952,92 +8348,62 @@
           </a:bodyPr>
           <a:lstStyle/>
           <a:p>
-            <a:pPr>
-              <a:spcAft>
-                <a:spcPts val="1100"/>
-              </a:spcAft>
-            </a:pPr>
-            <a:r>
-              <a:rPr sz="1600" b="1" i="0">
-                <a:solidFill>
-                  <a:srgbClr val="E8801A"/>
-                </a:solidFill>
-                <a:latin typeface="Montserrat"/>
-              </a:rPr>
-              <a:t>▸  </a:t>
-            </a:r>
-            <a:r>
-              <a:rPr sz="1600" b="0" i="0">
-                <a:solidFill>
-                  <a:srgbClr val="1B2330"/>
-                </a:solidFill>
-                <a:latin typeface="Montserrat"/>
-              </a:rPr>
-              <a:t>Nunca en dormitorio ni baño</a:t>
-            </a:r>
-          </a:p>
-          <a:p>
-            <a:pPr>
-              <a:spcAft>
-                <a:spcPts val="1100"/>
-              </a:spcAft>
-            </a:pPr>
-            <a:r>
-              <a:rPr sz="1600" b="1" i="0">
-                <a:solidFill>
-                  <a:srgbClr val="E8801A"/>
-                </a:solidFill>
-                <a:latin typeface="Montserrat"/>
-              </a:rPr>
-              <a:t>▸  </a:t>
-            </a:r>
-            <a:r>
-              <a:rPr sz="1600" b="0" i="0">
-                <a:solidFill>
-                  <a:srgbClr val="1B2330"/>
-                </a:solidFill>
-                <a:latin typeface="Montserrat"/>
-              </a:rPr>
-              <a:t>B3x: cocinas, lavaderos, garajes</a:t>
-            </a:r>
-          </a:p>
-          <a:p>
-            <a:pPr>
-              <a:spcAft>
-                <a:spcPts val="1100"/>
-              </a:spcAft>
-            </a:pPr>
-            <a:r>
-              <a:rPr sz="1600" b="1" i="0">
-                <a:solidFill>
-                  <a:srgbClr val="E8801A"/>
-                </a:solidFill>
-                <a:latin typeface="Montserrat"/>
-              </a:rPr>
-              <a:t>▸  </a:t>
-            </a:r>
-            <a:r>
-              <a:rPr sz="1600" b="0" i="0">
-                <a:solidFill>
-                  <a:srgbClr val="1B2330"/>
-                </a:solidFill>
-                <a:latin typeface="Montserrat"/>
-              </a:rPr>
-              <a:t>Única excepción a la prohibición</a:t>
-            </a:r>
-          </a:p>
-        </p:txBody>
-      </p:sp>
-      <p:sp>
-        <p:nvSpPr>
-          <p:cNvPr id="9" name="imgph" descr="IMGQ:utility room gas water heater"/>
+            <a:r>
+              <a:rPr sz="2400" b="1" i="0">
+                <a:solidFill>
+                  <a:srgbClr val="FFFFFF"/>
+                </a:solidFill>
+                <a:latin typeface="Montserrat"/>
+              </a:rPr>
+              <a:t>⚡  PREGUNTA RÁPIDA</a:t>
+            </a:r>
+          </a:p>
+        </p:txBody>
+      </p:sp>
+      <p:sp>
+        <p:nvSpPr>
+          <p:cNvPr id="7" name="TextBox 6"/>
+          <p:cNvSpPr txBox="1"/>
+          <p:nvPr/>
+        </p:nvSpPr>
+        <p:spPr>
+          <a:xfrm>
+            <a:off x="822960" y="1508760"/>
+            <a:ext cx="10515600" cy="1371600"/>
+          </a:xfrm>
+          <a:prstGeom prst="rect">
+            <a:avLst/>
+          </a:prstGeom>
+          <a:noFill/>
+        </p:spPr>
+        <p:txBody>
+          <a:bodyPr wrap="square">
+            <a:spAutoFit/>
+          </a:bodyPr>
+          <a:lstStyle/>
+          <a:p>
+            <a:r>
+              <a:rPr sz="2400" b="1" i="0">
+                <a:solidFill>
+                  <a:srgbClr val="1E2761"/>
+                </a:solidFill>
+                <a:latin typeface="Montserrat"/>
+              </a:rPr>
+              <a:t>¿Se puede instalar un acumulador de ACS de tipo A si es de poca potencia?</a:t>
+            </a:r>
+          </a:p>
+        </p:txBody>
+      </p:sp>
+      <p:sp>
+        <p:nvSpPr>
+          <p:cNvPr id="8" name="Rounded Rectangle 7"/>
           <p:cNvSpPr/>
           <p:nvPr/>
         </p:nvSpPr>
         <p:spPr>
           <a:xfrm>
-            <a:off x="5806440" y="1051560"/>
-            <a:ext cx="5298947" cy="4629150"/>
+            <a:off x="822960" y="3291840"/>
+            <a:ext cx="4983480" cy="1143000"/>
           </a:xfrm>
           <a:prstGeom prst="roundRect">
             <a:avLst/>
@@ -8076,14 +8442,58 @@
       </p:sp>
       <p:sp>
         <p:nvSpPr>
+          <p:cNvPr id="9" name="Rectangle 8"/>
+          <p:cNvSpPr/>
+          <p:nvPr/>
+        </p:nvSpPr>
+        <p:spPr>
+          <a:xfrm>
+            <a:off x="822960" y="3291840"/>
+            <a:ext cx="640080" cy="1143000"/>
+          </a:xfrm>
+          <a:prstGeom prst="rect">
+            <a:avLst/>
+          </a:prstGeom>
+          <a:solidFill>
+            <a:srgbClr val="1E2761"/>
+          </a:solidFill>
+          <a:ln>
+            <a:noFill/>
+          </a:ln>
+          <a:effectLst/>
+        </p:spPr>
+        <p:style>
+          <a:lnRef idx="1">
+            <a:schemeClr val="accent1"/>
+          </a:lnRef>
+          <a:fillRef idx="3">
+            <a:schemeClr val="accent1"/>
+          </a:fillRef>
+          <a:effectRef idx="2">
+            <a:schemeClr val="accent1"/>
+          </a:effectRef>
+          <a:fontRef idx="minor">
+            <a:schemeClr val="lt1"/>
+          </a:fontRef>
+        </p:style>
+        <p:txBody>
+          <a:bodyPr rtlCol="0" anchor="ctr"/>
+          <a:lstStyle/>
+          <a:p>
+            <a:pPr algn="ctr"/>
+          </a:p>
+        </p:txBody>
+      </p:sp>
+      <p:sp>
+        <p:nvSpPr>
           <p:cNvPr id="10" name="TextBox 9"/>
           <p:cNvSpPr txBox="1"/>
           <p:nvPr/>
         </p:nvSpPr>
         <p:spPr>
           <a:xfrm>
-            <a:off x="6080760" y="2726055"/>
-            <a:ext cx="4750307" cy="1280160"/>
+            <a:off x="822960" y="3611880"/>
+            <a:ext cx="640080" cy="548640"/>
           </a:xfrm>
           <a:prstGeom prst="rect">
             <a:avLst/>
@@ -8098,25 +8508,524 @@
           <a:p>
             <a:pPr algn="ctr"/>
             <a:r>
-              <a:rPr sz="1400" b="1" i="0">
-                <a:solidFill>
-                  <a:srgbClr val="64748B"/>
-                </a:solidFill>
-                <a:latin typeface="Montserrat"/>
-              </a:rPr>
-              <a:t>IMAGEN REALISTA</a:t>
-            </a:r>
-          </a:p>
+              <a:rPr sz="2200" b="1" i="0">
+                <a:solidFill>
+                  <a:srgbClr val="FFFFFF"/>
+                </a:solidFill>
+                <a:latin typeface="Montserrat"/>
+              </a:rPr>
+              <a:t>A</a:t>
+            </a:r>
+          </a:p>
+        </p:txBody>
+      </p:sp>
+      <p:sp>
+        <p:nvSpPr>
+          <p:cNvPr id="11" name="TextBox 10"/>
+          <p:cNvSpPr txBox="1"/>
+          <p:nvPr/>
+        </p:nvSpPr>
+        <p:spPr>
+          <a:xfrm>
+            <a:off x="1600200" y="3474720"/>
+            <a:ext cx="4114800" cy="868680"/>
+          </a:xfrm>
+          <a:prstGeom prst="rect">
+            <a:avLst/>
+          </a:prstGeom>
+          <a:noFill/>
+        </p:spPr>
+        <p:txBody>
+          <a:bodyPr wrap="square">
+            <a:spAutoFit/>
+          </a:bodyPr>
+          <a:lstStyle/>
+          <a:p>
+            <a:r>
+              <a:rPr sz="1400" b="0" i="0">
+                <a:solidFill>
+                  <a:srgbClr val="1B2330"/>
+                </a:solidFill>
+                <a:latin typeface="Montserrat"/>
+              </a:rPr>
+              <a:t>Sí, si es menor de 4,65 kW</a:t>
+            </a:r>
+          </a:p>
+        </p:txBody>
+      </p:sp>
+      <p:sp>
+        <p:nvSpPr>
+          <p:cNvPr id="12" name="Rounded Rectangle 11"/>
+          <p:cNvSpPr/>
+          <p:nvPr/>
+        </p:nvSpPr>
+        <p:spPr>
+          <a:xfrm>
+            <a:off x="6355080" y="3291840"/>
+            <a:ext cx="4983480" cy="1143000"/>
+          </a:xfrm>
+          <a:prstGeom prst="roundRect">
+            <a:avLst/>
+          </a:prstGeom>
+          <a:solidFill>
+            <a:srgbClr val="F3F6FB"/>
+          </a:solidFill>
+          <a:ln w="12700">
+            <a:solidFill>
+              <a:srgbClr val="C7D2E6"/>
+            </a:solidFill>
+          </a:ln>
+          <a:effectLst/>
+        </p:spPr>
+        <p:style>
+          <a:lnRef idx="1">
+            <a:schemeClr val="accent1"/>
+          </a:lnRef>
+          <a:fillRef idx="3">
+            <a:schemeClr val="accent1"/>
+          </a:fillRef>
+          <a:effectRef idx="2">
+            <a:schemeClr val="accent1"/>
+          </a:effectRef>
+          <a:fontRef idx="minor">
+            <a:schemeClr val="lt1"/>
+          </a:fontRef>
+        </p:style>
+        <p:txBody>
+          <a:bodyPr rtlCol="0" anchor="ctr"/>
+          <a:lstStyle/>
           <a:p>
             <a:pPr algn="ctr"/>
-            <a:r>
-              <a:rPr sz="1100" b="0" i="1">
-                <a:solidFill>
-                  <a:srgbClr val="64748B"/>
-                </a:solidFill>
-                <a:latin typeface="Montserrat"/>
-              </a:rPr>
-              <a:t>utility room gas water heater</a:t>
+          </a:p>
+        </p:txBody>
+      </p:sp>
+      <p:sp>
+        <p:nvSpPr>
+          <p:cNvPr id="13" name="Rectangle 12"/>
+          <p:cNvSpPr/>
+          <p:nvPr/>
+        </p:nvSpPr>
+        <p:spPr>
+          <a:xfrm>
+            <a:off x="6355080" y="3291840"/>
+            <a:ext cx="640080" cy="1143000"/>
+          </a:xfrm>
+          <a:prstGeom prst="rect">
+            <a:avLst/>
+          </a:prstGeom>
+          <a:solidFill>
+            <a:srgbClr val="1E2761"/>
+          </a:solidFill>
+          <a:ln>
+            <a:noFill/>
+          </a:ln>
+          <a:effectLst/>
+        </p:spPr>
+        <p:style>
+          <a:lnRef idx="1">
+            <a:schemeClr val="accent1"/>
+          </a:lnRef>
+          <a:fillRef idx="3">
+            <a:schemeClr val="accent1"/>
+          </a:fillRef>
+          <a:effectRef idx="2">
+            <a:schemeClr val="accent1"/>
+          </a:effectRef>
+          <a:fontRef idx="minor">
+            <a:schemeClr val="lt1"/>
+          </a:fontRef>
+        </p:style>
+        <p:txBody>
+          <a:bodyPr rtlCol="0" anchor="ctr"/>
+          <a:lstStyle/>
+          <a:p>
+            <a:pPr algn="ctr"/>
+          </a:p>
+        </p:txBody>
+      </p:sp>
+      <p:sp>
+        <p:nvSpPr>
+          <p:cNvPr id="14" name="TextBox 13"/>
+          <p:cNvSpPr txBox="1"/>
+          <p:nvPr/>
+        </p:nvSpPr>
+        <p:spPr>
+          <a:xfrm>
+            <a:off x="6355080" y="3611880"/>
+            <a:ext cx="640080" cy="548640"/>
+          </a:xfrm>
+          <a:prstGeom prst="rect">
+            <a:avLst/>
+          </a:prstGeom>
+          <a:noFill/>
+        </p:spPr>
+        <p:txBody>
+          <a:bodyPr wrap="square">
+            <a:spAutoFit/>
+          </a:bodyPr>
+          <a:lstStyle/>
+          <a:p>
+            <a:pPr algn="ctr"/>
+            <a:r>
+              <a:rPr sz="2200" b="1" i="0">
+                <a:solidFill>
+                  <a:srgbClr val="FFFFFF"/>
+                </a:solidFill>
+                <a:latin typeface="Montserrat"/>
+              </a:rPr>
+              <a:t>B</a:t>
+            </a:r>
+          </a:p>
+        </p:txBody>
+      </p:sp>
+      <p:sp>
+        <p:nvSpPr>
+          <p:cNvPr id="15" name="TextBox 14"/>
+          <p:cNvSpPr txBox="1"/>
+          <p:nvPr/>
+        </p:nvSpPr>
+        <p:spPr>
+          <a:xfrm>
+            <a:off x="7132320" y="3474720"/>
+            <a:ext cx="4114800" cy="868680"/>
+          </a:xfrm>
+          <a:prstGeom prst="rect">
+            <a:avLst/>
+          </a:prstGeom>
+          <a:noFill/>
+        </p:spPr>
+        <p:txBody>
+          <a:bodyPr wrap="square">
+            <a:spAutoFit/>
+          </a:bodyPr>
+          <a:lstStyle/>
+          <a:p>
+            <a:r>
+              <a:rPr sz="1400" b="0" i="0">
+                <a:solidFill>
+                  <a:srgbClr val="1B2330"/>
+                </a:solidFill>
+                <a:latin typeface="Montserrat"/>
+              </a:rPr>
+              <a:t>Sí, con ventilación rápida</a:t>
+            </a:r>
+          </a:p>
+        </p:txBody>
+      </p:sp>
+      <p:sp>
+        <p:nvSpPr>
+          <p:cNvPr id="16" name="Rounded Rectangle 15"/>
+          <p:cNvSpPr/>
+          <p:nvPr/>
+        </p:nvSpPr>
+        <p:spPr>
+          <a:xfrm>
+            <a:off x="822960" y="4617720"/>
+            <a:ext cx="4983480" cy="1143000"/>
+          </a:xfrm>
+          <a:prstGeom prst="roundRect">
+            <a:avLst/>
+          </a:prstGeom>
+          <a:solidFill>
+            <a:srgbClr val="F3F6FB"/>
+          </a:solidFill>
+          <a:ln w="12700">
+            <a:solidFill>
+              <a:srgbClr val="C7D2E6"/>
+            </a:solidFill>
+          </a:ln>
+          <a:effectLst/>
+        </p:spPr>
+        <p:style>
+          <a:lnRef idx="1">
+            <a:schemeClr val="accent1"/>
+          </a:lnRef>
+          <a:fillRef idx="3">
+            <a:schemeClr val="accent1"/>
+          </a:fillRef>
+          <a:effectRef idx="2">
+            <a:schemeClr val="accent1"/>
+          </a:effectRef>
+          <a:fontRef idx="minor">
+            <a:schemeClr val="lt1"/>
+          </a:fontRef>
+        </p:style>
+        <p:txBody>
+          <a:bodyPr rtlCol="0" anchor="ctr"/>
+          <a:lstStyle/>
+          <a:p>
+            <a:pPr algn="ctr"/>
+          </a:p>
+        </p:txBody>
+      </p:sp>
+      <p:sp>
+        <p:nvSpPr>
+          <p:cNvPr id="17" name="Rectangle 16"/>
+          <p:cNvSpPr/>
+          <p:nvPr/>
+        </p:nvSpPr>
+        <p:spPr>
+          <a:xfrm>
+            <a:off x="822960" y="4617720"/>
+            <a:ext cx="640080" cy="1143000"/>
+          </a:xfrm>
+          <a:prstGeom prst="rect">
+            <a:avLst/>
+          </a:prstGeom>
+          <a:solidFill>
+            <a:srgbClr val="1E2761"/>
+          </a:solidFill>
+          <a:ln>
+            <a:noFill/>
+          </a:ln>
+          <a:effectLst/>
+        </p:spPr>
+        <p:style>
+          <a:lnRef idx="1">
+            <a:schemeClr val="accent1"/>
+          </a:lnRef>
+          <a:fillRef idx="3">
+            <a:schemeClr val="accent1"/>
+          </a:fillRef>
+          <a:effectRef idx="2">
+            <a:schemeClr val="accent1"/>
+          </a:effectRef>
+          <a:fontRef idx="minor">
+            <a:schemeClr val="lt1"/>
+          </a:fontRef>
+        </p:style>
+        <p:txBody>
+          <a:bodyPr rtlCol="0" anchor="ctr"/>
+          <a:lstStyle/>
+          <a:p>
+            <a:pPr algn="ctr"/>
+          </a:p>
+        </p:txBody>
+      </p:sp>
+      <p:sp>
+        <p:nvSpPr>
+          <p:cNvPr id="18" name="TextBox 17"/>
+          <p:cNvSpPr txBox="1"/>
+          <p:nvPr/>
+        </p:nvSpPr>
+        <p:spPr>
+          <a:xfrm>
+            <a:off x="822960" y="4937760"/>
+            <a:ext cx="640080" cy="548640"/>
+          </a:xfrm>
+          <a:prstGeom prst="rect">
+            <a:avLst/>
+          </a:prstGeom>
+          <a:noFill/>
+        </p:spPr>
+        <p:txBody>
+          <a:bodyPr wrap="square">
+            <a:spAutoFit/>
+          </a:bodyPr>
+          <a:lstStyle/>
+          <a:p>
+            <a:pPr algn="ctr"/>
+            <a:r>
+              <a:rPr sz="2200" b="1" i="0">
+                <a:solidFill>
+                  <a:srgbClr val="FFFFFF"/>
+                </a:solidFill>
+                <a:latin typeface="Montserrat"/>
+              </a:rPr>
+              <a:t>C</a:t>
+            </a:r>
+          </a:p>
+        </p:txBody>
+      </p:sp>
+      <p:sp>
+        <p:nvSpPr>
+          <p:cNvPr id="19" name="TextBox 18"/>
+          <p:cNvSpPr txBox="1"/>
+          <p:nvPr/>
+        </p:nvSpPr>
+        <p:spPr>
+          <a:xfrm>
+            <a:off x="1600200" y="4800600"/>
+            <a:ext cx="4114800" cy="868680"/>
+          </a:xfrm>
+          <a:prstGeom prst="rect">
+            <a:avLst/>
+          </a:prstGeom>
+          <a:noFill/>
+        </p:spPr>
+        <p:txBody>
+          <a:bodyPr wrap="square">
+            <a:spAutoFit/>
+          </a:bodyPr>
+          <a:lstStyle/>
+          <a:p>
+            <a:r>
+              <a:rPr sz="1400" b="0" i="0">
+                <a:solidFill>
+                  <a:srgbClr val="1B2330"/>
+                </a:solidFill>
+                <a:latin typeface="Montserrat"/>
+              </a:rPr>
+              <a:t>No, no se instala en ningún caso</a:t>
+            </a:r>
+          </a:p>
+        </p:txBody>
+      </p:sp>
+      <p:sp>
+        <p:nvSpPr>
+          <p:cNvPr id="20" name="Rounded Rectangle 19"/>
+          <p:cNvSpPr/>
+          <p:nvPr/>
+        </p:nvSpPr>
+        <p:spPr>
+          <a:xfrm>
+            <a:off x="6355080" y="4617720"/>
+            <a:ext cx="4983480" cy="1143000"/>
+          </a:xfrm>
+          <a:prstGeom prst="roundRect">
+            <a:avLst/>
+          </a:prstGeom>
+          <a:solidFill>
+            <a:srgbClr val="F3F6FB"/>
+          </a:solidFill>
+          <a:ln w="12700">
+            <a:solidFill>
+              <a:srgbClr val="C7D2E6"/>
+            </a:solidFill>
+          </a:ln>
+          <a:effectLst/>
+        </p:spPr>
+        <p:style>
+          <a:lnRef idx="1">
+            <a:schemeClr val="accent1"/>
+          </a:lnRef>
+          <a:fillRef idx="3">
+            <a:schemeClr val="accent1"/>
+          </a:fillRef>
+          <a:effectRef idx="2">
+            <a:schemeClr val="accent1"/>
+          </a:effectRef>
+          <a:fontRef idx="minor">
+            <a:schemeClr val="lt1"/>
+          </a:fontRef>
+        </p:style>
+        <p:txBody>
+          <a:bodyPr rtlCol="0" anchor="ctr"/>
+          <a:lstStyle/>
+          <a:p>
+            <a:pPr algn="ctr"/>
+          </a:p>
+        </p:txBody>
+      </p:sp>
+      <p:sp>
+        <p:nvSpPr>
+          <p:cNvPr id="21" name="Rectangle 20"/>
+          <p:cNvSpPr/>
+          <p:nvPr/>
+        </p:nvSpPr>
+        <p:spPr>
+          <a:xfrm>
+            <a:off x="6355080" y="4617720"/>
+            <a:ext cx="640080" cy="1143000"/>
+          </a:xfrm>
+          <a:prstGeom prst="rect">
+            <a:avLst/>
+          </a:prstGeom>
+          <a:solidFill>
+            <a:srgbClr val="1E2761"/>
+          </a:solidFill>
+          <a:ln>
+            <a:noFill/>
+          </a:ln>
+          <a:effectLst/>
+        </p:spPr>
+        <p:style>
+          <a:lnRef idx="1">
+            <a:schemeClr val="accent1"/>
+          </a:lnRef>
+          <a:fillRef idx="3">
+            <a:schemeClr val="accent1"/>
+          </a:fillRef>
+          <a:effectRef idx="2">
+            <a:schemeClr val="accent1"/>
+          </a:effectRef>
+          <a:fontRef idx="minor">
+            <a:schemeClr val="lt1"/>
+          </a:fontRef>
+        </p:style>
+        <p:txBody>
+          <a:bodyPr rtlCol="0" anchor="ctr"/>
+          <a:lstStyle/>
+          <a:p>
+            <a:pPr algn="ctr"/>
+          </a:p>
+        </p:txBody>
+      </p:sp>
+      <p:sp>
+        <p:nvSpPr>
+          <p:cNvPr id="22" name="TextBox 21"/>
+          <p:cNvSpPr txBox="1"/>
+          <p:nvPr/>
+        </p:nvSpPr>
+        <p:spPr>
+          <a:xfrm>
+            <a:off x="6355080" y="4937760"/>
+            <a:ext cx="640080" cy="548640"/>
+          </a:xfrm>
+          <a:prstGeom prst="rect">
+            <a:avLst/>
+          </a:prstGeom>
+          <a:noFill/>
+        </p:spPr>
+        <p:txBody>
+          <a:bodyPr wrap="square">
+            <a:spAutoFit/>
+          </a:bodyPr>
+          <a:lstStyle/>
+          <a:p>
+            <a:pPr algn="ctr"/>
+            <a:r>
+              <a:rPr sz="2200" b="1" i="0">
+                <a:solidFill>
+                  <a:srgbClr val="FFFFFF"/>
+                </a:solidFill>
+                <a:latin typeface="Montserrat"/>
+              </a:rPr>
+              <a:t>D</a:t>
+            </a:r>
+          </a:p>
+        </p:txBody>
+      </p:sp>
+      <p:sp>
+        <p:nvSpPr>
+          <p:cNvPr id="23" name="TextBox 22"/>
+          <p:cNvSpPr txBox="1"/>
+          <p:nvPr/>
+        </p:nvSpPr>
+        <p:spPr>
+          <a:xfrm>
+            <a:off x="7132320" y="4800600"/>
+            <a:ext cx="4114800" cy="868680"/>
+          </a:xfrm>
+          <a:prstGeom prst="rect">
+            <a:avLst/>
+          </a:prstGeom>
+          <a:noFill/>
+        </p:spPr>
+        <p:txBody>
+          <a:bodyPr wrap="square">
+            <a:spAutoFit/>
+          </a:bodyPr>
+          <a:lstStyle/>
+          <a:p>
+            <a:r>
+              <a:rPr sz="1400" b="0" i="0">
+                <a:solidFill>
+                  <a:srgbClr val="1B2330"/>
+                </a:solidFill>
+                <a:latin typeface="Montserrat"/>
+              </a:rPr>
+              <a:t>Solo en zona exterior</a:t>
             </a:r>
           </a:p>
         </p:txBody>
@@ -8126,6 +9035,18 @@
   <p:clrMapOvr>
     <a:masterClrMapping/>
   </p:clrMapOvr>
+  <mc:AlternateContent xmlns:mc="http://schemas.openxmlformats.org/markup-compatibility/2006">
+    <mc:Choice xmlns:p14="http://schemas.microsoft.com/office/powerpoint/2010/main" Requires="p14">
+      <p:transition spd="med" p14:dur="700">
+        <p14:cube dir="r"/>
+      </p:transition>
+    </mc:Choice>
+    <mc:Fallback>
+      <p:transition spd="med">
+        <p:push dir="r"/>
+      </p:transition>
+    </mc:Fallback>
+  </mc:AlternateContent>
 </p:sld>
 </file>
 
@@ -8213,7 +9134,7 @@
                 </a:solidFill>
                 <a:latin typeface="Montserrat"/>
               </a:rPr>
-              <a:t>017 / 019</a:t>
+              <a:t>017 / 024</a:t>
             </a:r>
           </a:p>
         </p:txBody>
@@ -8254,88 +9175,20 @@
       </p:sp>
       <p:sp>
         <p:nvSpPr>
-          <p:cNvPr id="5" name="TextBox 4"/>
-          <p:cNvSpPr txBox="1"/>
-          <p:nvPr/>
-        </p:nvSpPr>
-        <p:spPr>
-          <a:xfrm>
-            <a:off x="822960" y="457200"/>
-            <a:ext cx="10058400" cy="365760"/>
-          </a:xfrm>
-          <a:prstGeom prst="rect">
-            <a:avLst/>
-          </a:prstGeom>
-          <a:noFill/>
-        </p:spPr>
-        <p:txBody>
-          <a:bodyPr wrap="square">
-            <a:spAutoFit/>
-          </a:bodyPr>
-          <a:lstStyle/>
-          <a:p>
-            <a:r>
-              <a:rPr sz="1300" b="1" i="0">
-                <a:solidFill>
-                  <a:srgbClr val="E8801A"/>
-                </a:solidFill>
-                <a:latin typeface="Montserrat"/>
-              </a:rPr>
-              <a:t>TIPO B · SEGURIDAD</a:t>
-            </a:r>
-          </a:p>
-        </p:txBody>
-      </p:sp>
-      <p:sp>
-        <p:nvSpPr>
-          <p:cNvPr id="6" name="TextBox 5"/>
-          <p:cNvSpPr txBox="1"/>
-          <p:nvPr/>
-        </p:nvSpPr>
-        <p:spPr>
-          <a:xfrm>
-            <a:off x="822960" y="868680"/>
-            <a:ext cx="10515600" cy="914400"/>
-          </a:xfrm>
-          <a:prstGeom prst="rect">
-            <a:avLst/>
-          </a:prstGeom>
-          <a:noFill/>
-        </p:spPr>
-        <p:txBody>
-          <a:bodyPr wrap="square">
-            <a:spAutoFit/>
-          </a:bodyPr>
-          <a:lstStyle/>
-          <a:p>
-            <a:r>
-              <a:rPr sz="2800" b="1" i="0">
-                <a:solidFill>
-                  <a:srgbClr val="1E2761"/>
-                </a:solidFill>
-                <a:latin typeface="Montserrat"/>
-              </a:rPr>
-              <a:t>Campana y calentador: el revoco</a:t>
-            </a:r>
-          </a:p>
-        </p:txBody>
-      </p:sp>
-      <p:sp>
-        <p:nvSpPr>
-          <p:cNvPr id="7" name="Rounded Rectangle 6"/>
+          <p:cNvPr id="5" name="Rectangle 4"/>
           <p:cNvSpPr/>
           <p:nvPr/>
         </p:nvSpPr>
         <p:spPr>
           <a:xfrm>
-            <a:off x="868680" y="1627632"/>
-            <a:ext cx="2011680" cy="73152"/>
-          </a:xfrm>
-          <a:prstGeom prst="roundRect">
+            <a:off x="0" y="0"/>
+            <a:ext cx="12191695" cy="1143000"/>
+          </a:xfrm>
+          <a:prstGeom prst="rect">
             <a:avLst/>
           </a:prstGeom>
           <a:solidFill>
-            <a:srgbClr val="E8801A"/>
+            <a:srgbClr val="1E8E4B"/>
           </a:solidFill>
           <a:ln>
             <a:noFill/>
@@ -8366,14 +9219,14 @@
       </p:sp>
       <p:sp>
         <p:nvSpPr>
-          <p:cNvPr id="8" name="TextBox 7"/>
+          <p:cNvPr id="6" name="TextBox 5"/>
           <p:cNvSpPr txBox="1"/>
           <p:nvPr/>
         </p:nvSpPr>
         <p:spPr>
           <a:xfrm>
-            <a:off x="822960" y="1965960"/>
-            <a:ext cx="4983480" cy="4206240"/>
+            <a:off x="822960" y="274320"/>
+            <a:ext cx="10515600" cy="640080"/>
           </a:xfrm>
           <a:prstGeom prst="rect">
             <a:avLst/>
@@ -8386,102 +9239,72 @@
           </a:bodyPr>
           <a:lstStyle/>
           <a:p>
-            <a:pPr>
-              <a:spcAft>
-                <a:spcPts val="1100"/>
-              </a:spcAft>
-            </a:pPr>
-            <a:r>
-              <a:rPr sz="1600" b="1" i="0">
-                <a:solidFill>
-                  <a:srgbClr val="E8801A"/>
-                </a:solidFill>
-                <a:latin typeface="Montserrat"/>
-              </a:rPr>
-              <a:t>▸  </a:t>
-            </a:r>
-            <a:r>
-              <a:rPr sz="1600" b="0" i="0">
-                <a:solidFill>
-                  <a:srgbClr val="1B2330"/>
-                </a:solidFill>
-                <a:latin typeface="Montserrat"/>
-              </a:rPr>
-              <a:t>La campana chupa los humos</a:t>
-            </a:r>
-          </a:p>
-          <a:p>
-            <a:pPr>
-              <a:spcAft>
-                <a:spcPts val="1100"/>
-              </a:spcAft>
-            </a:pPr>
-            <a:r>
-              <a:rPr sz="1600" b="1" i="0">
-                <a:solidFill>
-                  <a:srgbClr val="E8801A"/>
-                </a:solidFill>
-                <a:latin typeface="Montserrat"/>
-              </a:rPr>
-              <a:t>▸  </a:t>
-            </a:r>
-            <a:r>
-              <a:rPr sz="1600" b="0" i="0">
-                <a:solidFill>
-                  <a:srgbClr val="1B2330"/>
-                </a:solidFill>
-                <a:latin typeface="Montserrat"/>
-              </a:rPr>
-              <a:t>Peligro de CO en casa</a:t>
-            </a:r>
-          </a:p>
-          <a:p>
-            <a:pPr>
-              <a:spcAft>
-                <a:spcPts val="1100"/>
-              </a:spcAft>
-            </a:pPr>
-            <a:r>
-              <a:rPr sz="1600" b="1" i="0">
-                <a:solidFill>
-                  <a:srgbClr val="E8801A"/>
-                </a:solidFill>
-                <a:latin typeface="Montserrat"/>
-              </a:rPr>
-              <a:t>▸  </a:t>
-            </a:r>
-            <a:r>
-              <a:rPr sz="1600" b="0" i="0">
-                <a:solidFill>
-                  <a:srgbClr val="1B2330"/>
-                </a:solidFill>
-                <a:latin typeface="Montserrat"/>
-              </a:rPr>
-              <a:t>Corte automático en ≤ 2 min</a:t>
-            </a:r>
-          </a:p>
-        </p:txBody>
-      </p:sp>
-      <p:sp>
-        <p:nvSpPr>
-          <p:cNvPr id="9" name="imgph" descr="IMGQ:kitchen extractor hood"/>
+            <a:r>
+              <a:rPr sz="2400" b="1" i="0">
+                <a:solidFill>
+                  <a:srgbClr val="FFFFFF"/>
+                </a:solidFill>
+                <a:latin typeface="Montserrat"/>
+              </a:rPr>
+              <a:t>✔  RESPUESTA:  C</a:t>
+            </a:r>
+          </a:p>
+        </p:txBody>
+      </p:sp>
+      <p:sp>
+        <p:nvSpPr>
+          <p:cNvPr id="7" name="TextBox 6"/>
+          <p:cNvSpPr txBox="1"/>
+          <p:nvPr/>
+        </p:nvSpPr>
+        <p:spPr>
+          <a:xfrm>
+            <a:off x="822960" y="1417320"/>
+            <a:ext cx="10515600" cy="914400"/>
+          </a:xfrm>
+          <a:prstGeom prst="rect">
+            <a:avLst/>
+          </a:prstGeom>
+          <a:noFill/>
+        </p:spPr>
+        <p:txBody>
+          <a:bodyPr wrap="square">
+            <a:spAutoFit/>
+          </a:bodyPr>
+          <a:lstStyle/>
+          <a:p>
+            <a:r>
+              <a:rPr sz="1800" b="1" i="0">
+                <a:solidFill>
+                  <a:srgbClr val="64748B"/>
+                </a:solidFill>
+                <a:latin typeface="Montserrat"/>
+              </a:rPr>
+              <a:t>¿Se puede instalar un acumulador de ACS de tipo A si es de poca potencia?</a:t>
+            </a:r>
+          </a:p>
+        </p:txBody>
+      </p:sp>
+      <p:sp>
+        <p:nvSpPr>
+          <p:cNvPr id="8" name="Rounded Rectangle 7"/>
           <p:cNvSpPr/>
           <p:nvPr/>
         </p:nvSpPr>
         <p:spPr>
           <a:xfrm>
-            <a:off x="5806440" y="1051560"/>
-            <a:ext cx="5298947" cy="4629150"/>
+            <a:off x="822960" y="2514600"/>
+            <a:ext cx="10515600" cy="914400"/>
           </a:xfrm>
           <a:prstGeom prst="roundRect">
             <a:avLst/>
           </a:prstGeom>
           <a:solidFill>
-            <a:srgbClr val="F3F6FB"/>
+            <a:srgbClr val="E9F6EE"/>
           </a:solidFill>
           <a:ln w="12700">
             <a:solidFill>
-              <a:srgbClr val="C7D2E6"/>
+              <a:srgbClr val="1E8E4B"/>
             </a:solidFill>
           </a:ln>
           <a:effectLst/>
@@ -8510,14 +9333,14 @@
       </p:sp>
       <p:sp>
         <p:nvSpPr>
-          <p:cNvPr id="10" name="TextBox 9"/>
+          <p:cNvPr id="9" name="TextBox 8"/>
           <p:cNvSpPr txBox="1"/>
           <p:nvPr/>
         </p:nvSpPr>
         <p:spPr>
           <a:xfrm>
-            <a:off x="6080760" y="2726055"/>
-            <a:ext cx="4750307" cy="1280160"/>
+            <a:off x="1097280" y="2697480"/>
+            <a:ext cx="10058400" cy="640080"/>
           </a:xfrm>
           <a:prstGeom prst="rect">
             <a:avLst/>
@@ -8530,27 +9353,66 @@
           </a:bodyPr>
           <a:lstStyle/>
           <a:p>
-            <a:pPr algn="ctr"/>
-            <a:r>
-              <a:rPr sz="1400" b="1" i="0">
-                <a:solidFill>
-                  <a:srgbClr val="64748B"/>
-                </a:solidFill>
-                <a:latin typeface="Montserrat"/>
-              </a:rPr>
-              <a:t>IMAGEN REALISTA</a:t>
-            </a:r>
-          </a:p>
-          <a:p>
-            <a:pPr algn="ctr"/>
-            <a:r>
-              <a:rPr sz="1100" b="0" i="1">
-                <a:solidFill>
-                  <a:srgbClr val="64748B"/>
-                </a:solidFill>
-                <a:latin typeface="Montserrat"/>
-              </a:rPr>
-              <a:t>kitchen extractor hood</a:t>
+            <a:r>
+              <a:rPr sz="1800" b="1" i="0">
+                <a:solidFill>
+                  <a:srgbClr val="1E8E4B"/>
+                </a:solidFill>
+                <a:latin typeface="Montserrat"/>
+              </a:rPr>
+              <a:t>C.  </a:t>
+            </a:r>
+            <a:r>
+              <a:rPr sz="1800" b="1" i="0">
+                <a:solidFill>
+                  <a:srgbClr val="1E2761"/>
+                </a:solidFill>
+                <a:latin typeface="Montserrat"/>
+              </a:rPr>
+              <a:t>No, no se instala en ningún caso</a:t>
+            </a:r>
+          </a:p>
+        </p:txBody>
+      </p:sp>
+      <p:sp>
+        <p:nvSpPr>
+          <p:cNvPr id="10" name="TextBox 9"/>
+          <p:cNvSpPr txBox="1"/>
+          <p:nvPr/>
+        </p:nvSpPr>
+        <p:spPr>
+          <a:xfrm>
+            <a:off x="822960" y="3749039"/>
+            <a:ext cx="10515600" cy="2194560"/>
+          </a:xfrm>
+          <a:prstGeom prst="rect">
+            <a:avLst/>
+          </a:prstGeom>
+          <a:noFill/>
+        </p:spPr>
+        <p:txBody>
+          <a:bodyPr wrap="square">
+            <a:spAutoFit/>
+          </a:bodyPr>
+          <a:lstStyle/>
+          <a:p>
+            <a:r>
+              <a:rPr sz="1500" b="1" i="0">
+                <a:solidFill>
+                  <a:srgbClr val="E8801A"/>
+                </a:solidFill>
+                <a:latin typeface="Montserrat"/>
+              </a:rPr>
+              <a:t>Por qué:  </a:t>
+            </a:r>
+            <a:r>
+              <a:rPr sz="1500" b="0" i="0">
+                <a:solidFill>
+                  <a:srgbClr val="1B2330"/>
+                </a:solidFill>
+                <a:latin typeface="Montserrat"/>
+              </a:rPr>
+              <a:t>El acumulador de agua caliente sanitaria de tipo A estaría soltando humos dentro de casa durante horas; la norma lo prohíbe siempre, sin excepción por potencia.</a:t>
             </a:r>
           </a:p>
         </p:txBody>
@@ -8560,6 +9422,18 @@
   <p:clrMapOvr>
     <a:masterClrMapping/>
   </p:clrMapOvr>
+  <mc:AlternateContent xmlns:mc="http://schemas.openxmlformats.org/markup-compatibility/2006">
+    <mc:Choice xmlns:p14="http://schemas.microsoft.com/office/powerpoint/2010/main" Requires="p14">
+      <p:transition spd="med" p14:dur="700">
+        <p14:cube dir="l"/>
+      </p:transition>
+    </mc:Choice>
+    <mc:Fallback>
+      <p:transition spd="med">
+        <p:push dir="l"/>
+      </p:transition>
+    </mc:Fallback>
+  </mc:AlternateContent>
 </p:sld>
 </file>
 
@@ -8647,7 +9521,7 @@
                 </a:solidFill>
                 <a:latin typeface="Montserrat"/>
               </a:rPr>
-              <a:t>018 / 019</a:t>
+              <a:t>018 / 024</a:t>
             </a:r>
           </a:p>
         </p:txBody>
@@ -8715,7 +9589,7 @@
                 </a:solidFill>
                 <a:latin typeface="Montserrat"/>
               </a:rPr>
-              <a:t>TIPO C · DÓNDE</a:t>
+              <a:t>TIPO A · FUEGOS Y LOFT</a:t>
             </a:r>
           </a:p>
         </p:txBody>
@@ -8749,14 +9623,14 @@
                 </a:solidFill>
                 <a:latin typeface="Montserrat"/>
               </a:rPr>
-              <a:t>Tipo C: el todoterreno</a:t>
-            </a:r>
-          </a:p>
-        </p:txBody>
-      </p:sp>
-      <p:sp>
-        <p:nvSpPr>
-          <p:cNvPr id="7" name="Rounded Rectangle 6"/>
+              <a:t>Seguridad de llama y el loft</a:t>
+            </a:r>
+          </a:p>
+        </p:txBody>
+      </p:sp>
+      <p:sp>
+        <p:nvSpPr>
+          <p:cNvPr id="7" name="Rectangle 6"/>
           <p:cNvSpPr/>
           <p:nvPr/>
         </p:nvSpPr>
@@ -8765,7 +9639,7 @@
             <a:off x="868680" y="1627632"/>
             <a:ext cx="2011680" cy="73152"/>
           </a:xfrm>
-          <a:prstGeom prst="roundRect">
+          <a:prstGeom prst="rect">
             <a:avLst/>
           </a:prstGeom>
           <a:solidFill>
@@ -8806,8 +9680,8 @@
         </p:nvSpPr>
         <p:spPr>
           <a:xfrm>
-            <a:off x="822960" y="1965960"/>
-            <a:ext cx="4983480" cy="4206240"/>
+            <a:off x="6355080" y="1965960"/>
+            <a:ext cx="5029200" cy="4206240"/>
           </a:xfrm>
           <a:prstGeom prst="rect">
             <a:avLst/>
@@ -8841,7 +9715,7 @@
                 </a:solidFill>
                 <a:latin typeface="Montserrat"/>
               </a:rPr>
-              <a:t>Vale en cualquier local</a:t>
+              <a:t>Sin seguridad de llama: ventilación rápida</a:t>
             </a:r>
           </a:p>
           <a:p>
@@ -8866,7 +9740,7 @@
                 </a:solidFill>
                 <a:latin typeface="Montserrat"/>
               </a:rPr>
-              <a:t>Incluso dormitorio y baño</a:t>
+              <a:t>Con seguridad de llama: no hace falta</a:t>
             </a:r>
           </a:p>
           <a:p>
@@ -8891,21 +9765,21 @@
                 </a:solidFill>
                 <a:latin typeface="Montserrat"/>
               </a:rPr>
-              <a:t>En húmedos: cumplir el REBT</a:t>
-            </a:r>
-          </a:p>
-        </p:txBody>
-      </p:sp>
-      <p:sp>
-        <p:nvSpPr>
-          <p:cNvPr id="9" name="imgph" descr="IMGQ:modern boiler in cupboard"/>
+              <a:t>Loft: cocción ≤ 12 kW y ≥ 80 m³</a:t>
+            </a:r>
+          </a:p>
+        </p:txBody>
+      </p:sp>
+      <p:sp>
+        <p:nvSpPr>
+          <p:cNvPr id="9" name="imgph" descr="IMGQ:loft apartment open kitchen"/>
           <p:cNvSpPr/>
           <p:nvPr/>
         </p:nvSpPr>
         <p:spPr>
           <a:xfrm>
-            <a:off x="5806440" y="1051560"/>
-            <a:ext cx="5298947" cy="4629150"/>
+            <a:off x="822960" y="1965960"/>
+            <a:ext cx="5303520" cy="4572000"/>
           </a:xfrm>
           <a:prstGeom prst="roundRect">
             <a:avLst/>
@@ -8950,8 +9824,8 @@
         </p:nvSpPr>
         <p:spPr>
           <a:xfrm>
-            <a:off x="6080760" y="2726055"/>
-            <a:ext cx="4750307" cy="1280160"/>
+            <a:off x="1097280" y="3611880"/>
+            <a:ext cx="4754880" cy="1280160"/>
           </a:xfrm>
           <a:prstGeom prst="rect">
             <a:avLst/>
@@ -8972,7 +9846,7 @@
                 </a:solidFill>
                 <a:latin typeface="Montserrat"/>
               </a:rPr>
-              <a:t>IMAGEN REALISTA</a:t>
+              <a:t>IMAGEN</a:t>
             </a:r>
           </a:p>
           <a:p>
@@ -8984,7 +9858,7 @@
                 </a:solidFill>
                 <a:latin typeface="Montserrat"/>
               </a:rPr>
-              <a:t>modern boiler in cupboard</a:t>
+              <a:t>loft apartment open kitchen</a:t>
             </a:r>
           </a:p>
         </p:txBody>
@@ -8994,6 +9868,18 @@
   <p:clrMapOvr>
     <a:masterClrMapping/>
   </p:clrMapOvr>
+  <mc:AlternateContent xmlns:mc="http://schemas.openxmlformats.org/markup-compatibility/2006">
+    <mc:Choice xmlns:p14="http://schemas.microsoft.com/office/powerpoint/2010/main" Requires="p14">
+      <p:transition spd="med" p14:dur="700">
+        <p14:cube dir="r"/>
+      </p:transition>
+    </mc:Choice>
+    <mc:Fallback>
+      <p:transition spd="med">
+        <p:push dir="r"/>
+      </p:transition>
+    </mc:Fallback>
+  </mc:AlternateContent>
 </p:sld>
 </file>
 
@@ -9022,7 +9908,7 @@
             <a:avLst/>
           </a:prstGeom>
           <a:solidFill>
-            <a:srgbClr val="1E2761"/>
+            <a:srgbClr val="FFFFFF"/>
           </a:solidFill>
           <a:ln>
             <a:noFill/>
@@ -9059,8 +9945,8 @@
         </p:nvSpPr>
         <p:spPr>
           <a:xfrm>
-            <a:off x="822960" y="640080"/>
-            <a:ext cx="10515600" cy="457200"/>
+            <a:off x="10607040" y="320040"/>
+            <a:ext cx="1371600" cy="365760"/>
           </a:xfrm>
           <a:prstGeom prst="rect">
             <a:avLst/>
@@ -9073,30 +9959,133 @@
           </a:bodyPr>
           <a:lstStyle/>
           <a:p>
-            <a:r>
-              <a:rPr sz="1400" b="1" i="0">
-                <a:solidFill>
-                  <a:srgbClr val="F4A24C"/>
-                </a:solidFill>
-                <a:latin typeface="Montserrat"/>
-              </a:rPr>
-              <a:t>LO QUE YA DOMINAS</a:t>
-            </a:r>
-          </a:p>
-        </p:txBody>
-      </p:sp>
-      <p:sp>
-        <p:nvSpPr>
-          <p:cNvPr id="4" name="Rounded Rectangle 3"/>
+            <a:pPr algn="r"/>
+            <a:r>
+              <a:rPr sz="1000" b="1" i="0">
+                <a:solidFill>
+                  <a:srgbClr val="64748B"/>
+                </a:solidFill>
+                <a:latin typeface="Montserrat"/>
+              </a:rPr>
+              <a:t>019 / 024</a:t>
+            </a:r>
+          </a:p>
+        </p:txBody>
+      </p:sp>
+      <p:sp>
+        <p:nvSpPr>
+          <p:cNvPr id="4" name="TextBox 3"/>
+          <p:cNvSpPr txBox="1"/>
+          <p:nvPr/>
+        </p:nvSpPr>
+        <p:spPr>
+          <a:xfrm>
+            <a:off x="457200" y="6419088"/>
+            <a:ext cx="8229600" cy="365760"/>
+          </a:xfrm>
+          <a:prstGeom prst="rect">
+            <a:avLst/>
+          </a:prstGeom>
+          <a:noFill/>
+        </p:spPr>
+        <p:txBody>
+          <a:bodyPr wrap="square">
+            <a:spAutoFit/>
+          </a:bodyPr>
+          <a:lstStyle/>
+          <a:p>
+            <a:r>
+              <a:rPr sz="900" b="0" i="0">
+                <a:solidFill>
+                  <a:srgbClr val="64748B"/>
+                </a:solidFill>
+                <a:latin typeface="Montserrat"/>
+              </a:rPr>
+              <a:t>Curso Gas B · Tema 13 · UNE 60670-6</a:t>
+            </a:r>
+          </a:p>
+        </p:txBody>
+      </p:sp>
+      <p:sp>
+        <p:nvSpPr>
+          <p:cNvPr id="5" name="TextBox 4"/>
+          <p:cNvSpPr txBox="1"/>
+          <p:nvPr/>
+        </p:nvSpPr>
+        <p:spPr>
+          <a:xfrm>
+            <a:off x="822960" y="457200"/>
+            <a:ext cx="10058400" cy="365760"/>
+          </a:xfrm>
+          <a:prstGeom prst="rect">
+            <a:avLst/>
+          </a:prstGeom>
+          <a:noFill/>
+        </p:spPr>
+        <p:txBody>
+          <a:bodyPr wrap="square">
+            <a:spAutoFit/>
+          </a:bodyPr>
+          <a:lstStyle/>
+          <a:p>
+            <a:r>
+              <a:rPr sz="1300" b="1" i="0">
+                <a:solidFill>
+                  <a:srgbClr val="E8801A"/>
+                </a:solidFill>
+                <a:latin typeface="Montserrat"/>
+              </a:rPr>
+              <a:t>TIPO B · DÓNDE</a:t>
+            </a:r>
+          </a:p>
+        </p:txBody>
+      </p:sp>
+      <p:sp>
+        <p:nvSpPr>
+          <p:cNvPr id="6" name="TextBox 5"/>
+          <p:cNvSpPr txBox="1"/>
+          <p:nvPr/>
+        </p:nvSpPr>
+        <p:spPr>
+          <a:xfrm>
+            <a:off x="822960" y="868680"/>
+            <a:ext cx="10515600" cy="914400"/>
+          </a:xfrm>
+          <a:prstGeom prst="rect">
+            <a:avLst/>
+          </a:prstGeom>
+          <a:noFill/>
+        </p:spPr>
+        <p:txBody>
+          <a:bodyPr wrap="square">
+            <a:spAutoFit/>
+          </a:bodyPr>
+          <a:lstStyle/>
+          <a:p>
+            <a:r>
+              <a:rPr sz="2800" b="1" i="0">
+                <a:solidFill>
+                  <a:srgbClr val="1E2761"/>
+                </a:solidFill>
+                <a:latin typeface="Montserrat"/>
+              </a:rPr>
+              <a:t>Tipo B y su comodín, el B3x</a:t>
+            </a:r>
+          </a:p>
+        </p:txBody>
+      </p:sp>
+      <p:sp>
+        <p:nvSpPr>
+          <p:cNvPr id="7" name="Rectangle 6"/>
           <p:cNvSpPr/>
           <p:nvPr/>
         </p:nvSpPr>
         <p:spPr>
           <a:xfrm>
-            <a:off x="868680" y="1051560"/>
-            <a:ext cx="1463040" cy="82296"/>
-          </a:xfrm>
-          <a:prstGeom prst="roundRect">
+            <a:off x="868680" y="1627632"/>
+            <a:ext cx="2011680" cy="73152"/>
+          </a:xfrm>
+          <a:prstGeom prst="rect">
             <a:avLst/>
           </a:prstGeom>
           <a:solidFill>
@@ -9131,14 +10120,14 @@
       </p:sp>
       <p:sp>
         <p:nvSpPr>
-          <p:cNvPr id="5" name="TextBox 4"/>
+          <p:cNvPr id="8" name="TextBox 7"/>
           <p:cNvSpPr txBox="1"/>
           <p:nvPr/>
         </p:nvSpPr>
         <p:spPr>
           <a:xfrm>
-            <a:off x="822960" y="1234440"/>
-            <a:ext cx="10515600" cy="1097280"/>
+            <a:off x="822960" y="1965960"/>
+            <a:ext cx="5029200" cy="4206240"/>
           </a:xfrm>
           <a:prstGeom prst="rect">
             <a:avLst/>
@@ -9151,160 +10140,103 @@
           </a:bodyPr>
           <a:lstStyle/>
           <a:p>
-            <a:r>
-              <a:rPr sz="3400" b="1" i="0">
-                <a:solidFill>
-                  <a:srgbClr val="FFFFFF"/>
-                </a:solidFill>
-                <a:latin typeface="Montserrat"/>
-              </a:rPr>
-              <a:t>Ya clasificas cualquier aparato de gas</a:t>
-            </a:r>
-          </a:p>
-        </p:txBody>
-      </p:sp>
-      <p:sp>
-        <p:nvSpPr>
-          <p:cNvPr id="6" name="TextBox 5"/>
-          <p:cNvSpPr txBox="1"/>
-          <p:nvPr/>
-        </p:nvSpPr>
-        <p:spPr>
-          <a:xfrm>
-            <a:off x="822960" y="2606040"/>
-            <a:ext cx="10515600" cy="2743200"/>
-          </a:xfrm>
-          <a:prstGeom prst="rect">
-            <a:avLst/>
-          </a:prstGeom>
-          <a:noFill/>
-        </p:spPr>
-        <p:txBody>
-          <a:bodyPr wrap="square">
-            <a:spAutoFit/>
-          </a:bodyPr>
-          <a:lstStyle/>
-          <a:p>
             <a:pPr>
               <a:spcAft>
-                <a:spcPts val="1200"/>
+                <a:spcPts val="1100"/>
               </a:spcAft>
             </a:pPr>
             <a:r>
-              <a:rPr sz="2000" b="1" i="0">
-                <a:solidFill>
-                  <a:srgbClr val="F4A24C"/>
-                </a:solidFill>
-                <a:latin typeface="Montserrat"/>
-              </a:rPr>
-              <a:t>✓  </a:t>
-            </a:r>
-            <a:r>
-              <a:rPr sz="1900" b="0" i="0">
-                <a:solidFill>
-                  <a:srgbClr val="FFFFFF"/>
-                </a:solidFill>
-                <a:latin typeface="Montserrat"/>
-              </a:rPr>
-              <a:t>A se lo queda, B tira humos, C ni te toca el aire</a:t>
+              <a:rPr sz="1600" b="1" i="0">
+                <a:solidFill>
+                  <a:srgbClr val="E8801A"/>
+                </a:solidFill>
+                <a:latin typeface="Montserrat"/>
+              </a:rPr>
+              <a:t>▸  </a:t>
+            </a:r>
+            <a:r>
+              <a:rPr sz="1600" b="0" i="0">
+                <a:solidFill>
+                  <a:srgbClr val="1B2330"/>
+                </a:solidFill>
+                <a:latin typeface="Montserrat"/>
+              </a:rPr>
+              <a:t>Nunca en dormitorio ni baño</a:t>
             </a:r>
           </a:p>
           <a:p>
             <a:pPr>
               <a:spcAft>
-                <a:spcPts val="1200"/>
+                <a:spcPts val="1100"/>
               </a:spcAft>
             </a:pPr>
             <a:r>
-              <a:rPr sz="2000" b="1" i="0">
-                <a:solidFill>
-                  <a:srgbClr val="F4A24C"/>
-                </a:solidFill>
-                <a:latin typeface="Montserrat"/>
-              </a:rPr>
-              <a:t>✓  </a:t>
-            </a:r>
-            <a:r>
-              <a:rPr sz="1900" b="0" i="0">
-                <a:solidFill>
-                  <a:srgbClr val="FFFFFF"/>
-                </a:solidFill>
-                <a:latin typeface="Montserrat"/>
-              </a:rPr>
-              <a:t>A y B fuera de dormitorio y baño; C entra</a:t>
+              <a:rPr sz="1600" b="1" i="0">
+                <a:solidFill>
+                  <a:srgbClr val="E8801A"/>
+                </a:solidFill>
+                <a:latin typeface="Montserrat"/>
+              </a:rPr>
+              <a:t>▸  </a:t>
+            </a:r>
+            <a:r>
+              <a:rPr sz="1600" b="0" i="0">
+                <a:solidFill>
+                  <a:srgbClr val="1B2330"/>
+                </a:solidFill>
+                <a:latin typeface="Montserrat"/>
+              </a:rPr>
+              <a:t>B3x: cocinas, lavaderos, garajes</a:t>
             </a:r>
           </a:p>
           <a:p>
             <a:pPr>
               <a:spcAft>
-                <a:spcPts val="1200"/>
+                <a:spcPts val="1100"/>
               </a:spcAft>
             </a:pPr>
             <a:r>
-              <a:rPr sz="2000" b="1" i="0">
-                <a:solidFill>
-                  <a:srgbClr val="F4A24C"/>
-                </a:solidFill>
-                <a:latin typeface="Montserrat"/>
-              </a:rPr>
-              <a:t>✓  </a:t>
-            </a:r>
-            <a:r>
-              <a:rPr sz="1900" b="0" i="0">
-                <a:solidFill>
-                  <a:srgbClr val="FFFFFF"/>
-                </a:solidFill>
-                <a:latin typeface="Montserrat"/>
-              </a:rPr>
-              <a:t>Semisótano: GLP nunca, gas natural hasta 4 m</a:t>
-            </a:r>
-          </a:p>
-          <a:p>
-            <a:pPr>
-              <a:spcAft>
-                <a:spcPts val="1200"/>
-              </a:spcAft>
-            </a:pPr>
-            <a:r>
-              <a:rPr sz="2000" b="1" i="0">
-                <a:solidFill>
-                  <a:srgbClr val="F4A24C"/>
-                </a:solidFill>
-                <a:latin typeface="Montserrat"/>
-              </a:rPr>
-              <a:t>✓  </a:t>
-            </a:r>
-            <a:r>
-              <a:rPr sz="1900" b="0" i="0">
-                <a:solidFill>
-                  <a:srgbClr val="FFFFFF"/>
-                </a:solidFill>
-                <a:latin typeface="Montserrat"/>
-              </a:rPr>
-              <a:t>70 kW: la puerta a la sala de máquinas</a:t>
-            </a:r>
-          </a:p>
-        </p:txBody>
-      </p:sp>
-      <p:sp>
-        <p:nvSpPr>
-          <p:cNvPr id="7" name="Rounded Rectangle 6"/>
+              <a:rPr sz="1600" b="1" i="0">
+                <a:solidFill>
+                  <a:srgbClr val="E8801A"/>
+                </a:solidFill>
+                <a:latin typeface="Montserrat"/>
+              </a:rPr>
+              <a:t>▸  </a:t>
+            </a:r>
+            <a:r>
+              <a:rPr sz="1600" b="0" i="0">
+                <a:solidFill>
+                  <a:srgbClr val="1B2330"/>
+                </a:solidFill>
+                <a:latin typeface="Montserrat"/>
+              </a:rPr>
+              <a:t>Única excepción a la prohibición</a:t>
+            </a:r>
+          </a:p>
+        </p:txBody>
+      </p:sp>
+      <p:sp>
+        <p:nvSpPr>
+          <p:cNvPr id="9" name="imgph" descr="IMGQ:utility room gas water heater"/>
           <p:cNvSpPr/>
           <p:nvPr/>
         </p:nvSpPr>
         <p:spPr>
           <a:xfrm>
-            <a:off x="822960" y="5532120"/>
-            <a:ext cx="10515600" cy="822960"/>
+            <a:off x="6080760" y="1965960"/>
+            <a:ext cx="5303520" cy="4572000"/>
           </a:xfrm>
           <a:prstGeom prst="roundRect">
             <a:avLst/>
           </a:prstGeom>
           <a:solidFill>
-            <a:srgbClr val="E8801A"/>
+            <a:srgbClr val="F3F6FB"/>
           </a:solidFill>
-          <a:ln>
-            <a:noFill/>
+          <a:ln w="12700">
+            <a:solidFill>
+              <a:srgbClr val="C7D2E6"/>
+            </a:solidFill>
           </a:ln>
           <a:effectLst/>
         </p:spPr>
@@ -9332,14 +10264,14 @@
       </p:sp>
       <p:sp>
         <p:nvSpPr>
-          <p:cNvPr id="8" name="TextBox 7"/>
+          <p:cNvPr id="10" name="TextBox 9"/>
           <p:cNvSpPr txBox="1"/>
           <p:nvPr/>
         </p:nvSpPr>
         <p:spPr>
           <a:xfrm>
-            <a:off x="1051560" y="5623560"/>
-            <a:ext cx="10058400" cy="640080"/>
+            <a:off x="6355080" y="3611880"/>
+            <a:ext cx="4754880" cy="1280160"/>
           </a:xfrm>
           <a:prstGeom prst="rect">
             <a:avLst/>
@@ -9352,14 +10284,27 @@
           </a:bodyPr>
           <a:lstStyle/>
           <a:p>
-            <a:r>
-              <a:rPr sz="1500" b="1" i="1">
-                <a:solidFill>
-                  <a:srgbClr val="1E2761"/>
-                </a:solidFill>
-                <a:latin typeface="Montserrat"/>
-              </a:rPr>
-              <a:t>Con el aparato bien clasificado, la ventilación y los humos caen solos. Vamos al vídeo 2.</a:t>
+            <a:pPr algn="ctr"/>
+            <a:r>
+              <a:rPr sz="1400" b="1" i="0">
+                <a:solidFill>
+                  <a:srgbClr val="64748B"/>
+                </a:solidFill>
+                <a:latin typeface="Montserrat"/>
+              </a:rPr>
+              <a:t>IMAGEN</a:t>
+            </a:r>
+          </a:p>
+          <a:p>
+            <a:pPr algn="ctr"/>
+            <a:r>
+              <a:rPr sz="1100" b="0" i="1">
+                <a:solidFill>
+                  <a:srgbClr val="64748B"/>
+                </a:solidFill>
+                <a:latin typeface="Montserrat"/>
+              </a:rPr>
+              <a:t>utility room gas water heater</a:t>
             </a:r>
           </a:p>
         </p:txBody>
@@ -9369,6 +10314,18 @@
   <p:clrMapOvr>
     <a:masterClrMapping/>
   </p:clrMapOvr>
+  <mc:AlternateContent xmlns:mc="http://schemas.openxmlformats.org/markup-compatibility/2006">
+    <mc:Choice xmlns:p14="http://schemas.microsoft.com/office/powerpoint/2010/main" Requires="p14">
+      <p:transition spd="med" p14:dur="700">
+        <p14:cube dir="l"/>
+      </p:transition>
+    </mc:Choice>
+    <mc:Fallback>
+      <p:transition spd="med">
+        <p:push dir="l"/>
+      </p:transition>
+    </mc:Fallback>
+  </mc:AlternateContent>
 </p:sld>
 </file>
 
@@ -9456,7 +10413,7 @@
                 </a:solidFill>
                 <a:latin typeface="Montserrat"/>
               </a:rPr>
-              <a:t>002 / 019</a:t>
+              <a:t>002 / 024</a:t>
             </a:r>
           </a:p>
         </p:txBody>
@@ -9531,7 +10488,7 @@
       </p:sp>
       <p:sp>
         <p:nvSpPr>
-          <p:cNvPr id="6" name="Rounded Rectangle 5"/>
+          <p:cNvPr id="6" name="Rectangle 5"/>
           <p:cNvSpPr/>
           <p:nvPr/>
         </p:nvSpPr>
@@ -9540,7 +10497,7 @@
             <a:off x="868680" y="1234440"/>
             <a:ext cx="1463040" cy="73152"/>
           </a:xfrm>
-          <a:prstGeom prst="roundRect">
+          <a:prstGeom prst="rect">
             <a:avLst/>
           </a:prstGeom>
           <a:solidFill>
@@ -9621,14 +10578,58 @@
       </p:sp>
       <p:sp>
         <p:nvSpPr>
-          <p:cNvPr id="8" name="TextBox 7"/>
+          <p:cNvPr id="8" name="Rectangle 7"/>
+          <p:cNvSpPr/>
+          <p:nvPr/>
+        </p:nvSpPr>
+        <p:spPr>
+          <a:xfrm>
+            <a:off x="822960" y="2011680"/>
+            <a:ext cx="3017520" cy="128016"/>
+          </a:xfrm>
+          <a:prstGeom prst="rect">
+            <a:avLst/>
+          </a:prstGeom>
+          <a:solidFill>
+            <a:srgbClr val="E8801A"/>
+          </a:solidFill>
+          <a:ln>
+            <a:noFill/>
+          </a:ln>
+          <a:effectLst/>
+        </p:spPr>
+        <p:style>
+          <a:lnRef idx="1">
+            <a:schemeClr val="accent1"/>
+          </a:lnRef>
+          <a:fillRef idx="3">
+            <a:schemeClr val="accent1"/>
+          </a:fillRef>
+          <a:effectRef idx="2">
+            <a:schemeClr val="accent1"/>
+          </a:effectRef>
+          <a:fontRef idx="minor">
+            <a:schemeClr val="lt1"/>
+          </a:fontRef>
+        </p:style>
+        <p:txBody>
+          <a:bodyPr rtlCol="0" anchor="ctr"/>
+          <a:lstStyle/>
+          <a:p>
+            <a:pPr algn="ctr"/>
+          </a:p>
+        </p:txBody>
+      </p:sp>
+      <p:sp>
+        <p:nvSpPr>
+          <p:cNvPr id="9" name="TextBox 8"/>
           <p:cNvSpPr txBox="1"/>
           <p:nvPr/>
         </p:nvSpPr>
         <p:spPr>
           <a:xfrm>
-            <a:off x="822960" y="2331720"/>
-            <a:ext cx="3017520" cy="1463040"/>
+            <a:off x="822960" y="2377440"/>
+            <a:ext cx="3017520" cy="1371600"/>
           </a:xfrm>
           <a:prstGeom prst="rect">
             <a:avLst/>
@@ -9643,7 +10644,7 @@
           <a:p>
             <a:pPr algn="ctr"/>
             <a:r>
-              <a:rPr sz="6000" b="1" i="0">
+              <a:rPr sz="5800" b="1" i="0">
                 <a:solidFill>
                   <a:srgbClr val="1E2761"/>
                 </a:solidFill>
@@ -9656,13 +10657,13 @@
       </p:sp>
       <p:sp>
         <p:nvSpPr>
-          <p:cNvPr id="9" name="TextBox 8"/>
+          <p:cNvPr id="10" name="TextBox 9"/>
           <p:cNvSpPr txBox="1"/>
           <p:nvPr/>
         </p:nvSpPr>
         <p:spPr>
           <a:xfrm>
-            <a:off x="1051560" y="3611880"/>
+            <a:off x="1051560" y="3657600"/>
             <a:ext cx="2560320" cy="1005840"/>
           </a:xfrm>
           <a:prstGeom prst="rect">
@@ -9691,7 +10692,7 @@
       </p:sp>
       <p:sp>
         <p:nvSpPr>
-          <p:cNvPr id="10" name="Rounded Rectangle 9"/>
+          <p:cNvPr id="11" name="Rounded Rectangle 10"/>
           <p:cNvSpPr/>
           <p:nvPr/>
         </p:nvSpPr>
@@ -9737,14 +10738,58 @@
       </p:sp>
       <p:sp>
         <p:nvSpPr>
-          <p:cNvPr id="11" name="TextBox 10"/>
+          <p:cNvPr id="12" name="Rectangle 11"/>
+          <p:cNvSpPr/>
+          <p:nvPr/>
+        </p:nvSpPr>
+        <p:spPr>
+          <a:xfrm>
+            <a:off x="4617720" y="2011680"/>
+            <a:ext cx="3017520" cy="128016"/>
+          </a:xfrm>
+          <a:prstGeom prst="rect">
+            <a:avLst/>
+          </a:prstGeom>
+          <a:solidFill>
+            <a:srgbClr val="E8801A"/>
+          </a:solidFill>
+          <a:ln>
+            <a:noFill/>
+          </a:ln>
+          <a:effectLst/>
+        </p:spPr>
+        <p:style>
+          <a:lnRef idx="1">
+            <a:schemeClr val="accent1"/>
+          </a:lnRef>
+          <a:fillRef idx="3">
+            <a:schemeClr val="accent1"/>
+          </a:fillRef>
+          <a:effectRef idx="2">
+            <a:schemeClr val="accent1"/>
+          </a:effectRef>
+          <a:fontRef idx="minor">
+            <a:schemeClr val="lt1"/>
+          </a:fontRef>
+        </p:style>
+        <p:txBody>
+          <a:bodyPr rtlCol="0" anchor="ctr"/>
+          <a:lstStyle/>
+          <a:p>
+            <a:pPr algn="ctr"/>
+          </a:p>
+        </p:txBody>
+      </p:sp>
+      <p:sp>
+        <p:nvSpPr>
+          <p:cNvPr id="13" name="TextBox 12"/>
           <p:cNvSpPr txBox="1"/>
           <p:nvPr/>
         </p:nvSpPr>
         <p:spPr>
           <a:xfrm>
-            <a:off x="4617720" y="2331720"/>
-            <a:ext cx="3017520" cy="1463040"/>
+            <a:off x="4617720" y="2377440"/>
+            <a:ext cx="3017520" cy="1371600"/>
           </a:xfrm>
           <a:prstGeom prst="rect">
             <a:avLst/>
@@ -9759,7 +10804,7 @@
           <a:p>
             <a:pPr algn="ctr"/>
             <a:r>
-              <a:rPr sz="6000" b="1" i="0">
+              <a:rPr sz="5800" b="1" i="0">
                 <a:solidFill>
                   <a:srgbClr val="1E2761"/>
                 </a:solidFill>
@@ -9772,13 +10817,13 @@
       </p:sp>
       <p:sp>
         <p:nvSpPr>
-          <p:cNvPr id="12" name="TextBox 11"/>
+          <p:cNvPr id="14" name="TextBox 13"/>
           <p:cNvSpPr txBox="1"/>
           <p:nvPr/>
         </p:nvSpPr>
         <p:spPr>
           <a:xfrm>
-            <a:off x="4846320" y="3611880"/>
+            <a:off x="4846320" y="3657600"/>
             <a:ext cx="2560320" cy="1005840"/>
           </a:xfrm>
           <a:prstGeom prst="rect">
@@ -9807,7 +10852,7 @@
       </p:sp>
       <p:sp>
         <p:nvSpPr>
-          <p:cNvPr id="13" name="Rounded Rectangle 12"/>
+          <p:cNvPr id="15" name="Rounded Rectangle 14"/>
           <p:cNvSpPr/>
           <p:nvPr/>
         </p:nvSpPr>
@@ -9853,14 +10898,58 @@
       </p:sp>
       <p:sp>
         <p:nvSpPr>
-          <p:cNvPr id="14" name="TextBox 13"/>
+          <p:cNvPr id="16" name="Rectangle 15"/>
+          <p:cNvSpPr/>
+          <p:nvPr/>
+        </p:nvSpPr>
+        <p:spPr>
+          <a:xfrm>
+            <a:off x="8412480" y="2011680"/>
+            <a:ext cx="3017520" cy="128016"/>
+          </a:xfrm>
+          <a:prstGeom prst="rect">
+            <a:avLst/>
+          </a:prstGeom>
+          <a:solidFill>
+            <a:srgbClr val="E8801A"/>
+          </a:solidFill>
+          <a:ln>
+            <a:noFill/>
+          </a:ln>
+          <a:effectLst/>
+        </p:spPr>
+        <p:style>
+          <a:lnRef idx="1">
+            <a:schemeClr val="accent1"/>
+          </a:lnRef>
+          <a:fillRef idx="3">
+            <a:schemeClr val="accent1"/>
+          </a:fillRef>
+          <a:effectRef idx="2">
+            <a:schemeClr val="accent1"/>
+          </a:effectRef>
+          <a:fontRef idx="minor">
+            <a:schemeClr val="lt1"/>
+          </a:fontRef>
+        </p:style>
+        <p:txBody>
+          <a:bodyPr rtlCol="0" anchor="ctr"/>
+          <a:lstStyle/>
+          <a:p>
+            <a:pPr algn="ctr"/>
+          </a:p>
+        </p:txBody>
+      </p:sp>
+      <p:sp>
+        <p:nvSpPr>
+          <p:cNvPr id="17" name="TextBox 16"/>
           <p:cNvSpPr txBox="1"/>
           <p:nvPr/>
         </p:nvSpPr>
         <p:spPr>
           <a:xfrm>
-            <a:off x="8412480" y="2331720"/>
-            <a:ext cx="3017520" cy="1463040"/>
+            <a:off x="8412480" y="2377440"/>
+            <a:ext cx="3017520" cy="1371600"/>
           </a:xfrm>
           <a:prstGeom prst="rect">
             <a:avLst/>
@@ -9875,7 +10964,7 @@
           <a:p>
             <a:pPr algn="ctr"/>
             <a:r>
-              <a:rPr sz="6000" b="1" i="0">
+              <a:rPr sz="5800" b="1" i="0">
                 <a:solidFill>
                   <a:srgbClr val="1E2761"/>
                 </a:solidFill>
@@ -9888,13 +10977,13 @@
       </p:sp>
       <p:sp>
         <p:nvSpPr>
-          <p:cNvPr id="15" name="TextBox 14"/>
+          <p:cNvPr id="18" name="TextBox 17"/>
           <p:cNvSpPr txBox="1"/>
           <p:nvPr/>
         </p:nvSpPr>
         <p:spPr>
           <a:xfrm>
-            <a:off x="8641080" y="3611880"/>
+            <a:off x="8641080" y="3657600"/>
             <a:ext cx="2560320" cy="1005840"/>
           </a:xfrm>
           <a:prstGeom prst="rect">
@@ -9926,6 +11015,2575 @@
   <p:clrMapOvr>
     <a:masterClrMapping/>
   </p:clrMapOvr>
+  <mc:AlternateContent xmlns:mc="http://schemas.openxmlformats.org/markup-compatibility/2006">
+    <mc:Choice xmlns:p14="http://schemas.microsoft.com/office/powerpoint/2010/main" Requires="p14">
+      <p:transition spd="med" p14:dur="700">
+        <p14:cube dir="r"/>
+      </p:transition>
+    </mc:Choice>
+    <mc:Fallback>
+      <p:transition spd="med">
+        <p:push dir="r"/>
+      </p:transition>
+    </mc:Fallback>
+  </mc:AlternateContent>
+</p:sld>
+</file>
+
+<file path=ppt/slides/slide20.xml><?xml version="1.0" encoding="utf-8"?>
+<p:sld xmlns:a="http://schemas.openxmlformats.org/drawingml/2006/main" xmlns:p="http://schemas.openxmlformats.org/presentationml/2006/main" xmlns:r="http://schemas.openxmlformats.org/officeDocument/2006/relationships">
+  <p:cSld>
+    <p:spTree>
+      <p:nvGrpSpPr>
+        <p:cNvPr id="1" name=""/>
+        <p:cNvGrpSpPr/>
+        <p:nvPr/>
+      </p:nvGrpSpPr>
+      <p:grpSpPr/>
+      <p:sp>
+        <p:nvSpPr>
+          <p:cNvPr id="2" name="Rectangle 1"/>
+          <p:cNvSpPr/>
+          <p:nvPr/>
+        </p:nvSpPr>
+        <p:spPr>
+          <a:xfrm>
+            <a:off x="0" y="0"/>
+            <a:ext cx="12191695" cy="6858000"/>
+          </a:xfrm>
+          <a:prstGeom prst="rect">
+            <a:avLst/>
+          </a:prstGeom>
+          <a:solidFill>
+            <a:srgbClr val="FFFFFF"/>
+          </a:solidFill>
+          <a:ln>
+            <a:noFill/>
+          </a:ln>
+          <a:effectLst/>
+        </p:spPr>
+        <p:style>
+          <a:lnRef idx="1">
+            <a:schemeClr val="accent1"/>
+          </a:lnRef>
+          <a:fillRef idx="3">
+            <a:schemeClr val="accent1"/>
+          </a:fillRef>
+          <a:effectRef idx="2">
+            <a:schemeClr val="accent1"/>
+          </a:effectRef>
+          <a:fontRef idx="minor">
+            <a:schemeClr val="lt1"/>
+          </a:fontRef>
+        </p:style>
+        <p:txBody>
+          <a:bodyPr rtlCol="0" anchor="ctr"/>
+          <a:lstStyle/>
+          <a:p>
+            <a:pPr algn="ctr"/>
+          </a:p>
+        </p:txBody>
+      </p:sp>
+      <p:sp>
+        <p:nvSpPr>
+          <p:cNvPr id="3" name="TextBox 2"/>
+          <p:cNvSpPr txBox="1"/>
+          <p:nvPr/>
+        </p:nvSpPr>
+        <p:spPr>
+          <a:xfrm>
+            <a:off x="10607040" y="320040"/>
+            <a:ext cx="1371600" cy="365760"/>
+          </a:xfrm>
+          <a:prstGeom prst="rect">
+            <a:avLst/>
+          </a:prstGeom>
+          <a:noFill/>
+        </p:spPr>
+        <p:txBody>
+          <a:bodyPr wrap="square">
+            <a:spAutoFit/>
+          </a:bodyPr>
+          <a:lstStyle/>
+          <a:p>
+            <a:pPr algn="r"/>
+            <a:r>
+              <a:rPr sz="1000" b="1" i="0">
+                <a:solidFill>
+                  <a:srgbClr val="64748B"/>
+                </a:solidFill>
+                <a:latin typeface="Montserrat"/>
+              </a:rPr>
+              <a:t>020 / 024</a:t>
+            </a:r>
+          </a:p>
+        </p:txBody>
+      </p:sp>
+      <p:sp>
+        <p:nvSpPr>
+          <p:cNvPr id="4" name="TextBox 3"/>
+          <p:cNvSpPr txBox="1"/>
+          <p:nvPr/>
+        </p:nvSpPr>
+        <p:spPr>
+          <a:xfrm>
+            <a:off x="457200" y="6419088"/>
+            <a:ext cx="8229600" cy="365760"/>
+          </a:xfrm>
+          <a:prstGeom prst="rect">
+            <a:avLst/>
+          </a:prstGeom>
+          <a:noFill/>
+        </p:spPr>
+        <p:txBody>
+          <a:bodyPr wrap="square">
+            <a:spAutoFit/>
+          </a:bodyPr>
+          <a:lstStyle/>
+          <a:p>
+            <a:r>
+              <a:rPr sz="900" b="0" i="0">
+                <a:solidFill>
+                  <a:srgbClr val="64748B"/>
+                </a:solidFill>
+                <a:latin typeface="Montserrat"/>
+              </a:rPr>
+              <a:t>Curso Gas B · Tema 13 · UNE 60670-6</a:t>
+            </a:r>
+          </a:p>
+        </p:txBody>
+      </p:sp>
+      <p:sp>
+        <p:nvSpPr>
+          <p:cNvPr id="5" name="TextBox 4"/>
+          <p:cNvSpPr txBox="1"/>
+          <p:nvPr/>
+        </p:nvSpPr>
+        <p:spPr>
+          <a:xfrm>
+            <a:off x="822960" y="457200"/>
+            <a:ext cx="10058400" cy="365760"/>
+          </a:xfrm>
+          <a:prstGeom prst="rect">
+            <a:avLst/>
+          </a:prstGeom>
+          <a:noFill/>
+        </p:spPr>
+        <p:txBody>
+          <a:bodyPr wrap="square">
+            <a:spAutoFit/>
+          </a:bodyPr>
+          <a:lstStyle/>
+          <a:p>
+            <a:r>
+              <a:rPr sz="1300" b="1" i="0">
+                <a:solidFill>
+                  <a:srgbClr val="E8801A"/>
+                </a:solidFill>
+                <a:latin typeface="Montserrat"/>
+              </a:rPr>
+              <a:t>TIPO B · SEGURIDAD</a:t>
+            </a:r>
+          </a:p>
+        </p:txBody>
+      </p:sp>
+      <p:sp>
+        <p:nvSpPr>
+          <p:cNvPr id="6" name="TextBox 5"/>
+          <p:cNvSpPr txBox="1"/>
+          <p:nvPr/>
+        </p:nvSpPr>
+        <p:spPr>
+          <a:xfrm>
+            <a:off x="822960" y="868680"/>
+            <a:ext cx="10515600" cy="914400"/>
+          </a:xfrm>
+          <a:prstGeom prst="rect">
+            <a:avLst/>
+          </a:prstGeom>
+          <a:noFill/>
+        </p:spPr>
+        <p:txBody>
+          <a:bodyPr wrap="square">
+            <a:spAutoFit/>
+          </a:bodyPr>
+          <a:lstStyle/>
+          <a:p>
+            <a:r>
+              <a:rPr sz="2800" b="1" i="0">
+                <a:solidFill>
+                  <a:srgbClr val="1E2761"/>
+                </a:solidFill>
+                <a:latin typeface="Montserrat"/>
+              </a:rPr>
+              <a:t>Campana y calentador: el revoco</a:t>
+            </a:r>
+          </a:p>
+        </p:txBody>
+      </p:sp>
+      <p:sp>
+        <p:nvSpPr>
+          <p:cNvPr id="7" name="Rectangle 6"/>
+          <p:cNvSpPr/>
+          <p:nvPr/>
+        </p:nvSpPr>
+        <p:spPr>
+          <a:xfrm>
+            <a:off x="868680" y="1627632"/>
+            <a:ext cx="2011680" cy="73152"/>
+          </a:xfrm>
+          <a:prstGeom prst="rect">
+            <a:avLst/>
+          </a:prstGeom>
+          <a:solidFill>
+            <a:srgbClr val="E8801A"/>
+          </a:solidFill>
+          <a:ln>
+            <a:noFill/>
+          </a:ln>
+          <a:effectLst/>
+        </p:spPr>
+        <p:style>
+          <a:lnRef idx="1">
+            <a:schemeClr val="accent1"/>
+          </a:lnRef>
+          <a:fillRef idx="3">
+            <a:schemeClr val="accent1"/>
+          </a:fillRef>
+          <a:effectRef idx="2">
+            <a:schemeClr val="accent1"/>
+          </a:effectRef>
+          <a:fontRef idx="minor">
+            <a:schemeClr val="lt1"/>
+          </a:fontRef>
+        </p:style>
+        <p:txBody>
+          <a:bodyPr rtlCol="0" anchor="ctr"/>
+          <a:lstStyle/>
+          <a:p>
+            <a:pPr algn="ctr"/>
+          </a:p>
+        </p:txBody>
+      </p:sp>
+      <p:sp>
+        <p:nvSpPr>
+          <p:cNvPr id="8" name="TextBox 7"/>
+          <p:cNvSpPr txBox="1"/>
+          <p:nvPr/>
+        </p:nvSpPr>
+        <p:spPr>
+          <a:xfrm>
+            <a:off x="6355080" y="1965960"/>
+            <a:ext cx="5029200" cy="4206240"/>
+          </a:xfrm>
+          <a:prstGeom prst="rect">
+            <a:avLst/>
+          </a:prstGeom>
+          <a:noFill/>
+        </p:spPr>
+        <p:txBody>
+          <a:bodyPr wrap="square">
+            <a:spAutoFit/>
+          </a:bodyPr>
+          <a:lstStyle/>
+          <a:p>
+            <a:pPr>
+              <a:spcAft>
+                <a:spcPts val="1100"/>
+              </a:spcAft>
+            </a:pPr>
+            <a:r>
+              <a:rPr sz="1600" b="1" i="0">
+                <a:solidFill>
+                  <a:srgbClr val="E8801A"/>
+                </a:solidFill>
+                <a:latin typeface="Montserrat"/>
+              </a:rPr>
+              <a:t>▸  </a:t>
+            </a:r>
+            <a:r>
+              <a:rPr sz="1600" b="0" i="0">
+                <a:solidFill>
+                  <a:srgbClr val="1B2330"/>
+                </a:solidFill>
+                <a:latin typeface="Montserrat"/>
+              </a:rPr>
+              <a:t>La campana chupa los humos</a:t>
+            </a:r>
+          </a:p>
+          <a:p>
+            <a:pPr>
+              <a:spcAft>
+                <a:spcPts val="1100"/>
+              </a:spcAft>
+            </a:pPr>
+            <a:r>
+              <a:rPr sz="1600" b="1" i="0">
+                <a:solidFill>
+                  <a:srgbClr val="E8801A"/>
+                </a:solidFill>
+                <a:latin typeface="Montserrat"/>
+              </a:rPr>
+              <a:t>▸  </a:t>
+            </a:r>
+            <a:r>
+              <a:rPr sz="1600" b="0" i="0">
+                <a:solidFill>
+                  <a:srgbClr val="1B2330"/>
+                </a:solidFill>
+                <a:latin typeface="Montserrat"/>
+              </a:rPr>
+              <a:t>Peligro de CO en casa</a:t>
+            </a:r>
+          </a:p>
+          <a:p>
+            <a:pPr>
+              <a:spcAft>
+                <a:spcPts val="1100"/>
+              </a:spcAft>
+            </a:pPr>
+            <a:r>
+              <a:rPr sz="1600" b="1" i="0">
+                <a:solidFill>
+                  <a:srgbClr val="E8801A"/>
+                </a:solidFill>
+                <a:latin typeface="Montserrat"/>
+              </a:rPr>
+              <a:t>▸  </a:t>
+            </a:r>
+            <a:r>
+              <a:rPr sz="1600" b="0" i="0">
+                <a:solidFill>
+                  <a:srgbClr val="1B2330"/>
+                </a:solidFill>
+                <a:latin typeface="Montserrat"/>
+              </a:rPr>
+              <a:t>Corte automático en ≤ 2 min</a:t>
+            </a:r>
+          </a:p>
+        </p:txBody>
+      </p:sp>
+      <p:sp>
+        <p:nvSpPr>
+          <p:cNvPr id="9" name="imgph" descr="IMGQ:kitchen extractor hood"/>
+          <p:cNvSpPr/>
+          <p:nvPr/>
+        </p:nvSpPr>
+        <p:spPr>
+          <a:xfrm>
+            <a:off x="822960" y="1965960"/>
+            <a:ext cx="5303520" cy="4572000"/>
+          </a:xfrm>
+          <a:prstGeom prst="roundRect">
+            <a:avLst/>
+          </a:prstGeom>
+          <a:solidFill>
+            <a:srgbClr val="F3F6FB"/>
+          </a:solidFill>
+          <a:ln w="12700">
+            <a:solidFill>
+              <a:srgbClr val="C7D2E6"/>
+            </a:solidFill>
+          </a:ln>
+          <a:effectLst/>
+        </p:spPr>
+        <p:style>
+          <a:lnRef idx="1">
+            <a:schemeClr val="accent1"/>
+          </a:lnRef>
+          <a:fillRef idx="3">
+            <a:schemeClr val="accent1"/>
+          </a:fillRef>
+          <a:effectRef idx="2">
+            <a:schemeClr val="accent1"/>
+          </a:effectRef>
+          <a:fontRef idx="minor">
+            <a:schemeClr val="lt1"/>
+          </a:fontRef>
+        </p:style>
+        <p:txBody>
+          <a:bodyPr rtlCol="0" anchor="ctr"/>
+          <a:lstStyle/>
+          <a:p>
+            <a:pPr algn="ctr"/>
+          </a:p>
+        </p:txBody>
+      </p:sp>
+      <p:sp>
+        <p:nvSpPr>
+          <p:cNvPr id="10" name="TextBox 9"/>
+          <p:cNvSpPr txBox="1"/>
+          <p:nvPr/>
+        </p:nvSpPr>
+        <p:spPr>
+          <a:xfrm>
+            <a:off x="1097280" y="3611880"/>
+            <a:ext cx="4754880" cy="1280160"/>
+          </a:xfrm>
+          <a:prstGeom prst="rect">
+            <a:avLst/>
+          </a:prstGeom>
+          <a:noFill/>
+        </p:spPr>
+        <p:txBody>
+          <a:bodyPr wrap="square">
+            <a:spAutoFit/>
+          </a:bodyPr>
+          <a:lstStyle/>
+          <a:p>
+            <a:pPr algn="ctr"/>
+            <a:r>
+              <a:rPr sz="1400" b="1" i="0">
+                <a:solidFill>
+                  <a:srgbClr val="64748B"/>
+                </a:solidFill>
+                <a:latin typeface="Montserrat"/>
+              </a:rPr>
+              <a:t>IMAGEN</a:t>
+            </a:r>
+          </a:p>
+          <a:p>
+            <a:pPr algn="ctr"/>
+            <a:r>
+              <a:rPr sz="1100" b="0" i="1">
+                <a:solidFill>
+                  <a:srgbClr val="64748B"/>
+                </a:solidFill>
+                <a:latin typeface="Montserrat"/>
+              </a:rPr>
+              <a:t>kitchen extractor hood</a:t>
+            </a:r>
+          </a:p>
+        </p:txBody>
+      </p:sp>
+    </p:spTree>
+  </p:cSld>
+  <p:clrMapOvr>
+    <a:masterClrMapping/>
+  </p:clrMapOvr>
+  <mc:AlternateContent xmlns:mc="http://schemas.openxmlformats.org/markup-compatibility/2006">
+    <mc:Choice xmlns:p14="http://schemas.microsoft.com/office/powerpoint/2010/main" Requires="p14">
+      <p:transition spd="med" p14:dur="700">
+        <p14:cube dir="r"/>
+      </p:transition>
+    </mc:Choice>
+    <mc:Fallback>
+      <p:transition spd="med">
+        <p:push dir="r"/>
+      </p:transition>
+    </mc:Fallback>
+  </mc:AlternateContent>
+</p:sld>
+</file>
+
+<file path=ppt/slides/slide21.xml><?xml version="1.0" encoding="utf-8"?>
+<p:sld xmlns:a="http://schemas.openxmlformats.org/drawingml/2006/main" xmlns:p="http://schemas.openxmlformats.org/presentationml/2006/main" xmlns:r="http://schemas.openxmlformats.org/officeDocument/2006/relationships">
+  <p:cSld>
+    <p:spTree>
+      <p:nvGrpSpPr>
+        <p:cNvPr id="1" name=""/>
+        <p:cNvGrpSpPr/>
+        <p:nvPr/>
+      </p:nvGrpSpPr>
+      <p:grpSpPr/>
+      <p:sp>
+        <p:nvSpPr>
+          <p:cNvPr id="2" name="Rectangle 1"/>
+          <p:cNvSpPr/>
+          <p:nvPr/>
+        </p:nvSpPr>
+        <p:spPr>
+          <a:xfrm>
+            <a:off x="0" y="0"/>
+            <a:ext cx="12191695" cy="6858000"/>
+          </a:xfrm>
+          <a:prstGeom prst="rect">
+            <a:avLst/>
+          </a:prstGeom>
+          <a:solidFill>
+            <a:srgbClr val="FFFFFF"/>
+          </a:solidFill>
+          <a:ln>
+            <a:noFill/>
+          </a:ln>
+          <a:effectLst/>
+        </p:spPr>
+        <p:style>
+          <a:lnRef idx="1">
+            <a:schemeClr val="accent1"/>
+          </a:lnRef>
+          <a:fillRef idx="3">
+            <a:schemeClr val="accent1"/>
+          </a:fillRef>
+          <a:effectRef idx="2">
+            <a:schemeClr val="accent1"/>
+          </a:effectRef>
+          <a:fontRef idx="minor">
+            <a:schemeClr val="lt1"/>
+          </a:fontRef>
+        </p:style>
+        <p:txBody>
+          <a:bodyPr rtlCol="0" anchor="ctr"/>
+          <a:lstStyle/>
+          <a:p>
+            <a:pPr algn="ctr"/>
+          </a:p>
+        </p:txBody>
+      </p:sp>
+      <p:sp>
+        <p:nvSpPr>
+          <p:cNvPr id="3" name="TextBox 2"/>
+          <p:cNvSpPr txBox="1"/>
+          <p:nvPr/>
+        </p:nvSpPr>
+        <p:spPr>
+          <a:xfrm>
+            <a:off x="10607040" y="320040"/>
+            <a:ext cx="1371600" cy="365760"/>
+          </a:xfrm>
+          <a:prstGeom prst="rect">
+            <a:avLst/>
+          </a:prstGeom>
+          <a:noFill/>
+        </p:spPr>
+        <p:txBody>
+          <a:bodyPr wrap="square">
+            <a:spAutoFit/>
+          </a:bodyPr>
+          <a:lstStyle/>
+          <a:p>
+            <a:pPr algn="r"/>
+            <a:r>
+              <a:rPr sz="1000" b="1" i="0">
+                <a:solidFill>
+                  <a:srgbClr val="64748B"/>
+                </a:solidFill>
+                <a:latin typeface="Montserrat"/>
+              </a:rPr>
+              <a:t>021 / 024</a:t>
+            </a:r>
+          </a:p>
+        </p:txBody>
+      </p:sp>
+      <p:sp>
+        <p:nvSpPr>
+          <p:cNvPr id="4" name="TextBox 3"/>
+          <p:cNvSpPr txBox="1"/>
+          <p:nvPr/>
+        </p:nvSpPr>
+        <p:spPr>
+          <a:xfrm>
+            <a:off x="457200" y="6419088"/>
+            <a:ext cx="8229600" cy="365760"/>
+          </a:xfrm>
+          <a:prstGeom prst="rect">
+            <a:avLst/>
+          </a:prstGeom>
+          <a:noFill/>
+        </p:spPr>
+        <p:txBody>
+          <a:bodyPr wrap="square">
+            <a:spAutoFit/>
+          </a:bodyPr>
+          <a:lstStyle/>
+          <a:p>
+            <a:r>
+              <a:rPr sz="900" b="0" i="0">
+                <a:solidFill>
+                  <a:srgbClr val="64748B"/>
+                </a:solidFill>
+                <a:latin typeface="Montserrat"/>
+              </a:rPr>
+              <a:t>Curso Gas B · Tema 13 · UNE 60670-6</a:t>
+            </a:r>
+          </a:p>
+        </p:txBody>
+      </p:sp>
+      <p:sp>
+        <p:nvSpPr>
+          <p:cNvPr id="5" name="TextBox 4"/>
+          <p:cNvSpPr txBox="1"/>
+          <p:nvPr/>
+        </p:nvSpPr>
+        <p:spPr>
+          <a:xfrm>
+            <a:off x="822960" y="457200"/>
+            <a:ext cx="10058400" cy="365760"/>
+          </a:xfrm>
+          <a:prstGeom prst="rect">
+            <a:avLst/>
+          </a:prstGeom>
+          <a:noFill/>
+        </p:spPr>
+        <p:txBody>
+          <a:bodyPr wrap="square">
+            <a:spAutoFit/>
+          </a:bodyPr>
+          <a:lstStyle/>
+          <a:p>
+            <a:r>
+              <a:rPr sz="1300" b="1" i="0">
+                <a:solidFill>
+                  <a:srgbClr val="E8801A"/>
+                </a:solidFill>
+                <a:latin typeface="Montserrat"/>
+              </a:rPr>
+              <a:t>TIPO C · DÓNDE</a:t>
+            </a:r>
+          </a:p>
+        </p:txBody>
+      </p:sp>
+      <p:sp>
+        <p:nvSpPr>
+          <p:cNvPr id="6" name="TextBox 5"/>
+          <p:cNvSpPr txBox="1"/>
+          <p:nvPr/>
+        </p:nvSpPr>
+        <p:spPr>
+          <a:xfrm>
+            <a:off x="822960" y="868680"/>
+            <a:ext cx="10515600" cy="914400"/>
+          </a:xfrm>
+          <a:prstGeom prst="rect">
+            <a:avLst/>
+          </a:prstGeom>
+          <a:noFill/>
+        </p:spPr>
+        <p:txBody>
+          <a:bodyPr wrap="square">
+            <a:spAutoFit/>
+          </a:bodyPr>
+          <a:lstStyle/>
+          <a:p>
+            <a:r>
+              <a:rPr sz="2800" b="1" i="0">
+                <a:solidFill>
+                  <a:srgbClr val="1E2761"/>
+                </a:solidFill>
+                <a:latin typeface="Montserrat"/>
+              </a:rPr>
+              <a:t>Tipo C: el todoterreno</a:t>
+            </a:r>
+          </a:p>
+        </p:txBody>
+      </p:sp>
+      <p:sp>
+        <p:nvSpPr>
+          <p:cNvPr id="7" name="Rectangle 6"/>
+          <p:cNvSpPr/>
+          <p:nvPr/>
+        </p:nvSpPr>
+        <p:spPr>
+          <a:xfrm>
+            <a:off x="868680" y="1627632"/>
+            <a:ext cx="2011680" cy="73152"/>
+          </a:xfrm>
+          <a:prstGeom prst="rect">
+            <a:avLst/>
+          </a:prstGeom>
+          <a:solidFill>
+            <a:srgbClr val="E8801A"/>
+          </a:solidFill>
+          <a:ln>
+            <a:noFill/>
+          </a:ln>
+          <a:effectLst/>
+        </p:spPr>
+        <p:style>
+          <a:lnRef idx="1">
+            <a:schemeClr val="accent1"/>
+          </a:lnRef>
+          <a:fillRef idx="3">
+            <a:schemeClr val="accent1"/>
+          </a:fillRef>
+          <a:effectRef idx="2">
+            <a:schemeClr val="accent1"/>
+          </a:effectRef>
+          <a:fontRef idx="minor">
+            <a:schemeClr val="lt1"/>
+          </a:fontRef>
+        </p:style>
+        <p:txBody>
+          <a:bodyPr rtlCol="0" anchor="ctr"/>
+          <a:lstStyle/>
+          <a:p>
+            <a:pPr algn="ctr"/>
+          </a:p>
+        </p:txBody>
+      </p:sp>
+      <p:sp>
+        <p:nvSpPr>
+          <p:cNvPr id="8" name="TextBox 7"/>
+          <p:cNvSpPr txBox="1"/>
+          <p:nvPr/>
+        </p:nvSpPr>
+        <p:spPr>
+          <a:xfrm>
+            <a:off x="822960" y="1965960"/>
+            <a:ext cx="5029200" cy="4206240"/>
+          </a:xfrm>
+          <a:prstGeom prst="rect">
+            <a:avLst/>
+          </a:prstGeom>
+          <a:noFill/>
+        </p:spPr>
+        <p:txBody>
+          <a:bodyPr wrap="square">
+            <a:spAutoFit/>
+          </a:bodyPr>
+          <a:lstStyle/>
+          <a:p>
+            <a:pPr>
+              <a:spcAft>
+                <a:spcPts val="1100"/>
+              </a:spcAft>
+            </a:pPr>
+            <a:r>
+              <a:rPr sz="1600" b="1" i="0">
+                <a:solidFill>
+                  <a:srgbClr val="E8801A"/>
+                </a:solidFill>
+                <a:latin typeface="Montserrat"/>
+              </a:rPr>
+              <a:t>▸  </a:t>
+            </a:r>
+            <a:r>
+              <a:rPr sz="1600" b="0" i="0">
+                <a:solidFill>
+                  <a:srgbClr val="1B2330"/>
+                </a:solidFill>
+                <a:latin typeface="Montserrat"/>
+              </a:rPr>
+              <a:t>Vale en cualquier local</a:t>
+            </a:r>
+          </a:p>
+          <a:p>
+            <a:pPr>
+              <a:spcAft>
+                <a:spcPts val="1100"/>
+              </a:spcAft>
+            </a:pPr>
+            <a:r>
+              <a:rPr sz="1600" b="1" i="0">
+                <a:solidFill>
+                  <a:srgbClr val="E8801A"/>
+                </a:solidFill>
+                <a:latin typeface="Montserrat"/>
+              </a:rPr>
+              <a:t>▸  </a:t>
+            </a:r>
+            <a:r>
+              <a:rPr sz="1600" b="0" i="0">
+                <a:solidFill>
+                  <a:srgbClr val="1B2330"/>
+                </a:solidFill>
+                <a:latin typeface="Montserrat"/>
+              </a:rPr>
+              <a:t>Incluso dormitorio y baño</a:t>
+            </a:r>
+          </a:p>
+          <a:p>
+            <a:pPr>
+              <a:spcAft>
+                <a:spcPts val="1100"/>
+              </a:spcAft>
+            </a:pPr>
+            <a:r>
+              <a:rPr sz="1600" b="1" i="0">
+                <a:solidFill>
+                  <a:srgbClr val="E8801A"/>
+                </a:solidFill>
+                <a:latin typeface="Montserrat"/>
+              </a:rPr>
+              <a:t>▸  </a:t>
+            </a:r>
+            <a:r>
+              <a:rPr sz="1600" b="0" i="0">
+                <a:solidFill>
+                  <a:srgbClr val="1B2330"/>
+                </a:solidFill>
+                <a:latin typeface="Montserrat"/>
+              </a:rPr>
+              <a:t>En húmedos: cumplir el REBT</a:t>
+            </a:r>
+          </a:p>
+        </p:txBody>
+      </p:sp>
+      <p:sp>
+        <p:nvSpPr>
+          <p:cNvPr id="9" name="imgph" descr="IMGQ:modern boiler in cupboard"/>
+          <p:cNvSpPr/>
+          <p:nvPr/>
+        </p:nvSpPr>
+        <p:spPr>
+          <a:xfrm>
+            <a:off x="6080760" y="1965960"/>
+            <a:ext cx="5303520" cy="4572000"/>
+          </a:xfrm>
+          <a:prstGeom prst="roundRect">
+            <a:avLst/>
+          </a:prstGeom>
+          <a:solidFill>
+            <a:srgbClr val="F3F6FB"/>
+          </a:solidFill>
+          <a:ln w="12700">
+            <a:solidFill>
+              <a:srgbClr val="C7D2E6"/>
+            </a:solidFill>
+          </a:ln>
+          <a:effectLst/>
+        </p:spPr>
+        <p:style>
+          <a:lnRef idx="1">
+            <a:schemeClr val="accent1"/>
+          </a:lnRef>
+          <a:fillRef idx="3">
+            <a:schemeClr val="accent1"/>
+          </a:fillRef>
+          <a:effectRef idx="2">
+            <a:schemeClr val="accent1"/>
+          </a:effectRef>
+          <a:fontRef idx="minor">
+            <a:schemeClr val="lt1"/>
+          </a:fontRef>
+        </p:style>
+        <p:txBody>
+          <a:bodyPr rtlCol="0" anchor="ctr"/>
+          <a:lstStyle/>
+          <a:p>
+            <a:pPr algn="ctr"/>
+          </a:p>
+        </p:txBody>
+      </p:sp>
+      <p:sp>
+        <p:nvSpPr>
+          <p:cNvPr id="10" name="TextBox 9"/>
+          <p:cNvSpPr txBox="1"/>
+          <p:nvPr/>
+        </p:nvSpPr>
+        <p:spPr>
+          <a:xfrm>
+            <a:off x="6355080" y="3611880"/>
+            <a:ext cx="4754880" cy="1280160"/>
+          </a:xfrm>
+          <a:prstGeom prst="rect">
+            <a:avLst/>
+          </a:prstGeom>
+          <a:noFill/>
+        </p:spPr>
+        <p:txBody>
+          <a:bodyPr wrap="square">
+            <a:spAutoFit/>
+          </a:bodyPr>
+          <a:lstStyle/>
+          <a:p>
+            <a:pPr algn="ctr"/>
+            <a:r>
+              <a:rPr sz="1400" b="1" i="0">
+                <a:solidFill>
+                  <a:srgbClr val="64748B"/>
+                </a:solidFill>
+                <a:latin typeface="Montserrat"/>
+              </a:rPr>
+              <a:t>IMAGEN</a:t>
+            </a:r>
+          </a:p>
+          <a:p>
+            <a:pPr algn="ctr"/>
+            <a:r>
+              <a:rPr sz="1100" b="0" i="1">
+                <a:solidFill>
+                  <a:srgbClr val="64748B"/>
+                </a:solidFill>
+                <a:latin typeface="Montserrat"/>
+              </a:rPr>
+              <a:t>modern boiler in cupboard</a:t>
+            </a:r>
+          </a:p>
+        </p:txBody>
+      </p:sp>
+    </p:spTree>
+  </p:cSld>
+  <p:clrMapOvr>
+    <a:masterClrMapping/>
+  </p:clrMapOvr>
+  <mc:AlternateContent xmlns:mc="http://schemas.openxmlformats.org/markup-compatibility/2006">
+    <mc:Choice xmlns:p14="http://schemas.microsoft.com/office/powerpoint/2010/main" Requires="p14">
+      <p:transition spd="med" p14:dur="700">
+        <p14:cube dir="l"/>
+      </p:transition>
+    </mc:Choice>
+    <mc:Fallback>
+      <p:transition spd="med">
+        <p:push dir="l"/>
+      </p:transition>
+    </mc:Fallback>
+  </mc:AlternateContent>
+</p:sld>
+</file>
+
+<file path=ppt/slides/slide22.xml><?xml version="1.0" encoding="utf-8"?>
+<p:sld xmlns:a="http://schemas.openxmlformats.org/drawingml/2006/main" xmlns:p="http://schemas.openxmlformats.org/presentationml/2006/main" xmlns:r="http://schemas.openxmlformats.org/officeDocument/2006/relationships">
+  <p:cSld>
+    <p:spTree>
+      <p:nvGrpSpPr>
+        <p:cNvPr id="1" name=""/>
+        <p:cNvGrpSpPr/>
+        <p:nvPr/>
+      </p:nvGrpSpPr>
+      <p:grpSpPr/>
+      <p:sp>
+        <p:nvSpPr>
+          <p:cNvPr id="2" name="Rectangle 1"/>
+          <p:cNvSpPr/>
+          <p:nvPr/>
+        </p:nvSpPr>
+        <p:spPr>
+          <a:xfrm>
+            <a:off x="0" y="0"/>
+            <a:ext cx="12191695" cy="6858000"/>
+          </a:xfrm>
+          <a:prstGeom prst="rect">
+            <a:avLst/>
+          </a:prstGeom>
+          <a:solidFill>
+            <a:srgbClr val="FFFFFF"/>
+          </a:solidFill>
+          <a:ln>
+            <a:noFill/>
+          </a:ln>
+          <a:effectLst/>
+        </p:spPr>
+        <p:style>
+          <a:lnRef idx="1">
+            <a:schemeClr val="accent1"/>
+          </a:lnRef>
+          <a:fillRef idx="3">
+            <a:schemeClr val="accent1"/>
+          </a:fillRef>
+          <a:effectRef idx="2">
+            <a:schemeClr val="accent1"/>
+          </a:effectRef>
+          <a:fontRef idx="minor">
+            <a:schemeClr val="lt1"/>
+          </a:fontRef>
+        </p:style>
+        <p:txBody>
+          <a:bodyPr rtlCol="0" anchor="ctr"/>
+          <a:lstStyle/>
+          <a:p>
+            <a:pPr algn="ctr"/>
+          </a:p>
+        </p:txBody>
+      </p:sp>
+      <p:sp>
+        <p:nvSpPr>
+          <p:cNvPr id="3" name="TextBox 2"/>
+          <p:cNvSpPr txBox="1"/>
+          <p:nvPr/>
+        </p:nvSpPr>
+        <p:spPr>
+          <a:xfrm>
+            <a:off x="10607040" y="320040"/>
+            <a:ext cx="1371600" cy="365760"/>
+          </a:xfrm>
+          <a:prstGeom prst="rect">
+            <a:avLst/>
+          </a:prstGeom>
+          <a:noFill/>
+        </p:spPr>
+        <p:txBody>
+          <a:bodyPr wrap="square">
+            <a:spAutoFit/>
+          </a:bodyPr>
+          <a:lstStyle/>
+          <a:p>
+            <a:pPr algn="r"/>
+            <a:r>
+              <a:rPr sz="1000" b="1" i="0">
+                <a:solidFill>
+                  <a:srgbClr val="64748B"/>
+                </a:solidFill>
+                <a:latin typeface="Montserrat"/>
+              </a:rPr>
+              <a:t>022 / 024</a:t>
+            </a:r>
+          </a:p>
+        </p:txBody>
+      </p:sp>
+      <p:sp>
+        <p:nvSpPr>
+          <p:cNvPr id="4" name="TextBox 3"/>
+          <p:cNvSpPr txBox="1"/>
+          <p:nvPr/>
+        </p:nvSpPr>
+        <p:spPr>
+          <a:xfrm>
+            <a:off x="457200" y="6419088"/>
+            <a:ext cx="8229600" cy="365760"/>
+          </a:xfrm>
+          <a:prstGeom prst="rect">
+            <a:avLst/>
+          </a:prstGeom>
+          <a:noFill/>
+        </p:spPr>
+        <p:txBody>
+          <a:bodyPr wrap="square">
+            <a:spAutoFit/>
+          </a:bodyPr>
+          <a:lstStyle/>
+          <a:p>
+            <a:r>
+              <a:rPr sz="900" b="0" i="0">
+                <a:solidFill>
+                  <a:srgbClr val="64748B"/>
+                </a:solidFill>
+                <a:latin typeface="Montserrat"/>
+              </a:rPr>
+              <a:t>Curso Gas B · Tema 13 · UNE 60670-6</a:t>
+            </a:r>
+          </a:p>
+        </p:txBody>
+      </p:sp>
+      <p:sp>
+        <p:nvSpPr>
+          <p:cNvPr id="5" name="Rectangle 4"/>
+          <p:cNvSpPr/>
+          <p:nvPr/>
+        </p:nvSpPr>
+        <p:spPr>
+          <a:xfrm>
+            <a:off x="0" y="0"/>
+            <a:ext cx="12191695" cy="1143000"/>
+          </a:xfrm>
+          <a:prstGeom prst="rect">
+            <a:avLst/>
+          </a:prstGeom>
+          <a:solidFill>
+            <a:srgbClr val="E8801A"/>
+          </a:solidFill>
+          <a:ln>
+            <a:noFill/>
+          </a:ln>
+          <a:effectLst/>
+        </p:spPr>
+        <p:style>
+          <a:lnRef idx="1">
+            <a:schemeClr val="accent1"/>
+          </a:lnRef>
+          <a:fillRef idx="3">
+            <a:schemeClr val="accent1"/>
+          </a:fillRef>
+          <a:effectRef idx="2">
+            <a:schemeClr val="accent1"/>
+          </a:effectRef>
+          <a:fontRef idx="minor">
+            <a:schemeClr val="lt1"/>
+          </a:fontRef>
+        </p:style>
+        <p:txBody>
+          <a:bodyPr rtlCol="0" anchor="ctr"/>
+          <a:lstStyle/>
+          <a:p>
+            <a:pPr algn="ctr"/>
+          </a:p>
+        </p:txBody>
+      </p:sp>
+      <p:sp>
+        <p:nvSpPr>
+          <p:cNvPr id="6" name="TextBox 5"/>
+          <p:cNvSpPr txBox="1"/>
+          <p:nvPr/>
+        </p:nvSpPr>
+        <p:spPr>
+          <a:xfrm>
+            <a:off x="822960" y="274320"/>
+            <a:ext cx="10515600" cy="640080"/>
+          </a:xfrm>
+          <a:prstGeom prst="rect">
+            <a:avLst/>
+          </a:prstGeom>
+          <a:noFill/>
+        </p:spPr>
+        <p:txBody>
+          <a:bodyPr wrap="square">
+            <a:spAutoFit/>
+          </a:bodyPr>
+          <a:lstStyle/>
+          <a:p>
+            <a:r>
+              <a:rPr sz="2400" b="1" i="0">
+                <a:solidFill>
+                  <a:srgbClr val="FFFFFF"/>
+                </a:solidFill>
+                <a:latin typeface="Montserrat"/>
+              </a:rPr>
+              <a:t>⚡  PREGUNTA RÁPIDA</a:t>
+            </a:r>
+          </a:p>
+        </p:txBody>
+      </p:sp>
+      <p:sp>
+        <p:nvSpPr>
+          <p:cNvPr id="7" name="TextBox 6"/>
+          <p:cNvSpPr txBox="1"/>
+          <p:nvPr/>
+        </p:nvSpPr>
+        <p:spPr>
+          <a:xfrm>
+            <a:off x="822960" y="1508760"/>
+            <a:ext cx="10515600" cy="1371600"/>
+          </a:xfrm>
+          <a:prstGeom prst="rect">
+            <a:avLst/>
+          </a:prstGeom>
+          <a:noFill/>
+        </p:spPr>
+        <p:txBody>
+          <a:bodyPr wrap="square">
+            <a:spAutoFit/>
+          </a:bodyPr>
+          <a:lstStyle/>
+          <a:p>
+            <a:r>
+              <a:rPr sz="2400" b="1" i="0">
+                <a:solidFill>
+                  <a:srgbClr val="1E2761"/>
+                </a:solidFill>
+                <a:latin typeface="Montserrat"/>
+              </a:rPr>
+              <a:t>¿Qué tipo de aparato se puede instalar en un dormitorio?</a:t>
+            </a:r>
+          </a:p>
+        </p:txBody>
+      </p:sp>
+      <p:sp>
+        <p:nvSpPr>
+          <p:cNvPr id="8" name="Rounded Rectangle 7"/>
+          <p:cNvSpPr/>
+          <p:nvPr/>
+        </p:nvSpPr>
+        <p:spPr>
+          <a:xfrm>
+            <a:off x="822960" y="3291840"/>
+            <a:ext cx="4983480" cy="1143000"/>
+          </a:xfrm>
+          <a:prstGeom prst="roundRect">
+            <a:avLst/>
+          </a:prstGeom>
+          <a:solidFill>
+            <a:srgbClr val="F3F6FB"/>
+          </a:solidFill>
+          <a:ln w="12700">
+            <a:solidFill>
+              <a:srgbClr val="C7D2E6"/>
+            </a:solidFill>
+          </a:ln>
+          <a:effectLst/>
+        </p:spPr>
+        <p:style>
+          <a:lnRef idx="1">
+            <a:schemeClr val="accent1"/>
+          </a:lnRef>
+          <a:fillRef idx="3">
+            <a:schemeClr val="accent1"/>
+          </a:fillRef>
+          <a:effectRef idx="2">
+            <a:schemeClr val="accent1"/>
+          </a:effectRef>
+          <a:fontRef idx="minor">
+            <a:schemeClr val="lt1"/>
+          </a:fontRef>
+        </p:style>
+        <p:txBody>
+          <a:bodyPr rtlCol="0" anchor="ctr"/>
+          <a:lstStyle/>
+          <a:p>
+            <a:pPr algn="ctr"/>
+          </a:p>
+        </p:txBody>
+      </p:sp>
+      <p:sp>
+        <p:nvSpPr>
+          <p:cNvPr id="9" name="Rectangle 8"/>
+          <p:cNvSpPr/>
+          <p:nvPr/>
+        </p:nvSpPr>
+        <p:spPr>
+          <a:xfrm>
+            <a:off x="822960" y="3291840"/>
+            <a:ext cx="640080" cy="1143000"/>
+          </a:xfrm>
+          <a:prstGeom prst="rect">
+            <a:avLst/>
+          </a:prstGeom>
+          <a:solidFill>
+            <a:srgbClr val="1E2761"/>
+          </a:solidFill>
+          <a:ln>
+            <a:noFill/>
+          </a:ln>
+          <a:effectLst/>
+        </p:spPr>
+        <p:style>
+          <a:lnRef idx="1">
+            <a:schemeClr val="accent1"/>
+          </a:lnRef>
+          <a:fillRef idx="3">
+            <a:schemeClr val="accent1"/>
+          </a:fillRef>
+          <a:effectRef idx="2">
+            <a:schemeClr val="accent1"/>
+          </a:effectRef>
+          <a:fontRef idx="minor">
+            <a:schemeClr val="lt1"/>
+          </a:fontRef>
+        </p:style>
+        <p:txBody>
+          <a:bodyPr rtlCol="0" anchor="ctr"/>
+          <a:lstStyle/>
+          <a:p>
+            <a:pPr algn="ctr"/>
+          </a:p>
+        </p:txBody>
+      </p:sp>
+      <p:sp>
+        <p:nvSpPr>
+          <p:cNvPr id="10" name="TextBox 9"/>
+          <p:cNvSpPr txBox="1"/>
+          <p:nvPr/>
+        </p:nvSpPr>
+        <p:spPr>
+          <a:xfrm>
+            <a:off x="822960" y="3611880"/>
+            <a:ext cx="640080" cy="548640"/>
+          </a:xfrm>
+          <a:prstGeom prst="rect">
+            <a:avLst/>
+          </a:prstGeom>
+          <a:noFill/>
+        </p:spPr>
+        <p:txBody>
+          <a:bodyPr wrap="square">
+            <a:spAutoFit/>
+          </a:bodyPr>
+          <a:lstStyle/>
+          <a:p>
+            <a:pPr algn="ctr"/>
+            <a:r>
+              <a:rPr sz="2200" b="1" i="0">
+                <a:solidFill>
+                  <a:srgbClr val="FFFFFF"/>
+                </a:solidFill>
+                <a:latin typeface="Montserrat"/>
+              </a:rPr>
+              <a:t>A</a:t>
+            </a:r>
+          </a:p>
+        </p:txBody>
+      </p:sp>
+      <p:sp>
+        <p:nvSpPr>
+          <p:cNvPr id="11" name="TextBox 10"/>
+          <p:cNvSpPr txBox="1"/>
+          <p:nvPr/>
+        </p:nvSpPr>
+        <p:spPr>
+          <a:xfrm>
+            <a:off x="1600200" y="3474720"/>
+            <a:ext cx="4114800" cy="868680"/>
+          </a:xfrm>
+          <a:prstGeom prst="rect">
+            <a:avLst/>
+          </a:prstGeom>
+          <a:noFill/>
+        </p:spPr>
+        <p:txBody>
+          <a:bodyPr wrap="square">
+            <a:spAutoFit/>
+          </a:bodyPr>
+          <a:lstStyle/>
+          <a:p>
+            <a:r>
+              <a:rPr sz="1400" b="0" i="0">
+                <a:solidFill>
+                  <a:srgbClr val="1B2330"/>
+                </a:solidFill>
+                <a:latin typeface="Montserrat"/>
+              </a:rPr>
+              <a:t>Solo el tipo A</a:t>
+            </a:r>
+          </a:p>
+        </p:txBody>
+      </p:sp>
+      <p:sp>
+        <p:nvSpPr>
+          <p:cNvPr id="12" name="Rounded Rectangle 11"/>
+          <p:cNvSpPr/>
+          <p:nvPr/>
+        </p:nvSpPr>
+        <p:spPr>
+          <a:xfrm>
+            <a:off x="6355080" y="3291840"/>
+            <a:ext cx="4983480" cy="1143000"/>
+          </a:xfrm>
+          <a:prstGeom prst="roundRect">
+            <a:avLst/>
+          </a:prstGeom>
+          <a:solidFill>
+            <a:srgbClr val="F3F6FB"/>
+          </a:solidFill>
+          <a:ln w="12700">
+            <a:solidFill>
+              <a:srgbClr val="C7D2E6"/>
+            </a:solidFill>
+          </a:ln>
+          <a:effectLst/>
+        </p:spPr>
+        <p:style>
+          <a:lnRef idx="1">
+            <a:schemeClr val="accent1"/>
+          </a:lnRef>
+          <a:fillRef idx="3">
+            <a:schemeClr val="accent1"/>
+          </a:fillRef>
+          <a:effectRef idx="2">
+            <a:schemeClr val="accent1"/>
+          </a:effectRef>
+          <a:fontRef idx="minor">
+            <a:schemeClr val="lt1"/>
+          </a:fontRef>
+        </p:style>
+        <p:txBody>
+          <a:bodyPr rtlCol="0" anchor="ctr"/>
+          <a:lstStyle/>
+          <a:p>
+            <a:pPr algn="ctr"/>
+          </a:p>
+        </p:txBody>
+      </p:sp>
+      <p:sp>
+        <p:nvSpPr>
+          <p:cNvPr id="13" name="Rectangle 12"/>
+          <p:cNvSpPr/>
+          <p:nvPr/>
+        </p:nvSpPr>
+        <p:spPr>
+          <a:xfrm>
+            <a:off x="6355080" y="3291840"/>
+            <a:ext cx="640080" cy="1143000"/>
+          </a:xfrm>
+          <a:prstGeom prst="rect">
+            <a:avLst/>
+          </a:prstGeom>
+          <a:solidFill>
+            <a:srgbClr val="1E2761"/>
+          </a:solidFill>
+          <a:ln>
+            <a:noFill/>
+          </a:ln>
+          <a:effectLst/>
+        </p:spPr>
+        <p:style>
+          <a:lnRef idx="1">
+            <a:schemeClr val="accent1"/>
+          </a:lnRef>
+          <a:fillRef idx="3">
+            <a:schemeClr val="accent1"/>
+          </a:fillRef>
+          <a:effectRef idx="2">
+            <a:schemeClr val="accent1"/>
+          </a:effectRef>
+          <a:fontRef idx="minor">
+            <a:schemeClr val="lt1"/>
+          </a:fontRef>
+        </p:style>
+        <p:txBody>
+          <a:bodyPr rtlCol="0" anchor="ctr"/>
+          <a:lstStyle/>
+          <a:p>
+            <a:pPr algn="ctr"/>
+          </a:p>
+        </p:txBody>
+      </p:sp>
+      <p:sp>
+        <p:nvSpPr>
+          <p:cNvPr id="14" name="TextBox 13"/>
+          <p:cNvSpPr txBox="1"/>
+          <p:nvPr/>
+        </p:nvSpPr>
+        <p:spPr>
+          <a:xfrm>
+            <a:off x="6355080" y="3611880"/>
+            <a:ext cx="640080" cy="548640"/>
+          </a:xfrm>
+          <a:prstGeom prst="rect">
+            <a:avLst/>
+          </a:prstGeom>
+          <a:noFill/>
+        </p:spPr>
+        <p:txBody>
+          <a:bodyPr wrap="square">
+            <a:spAutoFit/>
+          </a:bodyPr>
+          <a:lstStyle/>
+          <a:p>
+            <a:pPr algn="ctr"/>
+            <a:r>
+              <a:rPr sz="2200" b="1" i="0">
+                <a:solidFill>
+                  <a:srgbClr val="FFFFFF"/>
+                </a:solidFill>
+                <a:latin typeface="Montserrat"/>
+              </a:rPr>
+              <a:t>B</a:t>
+            </a:r>
+          </a:p>
+        </p:txBody>
+      </p:sp>
+      <p:sp>
+        <p:nvSpPr>
+          <p:cNvPr id="15" name="TextBox 14"/>
+          <p:cNvSpPr txBox="1"/>
+          <p:nvPr/>
+        </p:nvSpPr>
+        <p:spPr>
+          <a:xfrm>
+            <a:off x="7132320" y="3474720"/>
+            <a:ext cx="4114800" cy="868680"/>
+          </a:xfrm>
+          <a:prstGeom prst="rect">
+            <a:avLst/>
+          </a:prstGeom>
+          <a:noFill/>
+        </p:spPr>
+        <p:txBody>
+          <a:bodyPr wrap="square">
+            <a:spAutoFit/>
+          </a:bodyPr>
+          <a:lstStyle/>
+          <a:p>
+            <a:r>
+              <a:rPr sz="1400" b="0" i="0">
+                <a:solidFill>
+                  <a:srgbClr val="1B2330"/>
+                </a:solidFill>
+                <a:latin typeface="Montserrat"/>
+              </a:rPr>
+              <a:t>Solo el tipo B</a:t>
+            </a:r>
+          </a:p>
+        </p:txBody>
+      </p:sp>
+      <p:sp>
+        <p:nvSpPr>
+          <p:cNvPr id="16" name="Rounded Rectangle 15"/>
+          <p:cNvSpPr/>
+          <p:nvPr/>
+        </p:nvSpPr>
+        <p:spPr>
+          <a:xfrm>
+            <a:off x="822960" y="4617720"/>
+            <a:ext cx="4983480" cy="1143000"/>
+          </a:xfrm>
+          <a:prstGeom prst="roundRect">
+            <a:avLst/>
+          </a:prstGeom>
+          <a:solidFill>
+            <a:srgbClr val="F3F6FB"/>
+          </a:solidFill>
+          <a:ln w="12700">
+            <a:solidFill>
+              <a:srgbClr val="C7D2E6"/>
+            </a:solidFill>
+          </a:ln>
+          <a:effectLst/>
+        </p:spPr>
+        <p:style>
+          <a:lnRef idx="1">
+            <a:schemeClr val="accent1"/>
+          </a:lnRef>
+          <a:fillRef idx="3">
+            <a:schemeClr val="accent1"/>
+          </a:fillRef>
+          <a:effectRef idx="2">
+            <a:schemeClr val="accent1"/>
+          </a:effectRef>
+          <a:fontRef idx="minor">
+            <a:schemeClr val="lt1"/>
+          </a:fontRef>
+        </p:style>
+        <p:txBody>
+          <a:bodyPr rtlCol="0" anchor="ctr"/>
+          <a:lstStyle/>
+          <a:p>
+            <a:pPr algn="ctr"/>
+          </a:p>
+        </p:txBody>
+      </p:sp>
+      <p:sp>
+        <p:nvSpPr>
+          <p:cNvPr id="17" name="Rectangle 16"/>
+          <p:cNvSpPr/>
+          <p:nvPr/>
+        </p:nvSpPr>
+        <p:spPr>
+          <a:xfrm>
+            <a:off x="822960" y="4617720"/>
+            <a:ext cx="640080" cy="1143000"/>
+          </a:xfrm>
+          <a:prstGeom prst="rect">
+            <a:avLst/>
+          </a:prstGeom>
+          <a:solidFill>
+            <a:srgbClr val="1E2761"/>
+          </a:solidFill>
+          <a:ln>
+            <a:noFill/>
+          </a:ln>
+          <a:effectLst/>
+        </p:spPr>
+        <p:style>
+          <a:lnRef idx="1">
+            <a:schemeClr val="accent1"/>
+          </a:lnRef>
+          <a:fillRef idx="3">
+            <a:schemeClr val="accent1"/>
+          </a:fillRef>
+          <a:effectRef idx="2">
+            <a:schemeClr val="accent1"/>
+          </a:effectRef>
+          <a:fontRef idx="minor">
+            <a:schemeClr val="lt1"/>
+          </a:fontRef>
+        </p:style>
+        <p:txBody>
+          <a:bodyPr rtlCol="0" anchor="ctr"/>
+          <a:lstStyle/>
+          <a:p>
+            <a:pPr algn="ctr"/>
+          </a:p>
+        </p:txBody>
+      </p:sp>
+      <p:sp>
+        <p:nvSpPr>
+          <p:cNvPr id="18" name="TextBox 17"/>
+          <p:cNvSpPr txBox="1"/>
+          <p:nvPr/>
+        </p:nvSpPr>
+        <p:spPr>
+          <a:xfrm>
+            <a:off x="822960" y="4937760"/>
+            <a:ext cx="640080" cy="548640"/>
+          </a:xfrm>
+          <a:prstGeom prst="rect">
+            <a:avLst/>
+          </a:prstGeom>
+          <a:noFill/>
+        </p:spPr>
+        <p:txBody>
+          <a:bodyPr wrap="square">
+            <a:spAutoFit/>
+          </a:bodyPr>
+          <a:lstStyle/>
+          <a:p>
+            <a:pPr algn="ctr"/>
+            <a:r>
+              <a:rPr sz="2200" b="1" i="0">
+                <a:solidFill>
+                  <a:srgbClr val="FFFFFF"/>
+                </a:solidFill>
+                <a:latin typeface="Montserrat"/>
+              </a:rPr>
+              <a:t>C</a:t>
+            </a:r>
+          </a:p>
+        </p:txBody>
+      </p:sp>
+      <p:sp>
+        <p:nvSpPr>
+          <p:cNvPr id="19" name="TextBox 18"/>
+          <p:cNvSpPr txBox="1"/>
+          <p:nvPr/>
+        </p:nvSpPr>
+        <p:spPr>
+          <a:xfrm>
+            <a:off x="1600200" y="4800600"/>
+            <a:ext cx="4114800" cy="868680"/>
+          </a:xfrm>
+          <a:prstGeom prst="rect">
+            <a:avLst/>
+          </a:prstGeom>
+          <a:noFill/>
+        </p:spPr>
+        <p:txBody>
+          <a:bodyPr wrap="square">
+            <a:spAutoFit/>
+          </a:bodyPr>
+          <a:lstStyle/>
+          <a:p>
+            <a:r>
+              <a:rPr sz="1400" b="0" i="0">
+                <a:solidFill>
+                  <a:srgbClr val="1B2330"/>
+                </a:solidFill>
+                <a:latin typeface="Montserrat"/>
+              </a:rPr>
+              <a:t>Solo el tipo C</a:t>
+            </a:r>
+          </a:p>
+        </p:txBody>
+      </p:sp>
+      <p:sp>
+        <p:nvSpPr>
+          <p:cNvPr id="20" name="Rounded Rectangle 19"/>
+          <p:cNvSpPr/>
+          <p:nvPr/>
+        </p:nvSpPr>
+        <p:spPr>
+          <a:xfrm>
+            <a:off x="6355080" y="4617720"/>
+            <a:ext cx="4983480" cy="1143000"/>
+          </a:xfrm>
+          <a:prstGeom prst="roundRect">
+            <a:avLst/>
+          </a:prstGeom>
+          <a:solidFill>
+            <a:srgbClr val="F3F6FB"/>
+          </a:solidFill>
+          <a:ln w="12700">
+            <a:solidFill>
+              <a:srgbClr val="C7D2E6"/>
+            </a:solidFill>
+          </a:ln>
+          <a:effectLst/>
+        </p:spPr>
+        <p:style>
+          <a:lnRef idx="1">
+            <a:schemeClr val="accent1"/>
+          </a:lnRef>
+          <a:fillRef idx="3">
+            <a:schemeClr val="accent1"/>
+          </a:fillRef>
+          <a:effectRef idx="2">
+            <a:schemeClr val="accent1"/>
+          </a:effectRef>
+          <a:fontRef idx="minor">
+            <a:schemeClr val="lt1"/>
+          </a:fontRef>
+        </p:style>
+        <p:txBody>
+          <a:bodyPr rtlCol="0" anchor="ctr"/>
+          <a:lstStyle/>
+          <a:p>
+            <a:pPr algn="ctr"/>
+          </a:p>
+        </p:txBody>
+      </p:sp>
+      <p:sp>
+        <p:nvSpPr>
+          <p:cNvPr id="21" name="Rectangle 20"/>
+          <p:cNvSpPr/>
+          <p:nvPr/>
+        </p:nvSpPr>
+        <p:spPr>
+          <a:xfrm>
+            <a:off x="6355080" y="4617720"/>
+            <a:ext cx="640080" cy="1143000"/>
+          </a:xfrm>
+          <a:prstGeom prst="rect">
+            <a:avLst/>
+          </a:prstGeom>
+          <a:solidFill>
+            <a:srgbClr val="1E2761"/>
+          </a:solidFill>
+          <a:ln>
+            <a:noFill/>
+          </a:ln>
+          <a:effectLst/>
+        </p:spPr>
+        <p:style>
+          <a:lnRef idx="1">
+            <a:schemeClr val="accent1"/>
+          </a:lnRef>
+          <a:fillRef idx="3">
+            <a:schemeClr val="accent1"/>
+          </a:fillRef>
+          <a:effectRef idx="2">
+            <a:schemeClr val="accent1"/>
+          </a:effectRef>
+          <a:fontRef idx="minor">
+            <a:schemeClr val="lt1"/>
+          </a:fontRef>
+        </p:style>
+        <p:txBody>
+          <a:bodyPr rtlCol="0" anchor="ctr"/>
+          <a:lstStyle/>
+          <a:p>
+            <a:pPr algn="ctr"/>
+          </a:p>
+        </p:txBody>
+      </p:sp>
+      <p:sp>
+        <p:nvSpPr>
+          <p:cNvPr id="22" name="TextBox 21"/>
+          <p:cNvSpPr txBox="1"/>
+          <p:nvPr/>
+        </p:nvSpPr>
+        <p:spPr>
+          <a:xfrm>
+            <a:off x="6355080" y="4937760"/>
+            <a:ext cx="640080" cy="548640"/>
+          </a:xfrm>
+          <a:prstGeom prst="rect">
+            <a:avLst/>
+          </a:prstGeom>
+          <a:noFill/>
+        </p:spPr>
+        <p:txBody>
+          <a:bodyPr wrap="square">
+            <a:spAutoFit/>
+          </a:bodyPr>
+          <a:lstStyle/>
+          <a:p>
+            <a:pPr algn="ctr"/>
+            <a:r>
+              <a:rPr sz="2200" b="1" i="0">
+                <a:solidFill>
+                  <a:srgbClr val="FFFFFF"/>
+                </a:solidFill>
+                <a:latin typeface="Montserrat"/>
+              </a:rPr>
+              <a:t>D</a:t>
+            </a:r>
+          </a:p>
+        </p:txBody>
+      </p:sp>
+      <p:sp>
+        <p:nvSpPr>
+          <p:cNvPr id="23" name="TextBox 22"/>
+          <p:cNvSpPr txBox="1"/>
+          <p:nvPr/>
+        </p:nvSpPr>
+        <p:spPr>
+          <a:xfrm>
+            <a:off x="7132320" y="4800600"/>
+            <a:ext cx="4114800" cy="868680"/>
+          </a:xfrm>
+          <a:prstGeom prst="rect">
+            <a:avLst/>
+          </a:prstGeom>
+          <a:noFill/>
+        </p:spPr>
+        <p:txBody>
+          <a:bodyPr wrap="square">
+            <a:spAutoFit/>
+          </a:bodyPr>
+          <a:lstStyle/>
+          <a:p>
+            <a:r>
+              <a:rPr sz="1400" b="0" i="0">
+                <a:solidFill>
+                  <a:srgbClr val="1B2330"/>
+                </a:solidFill>
+                <a:latin typeface="Montserrat"/>
+              </a:rPr>
+              <a:t>Cualquiera de los tres</a:t>
+            </a:r>
+          </a:p>
+        </p:txBody>
+      </p:sp>
+    </p:spTree>
+  </p:cSld>
+  <p:clrMapOvr>
+    <a:masterClrMapping/>
+  </p:clrMapOvr>
+  <mc:AlternateContent xmlns:mc="http://schemas.openxmlformats.org/markup-compatibility/2006">
+    <mc:Choice xmlns:p14="http://schemas.microsoft.com/office/powerpoint/2010/main" Requires="p14">
+      <p:transition spd="med" p14:dur="700">
+        <p14:cube dir="r"/>
+      </p:transition>
+    </mc:Choice>
+    <mc:Fallback>
+      <p:transition spd="med">
+        <p:push dir="r"/>
+      </p:transition>
+    </mc:Fallback>
+  </mc:AlternateContent>
+</p:sld>
+</file>
+
+<file path=ppt/slides/slide23.xml><?xml version="1.0" encoding="utf-8"?>
+<p:sld xmlns:a="http://schemas.openxmlformats.org/drawingml/2006/main" xmlns:p="http://schemas.openxmlformats.org/presentationml/2006/main" xmlns:r="http://schemas.openxmlformats.org/officeDocument/2006/relationships">
+  <p:cSld>
+    <p:spTree>
+      <p:nvGrpSpPr>
+        <p:cNvPr id="1" name=""/>
+        <p:cNvGrpSpPr/>
+        <p:nvPr/>
+      </p:nvGrpSpPr>
+      <p:grpSpPr/>
+      <p:sp>
+        <p:nvSpPr>
+          <p:cNvPr id="2" name="Rectangle 1"/>
+          <p:cNvSpPr/>
+          <p:nvPr/>
+        </p:nvSpPr>
+        <p:spPr>
+          <a:xfrm>
+            <a:off x="0" y="0"/>
+            <a:ext cx="12191695" cy="6858000"/>
+          </a:xfrm>
+          <a:prstGeom prst="rect">
+            <a:avLst/>
+          </a:prstGeom>
+          <a:solidFill>
+            <a:srgbClr val="FFFFFF"/>
+          </a:solidFill>
+          <a:ln>
+            <a:noFill/>
+          </a:ln>
+          <a:effectLst/>
+        </p:spPr>
+        <p:style>
+          <a:lnRef idx="1">
+            <a:schemeClr val="accent1"/>
+          </a:lnRef>
+          <a:fillRef idx="3">
+            <a:schemeClr val="accent1"/>
+          </a:fillRef>
+          <a:effectRef idx="2">
+            <a:schemeClr val="accent1"/>
+          </a:effectRef>
+          <a:fontRef idx="minor">
+            <a:schemeClr val="lt1"/>
+          </a:fontRef>
+        </p:style>
+        <p:txBody>
+          <a:bodyPr rtlCol="0" anchor="ctr"/>
+          <a:lstStyle/>
+          <a:p>
+            <a:pPr algn="ctr"/>
+          </a:p>
+        </p:txBody>
+      </p:sp>
+      <p:sp>
+        <p:nvSpPr>
+          <p:cNvPr id="3" name="TextBox 2"/>
+          <p:cNvSpPr txBox="1"/>
+          <p:nvPr/>
+        </p:nvSpPr>
+        <p:spPr>
+          <a:xfrm>
+            <a:off x="10607040" y="320040"/>
+            <a:ext cx="1371600" cy="365760"/>
+          </a:xfrm>
+          <a:prstGeom prst="rect">
+            <a:avLst/>
+          </a:prstGeom>
+          <a:noFill/>
+        </p:spPr>
+        <p:txBody>
+          <a:bodyPr wrap="square">
+            <a:spAutoFit/>
+          </a:bodyPr>
+          <a:lstStyle/>
+          <a:p>
+            <a:pPr algn="r"/>
+            <a:r>
+              <a:rPr sz="1000" b="1" i="0">
+                <a:solidFill>
+                  <a:srgbClr val="64748B"/>
+                </a:solidFill>
+                <a:latin typeface="Montserrat"/>
+              </a:rPr>
+              <a:t>023 / 024</a:t>
+            </a:r>
+          </a:p>
+        </p:txBody>
+      </p:sp>
+      <p:sp>
+        <p:nvSpPr>
+          <p:cNvPr id="4" name="TextBox 3"/>
+          <p:cNvSpPr txBox="1"/>
+          <p:nvPr/>
+        </p:nvSpPr>
+        <p:spPr>
+          <a:xfrm>
+            <a:off x="457200" y="6419088"/>
+            <a:ext cx="8229600" cy="365760"/>
+          </a:xfrm>
+          <a:prstGeom prst="rect">
+            <a:avLst/>
+          </a:prstGeom>
+          <a:noFill/>
+        </p:spPr>
+        <p:txBody>
+          <a:bodyPr wrap="square">
+            <a:spAutoFit/>
+          </a:bodyPr>
+          <a:lstStyle/>
+          <a:p>
+            <a:r>
+              <a:rPr sz="900" b="0" i="0">
+                <a:solidFill>
+                  <a:srgbClr val="64748B"/>
+                </a:solidFill>
+                <a:latin typeface="Montserrat"/>
+              </a:rPr>
+              <a:t>Curso Gas B · Tema 13 · UNE 60670-6</a:t>
+            </a:r>
+          </a:p>
+        </p:txBody>
+      </p:sp>
+      <p:sp>
+        <p:nvSpPr>
+          <p:cNvPr id="5" name="Rectangle 4"/>
+          <p:cNvSpPr/>
+          <p:nvPr/>
+        </p:nvSpPr>
+        <p:spPr>
+          <a:xfrm>
+            <a:off x="0" y="0"/>
+            <a:ext cx="12191695" cy="1143000"/>
+          </a:xfrm>
+          <a:prstGeom prst="rect">
+            <a:avLst/>
+          </a:prstGeom>
+          <a:solidFill>
+            <a:srgbClr val="1E8E4B"/>
+          </a:solidFill>
+          <a:ln>
+            <a:noFill/>
+          </a:ln>
+          <a:effectLst/>
+        </p:spPr>
+        <p:style>
+          <a:lnRef idx="1">
+            <a:schemeClr val="accent1"/>
+          </a:lnRef>
+          <a:fillRef idx="3">
+            <a:schemeClr val="accent1"/>
+          </a:fillRef>
+          <a:effectRef idx="2">
+            <a:schemeClr val="accent1"/>
+          </a:effectRef>
+          <a:fontRef idx="minor">
+            <a:schemeClr val="lt1"/>
+          </a:fontRef>
+        </p:style>
+        <p:txBody>
+          <a:bodyPr rtlCol="0" anchor="ctr"/>
+          <a:lstStyle/>
+          <a:p>
+            <a:pPr algn="ctr"/>
+          </a:p>
+        </p:txBody>
+      </p:sp>
+      <p:sp>
+        <p:nvSpPr>
+          <p:cNvPr id="6" name="TextBox 5"/>
+          <p:cNvSpPr txBox="1"/>
+          <p:nvPr/>
+        </p:nvSpPr>
+        <p:spPr>
+          <a:xfrm>
+            <a:off x="822960" y="274320"/>
+            <a:ext cx="10515600" cy="640080"/>
+          </a:xfrm>
+          <a:prstGeom prst="rect">
+            <a:avLst/>
+          </a:prstGeom>
+          <a:noFill/>
+        </p:spPr>
+        <p:txBody>
+          <a:bodyPr wrap="square">
+            <a:spAutoFit/>
+          </a:bodyPr>
+          <a:lstStyle/>
+          <a:p>
+            <a:r>
+              <a:rPr sz="2400" b="1" i="0">
+                <a:solidFill>
+                  <a:srgbClr val="FFFFFF"/>
+                </a:solidFill>
+                <a:latin typeface="Montserrat"/>
+              </a:rPr>
+              <a:t>✔  RESPUESTA:  C</a:t>
+            </a:r>
+          </a:p>
+        </p:txBody>
+      </p:sp>
+      <p:sp>
+        <p:nvSpPr>
+          <p:cNvPr id="7" name="TextBox 6"/>
+          <p:cNvSpPr txBox="1"/>
+          <p:nvPr/>
+        </p:nvSpPr>
+        <p:spPr>
+          <a:xfrm>
+            <a:off x="822960" y="1417320"/>
+            <a:ext cx="10515600" cy="914400"/>
+          </a:xfrm>
+          <a:prstGeom prst="rect">
+            <a:avLst/>
+          </a:prstGeom>
+          <a:noFill/>
+        </p:spPr>
+        <p:txBody>
+          <a:bodyPr wrap="square">
+            <a:spAutoFit/>
+          </a:bodyPr>
+          <a:lstStyle/>
+          <a:p>
+            <a:r>
+              <a:rPr sz="1800" b="1" i="0">
+                <a:solidFill>
+                  <a:srgbClr val="64748B"/>
+                </a:solidFill>
+                <a:latin typeface="Montserrat"/>
+              </a:rPr>
+              <a:t>¿Qué tipo de aparato se puede instalar en un dormitorio?</a:t>
+            </a:r>
+          </a:p>
+        </p:txBody>
+      </p:sp>
+      <p:sp>
+        <p:nvSpPr>
+          <p:cNvPr id="8" name="Rounded Rectangle 7"/>
+          <p:cNvSpPr/>
+          <p:nvPr/>
+        </p:nvSpPr>
+        <p:spPr>
+          <a:xfrm>
+            <a:off x="822960" y="2514600"/>
+            <a:ext cx="10515600" cy="914400"/>
+          </a:xfrm>
+          <a:prstGeom prst="roundRect">
+            <a:avLst/>
+          </a:prstGeom>
+          <a:solidFill>
+            <a:srgbClr val="E9F6EE"/>
+          </a:solidFill>
+          <a:ln w="12700">
+            <a:solidFill>
+              <a:srgbClr val="1E8E4B"/>
+            </a:solidFill>
+          </a:ln>
+          <a:effectLst/>
+        </p:spPr>
+        <p:style>
+          <a:lnRef idx="1">
+            <a:schemeClr val="accent1"/>
+          </a:lnRef>
+          <a:fillRef idx="3">
+            <a:schemeClr val="accent1"/>
+          </a:fillRef>
+          <a:effectRef idx="2">
+            <a:schemeClr val="accent1"/>
+          </a:effectRef>
+          <a:fontRef idx="minor">
+            <a:schemeClr val="lt1"/>
+          </a:fontRef>
+        </p:style>
+        <p:txBody>
+          <a:bodyPr rtlCol="0" anchor="ctr"/>
+          <a:lstStyle/>
+          <a:p>
+            <a:pPr algn="ctr"/>
+          </a:p>
+        </p:txBody>
+      </p:sp>
+      <p:sp>
+        <p:nvSpPr>
+          <p:cNvPr id="9" name="TextBox 8"/>
+          <p:cNvSpPr txBox="1"/>
+          <p:nvPr/>
+        </p:nvSpPr>
+        <p:spPr>
+          <a:xfrm>
+            <a:off x="1097280" y="2697480"/>
+            <a:ext cx="10058400" cy="640080"/>
+          </a:xfrm>
+          <a:prstGeom prst="rect">
+            <a:avLst/>
+          </a:prstGeom>
+          <a:noFill/>
+        </p:spPr>
+        <p:txBody>
+          <a:bodyPr wrap="square">
+            <a:spAutoFit/>
+          </a:bodyPr>
+          <a:lstStyle/>
+          <a:p>
+            <a:r>
+              <a:rPr sz="1800" b="1" i="0">
+                <a:solidFill>
+                  <a:srgbClr val="1E8E4B"/>
+                </a:solidFill>
+                <a:latin typeface="Montserrat"/>
+              </a:rPr>
+              <a:t>C.  </a:t>
+            </a:r>
+            <a:r>
+              <a:rPr sz="1800" b="1" i="0">
+                <a:solidFill>
+                  <a:srgbClr val="1E2761"/>
+                </a:solidFill>
+                <a:latin typeface="Montserrat"/>
+              </a:rPr>
+              <a:t>Solo el tipo C</a:t>
+            </a:r>
+          </a:p>
+        </p:txBody>
+      </p:sp>
+      <p:sp>
+        <p:nvSpPr>
+          <p:cNvPr id="10" name="TextBox 9"/>
+          <p:cNvSpPr txBox="1"/>
+          <p:nvPr/>
+        </p:nvSpPr>
+        <p:spPr>
+          <a:xfrm>
+            <a:off x="822960" y="3749039"/>
+            <a:ext cx="10515600" cy="2194560"/>
+          </a:xfrm>
+          <a:prstGeom prst="rect">
+            <a:avLst/>
+          </a:prstGeom>
+          <a:noFill/>
+        </p:spPr>
+        <p:txBody>
+          <a:bodyPr wrap="square">
+            <a:spAutoFit/>
+          </a:bodyPr>
+          <a:lstStyle/>
+          <a:p>
+            <a:r>
+              <a:rPr sz="1500" b="1" i="0">
+                <a:solidFill>
+                  <a:srgbClr val="E8801A"/>
+                </a:solidFill>
+                <a:latin typeface="Montserrat"/>
+              </a:rPr>
+              <a:t>Por qué:  </a:t>
+            </a:r>
+            <a:r>
+              <a:rPr sz="1500" b="0" i="0">
+                <a:solidFill>
+                  <a:srgbClr val="1B2330"/>
+                </a:solidFill>
+                <a:latin typeface="Montserrat"/>
+              </a:rPr>
+              <a:t>El tipo C es estanco: no coge aire del local ni suelta humos dentro, por eso es el único admitido en dormitorios y baños, cumpliendo el REBT de locales húmedos.</a:t>
+            </a:r>
+          </a:p>
+        </p:txBody>
+      </p:sp>
+    </p:spTree>
+  </p:cSld>
+  <p:clrMapOvr>
+    <a:masterClrMapping/>
+  </p:clrMapOvr>
+  <mc:AlternateContent xmlns:mc="http://schemas.openxmlformats.org/markup-compatibility/2006">
+    <mc:Choice xmlns:p14="http://schemas.microsoft.com/office/powerpoint/2010/main" Requires="p14">
+      <p:transition spd="med" p14:dur="700">
+        <p14:cube dir="l"/>
+      </p:transition>
+    </mc:Choice>
+    <mc:Fallback>
+      <p:transition spd="med">
+        <p:push dir="l"/>
+      </p:transition>
+    </mc:Fallback>
+  </mc:AlternateContent>
+</p:sld>
+</file>
+
+<file path=ppt/slides/slide24.xml><?xml version="1.0" encoding="utf-8"?>
+<p:sld xmlns:a="http://schemas.openxmlformats.org/drawingml/2006/main" xmlns:p="http://schemas.openxmlformats.org/presentationml/2006/main" xmlns:r="http://schemas.openxmlformats.org/officeDocument/2006/relationships">
+  <p:cSld>
+    <p:spTree>
+      <p:nvGrpSpPr>
+        <p:cNvPr id="1" name=""/>
+        <p:cNvGrpSpPr/>
+        <p:nvPr/>
+      </p:nvGrpSpPr>
+      <p:grpSpPr/>
+      <p:sp>
+        <p:nvSpPr>
+          <p:cNvPr id="2" name="Rectangle 1"/>
+          <p:cNvSpPr/>
+          <p:nvPr/>
+        </p:nvSpPr>
+        <p:spPr>
+          <a:xfrm>
+            <a:off x="0" y="0"/>
+            <a:ext cx="12191695" cy="6858000"/>
+          </a:xfrm>
+          <a:prstGeom prst="rect">
+            <a:avLst/>
+          </a:prstGeom>
+          <a:solidFill>
+            <a:srgbClr val="1E2761"/>
+          </a:solidFill>
+          <a:ln>
+            <a:noFill/>
+          </a:ln>
+          <a:effectLst/>
+        </p:spPr>
+        <p:style>
+          <a:lnRef idx="1">
+            <a:schemeClr val="accent1"/>
+          </a:lnRef>
+          <a:fillRef idx="3">
+            <a:schemeClr val="accent1"/>
+          </a:fillRef>
+          <a:effectRef idx="2">
+            <a:schemeClr val="accent1"/>
+          </a:effectRef>
+          <a:fontRef idx="minor">
+            <a:schemeClr val="lt1"/>
+          </a:fontRef>
+        </p:style>
+        <p:txBody>
+          <a:bodyPr rtlCol="0" anchor="ctr"/>
+          <a:lstStyle/>
+          <a:p>
+            <a:pPr algn="ctr"/>
+          </a:p>
+        </p:txBody>
+      </p:sp>
+      <p:sp>
+        <p:nvSpPr>
+          <p:cNvPr id="3" name="TextBox 2"/>
+          <p:cNvSpPr txBox="1"/>
+          <p:nvPr/>
+        </p:nvSpPr>
+        <p:spPr>
+          <a:xfrm>
+            <a:off x="822960" y="640080"/>
+            <a:ext cx="10515600" cy="457200"/>
+          </a:xfrm>
+          <a:prstGeom prst="rect">
+            <a:avLst/>
+          </a:prstGeom>
+          <a:noFill/>
+        </p:spPr>
+        <p:txBody>
+          <a:bodyPr wrap="square">
+            <a:spAutoFit/>
+          </a:bodyPr>
+          <a:lstStyle/>
+          <a:p>
+            <a:r>
+              <a:rPr sz="1400" b="1" i="0">
+                <a:solidFill>
+                  <a:srgbClr val="F4A24C"/>
+                </a:solidFill>
+                <a:latin typeface="Montserrat"/>
+              </a:rPr>
+              <a:t>LO QUE YA DOMINAS</a:t>
+            </a:r>
+          </a:p>
+        </p:txBody>
+      </p:sp>
+      <p:sp>
+        <p:nvSpPr>
+          <p:cNvPr id="4" name="Rectangle 3"/>
+          <p:cNvSpPr/>
+          <p:nvPr/>
+        </p:nvSpPr>
+        <p:spPr>
+          <a:xfrm>
+            <a:off x="868680" y="1051560"/>
+            <a:ext cx="1463040" cy="82296"/>
+          </a:xfrm>
+          <a:prstGeom prst="rect">
+            <a:avLst/>
+          </a:prstGeom>
+          <a:solidFill>
+            <a:srgbClr val="E8801A"/>
+          </a:solidFill>
+          <a:ln>
+            <a:noFill/>
+          </a:ln>
+          <a:effectLst/>
+        </p:spPr>
+        <p:style>
+          <a:lnRef idx="1">
+            <a:schemeClr val="accent1"/>
+          </a:lnRef>
+          <a:fillRef idx="3">
+            <a:schemeClr val="accent1"/>
+          </a:fillRef>
+          <a:effectRef idx="2">
+            <a:schemeClr val="accent1"/>
+          </a:effectRef>
+          <a:fontRef idx="minor">
+            <a:schemeClr val="lt1"/>
+          </a:fontRef>
+        </p:style>
+        <p:txBody>
+          <a:bodyPr rtlCol="0" anchor="ctr"/>
+          <a:lstStyle/>
+          <a:p>
+            <a:pPr algn="ctr"/>
+          </a:p>
+        </p:txBody>
+      </p:sp>
+      <p:sp>
+        <p:nvSpPr>
+          <p:cNvPr id="5" name="TextBox 4"/>
+          <p:cNvSpPr txBox="1"/>
+          <p:nvPr/>
+        </p:nvSpPr>
+        <p:spPr>
+          <a:xfrm>
+            <a:off x="822960" y="1234440"/>
+            <a:ext cx="10515600" cy="1097280"/>
+          </a:xfrm>
+          <a:prstGeom prst="rect">
+            <a:avLst/>
+          </a:prstGeom>
+          <a:noFill/>
+        </p:spPr>
+        <p:txBody>
+          <a:bodyPr wrap="square">
+            <a:spAutoFit/>
+          </a:bodyPr>
+          <a:lstStyle/>
+          <a:p>
+            <a:r>
+              <a:rPr sz="3400" b="1" i="0">
+                <a:solidFill>
+                  <a:srgbClr val="FFFFFF"/>
+                </a:solidFill>
+                <a:latin typeface="Montserrat"/>
+              </a:rPr>
+              <a:t>Ya clasificas cualquier aparato de gas</a:t>
+            </a:r>
+          </a:p>
+        </p:txBody>
+      </p:sp>
+      <p:sp>
+        <p:nvSpPr>
+          <p:cNvPr id="6" name="TextBox 5"/>
+          <p:cNvSpPr txBox="1"/>
+          <p:nvPr/>
+        </p:nvSpPr>
+        <p:spPr>
+          <a:xfrm>
+            <a:off x="822960" y="2606040"/>
+            <a:ext cx="10515600" cy="2743200"/>
+          </a:xfrm>
+          <a:prstGeom prst="rect">
+            <a:avLst/>
+          </a:prstGeom>
+          <a:noFill/>
+        </p:spPr>
+        <p:txBody>
+          <a:bodyPr wrap="square">
+            <a:spAutoFit/>
+          </a:bodyPr>
+          <a:lstStyle/>
+          <a:p>
+            <a:pPr>
+              <a:spcAft>
+                <a:spcPts val="1200"/>
+              </a:spcAft>
+            </a:pPr>
+            <a:r>
+              <a:rPr sz="2000" b="1" i="0">
+                <a:solidFill>
+                  <a:srgbClr val="F4A24C"/>
+                </a:solidFill>
+                <a:latin typeface="Montserrat"/>
+              </a:rPr>
+              <a:t>✓  </a:t>
+            </a:r>
+            <a:r>
+              <a:rPr sz="1900" b="0" i="0">
+                <a:solidFill>
+                  <a:srgbClr val="FFFFFF"/>
+                </a:solidFill>
+                <a:latin typeface="Montserrat"/>
+              </a:rPr>
+              <a:t>A se lo queda, B tira humos, C ni te toca el aire</a:t>
+            </a:r>
+          </a:p>
+          <a:p>
+            <a:pPr>
+              <a:spcAft>
+                <a:spcPts val="1200"/>
+              </a:spcAft>
+            </a:pPr>
+            <a:r>
+              <a:rPr sz="2000" b="1" i="0">
+                <a:solidFill>
+                  <a:srgbClr val="F4A24C"/>
+                </a:solidFill>
+                <a:latin typeface="Montserrat"/>
+              </a:rPr>
+              <a:t>✓  </a:t>
+            </a:r>
+            <a:r>
+              <a:rPr sz="1900" b="0" i="0">
+                <a:solidFill>
+                  <a:srgbClr val="FFFFFF"/>
+                </a:solidFill>
+                <a:latin typeface="Montserrat"/>
+              </a:rPr>
+              <a:t>A y B fuera de dormitorio y baño; C entra</a:t>
+            </a:r>
+          </a:p>
+          <a:p>
+            <a:pPr>
+              <a:spcAft>
+                <a:spcPts val="1200"/>
+              </a:spcAft>
+            </a:pPr>
+            <a:r>
+              <a:rPr sz="2000" b="1" i="0">
+                <a:solidFill>
+                  <a:srgbClr val="F4A24C"/>
+                </a:solidFill>
+                <a:latin typeface="Montserrat"/>
+              </a:rPr>
+              <a:t>✓  </a:t>
+            </a:r>
+            <a:r>
+              <a:rPr sz="1900" b="0" i="0">
+                <a:solidFill>
+                  <a:srgbClr val="FFFFFF"/>
+                </a:solidFill>
+                <a:latin typeface="Montserrat"/>
+              </a:rPr>
+              <a:t>Semisótano: GLP nunca, gas natural hasta 4 m</a:t>
+            </a:r>
+          </a:p>
+          <a:p>
+            <a:pPr>
+              <a:spcAft>
+                <a:spcPts val="1200"/>
+              </a:spcAft>
+            </a:pPr>
+            <a:r>
+              <a:rPr sz="2000" b="1" i="0">
+                <a:solidFill>
+                  <a:srgbClr val="F4A24C"/>
+                </a:solidFill>
+                <a:latin typeface="Montserrat"/>
+              </a:rPr>
+              <a:t>✓  </a:t>
+            </a:r>
+            <a:r>
+              <a:rPr sz="1900" b="0" i="0">
+                <a:solidFill>
+                  <a:srgbClr val="FFFFFF"/>
+                </a:solidFill>
+                <a:latin typeface="Montserrat"/>
+              </a:rPr>
+              <a:t>70 kW: la puerta a la sala de máquinas</a:t>
+            </a:r>
+          </a:p>
+        </p:txBody>
+      </p:sp>
+      <p:sp>
+        <p:nvSpPr>
+          <p:cNvPr id="7" name="Rounded Rectangle 6"/>
+          <p:cNvSpPr/>
+          <p:nvPr/>
+        </p:nvSpPr>
+        <p:spPr>
+          <a:xfrm>
+            <a:off x="822960" y="5532120"/>
+            <a:ext cx="10515600" cy="822960"/>
+          </a:xfrm>
+          <a:prstGeom prst="roundRect">
+            <a:avLst/>
+          </a:prstGeom>
+          <a:solidFill>
+            <a:srgbClr val="E8801A"/>
+          </a:solidFill>
+          <a:ln>
+            <a:noFill/>
+          </a:ln>
+          <a:effectLst/>
+        </p:spPr>
+        <p:style>
+          <a:lnRef idx="1">
+            <a:schemeClr val="accent1"/>
+          </a:lnRef>
+          <a:fillRef idx="3">
+            <a:schemeClr val="accent1"/>
+          </a:fillRef>
+          <a:effectRef idx="2">
+            <a:schemeClr val="accent1"/>
+          </a:effectRef>
+          <a:fontRef idx="minor">
+            <a:schemeClr val="lt1"/>
+          </a:fontRef>
+        </p:style>
+        <p:txBody>
+          <a:bodyPr rtlCol="0" anchor="ctr"/>
+          <a:lstStyle/>
+          <a:p>
+            <a:pPr algn="ctr"/>
+          </a:p>
+        </p:txBody>
+      </p:sp>
+      <p:sp>
+        <p:nvSpPr>
+          <p:cNvPr id="8" name="TextBox 7"/>
+          <p:cNvSpPr txBox="1"/>
+          <p:nvPr/>
+        </p:nvSpPr>
+        <p:spPr>
+          <a:xfrm>
+            <a:off x="1051560" y="5623560"/>
+            <a:ext cx="10058400" cy="640080"/>
+          </a:xfrm>
+          <a:prstGeom prst="rect">
+            <a:avLst/>
+          </a:prstGeom>
+          <a:noFill/>
+        </p:spPr>
+        <p:txBody>
+          <a:bodyPr wrap="square">
+            <a:spAutoFit/>
+          </a:bodyPr>
+          <a:lstStyle/>
+          <a:p>
+            <a:r>
+              <a:rPr sz="1500" b="1" i="1">
+                <a:solidFill>
+                  <a:srgbClr val="1E2761"/>
+                </a:solidFill>
+                <a:latin typeface="Montserrat"/>
+              </a:rPr>
+              <a:t>Con el aparato bien clasificado, la ventilación y los humos caen solos. Vamos al vídeo 2.</a:t>
+            </a:r>
+          </a:p>
+        </p:txBody>
+      </p:sp>
+    </p:spTree>
+  </p:cSld>
+  <p:clrMapOvr>
+    <a:masterClrMapping/>
+  </p:clrMapOvr>
+  <mc:AlternateContent xmlns:mc="http://schemas.openxmlformats.org/markup-compatibility/2006">
+    <mc:Choice xmlns:p14="http://schemas.microsoft.com/office/powerpoint/2010/main" Requires="p14">
+      <p:transition spd="med" p14:dur="700">
+        <p14:cube dir="r"/>
+      </p:transition>
+    </mc:Choice>
+    <mc:Fallback>
+      <p:transition spd="med">
+        <p:push dir="r"/>
+      </p:transition>
+    </mc:Fallback>
+  </mc:AlternateContent>
 </p:sld>
 </file>
 
@@ -10013,7 +13671,7 @@
                 </a:solidFill>
                 <a:latin typeface="Montserrat"/>
               </a:rPr>
-              <a:t>003 / 019</a:t>
+              <a:t>003 / 024</a:t>
             </a:r>
           </a:p>
         </p:txBody>
@@ -10122,7 +13780,7 @@
       </p:sp>
       <p:sp>
         <p:nvSpPr>
-          <p:cNvPr id="7" name="Rounded Rectangle 6"/>
+          <p:cNvPr id="7" name="Rectangle 6"/>
           <p:cNvSpPr/>
           <p:nvPr/>
         </p:nvSpPr>
@@ -10131,7 +13789,7 @@
             <a:off x="868680" y="1673352"/>
             <a:ext cx="2011680" cy="73152"/>
           </a:xfrm>
-          <a:prstGeom prst="roundRect">
+          <a:prstGeom prst="rect">
             <a:avLst/>
           </a:prstGeom>
           <a:solidFill>
@@ -10417,6 +14075,18 @@
   <p:clrMapOvr>
     <a:masterClrMapping/>
   </p:clrMapOvr>
+  <mc:AlternateContent xmlns:mc="http://schemas.openxmlformats.org/markup-compatibility/2006">
+    <mc:Choice xmlns:p14="http://schemas.microsoft.com/office/powerpoint/2010/main" Requires="p14">
+      <p:transition spd="med" p14:dur="700">
+        <p14:cube dir="l"/>
+      </p:transition>
+    </mc:Choice>
+    <mc:Fallback>
+      <p:transition spd="med">
+        <p:push dir="l"/>
+      </p:transition>
+    </mc:Fallback>
+  </mc:AlternateContent>
 </p:sld>
 </file>
 
@@ -10504,7 +14174,7 @@
                 </a:solidFill>
                 <a:latin typeface="Montserrat"/>
               </a:rPr>
-              <a:t>004 / 019</a:t>
+              <a:t>004 / 024</a:t>
             </a:r>
           </a:p>
         </p:txBody>
@@ -10613,7 +14283,7 @@
       </p:sp>
       <p:sp>
         <p:nvSpPr>
-          <p:cNvPr id="7" name="Rounded Rectangle 6"/>
+          <p:cNvPr id="7" name="Rectangle 6"/>
           <p:cNvSpPr/>
           <p:nvPr/>
         </p:nvSpPr>
@@ -10622,7 +14292,7 @@
             <a:off x="868680" y="1627632"/>
             <a:ext cx="2011680" cy="73152"/>
           </a:xfrm>
-          <a:prstGeom prst="roundRect">
+          <a:prstGeom prst="rect">
             <a:avLst/>
           </a:prstGeom>
           <a:solidFill>
@@ -10664,7 +14334,7 @@
         <p:spPr>
           <a:xfrm>
             <a:off x="822960" y="1965960"/>
-            <a:ext cx="4983480" cy="4206240"/>
+            <a:ext cx="5029200" cy="4206240"/>
           </a:xfrm>
           <a:prstGeom prst="rect">
             <a:avLst/>
@@ -10761,8 +14431,8 @@
         </p:nvSpPr>
         <p:spPr>
           <a:xfrm>
-            <a:off x="5806440" y="1051560"/>
-            <a:ext cx="5298947" cy="4629150"/>
+            <a:off x="6080760" y="1965960"/>
+            <a:ext cx="5303520" cy="4572000"/>
           </a:xfrm>
           <a:prstGeom prst="roundRect">
             <a:avLst/>
@@ -10807,8 +14477,8 @@
         </p:nvSpPr>
         <p:spPr>
           <a:xfrm>
-            <a:off x="6080760" y="2726055"/>
-            <a:ext cx="4750307" cy="1280160"/>
+            <a:off x="6355080" y="3611880"/>
+            <a:ext cx="4754880" cy="1280160"/>
           </a:xfrm>
           <a:prstGeom prst="rect">
             <a:avLst/>
@@ -10829,7 +14499,7 @@
                 </a:solidFill>
                 <a:latin typeface="Montserrat"/>
               </a:rPr>
-              <a:t>IMAGEN REALISTA</a:t>
+              <a:t>IMAGEN</a:t>
             </a:r>
           </a:p>
           <a:p>
@@ -10851,6 +14521,18 @@
   <p:clrMapOvr>
     <a:masterClrMapping/>
   </p:clrMapOvr>
+  <mc:AlternateContent xmlns:mc="http://schemas.openxmlformats.org/markup-compatibility/2006">
+    <mc:Choice xmlns:p14="http://schemas.microsoft.com/office/powerpoint/2010/main" Requires="p14">
+      <p:transition spd="med" p14:dur="700">
+        <p14:cube dir="r"/>
+      </p:transition>
+    </mc:Choice>
+    <mc:Fallback>
+      <p:transition spd="med">
+        <p:push dir="r"/>
+      </p:transition>
+    </mc:Fallback>
+  </mc:AlternateContent>
 </p:sld>
 </file>
 
@@ -10938,7 +14620,7 @@
                 </a:solidFill>
                 <a:latin typeface="Montserrat"/>
               </a:rPr>
-              <a:t>005 / 019</a:t>
+              <a:t>005 / 024</a:t>
             </a:r>
           </a:p>
         </p:txBody>
@@ -11047,7 +14729,7 @@
       </p:sp>
       <p:sp>
         <p:nvSpPr>
-          <p:cNvPr id="7" name="Rounded Rectangle 6"/>
+          <p:cNvPr id="7" name="Rectangle 6"/>
           <p:cNvSpPr/>
           <p:nvPr/>
         </p:nvSpPr>
@@ -11056,7 +14738,7 @@
             <a:off x="868680" y="1627632"/>
             <a:ext cx="2011680" cy="73152"/>
           </a:xfrm>
-          <a:prstGeom prst="roundRect">
+          <a:prstGeom prst="rect">
             <a:avLst/>
           </a:prstGeom>
           <a:solidFill>
@@ -11097,8 +14779,8 @@
         </p:nvSpPr>
         <p:spPr>
           <a:xfrm>
-            <a:off x="822960" y="1965960"/>
-            <a:ext cx="4983480" cy="4206240"/>
+            <a:off x="6355080" y="1965960"/>
+            <a:ext cx="5029200" cy="4206240"/>
           </a:xfrm>
           <a:prstGeom prst="rect">
             <a:avLst/>
@@ -11195,8 +14877,8 @@
         </p:nvSpPr>
         <p:spPr>
           <a:xfrm>
-            <a:off x="5806440" y="1051560"/>
-            <a:ext cx="5298947" cy="4629150"/>
+            <a:off x="822960" y="1965960"/>
+            <a:ext cx="5303520" cy="4572000"/>
           </a:xfrm>
           <a:prstGeom prst="roundRect">
             <a:avLst/>
@@ -11241,8 +14923,8 @@
         </p:nvSpPr>
         <p:spPr>
           <a:xfrm>
-            <a:off x="6080760" y="2726055"/>
-            <a:ext cx="4750307" cy="1280160"/>
+            <a:off x="1097280" y="3611880"/>
+            <a:ext cx="4754880" cy="1280160"/>
           </a:xfrm>
           <a:prstGeom prst="rect">
             <a:avLst/>
@@ -11263,7 +14945,7 @@
                 </a:solidFill>
                 <a:latin typeface="Montserrat"/>
               </a:rPr>
-              <a:t>IMAGEN REALISTA</a:t>
+              <a:t>IMAGEN</a:t>
             </a:r>
           </a:p>
           <a:p>
@@ -11285,6 +14967,18 @@
   <p:clrMapOvr>
     <a:masterClrMapping/>
   </p:clrMapOvr>
+  <mc:AlternateContent xmlns:mc="http://schemas.openxmlformats.org/markup-compatibility/2006">
+    <mc:Choice xmlns:p14="http://schemas.microsoft.com/office/powerpoint/2010/main" Requires="p14">
+      <p:transition spd="med" p14:dur="700">
+        <p14:cube dir="l"/>
+      </p:transition>
+    </mc:Choice>
+    <mc:Fallback>
+      <p:transition spd="med">
+        <p:push dir="l"/>
+      </p:transition>
+    </mc:Fallback>
+  </mc:AlternateContent>
 </p:sld>
 </file>
 
@@ -11372,7 +15066,7 @@
                 </a:solidFill>
                 <a:latin typeface="Montserrat"/>
               </a:rPr>
-              <a:t>006 / 019</a:t>
+              <a:t>006 / 024</a:t>
             </a:r>
           </a:p>
         </p:txBody>
@@ -11419,7 +15113,7 @@
         </p:nvSpPr>
         <p:spPr>
           <a:xfrm>
-            <a:off x="822960" y="457200"/>
+            <a:off x="822960" y="411480"/>
             <a:ext cx="10058400" cy="365760"/>
           </a:xfrm>
           <a:prstGeom prst="rect">
@@ -11440,7 +15134,7 @@
                 </a:solidFill>
                 <a:latin typeface="Montserrat"/>
               </a:rPr>
-              <a:t>NOVEDADES</a:t>
+              <a:t>TRECE PARTES</a:t>
             </a:r>
           </a:p>
         </p:txBody>
@@ -11453,8 +15147,8 @@
         </p:nvSpPr>
         <p:spPr>
           <a:xfrm>
-            <a:off x="822960" y="868680"/>
-            <a:ext cx="10515600" cy="914400"/>
+            <a:off x="822960" y="777240"/>
+            <a:ext cx="10515600" cy="822960"/>
           </a:xfrm>
           <a:prstGeom prst="rect">
             <a:avLst/>
@@ -11468,29 +15162,29 @@
           <a:lstStyle/>
           <a:p>
             <a:r>
-              <a:rPr sz="2800" b="1" i="0">
+              <a:rPr sz="2600" b="1" i="0">
                 <a:solidFill>
                   <a:srgbClr val="1E2761"/>
                 </a:solidFill>
                 <a:latin typeface="Montserrat"/>
               </a:rPr>
-              <a:t>Lo nuevo que gusta en examen</a:t>
-            </a:r>
-          </a:p>
-        </p:txBody>
-      </p:sp>
-      <p:sp>
-        <p:nvSpPr>
-          <p:cNvPr id="7" name="Rounded Rectangle 6"/>
+              <a:t>Las 13 partes de la UNE 60670</a:t>
+            </a:r>
+          </a:p>
+        </p:txBody>
+      </p:sp>
+      <p:sp>
+        <p:nvSpPr>
+          <p:cNvPr id="7" name="Rectangle 6"/>
           <p:cNvSpPr/>
           <p:nvPr/>
         </p:nvSpPr>
         <p:spPr>
           <a:xfrm>
-            <a:off x="868680" y="1627632"/>
+            <a:off x="868680" y="1481328"/>
             <a:ext cx="2011680" cy="73152"/>
           </a:xfrm>
-          <a:prstGeom prst="roundRect">
+          <a:prstGeom prst="rect">
             <a:avLst/>
           </a:prstGeom>
           <a:solidFill>
@@ -11523,139 +15217,686 @@
           </a:p>
         </p:txBody>
       </p:sp>
-      <p:sp>
-        <p:nvSpPr>
-          <p:cNvPr id="8" name="TextBox 7"/>
-          <p:cNvSpPr txBox="1"/>
-          <p:nvPr/>
-        </p:nvSpPr>
-        <p:spPr>
-          <a:xfrm>
-            <a:off x="822960" y="1965960"/>
-            <a:ext cx="4983480" cy="4206240"/>
-          </a:xfrm>
-          <a:prstGeom prst="rect">
-            <a:avLst/>
-          </a:prstGeom>
-          <a:noFill/>
-        </p:spPr>
-        <p:txBody>
-          <a:bodyPr wrap="square">
-            <a:spAutoFit/>
-          </a:bodyPr>
-          <a:lstStyle/>
-          <a:p>
-            <a:pPr>
-              <a:spcAft>
-                <a:spcPts val="1100"/>
-              </a:spcAft>
-            </a:pPr>
-            <a:r>
-              <a:rPr sz="1600" b="1" i="0">
-                <a:solidFill>
-                  <a:srgbClr val="E8801A"/>
-                </a:solidFill>
-                <a:latin typeface="Montserrat"/>
-              </a:rPr>
-              <a:t>▸  </a:t>
-            </a:r>
-            <a:r>
-              <a:rPr sz="1600" b="0" i="0">
-                <a:solidFill>
-                  <a:srgbClr val="1B2330"/>
-                </a:solidFill>
-                <a:latin typeface="Montserrat"/>
-              </a:rPr>
-              <a:t>Semisótano: gas ligero hasta 4 m</a:t>
-            </a:r>
-          </a:p>
-          <a:p>
-            <a:pPr>
-              <a:spcAft>
-                <a:spcPts val="1100"/>
-              </a:spcAft>
-            </a:pPr>
-            <a:r>
-              <a:rPr sz="1600" b="1" i="0">
-                <a:solidFill>
-                  <a:srgbClr val="E8801A"/>
-                </a:solidFill>
-                <a:latin typeface="Montserrat"/>
-              </a:rPr>
-              <a:t>▸  </a:t>
-            </a:r>
-            <a:r>
-              <a:rPr sz="1600" b="0" i="0">
-                <a:solidFill>
-                  <a:srgbClr val="1B2330"/>
-                </a:solidFill>
-                <a:latin typeface="Montserrat"/>
-              </a:rPr>
-              <a:t>Cocción tipo A en loft, con condiciones</a:t>
-            </a:r>
-          </a:p>
-          <a:p>
-            <a:pPr>
-              <a:spcAft>
-                <a:spcPts val="1100"/>
-              </a:spcAft>
-            </a:pPr>
-            <a:r>
-              <a:rPr sz="1600" b="1" i="0">
-                <a:solidFill>
-                  <a:srgbClr val="E8801A"/>
-                </a:solidFill>
-                <a:latin typeface="Montserrat"/>
-              </a:rPr>
-              <a:t>▸  </a:t>
-            </a:r>
-            <a:r>
-              <a:rPr sz="1600" b="0" i="0">
-                <a:solidFill>
-                  <a:srgbClr val="1B2330"/>
-                </a:solidFill>
-                <a:latin typeface="Montserrat"/>
-              </a:rPr>
-              <a:t>Tipo B revisado por completo</a:t>
-            </a:r>
-          </a:p>
-          <a:p>
-            <a:pPr>
-              <a:spcAft>
-                <a:spcPts val="1100"/>
-              </a:spcAft>
-            </a:pPr>
-            <a:r>
-              <a:rPr sz="1600" b="1" i="0">
-                <a:solidFill>
-                  <a:srgbClr val="E8801A"/>
-                </a:solidFill>
-                <a:latin typeface="Montserrat"/>
-              </a:rPr>
-              <a:t>▸  </a:t>
-            </a:r>
-            <a:r>
-              <a:rPr sz="1600" b="0" i="0">
-                <a:solidFill>
-                  <a:srgbClr val="1B2330"/>
-                </a:solidFill>
-                <a:latin typeface="Montserrat"/>
-              </a:rPr>
-              <a:t>Ventilación cruzada industrial &gt; 70 kW</a:t>
-            </a:r>
-          </a:p>
-        </p:txBody>
-      </p:sp>
-      <p:sp>
-        <p:nvSpPr>
-          <p:cNvPr id="9" name="imgph" descr="IMGQ:modern gas boiler wall mounted"/>
+      <p:graphicFrame>
+        <p:nvGraphicFramePr>
+          <p:cNvPr id="8" name="Table 7"/>
+          <p:cNvGraphicFramePr>
+            <a:graphicFrameLocks noGrp="1"/>
+          </p:cNvGraphicFramePr>
+          <p:nvPr/>
+        </p:nvGraphicFramePr>
+        <p:xfrm>
+          <a:off x="548640" y="1783080"/>
+          <a:ext cx="11091672" cy="4023360"/>
+        </p:xfrm>
+        <a:graphic>
+          <a:graphicData uri="http://schemas.openxmlformats.org/drawingml/2006/table">
+            <a:tbl>
+              <a:tblPr firstRow="1" bandRow="1">
+                <a:tableStyleId>{5C22544A-7EE6-4342-B048-85BDC9FD1C3A}</a:tableStyleId>
+              </a:tblPr>
+              <a:tblGrid>
+                <a:gridCol w="5545836"/>
+                <a:gridCol w="5545836"/>
+              </a:tblGrid>
+              <a:tr h="287382">
+                <a:tc>
+                  <a:txBody>
+                    <a:bodyPr/>
+                    <a:lstStyle/>
+                    <a:p>
+                      <a:r>
+                        <a:rPr sz="1200" b="1" i="0">
+                          <a:solidFill>
+                            <a:srgbClr val="FFFFFF"/>
+                          </a:solidFill>
+                          <a:latin typeface="Montserrat"/>
+                        </a:rPr>
+                        <a:t>Parte</a:t>
+                      </a:r>
+                    </a:p>
+                  </a:txBody>
+                  <a:tcPr>
+                    <a:solidFill>
+                      <a:srgbClr val="1E2761"/>
+                    </a:solidFill>
+                  </a:tcPr>
+                </a:tc>
+                <a:tc>
+                  <a:txBody>
+                    <a:bodyPr/>
+                    <a:lstStyle/>
+                    <a:p>
+                      <a:r>
+                        <a:rPr sz="1200" b="1" i="0">
+                          <a:solidFill>
+                            <a:srgbClr val="FFFFFF"/>
+                          </a:solidFill>
+                          <a:latin typeface="Montserrat"/>
+                        </a:rPr>
+                        <a:t>Contenido</a:t>
+                      </a:r>
+                    </a:p>
+                  </a:txBody>
+                  <a:tcPr>
+                    <a:solidFill>
+                      <a:srgbClr val="1E2761"/>
+                    </a:solidFill>
+                  </a:tcPr>
+                </a:tc>
+              </a:tr>
+              <a:tr h="287382">
+                <a:tc>
+                  <a:txBody>
+                    <a:bodyPr/>
+                    <a:lstStyle/>
+                    <a:p>
+                      <a:r>
+                        <a:rPr sz="1200" b="0" i="0">
+                          <a:solidFill>
+                            <a:srgbClr val="1B2330"/>
+                          </a:solidFill>
+                          <a:latin typeface="Montserrat"/>
+                        </a:rPr>
+                        <a:t>1</a:t>
+                      </a:r>
+                    </a:p>
+                  </a:txBody>
+                  <a:tcPr>
+                    <a:solidFill>
+                      <a:srgbClr val="F6F8FC"/>
+                    </a:solidFill>
+                  </a:tcPr>
+                </a:tc>
+                <a:tc>
+                  <a:txBody>
+                    <a:bodyPr/>
+                    <a:lstStyle/>
+                    <a:p>
+                      <a:r>
+                        <a:rPr sz="1200" b="0" i="0">
+                          <a:solidFill>
+                            <a:srgbClr val="1B2330"/>
+                          </a:solidFill>
+                          <a:latin typeface="Montserrat"/>
+                        </a:rPr>
+                        <a:t>Generalidades</a:t>
+                      </a:r>
+                    </a:p>
+                  </a:txBody>
+                  <a:tcPr>
+                    <a:solidFill>
+                      <a:srgbClr val="F6F8FC"/>
+                    </a:solidFill>
+                  </a:tcPr>
+                </a:tc>
+              </a:tr>
+              <a:tr h="287382">
+                <a:tc>
+                  <a:txBody>
+                    <a:bodyPr/>
+                    <a:lstStyle/>
+                    <a:p>
+                      <a:r>
+                        <a:rPr sz="1200" b="0" i="0">
+                          <a:solidFill>
+                            <a:srgbClr val="1B2330"/>
+                          </a:solidFill>
+                          <a:latin typeface="Montserrat"/>
+                        </a:rPr>
+                        <a:t>2</a:t>
+                      </a:r>
+                    </a:p>
+                  </a:txBody>
+                  <a:tcPr>
+                    <a:solidFill>
+                      <a:srgbClr val="FFFFFF"/>
+                    </a:solidFill>
+                  </a:tcPr>
+                </a:tc>
+                <a:tc>
+                  <a:txBody>
+                    <a:bodyPr/>
+                    <a:lstStyle/>
+                    <a:p>
+                      <a:r>
+                        <a:rPr sz="1200" b="0" i="0">
+                          <a:solidFill>
+                            <a:srgbClr val="1B2330"/>
+                          </a:solidFill>
+                          <a:latin typeface="Montserrat"/>
+                        </a:rPr>
+                        <a:t>Terminología</a:t>
+                      </a:r>
+                    </a:p>
+                  </a:txBody>
+                  <a:tcPr>
+                    <a:solidFill>
+                      <a:srgbClr val="FFFFFF"/>
+                    </a:solidFill>
+                  </a:tcPr>
+                </a:tc>
+              </a:tr>
+              <a:tr h="287382">
+                <a:tc>
+                  <a:txBody>
+                    <a:bodyPr/>
+                    <a:lstStyle/>
+                    <a:p>
+                      <a:r>
+                        <a:rPr sz="1200" b="0" i="0">
+                          <a:solidFill>
+                            <a:srgbClr val="1B2330"/>
+                          </a:solidFill>
+                          <a:latin typeface="Montserrat"/>
+                        </a:rPr>
+                        <a:t>3</a:t>
+                      </a:r>
+                    </a:p>
+                  </a:txBody>
+                  <a:tcPr>
+                    <a:solidFill>
+                      <a:srgbClr val="F6F8FC"/>
+                    </a:solidFill>
+                  </a:tcPr>
+                </a:tc>
+                <a:tc>
+                  <a:txBody>
+                    <a:bodyPr/>
+                    <a:lstStyle/>
+                    <a:p>
+                      <a:r>
+                        <a:rPr sz="1200" b="0" i="0">
+                          <a:solidFill>
+                            <a:srgbClr val="1B2330"/>
+                          </a:solidFill>
+                          <a:latin typeface="Montserrat"/>
+                        </a:rPr>
+                        <a:t>Tuberías, elementos, accesorios y sus uniones</a:t>
+                      </a:r>
+                    </a:p>
+                  </a:txBody>
+                  <a:tcPr>
+                    <a:solidFill>
+                      <a:srgbClr val="F6F8FC"/>
+                    </a:solidFill>
+                  </a:tcPr>
+                </a:tc>
+              </a:tr>
+              <a:tr h="287382">
+                <a:tc>
+                  <a:txBody>
+                    <a:bodyPr/>
+                    <a:lstStyle/>
+                    <a:p>
+                      <a:r>
+                        <a:rPr sz="1200" b="0" i="0">
+                          <a:solidFill>
+                            <a:srgbClr val="1B2330"/>
+                          </a:solidFill>
+                          <a:latin typeface="Montserrat"/>
+                        </a:rPr>
+                        <a:t>4</a:t>
+                      </a:r>
+                    </a:p>
+                  </a:txBody>
+                  <a:tcPr>
+                    <a:solidFill>
+                      <a:srgbClr val="FFFFFF"/>
+                    </a:solidFill>
+                  </a:tcPr>
+                </a:tc>
+                <a:tc>
+                  <a:txBody>
+                    <a:bodyPr/>
+                    <a:lstStyle/>
+                    <a:p>
+                      <a:r>
+                        <a:rPr sz="1200" b="0" i="0">
+                          <a:solidFill>
+                            <a:srgbClr val="1B2330"/>
+                          </a:solidFill>
+                          <a:latin typeface="Montserrat"/>
+                        </a:rPr>
+                        <a:t>Diseño y construcción</a:t>
+                      </a:r>
+                    </a:p>
+                  </a:txBody>
+                  <a:tcPr>
+                    <a:solidFill>
+                      <a:srgbClr val="FFFFFF"/>
+                    </a:solidFill>
+                  </a:tcPr>
+                </a:tc>
+              </a:tr>
+              <a:tr h="287382">
+                <a:tc>
+                  <a:txBody>
+                    <a:bodyPr/>
+                    <a:lstStyle/>
+                    <a:p>
+                      <a:r>
+                        <a:rPr sz="1200" b="0" i="0">
+                          <a:solidFill>
+                            <a:srgbClr val="1B2330"/>
+                          </a:solidFill>
+                          <a:latin typeface="Montserrat"/>
+                        </a:rPr>
+                        <a:t>5</a:t>
+                      </a:r>
+                    </a:p>
+                  </a:txBody>
+                  <a:tcPr>
+                    <a:solidFill>
+                      <a:srgbClr val="F6F8FC"/>
+                    </a:solidFill>
+                  </a:tcPr>
+                </a:tc>
+                <a:tc>
+                  <a:txBody>
+                    <a:bodyPr/>
+                    <a:lstStyle/>
+                    <a:p>
+                      <a:r>
+                        <a:rPr sz="1200" b="0" i="0">
+                          <a:solidFill>
+                            <a:srgbClr val="1B2330"/>
+                          </a:solidFill>
+                          <a:latin typeface="Montserrat"/>
+                        </a:rPr>
+                        <a:t>Recintos destinados a la instalación de contadores de gas</a:t>
+                      </a:r>
+                    </a:p>
+                  </a:txBody>
+                  <a:tcPr>
+                    <a:solidFill>
+                      <a:srgbClr val="F6F8FC"/>
+                    </a:solidFill>
+                  </a:tcPr>
+                </a:tc>
+              </a:tr>
+              <a:tr h="287382">
+                <a:tc>
+                  <a:txBody>
+                    <a:bodyPr/>
+                    <a:lstStyle/>
+                    <a:p>
+                      <a:r>
+                        <a:rPr sz="1200" b="0" i="0">
+                          <a:solidFill>
+                            <a:srgbClr val="1B2330"/>
+                          </a:solidFill>
+                          <a:latin typeface="Montserrat"/>
+                        </a:rPr>
+                        <a:t>6</a:t>
+                      </a:r>
+                    </a:p>
+                  </a:txBody>
+                  <a:tcPr>
+                    <a:solidFill>
+                      <a:srgbClr val="FFFFFF"/>
+                    </a:solidFill>
+                  </a:tcPr>
+                </a:tc>
+                <a:tc>
+                  <a:txBody>
+                    <a:bodyPr/>
+                    <a:lstStyle/>
+                    <a:p>
+                      <a:r>
+                        <a:rPr sz="1200" b="0" i="0">
+                          <a:solidFill>
+                            <a:srgbClr val="1B2330"/>
+                          </a:solidFill>
+                          <a:latin typeface="Montserrat"/>
+                        </a:rPr>
+                        <a:t>Requisitos de configuración, ventilación y evacuación de los productos de la combustión en los locales que contienen aparatos a gas</a:t>
+                      </a:r>
+                    </a:p>
+                  </a:txBody>
+                  <a:tcPr>
+                    <a:solidFill>
+                      <a:srgbClr val="FFFFFF"/>
+                    </a:solidFill>
+                  </a:tcPr>
+                </a:tc>
+              </a:tr>
+              <a:tr h="287382">
+                <a:tc>
+                  <a:txBody>
+                    <a:bodyPr/>
+                    <a:lstStyle/>
+                    <a:p>
+                      <a:r>
+                        <a:rPr sz="1200" b="0" i="0">
+                          <a:solidFill>
+                            <a:srgbClr val="1B2330"/>
+                          </a:solidFill>
+                          <a:latin typeface="Montserrat"/>
+                        </a:rPr>
+                        <a:t>7</a:t>
+                      </a:r>
+                    </a:p>
+                  </a:txBody>
+                  <a:tcPr>
+                    <a:solidFill>
+                      <a:srgbClr val="F6F8FC"/>
+                    </a:solidFill>
+                  </a:tcPr>
+                </a:tc>
+                <a:tc>
+                  <a:txBody>
+                    <a:bodyPr/>
+                    <a:lstStyle/>
+                    <a:p>
+                      <a:r>
+                        <a:rPr sz="1200" b="0" i="0">
+                          <a:solidFill>
+                            <a:srgbClr val="1B2330"/>
+                          </a:solidFill>
+                          <a:latin typeface="Montserrat"/>
+                        </a:rPr>
+                        <a:t>Requisitos de instalación y conexión de los aparatos a gas</a:t>
+                      </a:r>
+                    </a:p>
+                  </a:txBody>
+                  <a:tcPr>
+                    <a:solidFill>
+                      <a:srgbClr val="F6F8FC"/>
+                    </a:solidFill>
+                  </a:tcPr>
+                </a:tc>
+              </a:tr>
+              <a:tr h="287382">
+                <a:tc>
+                  <a:txBody>
+                    <a:bodyPr/>
+                    <a:lstStyle/>
+                    <a:p>
+                      <a:r>
+                        <a:rPr sz="1200" b="0" i="0">
+                          <a:solidFill>
+                            <a:srgbClr val="1B2330"/>
+                          </a:solidFill>
+                          <a:latin typeface="Montserrat"/>
+                        </a:rPr>
+                        <a:t>8</a:t>
+                      </a:r>
+                    </a:p>
+                  </a:txBody>
+                  <a:tcPr>
+                    <a:solidFill>
+                      <a:srgbClr val="FFFFFF"/>
+                    </a:solidFill>
+                  </a:tcPr>
+                </a:tc>
+                <a:tc>
+                  <a:txBody>
+                    <a:bodyPr/>
+                    <a:lstStyle/>
+                    <a:p>
+                      <a:r>
+                        <a:rPr sz="1200" b="0" i="0">
+                          <a:solidFill>
+                            <a:srgbClr val="1B2330"/>
+                          </a:solidFill>
+                          <a:latin typeface="Montserrat"/>
+                        </a:rPr>
+                        <a:t>Pruebas de estanquidad para la entrega de la instalación receptora</a:t>
+                      </a:r>
+                    </a:p>
+                  </a:txBody>
+                  <a:tcPr>
+                    <a:solidFill>
+                      <a:srgbClr val="FFFFFF"/>
+                    </a:solidFill>
+                  </a:tcPr>
+                </a:tc>
+              </a:tr>
+              <a:tr h="287382">
+                <a:tc>
+                  <a:txBody>
+                    <a:bodyPr/>
+                    <a:lstStyle/>
+                    <a:p>
+                      <a:r>
+                        <a:rPr sz="1200" b="0" i="0">
+                          <a:solidFill>
+                            <a:srgbClr val="1B2330"/>
+                          </a:solidFill>
+                          <a:latin typeface="Montserrat"/>
+                        </a:rPr>
+                        <a:t>9</a:t>
+                      </a:r>
+                    </a:p>
+                  </a:txBody>
+                  <a:tcPr>
+                    <a:solidFill>
+                      <a:srgbClr val="F6F8FC"/>
+                    </a:solidFill>
+                  </a:tcPr>
+                </a:tc>
+                <a:tc>
+                  <a:txBody>
+                    <a:bodyPr/>
+                    <a:lstStyle/>
+                    <a:p>
+                      <a:r>
+                        <a:rPr sz="1200" b="0" i="0">
+                          <a:solidFill>
+                            <a:srgbClr val="1B2330"/>
+                          </a:solidFill>
+                          <a:latin typeface="Montserrat"/>
+                        </a:rPr>
+                        <a:t>Pruebas previas al suministro y puesta en servicio</a:t>
+                      </a:r>
+                    </a:p>
+                  </a:txBody>
+                  <a:tcPr>
+                    <a:solidFill>
+                      <a:srgbClr val="F6F8FC"/>
+                    </a:solidFill>
+                  </a:tcPr>
+                </a:tc>
+              </a:tr>
+              <a:tr h="287382">
+                <a:tc>
+                  <a:txBody>
+                    <a:bodyPr/>
+                    <a:lstStyle/>
+                    <a:p>
+                      <a:r>
+                        <a:rPr sz="1200" b="0" i="0">
+                          <a:solidFill>
+                            <a:srgbClr val="1B2330"/>
+                          </a:solidFill>
+                          <a:latin typeface="Montserrat"/>
+                        </a:rPr>
+                        <a:t>10</a:t>
+                      </a:r>
+                    </a:p>
+                  </a:txBody>
+                  <a:tcPr>
+                    <a:solidFill>
+                      <a:srgbClr val="FFFFFF"/>
+                    </a:solidFill>
+                  </a:tcPr>
+                </a:tc>
+                <a:tc>
+                  <a:txBody>
+                    <a:bodyPr/>
+                    <a:lstStyle/>
+                    <a:p>
+                      <a:r>
+                        <a:rPr sz="1200" b="0" i="0">
+                          <a:solidFill>
+                            <a:srgbClr val="1B2330"/>
+                          </a:solidFill>
+                          <a:latin typeface="Montserrat"/>
+                        </a:rPr>
+                        <a:t>Comprobaciones para la puesta en marcha de los aparatos o tras adecuación por cambio de familia de gas</a:t>
+                      </a:r>
+                    </a:p>
+                  </a:txBody>
+                  <a:tcPr>
+                    <a:solidFill>
+                      <a:srgbClr val="FFFFFF"/>
+                    </a:solidFill>
+                  </a:tcPr>
+                </a:tc>
+              </a:tr>
+              <a:tr h="287382">
+                <a:tc>
+                  <a:txBody>
+                    <a:bodyPr/>
+                    <a:lstStyle/>
+                    <a:p>
+                      <a:r>
+                        <a:rPr sz="1200" b="0" i="0">
+                          <a:solidFill>
+                            <a:srgbClr val="1B2330"/>
+                          </a:solidFill>
+                          <a:latin typeface="Montserrat"/>
+                        </a:rPr>
+                        <a:t>11</a:t>
+                      </a:r>
+                    </a:p>
+                  </a:txBody>
+                  <a:tcPr>
+                    <a:solidFill>
+                      <a:srgbClr val="F6F8FC"/>
+                    </a:solidFill>
+                  </a:tcPr>
+                </a:tc>
+                <a:tc>
+                  <a:txBody>
+                    <a:bodyPr/>
+                    <a:lstStyle/>
+                    <a:p>
+                      <a:r>
+                        <a:rPr sz="1200" b="0" i="0">
+                          <a:solidFill>
+                            <a:srgbClr val="1B2330"/>
+                          </a:solidFill>
+                          <a:latin typeface="Montserrat"/>
+                        </a:rPr>
+                        <a:t>Operaciones en instalaciones receptoras en servicio</a:t>
+                      </a:r>
+                    </a:p>
+                  </a:txBody>
+                  <a:tcPr>
+                    <a:solidFill>
+                      <a:srgbClr val="F6F8FC"/>
+                    </a:solidFill>
+                  </a:tcPr>
+                </a:tc>
+              </a:tr>
+              <a:tr h="287382">
+                <a:tc>
+                  <a:txBody>
+                    <a:bodyPr/>
+                    <a:lstStyle/>
+                    <a:p>
+                      <a:r>
+                        <a:rPr sz="1200" b="0" i="0">
+                          <a:solidFill>
+                            <a:srgbClr val="1B2330"/>
+                          </a:solidFill>
+                          <a:latin typeface="Montserrat"/>
+                        </a:rPr>
+                        <a:t>12</a:t>
+                      </a:r>
+                    </a:p>
+                  </a:txBody>
+                  <a:tcPr>
+                    <a:solidFill>
+                      <a:srgbClr val="FFFFFF"/>
+                    </a:solidFill>
+                  </a:tcPr>
+                </a:tc>
+                <a:tc>
+                  <a:txBody>
+                    <a:bodyPr/>
+                    <a:lstStyle/>
+                    <a:p>
+                      <a:r>
+                        <a:rPr sz="1200" b="0" i="0">
+                          <a:solidFill>
+                            <a:srgbClr val="1B2330"/>
+                          </a:solidFill>
+                          <a:latin typeface="Montserrat"/>
+                        </a:rPr>
+                        <a:t>Control periódico de las instalaciones receptoras en servicio</a:t>
+                      </a:r>
+                    </a:p>
+                  </a:txBody>
+                  <a:tcPr>
+                    <a:solidFill>
+                      <a:srgbClr val="FFFFFF"/>
+                    </a:solidFill>
+                  </a:tcPr>
+                </a:tc>
+              </a:tr>
+              <a:tr h="287394">
+                <a:tc>
+                  <a:txBody>
+                    <a:bodyPr/>
+                    <a:lstStyle/>
+                    <a:p>
+                      <a:r>
+                        <a:rPr sz="1200" b="0" i="0">
+                          <a:solidFill>
+                            <a:srgbClr val="1B2330"/>
+                          </a:solidFill>
+                          <a:latin typeface="Montserrat"/>
+                        </a:rPr>
+                        <a:t>13</a:t>
+                      </a:r>
+                    </a:p>
+                  </a:txBody>
+                  <a:tcPr>
+                    <a:solidFill>
+                      <a:srgbClr val="F6F8FC"/>
+                    </a:solidFill>
+                  </a:tcPr>
+                </a:tc>
+                <a:tc>
+                  <a:txBody>
+                    <a:bodyPr/>
+                    <a:lstStyle/>
+                    <a:p>
+                      <a:r>
+                        <a:rPr sz="1200" b="0" i="0">
+                          <a:solidFill>
+                            <a:srgbClr val="1B2330"/>
+                          </a:solidFill>
+                          <a:latin typeface="Montserrat"/>
+                        </a:rPr>
+                        <a:t>Control periódico de los aparatos a gas de las instalaciones receptoras en servicio</a:t>
+                      </a:r>
+                    </a:p>
+                  </a:txBody>
+                  <a:tcPr>
+                    <a:solidFill>
+                      <a:srgbClr val="F6F8FC"/>
+                    </a:solidFill>
+                  </a:tcPr>
+                </a:tc>
+              </a:tr>
+            </a:tbl>
+          </a:graphicData>
+        </a:graphic>
+      </p:graphicFrame>
+      <p:sp>
+        <p:nvSpPr>
+          <p:cNvPr id="9" name="Rounded Rectangle 8"/>
           <p:cNvSpPr/>
           <p:nvPr/>
         </p:nvSpPr>
         <p:spPr>
           <a:xfrm>
-            <a:off x="5806440" y="1051560"/>
-            <a:ext cx="5298947" cy="4629150"/>
+            <a:off x="548640" y="5943600"/>
+            <a:ext cx="11091672" cy="384048"/>
           </a:xfrm>
           <a:prstGeom prst="roundRect">
             <a:avLst/>
@@ -11665,7 +15906,7 @@
           </a:solidFill>
           <a:ln w="12700">
             <a:solidFill>
-              <a:srgbClr val="C7D2E6"/>
+              <a:srgbClr val="D7DEEA"/>
             </a:solidFill>
           </a:ln>
           <a:effectLst/>
@@ -11700,8 +15941,8 @@
         </p:nvSpPr>
         <p:spPr>
           <a:xfrm>
-            <a:off x="6080760" y="2726055"/>
-            <a:ext cx="4750307" cy="1280160"/>
+            <a:off x="731520" y="5961888"/>
+            <a:ext cx="10789920" cy="365760"/>
           </a:xfrm>
           <a:prstGeom prst="rect">
             <a:avLst/>
@@ -11714,27 +15955,23 @@
           </a:bodyPr>
           <a:lstStyle/>
           <a:p>
-            <a:pPr algn="ctr"/>
-            <a:r>
-              <a:rPr sz="1400" b="1" i="0">
-                <a:solidFill>
-                  <a:srgbClr val="64748B"/>
-                </a:solidFill>
-                <a:latin typeface="Montserrat"/>
-              </a:rPr>
-              <a:t>IMAGEN REALISTA</a:t>
-            </a:r>
-          </a:p>
-          <a:p>
-            <a:pPr algn="ctr"/>
-            <a:r>
-              <a:rPr sz="1100" b="0" i="1">
-                <a:solidFill>
-                  <a:srgbClr val="64748B"/>
-                </a:solidFill>
-                <a:latin typeface="Montserrat"/>
-              </a:rPr>
-              <a:t>modern gas boiler wall mounted</a:t>
+            <a:r>
+              <a:rPr sz="1100" b="1" i="0">
+                <a:solidFill>
+                  <a:srgbClr val="E8801A"/>
+                </a:solidFill>
+                <a:latin typeface="Montserrat"/>
+              </a:rPr>
+              <a:t>Qué significa:  </a:t>
+            </a:r>
+            <a:r>
+              <a:rPr sz="1100" b="0" i="0">
+                <a:solidFill>
+                  <a:srgbClr val="1B2330"/>
+                </a:solidFill>
+                <a:latin typeface="Montserrat"/>
+              </a:rPr>
+              <a:t>La parte 6 es la tuya: locales, ventilación y humos. No la confundas con el tema 13 del curso, aunque coincida el número.</a:t>
             </a:r>
           </a:p>
         </p:txBody>
@@ -11744,6 +15981,18 @@
   <p:clrMapOvr>
     <a:masterClrMapping/>
   </p:clrMapOvr>
+  <mc:AlternateContent xmlns:mc="http://schemas.openxmlformats.org/markup-compatibility/2006">
+    <mc:Choice xmlns:p14="http://schemas.microsoft.com/office/powerpoint/2010/main" Requires="p14">
+      <p:transition spd="med" p14:dur="700">
+        <p14:cube dir="r"/>
+      </p:transition>
+    </mc:Choice>
+    <mc:Fallback>
+      <p:transition spd="med">
+        <p:push dir="r"/>
+      </p:transition>
+    </mc:Fallback>
+  </mc:AlternateContent>
 </p:sld>
 </file>
 
@@ -11831,7 +16080,7 @@
                 </a:solidFill>
                 <a:latin typeface="Montserrat"/>
               </a:rPr>
-              <a:t>007 / 019</a:t>
+              <a:t>007 / 024</a:t>
             </a:r>
           </a:p>
         </p:txBody>
@@ -11899,7 +16148,7 @@
                 </a:solidFill>
                 <a:latin typeface="Montserrat"/>
               </a:rPr>
-              <a:t>OBJETO</a:t>
+              <a:t>NOVEDADES</a:t>
             </a:r>
           </a:p>
         </p:txBody>
@@ -11933,14 +16182,14 @@
                 </a:solidFill>
                 <a:latin typeface="Montserrat"/>
               </a:rPr>
-              <a:t>De qué se ocupa y de qué no</a:t>
-            </a:r>
-          </a:p>
-        </p:txBody>
-      </p:sp>
-      <p:sp>
-        <p:nvSpPr>
-          <p:cNvPr id="7" name="Rounded Rectangle 6"/>
+              <a:t>Lo nuevo que gusta en examen</a:t>
+            </a:r>
+          </a:p>
+        </p:txBody>
+      </p:sp>
+      <p:sp>
+        <p:nvSpPr>
+          <p:cNvPr id="7" name="Rectangle 6"/>
           <p:cNvSpPr/>
           <p:nvPr/>
         </p:nvSpPr>
@@ -11949,7 +16198,7 @@
             <a:off x="868680" y="1627632"/>
             <a:ext cx="2011680" cy="73152"/>
           </a:xfrm>
-          <a:prstGeom prst="roundRect">
+          <a:prstGeom prst="rect">
             <a:avLst/>
           </a:prstGeom>
           <a:solidFill>
@@ -11991,7 +16240,7 @@
         <p:spPr>
           <a:xfrm>
             <a:off x="822960" y="1965960"/>
-            <a:ext cx="4983480" cy="4206240"/>
+            <a:ext cx="5029200" cy="4206240"/>
           </a:xfrm>
           <a:prstGeom prst="rect">
             <a:avLst/>
@@ -12025,7 +16274,7 @@
                 </a:solidFill>
                 <a:latin typeface="Montserrat"/>
               </a:rPr>
-              <a:t>Locales con aparatos de gas</a:t>
+              <a:t>Semisótano: gas ligero hasta 4 m</a:t>
             </a:r>
           </a:p>
           <a:p>
@@ -12050,7 +16299,7 @@
                 </a:solidFill>
                 <a:latin typeface="Montserrat"/>
               </a:rPr>
-              <a:t>Ventilación y evacuación de humos</a:t>
+              <a:t>Cocción tipo A en loft, con condiciones</a:t>
             </a:r>
           </a:p>
           <a:p>
@@ -12075,21 +16324,46 @@
                 </a:solidFill>
                 <a:latin typeface="Montserrat"/>
               </a:rPr>
-              <a:t>Fuera: salas de máquinas (UNE 60601)</a:t>
-            </a:r>
-          </a:p>
-        </p:txBody>
-      </p:sp>
-      <p:sp>
-        <p:nvSpPr>
-          <p:cNvPr id="9" name="imgph" descr="IMGQ:industrial boiler room machinery"/>
+              <a:t>Tipo B revisado por completo</a:t>
+            </a:r>
+          </a:p>
+          <a:p>
+            <a:pPr>
+              <a:spcAft>
+                <a:spcPts val="1100"/>
+              </a:spcAft>
+            </a:pPr>
+            <a:r>
+              <a:rPr sz="1600" b="1" i="0">
+                <a:solidFill>
+                  <a:srgbClr val="E8801A"/>
+                </a:solidFill>
+                <a:latin typeface="Montserrat"/>
+              </a:rPr>
+              <a:t>▸  </a:t>
+            </a:r>
+            <a:r>
+              <a:rPr sz="1600" b="0" i="0">
+                <a:solidFill>
+                  <a:srgbClr val="1B2330"/>
+                </a:solidFill>
+                <a:latin typeface="Montserrat"/>
+              </a:rPr>
+              <a:t>Ventilación cruzada industrial &gt; 70 kW</a:t>
+            </a:r>
+          </a:p>
+        </p:txBody>
+      </p:sp>
+      <p:sp>
+        <p:nvSpPr>
+          <p:cNvPr id="9" name="imgph" descr="IMGQ:modern gas boiler wall mounted"/>
           <p:cNvSpPr/>
           <p:nvPr/>
         </p:nvSpPr>
         <p:spPr>
           <a:xfrm>
-            <a:off x="5806440" y="1051560"/>
-            <a:ext cx="5298947" cy="4629150"/>
+            <a:off x="6080760" y="1965960"/>
+            <a:ext cx="5303520" cy="4572000"/>
           </a:xfrm>
           <a:prstGeom prst="roundRect">
             <a:avLst/>
@@ -12134,8 +16408,8 @@
         </p:nvSpPr>
         <p:spPr>
           <a:xfrm>
-            <a:off x="6080760" y="2726055"/>
-            <a:ext cx="4750307" cy="1280160"/>
+            <a:off x="6355080" y="3611880"/>
+            <a:ext cx="4754880" cy="1280160"/>
           </a:xfrm>
           <a:prstGeom prst="rect">
             <a:avLst/>
@@ -12156,7 +16430,7 @@
                 </a:solidFill>
                 <a:latin typeface="Montserrat"/>
               </a:rPr>
-              <a:t>IMAGEN REALISTA</a:t>
+              <a:t>IMAGEN</a:t>
             </a:r>
           </a:p>
           <a:p>
@@ -12168,7 +16442,7 @@
                 </a:solidFill>
                 <a:latin typeface="Montserrat"/>
               </a:rPr>
-              <a:t>industrial boiler room machinery</a:t>
+              <a:t>modern gas boiler wall mounted</a:t>
             </a:r>
           </a:p>
         </p:txBody>
@@ -12178,6 +16452,18 @@
   <p:clrMapOvr>
     <a:masterClrMapping/>
   </p:clrMapOvr>
+  <mc:AlternateContent xmlns:mc="http://schemas.openxmlformats.org/markup-compatibility/2006">
+    <mc:Choice xmlns:p14="http://schemas.microsoft.com/office/powerpoint/2010/main" Requires="p14">
+      <p:transition spd="med" p14:dur="700">
+        <p14:cube dir="l"/>
+      </p:transition>
+    </mc:Choice>
+    <mc:Fallback>
+      <p:transition spd="med">
+        <p:push dir="l"/>
+      </p:transition>
+    </mc:Fallback>
+  </mc:AlternateContent>
 </p:sld>
 </file>
 
@@ -12265,7 +16551,7 @@
                 </a:solidFill>
                 <a:latin typeface="Montserrat"/>
               </a:rPr>
-              <a:t>008 / 019</a:t>
+              <a:t>008 / 024</a:t>
             </a:r>
           </a:p>
         </p:txBody>
@@ -12333,7 +16619,7 @@
                 </a:solidFill>
                 <a:latin typeface="Montserrat"/>
               </a:rPr>
-              <a:t>CLASIFICACIÓN · CIRCUITO ABIERTO</a:t>
+              <a:t>OBJETO</a:t>
             </a:r>
           </a:p>
         </p:txBody>
@@ -12367,14 +16653,14 @@
                 </a:solidFill>
                 <a:latin typeface="Montserrat"/>
               </a:rPr>
-              <a:t>Tipo A y tipo B: respiran del local</a:t>
-            </a:r>
-          </a:p>
-        </p:txBody>
-      </p:sp>
-      <p:sp>
-        <p:nvSpPr>
-          <p:cNvPr id="7" name="Rounded Rectangle 6"/>
+              <a:t>De qué se ocupa y de qué no</a:t>
+            </a:r>
+          </a:p>
+        </p:txBody>
+      </p:sp>
+      <p:sp>
+        <p:nvSpPr>
+          <p:cNvPr id="7" name="Rectangle 6"/>
           <p:cNvSpPr/>
           <p:nvPr/>
         </p:nvSpPr>
@@ -12383,7 +16669,7 @@
             <a:off x="868680" y="1627632"/>
             <a:ext cx="2011680" cy="73152"/>
           </a:xfrm>
-          <a:prstGeom prst="roundRect">
+          <a:prstGeom prst="rect">
             <a:avLst/>
           </a:prstGeom>
           <a:solidFill>
@@ -12424,8 +16710,8 @@
         </p:nvSpPr>
         <p:spPr>
           <a:xfrm>
-            <a:off x="822960" y="1965960"/>
-            <a:ext cx="4983480" cy="4206240"/>
+            <a:off x="6355080" y="1965960"/>
+            <a:ext cx="5029200" cy="4206240"/>
           </a:xfrm>
           <a:prstGeom prst="rect">
             <a:avLst/>
@@ -12459,7 +16745,7 @@
                 </a:solidFill>
                 <a:latin typeface="Montserrat"/>
               </a:rPr>
-              <a:t>Tipo A: humos al propio local</a:t>
+              <a:t>Locales con aparatos de gas</a:t>
             </a:r>
           </a:p>
           <a:p>
@@ -12484,7 +16770,7 @@
                 </a:solidFill>
                 <a:latin typeface="Montserrat"/>
               </a:rPr>
-              <a:t>Tipo B: humos fuera por un tubo</a:t>
+              <a:t>Ventilación y evacuación de humos</a:t>
             </a:r>
           </a:p>
           <a:p>
@@ -12509,21 +16795,21 @@
                 </a:solidFill>
                 <a:latin typeface="Montserrat"/>
               </a:rPr>
-              <a:t>Ambos cogen aire de la habitación</a:t>
-            </a:r>
-          </a:p>
-        </p:txBody>
-      </p:sp>
-      <p:sp>
-        <p:nvSpPr>
-          <p:cNvPr id="9" name="imgph" descr="IMGQ:old gas water heater bathroom"/>
+              <a:t>Fuera: salas de máquinas (UNE 60601)</a:t>
+            </a:r>
+          </a:p>
+        </p:txBody>
+      </p:sp>
+      <p:sp>
+        <p:nvSpPr>
+          <p:cNvPr id="9" name="imgph" descr="IMGQ:industrial boiler room machinery"/>
           <p:cNvSpPr/>
           <p:nvPr/>
         </p:nvSpPr>
         <p:spPr>
           <a:xfrm>
-            <a:off x="5806440" y="1051560"/>
-            <a:ext cx="5298947" cy="4629150"/>
+            <a:off x="822960" y="1965960"/>
+            <a:ext cx="5303520" cy="4572000"/>
           </a:xfrm>
           <a:prstGeom prst="roundRect">
             <a:avLst/>
@@ -12568,8 +16854,8 @@
         </p:nvSpPr>
         <p:spPr>
           <a:xfrm>
-            <a:off x="6080760" y="2726055"/>
-            <a:ext cx="4750307" cy="1280160"/>
+            <a:off x="1097280" y="3611880"/>
+            <a:ext cx="4754880" cy="1280160"/>
           </a:xfrm>
           <a:prstGeom prst="rect">
             <a:avLst/>
@@ -12590,7 +16876,7 @@
                 </a:solidFill>
                 <a:latin typeface="Montserrat"/>
               </a:rPr>
-              <a:t>IMAGEN REALISTA</a:t>
+              <a:t>IMAGEN</a:t>
             </a:r>
           </a:p>
           <a:p>
@@ -12602,7 +16888,7 @@
                 </a:solidFill>
                 <a:latin typeface="Montserrat"/>
               </a:rPr>
-              <a:t>old gas water heater bathroom</a:t>
+              <a:t>industrial boiler room machinery</a:t>
             </a:r>
           </a:p>
         </p:txBody>
@@ -12612,6 +16898,18 @@
   <p:clrMapOvr>
     <a:masterClrMapping/>
   </p:clrMapOvr>
+  <mc:AlternateContent xmlns:mc="http://schemas.openxmlformats.org/markup-compatibility/2006">
+    <mc:Choice xmlns:p14="http://schemas.microsoft.com/office/powerpoint/2010/main" Requires="p14">
+      <p:transition spd="med" p14:dur="700">
+        <p14:cube dir="r"/>
+      </p:transition>
+    </mc:Choice>
+    <mc:Fallback>
+      <p:transition spd="med">
+        <p:push dir="r"/>
+      </p:transition>
+    </mc:Fallback>
+  </mc:AlternateContent>
 </p:sld>
 </file>
 
@@ -12699,7 +16997,7 @@
                 </a:solidFill>
                 <a:latin typeface="Montserrat"/>
               </a:rPr>
-              <a:t>009 / 019</a:t>
+              <a:t>009 / 024</a:t>
             </a:r>
           </a:p>
         </p:txBody>
@@ -12767,7 +17065,7 @@
                 </a:solidFill>
                 <a:latin typeface="Montserrat"/>
               </a:rPr>
-              <a:t>CLASIFICACIÓN · CIRCUITO ESTANCO</a:t>
+              <a:t>CLASIFICACIÓN · CIRCUITO ABIERTO</a:t>
             </a:r>
           </a:p>
         </p:txBody>
@@ -12801,14 +17099,14 @@
                 </a:solidFill>
                 <a:latin typeface="Montserrat"/>
               </a:rPr>
-              <a:t>Tipo C: ni toca el aire del local</a:t>
-            </a:r>
-          </a:p>
-        </p:txBody>
-      </p:sp>
-      <p:sp>
-        <p:nvSpPr>
-          <p:cNvPr id="7" name="Rounded Rectangle 6"/>
+              <a:t>Tipo A y tipo B: respiran del local</a:t>
+            </a:r>
+          </a:p>
+        </p:txBody>
+      </p:sp>
+      <p:sp>
+        <p:nvSpPr>
+          <p:cNvPr id="7" name="Rectangle 6"/>
           <p:cNvSpPr/>
           <p:nvPr/>
         </p:nvSpPr>
@@ -12817,7 +17115,7 @@
             <a:off x="868680" y="1627632"/>
             <a:ext cx="2011680" cy="73152"/>
           </a:xfrm>
-          <a:prstGeom prst="roundRect">
+          <a:prstGeom prst="rect">
             <a:avLst/>
           </a:prstGeom>
           <a:solidFill>
@@ -12859,7 +17157,7 @@
         <p:spPr>
           <a:xfrm>
             <a:off x="822960" y="1965960"/>
-            <a:ext cx="4983480" cy="4206240"/>
+            <a:ext cx="5029200" cy="4206240"/>
           </a:xfrm>
           <a:prstGeom prst="rect">
             <a:avLst/>
@@ -12893,7 +17191,7 @@
                 </a:solidFill>
                 <a:latin typeface="Montserrat"/>
               </a:rPr>
-              <a:t>Circuito de combustión cerrado</a:t>
+              <a:t>Tipo A: humos al propio local</a:t>
             </a:r>
           </a:p>
           <a:p>
@@ -12918,7 +17216,7 @@
                 </a:solidFill>
                 <a:latin typeface="Montserrat"/>
               </a:rPr>
-              <a:t>Aire de fuera, humos fuera</a:t>
+              <a:t>Tipo B: humos fuera por un tubo</a:t>
             </a:r>
           </a:p>
           <a:p>
@@ -12943,21 +17241,21 @@
                 </a:solidFill>
                 <a:latin typeface="Montserrat"/>
               </a:rPr>
-              <a:t>El más seguro de los tres</a:t>
-            </a:r>
-          </a:p>
-        </p:txBody>
-      </p:sp>
-      <p:sp>
-        <p:nvSpPr>
-          <p:cNvPr id="9" name="imgph" descr="IMGQ:condensing boiler concentric flue"/>
+              <a:t>Ambos cogen aire de la habitación</a:t>
+            </a:r>
+          </a:p>
+        </p:txBody>
+      </p:sp>
+      <p:sp>
+        <p:nvSpPr>
+          <p:cNvPr id="9" name="imgph" descr="IMGQ:old gas water heater bathroom"/>
           <p:cNvSpPr/>
           <p:nvPr/>
         </p:nvSpPr>
         <p:spPr>
           <a:xfrm>
-            <a:off x="5806440" y="1051560"/>
-            <a:ext cx="5298947" cy="4629150"/>
+            <a:off x="6080760" y="1965960"/>
+            <a:ext cx="5303520" cy="4572000"/>
           </a:xfrm>
           <a:prstGeom prst="roundRect">
             <a:avLst/>
@@ -13002,8 +17300,8 @@
         </p:nvSpPr>
         <p:spPr>
           <a:xfrm>
-            <a:off x="6080760" y="2726055"/>
-            <a:ext cx="4750307" cy="1280160"/>
+            <a:off x="6355080" y="3611880"/>
+            <a:ext cx="4754880" cy="1280160"/>
           </a:xfrm>
           <a:prstGeom prst="rect">
             <a:avLst/>
@@ -13024,7 +17322,7 @@
                 </a:solidFill>
                 <a:latin typeface="Montserrat"/>
               </a:rPr>
-              <a:t>IMAGEN REALISTA</a:t>
+              <a:t>IMAGEN</a:t>
             </a:r>
           </a:p>
           <a:p>
@@ -13036,7 +17334,7 @@
                 </a:solidFill>
                 <a:latin typeface="Montserrat"/>
               </a:rPr>
-              <a:t>condensing boiler concentric flue</a:t>
+              <a:t>old gas water heater bathroom</a:t>
             </a:r>
           </a:p>
         </p:txBody>
@@ -13046,6 +17344,18 @@
   <p:clrMapOvr>
     <a:masterClrMapping/>
   </p:clrMapOvr>
+  <mc:AlternateContent xmlns:mc="http://schemas.openxmlformats.org/markup-compatibility/2006">
+    <mc:Choice xmlns:p14="http://schemas.microsoft.com/office/powerpoint/2010/main" Requires="p14">
+      <p:transition spd="med" p14:dur="700">
+        <p14:cube dir="l"/>
+      </p:transition>
+    </mc:Choice>
+    <mc:Fallback>
+      <p:transition spd="med">
+        <p:push dir="l"/>
+      </p:transition>
+    </mc:Fallback>
+  </mc:AlternateContent>
 </p:sld>
 </file>
 

--- a/Curso Gas B/13 - UNE 60670 - Ventilacion y evacuacion de humos/13 - UNE 60670 - Ventilacion y evacuacion de humos - Vídeo 1.pptx
+++ b/Curso Gas B/13 - UNE 60670 - Ventilacion y evacuacion de humos/13 - UNE 60670 - Ventilacion y evacuacion de humos - Vídeo 1.pptx
@@ -1050,12 +1050,12 @@
           <a:lstStyle/>
           <a:p>
             <a:r>
-              <a:t>N1: Pregunta trampa clásica. Un termo de agua de tipo A pequeñito, ¿pasa?</a:t>
-            </a:r>
-          </a:p>
-          <a:p>
-            <a:r>
-              <a:t>N2: Ojo, que aquí la poca potencia no te salva. Piensa cuántas horas estaría soltando humos dentro de casa.</a:t>
+              <a:t>N1: Vamos con una pregunta trampa clásica. Escucha bien el enunciado: ¿se puede instalar un acumulador de agua caliente sanitaria de tipo A si es de poca potencia? Y estas son las cuatro opciones. Opción A: sí, si es menor de cuatro coma sesenta y cinco kilovatios. Opción B: sí, con ventilación rápida. Opción C: no, no se instala en ningún caso. Opción D: solo en zona exterior.</a:t>
+            </a:r>
+          </a:p>
+          <a:p>
+            <a:r>
+              <a:t>N2: Párala un momento y piénsalo. Pista: aquí la poca potencia no te salva; piensa cuántas horas estaría ese depósito soltando humos dentro de casa.</a:t>
             </a:r>
           </a:p>
         </p:txBody>
@@ -1125,12 +1125,17 @@
           <a:lstStyle/>
           <a:p>
             <a:r>
-              <a:t>N1: ¿Por qué nunca?</a:t>
-            </a:r>
-          </a:p>
-          <a:p>
-            <a:r>
-              <a:t>N2: Porque aunque los «otros aparatos» de tipo A de menos de cuatro coma sesenta y cinco kilovatios se permiten, la norma saca una excepción tajante: el aparato de producción de agua caliente sanitaria por acumulación de tipo A no se instala jamás. Un depósito soltando humos durante horas dentro de casa es un riesgo de intoxicación. El truco: si ves «acumulador de ACS de tipo A», la respuesta es no, nunca, da igual la potencia.</a:t>
+              <a:t>N2: La respuesta correcta es la opción C: no, no se instala en ningún caso. Aunque los «otros aparatos» de tipo A de menos de cuatro coma sesenta y cinco kilovatios sí se permiten, la norma saca una excepción tajante: el aparato de producción de agua caliente sanitaria por acumulación de tipo A no se instala jamás, da igual la potencia. Un depósito soltando humos durante horas dentro de casa es un riesgo directo de intoxicación.</a:t>
+            </a:r>
+          </a:p>
+          <a:p>
+            <a:r>
+              <a:t>N1: ¿El truco para no fallar?</a:t>
+            </a:r>
+          </a:p>
+          <a:p>
+            <a:r>
+              <a:t>N2: Si ves «acumulador de ACS de tipo A», la respuesta es no, nunca; la poca potencia es solo un cebo para despistarte.</a:t>
             </a:r>
           </a:p>
         </p:txBody>
@@ -1575,12 +1580,12 @@
           <a:lstStyle/>
           <a:p>
             <a:r>
-              <a:t>N1: Una de examen puro. En un dormitorio, ¿qué aparato tiene permiso para entrar?</a:t>
-            </a:r>
-          </a:p>
-          <a:p>
-            <a:r>
-              <a:t>N2: Piensa en cuál no respira el aire de la habitación ni suelta humos dentro. Ese es el bueno.</a:t>
+              <a:t>N1: Una de examen puro. Atento a la pregunta: ¿qué tipo de aparato se puede instalar en un dormitorio? Y las cuatro opciones. Opción A: solo el tipo A. Opción B: solo el tipo B. Opción C: solo el tipo C. Opción D: cualquiera de los tres.</a:t>
+            </a:r>
+          </a:p>
+          <a:p>
+            <a:r>
+              <a:t>N2: Tómate un segundo para elegir. Pista: piensa en cuál no respira el aire de la habitación ni suelta humos dentro. Ese es el bueno.</a:t>
             </a:r>
           </a:p>
         </p:txBody>
@@ -1650,12 +1655,17 @@
           <a:lstStyle/>
           <a:p>
             <a:r>
-              <a:t>N1: ¿Por qué el C y no los otros?</a:t>
-            </a:r>
-          </a:p>
-          <a:p>
-            <a:r>
-              <a:t>N2: Porque el tipo A suelta los humos en el propio local y el tipo B roba aire del cuarto para tirarlos fuera; los dos están prohibidos donde se duerme o donde uno se encierra con vapor. El tipo C es estanco: coge aire de fuera y echa humos fuera, sin tocar el aire del dormitorio. El truco para no fallar: tipo A y tipo B prohibidos en dormitorio y baño; el único que entra es el C.</a:t>
+              <a:t>N2: La respuesta correcta es la opción C: solo el tipo C. El tipo A suelta los humos en el propio local y el tipo B roba aire del cuarto para tirarlos fuera; los dos están prohibidos donde se duerme o donde uno se encierra con vapor. El tipo C es estanco: coge aire de fuera y echa humos fuera, sin tocar el aire del dormitorio.</a:t>
+            </a:r>
+          </a:p>
+          <a:p>
+            <a:r>
+              <a:t>N1: ¿La chuleta para no fallar?</a:t>
+            </a:r>
+          </a:p>
+          <a:p>
+            <a:r>
+              <a:t>N2: Tipo A y tipo B, prohibidos en dormitorio y baño; el único que entra es el C.</a:t>
             </a:r>
           </a:p>
         </p:txBody>
@@ -2031,7 +2041,7 @@
           </a:p>
           <a:p>
             <a:r>
-              <a:t>N2: La UNE seis mil seiscientos setenta se divide en trece partes bajo un mismo título general. La uno es generalidades, la dos terminología, la tres tuberías, la cuatro diseño y construcción, la cinco los recintos de contadores. La tuya es la parte seis: configuración, ventilación y evacuación de humos en los locales que contienen aparatos a gas. De la siete en adelante van la instalación de aparatos, las pruebas de estanquidad, la puesta en servicio y los controles periódicos. Fíjate en la coincidencia que despista: esta parte seis es el tema trece de tu curso, y son cosas distintas con números que no tienen nada que ver. Cuando leas «guion seis», piensa siempre: locales, ventilación y humos.</a:t>
+              <a:t>N2: Presta atención a esta tabla, que enumera las trece partes de la UNE seis mil seiscientos setenta, cada fila con su número y su contenido. Te leo las que importan: la parte uno, generalidades; la dos, terminología; la tres, tuberías y sus uniones; la cuatro, diseño y construcción; la cinco, los recintos de contadores. Y aquí está la tuya, la parte seis: configuración, ventilación y evacuación de humos en los locales que contienen aparatos a gas. De la siete en adelante van la instalación de aparatos, las pruebas de estanquidad, la puesta en servicio y los controles periódicos, hasta la trece. Fíjate en la coincidencia que despista: esta parte seis es el tema trece de tu curso, y son cosas distintas con números que no tienen nada que ver. Cuando leas «guion seis», piensa siempre: locales, ventilación y humos.</a:t>
             </a:r>
           </a:p>
         </p:txBody>
